--- a/presentacion_nlp_finanzas.pptx
+++ b/presentacion_nlp_finanzas.pptx
@@ -5,7 +5,7 @@
     <p:sldMasterId id="2147483648" r:id="rId1"/>
   </p:sldMasterIdLst>
   <p:notesMasterIdLst>
-    <p:notesMasterId r:id="rId14"/>
+    <p:notesMasterId r:id="rId15"/>
   </p:notesMasterIdLst>
   <p:sldIdLst>
     <p:sldId id="256" r:id="rId2"/>
@@ -15,11 +15,12 @@
     <p:sldId id="268" r:id="rId6"/>
     <p:sldId id="269" r:id="rId7"/>
     <p:sldId id="261" r:id="rId8"/>
-    <p:sldId id="262" r:id="rId9"/>
-    <p:sldId id="264" r:id="rId10"/>
-    <p:sldId id="265" r:id="rId11"/>
-    <p:sldId id="266" r:id="rId12"/>
-    <p:sldId id="267" r:id="rId13"/>
+    <p:sldId id="270" r:id="rId9"/>
+    <p:sldId id="271" r:id="rId10"/>
+    <p:sldId id="272" r:id="rId11"/>
+    <p:sldId id="273" r:id="rId12"/>
+    <p:sldId id="275" r:id="rId13"/>
+    <p:sldId id="274" r:id="rId14"/>
   </p:sldIdLst>
   <p:sldSz cx="12192000" cy="6858000"/>
   <p:notesSz cx="6858000" cy="12192000"/>
@@ -380,9 +381,138 @@
           <a:lstStyle/>
           <a:p>
             <a:r>
-              <a:rPr lang="en-US" dirty="0"/>
-              <a:t>Estas matrices comparan sentimiento real contra sentimiento generado, usando FinBERT como evaluador externo. En GPT-2 base el match semantico es bajo: el modelo puede generar texto que parece financiero pero no con el tono correcto. Con fine-tuning, especialmente en NVDA + AMD, mejora la alineacion, pero todavia no supera claramente el baseline neutral. La matriz financiera mira si la direccion generada coincide con la real: el run con features direccionales obtiene la mejor directional accuracy, alrededor de 0.556, con coverage total, pero el p-value contra azar es aproximadamente 0.225. Por eso lo presentamos como senal exploratoria.</a:t>
-            </a:r>
+              <a:rPr lang="es-ES" sz="1200" b="0" i="1" kern="1200" dirty="0">
+                <a:solidFill>
+                  <a:schemeClr val="tx1"/>
+                </a:solidFill>
+                <a:effectLst/>
+                <a:latin typeface="+mn-lt"/>
+                <a:ea typeface="+mn-ea"/>
+                <a:cs typeface="+mn-cs"/>
+              </a:rPr>
+              <a:t>Esta </a:t>
+            </a:r>
+            <a:r>
+              <a:rPr lang="es-ES" sz="1200" b="0" i="1" kern="1200" dirty="0" err="1">
+                <a:solidFill>
+                  <a:schemeClr val="tx1"/>
+                </a:solidFill>
+                <a:effectLst/>
+                <a:latin typeface="+mn-lt"/>
+                <a:ea typeface="+mn-ea"/>
+                <a:cs typeface="+mn-cs"/>
+              </a:rPr>
+              <a:t>slide</a:t>
+            </a:r>
+            <a:r>
+              <a:rPr lang="es-ES" sz="1200" b="0" i="1" kern="1200" dirty="0">
+                <a:solidFill>
+                  <a:schemeClr val="tx1"/>
+                </a:solidFill>
+                <a:effectLst/>
+                <a:latin typeface="+mn-lt"/>
+                <a:ea typeface="+mn-ea"/>
+                <a:cs typeface="+mn-cs"/>
+              </a:rPr>
+              <a:t> muestra dos evaluaciones distintas. En semántica, GPT-2 base tiene baja alineación con el sentimiento real: 0.273. Con fine-</a:t>
+            </a:r>
+            <a:r>
+              <a:rPr lang="es-ES" sz="1200" b="0" i="1" kern="1200" dirty="0" err="1">
+                <a:solidFill>
+                  <a:schemeClr val="tx1"/>
+                </a:solidFill>
+                <a:effectLst/>
+                <a:latin typeface="+mn-lt"/>
+                <a:ea typeface="+mn-ea"/>
+                <a:cs typeface="+mn-cs"/>
+              </a:rPr>
+              <a:t>tuning</a:t>
+            </a:r>
+            <a:r>
+              <a:rPr lang="es-ES" sz="1200" b="0" i="1" kern="1200" dirty="0">
+                <a:solidFill>
+                  <a:schemeClr val="tx1"/>
+                </a:solidFill>
+                <a:effectLst/>
+                <a:latin typeface="+mn-lt"/>
+                <a:ea typeface="+mn-ea"/>
+                <a:cs typeface="+mn-cs"/>
+              </a:rPr>
+              <a:t> en NVDA + AMD mejora a 0.442, así que el modelo aprende algo del tono financiero. Pero en la parte financiera, la </a:t>
+            </a:r>
+            <a:r>
+              <a:rPr lang="es-ES" sz="1200" b="0" i="1" kern="1200" dirty="0" err="1">
+                <a:solidFill>
+                  <a:schemeClr val="tx1"/>
+                </a:solidFill>
+                <a:effectLst/>
+                <a:latin typeface="+mn-lt"/>
+                <a:ea typeface="+mn-ea"/>
+                <a:cs typeface="+mn-cs"/>
+              </a:rPr>
+              <a:t>directional</a:t>
+            </a:r>
+            <a:r>
+              <a:rPr lang="es-ES" sz="1200" b="0" i="1" kern="1200" dirty="0">
+                <a:solidFill>
+                  <a:schemeClr val="tx1"/>
+                </a:solidFill>
+                <a:effectLst/>
+                <a:latin typeface="+mn-lt"/>
+                <a:ea typeface="+mn-ea"/>
+                <a:cs typeface="+mn-cs"/>
+              </a:rPr>
+              <a:t> </a:t>
+            </a:r>
+            <a:r>
+              <a:rPr lang="es-ES" sz="1200" b="0" i="1" kern="1200" dirty="0" err="1">
+                <a:solidFill>
+                  <a:schemeClr val="tx1"/>
+                </a:solidFill>
+                <a:effectLst/>
+                <a:latin typeface="+mn-lt"/>
+                <a:ea typeface="+mn-ea"/>
+                <a:cs typeface="+mn-cs"/>
+              </a:rPr>
+              <a:t>accuracy</a:t>
+            </a:r>
+            <a:r>
+              <a:rPr lang="es-ES" sz="1200" b="0" i="1" kern="1200" dirty="0">
+                <a:solidFill>
+                  <a:schemeClr val="tx1"/>
+                </a:solidFill>
+                <a:effectLst/>
+                <a:latin typeface="+mn-lt"/>
+                <a:ea typeface="+mn-ea"/>
+                <a:cs typeface="+mn-cs"/>
+              </a:rPr>
+              <a:t> es 0.530 con p-</a:t>
+            </a:r>
+            <a:r>
+              <a:rPr lang="es-ES" sz="1200" b="0" i="1" kern="1200" dirty="0" err="1">
+                <a:solidFill>
+                  <a:schemeClr val="tx1"/>
+                </a:solidFill>
+                <a:effectLst/>
+                <a:latin typeface="+mn-lt"/>
+                <a:ea typeface="+mn-ea"/>
+                <a:cs typeface="+mn-cs"/>
+              </a:rPr>
+              <a:t>value</a:t>
+            </a:r>
+            <a:r>
+              <a:rPr lang="es-ES" sz="1200" b="0" i="1" kern="1200" dirty="0">
+                <a:solidFill>
+                  <a:schemeClr val="tx1"/>
+                </a:solidFill>
+                <a:effectLst/>
+                <a:latin typeface="+mn-lt"/>
+                <a:ea typeface="+mn-ea"/>
+                <a:cs typeface="+mn-cs"/>
+              </a:rPr>
+              <a:t> 0.579, por lo que no hay evidencia robusta de predicción. Mejora la semántica, no necesariamente la señal financiera.</a:t>
+            </a:r>
+            <a:endParaRPr lang="es-ES" dirty="0"/>
           </a:p>
         </p:txBody>
       </p:sp>
@@ -555,7 +685,74 @@
           <a:p>
             <a:r>
               <a:rPr lang="en-US" dirty="0"/>
-              <a:t>Las limitaciones son varias: el dataset de test es chico, el target son titulares agregados por dia y no articulos completos, GPT-2 small tiene capacidad limitada, FinBERT es un evaluador imperfecto y la directional accuracy depende de la distribucion de clases. La mas importante: no hay significancia estadistica fuerte. Conclusiones: GPT-2 fine-tuneado aprende vocabulario y formato financiero; el fine-tuning mejora la calidad textual y semantica; las metricas no son equivalentes; la directional accuracy no alcanza para afirmar predictividad. El aporte principal es metodologico: un pipeline reproducible de NLP generativo evaluado criticamente. Como trabajo futuro: baselines estadisticos mas fuertes, mas datos, modelos mas grandes, mejor control de salida y evaluacion humana. Cierre: el proyecto muestra que fine-tunear GPT-2 adapta el modelo al dominio financiero, pero tambien por que evaluar generacion es dificil. La contribucion principal es el pipeline de evaluacion multicapa y la lectura critica.</a:t>
+              <a:t>Esta slide aterriza las métricas en ejemplos concretos. </a:t>
+            </a:r>
+            <a:r>
+              <a:rPr lang="en-US" dirty="0" err="1"/>
+              <a:t>Vemos</a:t>
+            </a:r>
+            <a:r>
+              <a:rPr lang="en-US" dirty="0"/>
+              <a:t> 2 </a:t>
+            </a:r>
+            <a:r>
+              <a:rPr lang="en-US" dirty="0" err="1"/>
+              <a:t>casos</a:t>
+            </a:r>
+            <a:r>
+              <a:rPr lang="en-US" dirty="0"/>
+              <a:t> </a:t>
+            </a:r>
+            <a:r>
+              <a:rPr lang="en-US" dirty="0" err="1"/>
+              <a:t>donde</a:t>
+            </a:r>
+            <a:r>
+              <a:rPr lang="en-US" dirty="0"/>
+              <a:t> </a:t>
+            </a:r>
+            <a:r>
+              <a:rPr lang="en-US" dirty="0" err="1"/>
+              <a:t>comparo</a:t>
+            </a:r>
+            <a:r>
+              <a:rPr lang="en-US" dirty="0"/>
+              <a:t> gpt2-base con </a:t>
+            </a:r>
+            <a:r>
+              <a:rPr lang="en-US" dirty="0" err="1"/>
+              <a:t>el</a:t>
+            </a:r>
+            <a:r>
+              <a:rPr lang="en-US" dirty="0"/>
+              <a:t> </a:t>
+            </a:r>
+            <a:r>
+              <a:rPr lang="en-US" dirty="0" err="1"/>
+              <a:t>modelo</a:t>
+            </a:r>
+            <a:r>
+              <a:rPr lang="en-US" dirty="0"/>
+              <a:t> </a:t>
+            </a:r>
+            <a:r>
+              <a:rPr lang="en-US" dirty="0" err="1"/>
+              <a:t>finetuneado</a:t>
+            </a:r>
+            <a:r>
+              <a:rPr lang="en-US" dirty="0"/>
+              <a:t>.</a:t>
+            </a:r>
+          </a:p>
+          <a:p>
+            <a:endParaRPr lang="en-US" dirty="0"/>
+          </a:p>
+          <a:p>
+            <a:r>
+              <a:rPr lang="en-US" dirty="0"/>
+              <a:t>- En el primer caso, GPT-2 base genera una explicación genérica sobre CPUs, mientras que el modelo fine-tuneado produce algo más parecido a un titular financiero del dominio AMD. No es perfecto, pero mejora el formato y la alineación semántica.
+- En el segundo caso pasa algo importante: GPT-2 base acierta la dirección, pero el texto generado es una nota genérica de CNBC sobre el Dow Jones, poco relacionada con AMD. Entonces una directional accuracy correcta no significa que el modelo haya entendido el contexto financiero.
+La conclusión es que necesitamos mirar métricas y ejemplos juntos.</a:t>
             </a:r>
           </a:p>
         </p:txBody>
@@ -578,6 +775,475 @@
             <a:fld id="{F7021451-1387-4CA6-816F-3879F97B5CBC}" type="slidenum">
               <a:rPr lang="en-US"/>
               <a:t>12</a:t>
+            </a:fld>
+            <a:endParaRPr lang="en-US"/>
+          </a:p>
+        </p:txBody>
+      </p:sp>
+    </p:spTree>
+    <p:extLst>
+      <p:ext uri="{BB962C8B-B14F-4D97-AF65-F5344CB8AC3E}">
+        <p14:creationId xmlns:p14="http://schemas.microsoft.com/office/powerpoint/2010/main" val="1024086991"/>
+      </p:ext>
+    </p:extLst>
+  </p:cSld>
+  <p:clrMapOvr>
+    <a:masterClrMapping/>
+  </p:clrMapOvr>
+</p:notes>
+</file>
+
+<file path=ppt/notesSlides/notesSlide13.xml><?xml version="1.0" encoding="utf-8"?>
+<p:notes xmlns:a="http://schemas.openxmlformats.org/drawingml/2006/main" xmlns:r="http://schemas.openxmlformats.org/officeDocument/2006/relationships" xmlns:p="http://schemas.openxmlformats.org/presentationml/2006/main">
+  <p:cSld>
+    <p:spTree>
+      <p:nvGrpSpPr>
+        <p:cNvPr id="1" name=""/>
+        <p:cNvGrpSpPr/>
+        <p:nvPr/>
+      </p:nvGrpSpPr>
+      <p:grpSpPr>
+        <a:xfrm>
+          <a:off x="0" y="0"/>
+          <a:ext cx="0" cy="0"/>
+          <a:chOff x="0" y="0"/>
+          <a:chExt cx="0" cy="0"/>
+        </a:xfrm>
+      </p:grpSpPr>
+      <p:sp>
+        <p:nvSpPr>
+          <p:cNvPr id="2" name="Slide Image Placeholder 1"/>
+          <p:cNvSpPr>
+            <a:spLocks noGrp="1" noRot="1" noChangeAspect="1"/>
+          </p:cNvSpPr>
+          <p:nvPr>
+            <p:ph type="sldImg"/>
+          </p:nvPr>
+        </p:nvSpPr>
+        <p:spPr/>
+      </p:sp>
+      <p:sp>
+        <p:nvSpPr>
+          <p:cNvPr id="3" name="Notes Placeholder 2"/>
+          <p:cNvSpPr>
+            <a:spLocks noGrp="1"/>
+          </p:cNvSpPr>
+          <p:nvPr>
+            <p:ph type="body" idx="1"/>
+          </p:nvPr>
+        </p:nvSpPr>
+        <p:spPr/>
+        <p:txBody>
+          <a:bodyPr/>
+          <a:lstStyle/>
+          <a:p>
+            <a:r>
+              <a:rPr lang="es-ES" sz="1200" b="0" i="1" kern="1200" dirty="0">
+                <a:solidFill>
+                  <a:schemeClr val="tx1"/>
+                </a:solidFill>
+                <a:effectLst/>
+                <a:latin typeface="+mn-lt"/>
+                <a:ea typeface="+mn-ea"/>
+                <a:cs typeface="+mn-cs"/>
+              </a:rPr>
+              <a:t>Para cerrar, resumo el trabajo en dos partes: qué limitaciones tiene y qué podemos concluir.</a:t>
+            </a:r>
+          </a:p>
+          <a:p>
+            <a:endParaRPr lang="es-ES" sz="1200" b="0" i="1" kern="1200" dirty="0">
+              <a:solidFill>
+                <a:schemeClr val="tx1"/>
+              </a:solidFill>
+              <a:effectLst/>
+              <a:latin typeface="+mn-lt"/>
+              <a:ea typeface="+mn-ea"/>
+              <a:cs typeface="+mn-cs"/>
+            </a:endParaRPr>
+          </a:p>
+          <a:p>
+            <a:r>
+              <a:rPr lang="es-ES" sz="1200" b="0" i="1" kern="1200" dirty="0">
+                <a:solidFill>
+                  <a:schemeClr val="tx1"/>
+                </a:solidFill>
+                <a:effectLst/>
+                <a:latin typeface="+mn-lt"/>
+                <a:ea typeface="+mn-ea"/>
+                <a:cs typeface="+mn-cs"/>
+              </a:rPr>
+              <a:t>Primero, las limitaciones. </a:t>
+            </a:r>
+          </a:p>
+          <a:p>
+            <a:pPr marL="171450" indent="-171450">
+              <a:buFontTx/>
+              <a:buChar char="-"/>
+            </a:pPr>
+            <a:r>
+              <a:rPr lang="es-ES" sz="1200" b="0" i="1" kern="1200" dirty="0">
+                <a:solidFill>
+                  <a:schemeClr val="tx1"/>
+                </a:solidFill>
+                <a:effectLst/>
+                <a:latin typeface="+mn-lt"/>
+                <a:ea typeface="+mn-ea"/>
+                <a:cs typeface="+mn-cs"/>
+              </a:rPr>
+              <a:t>El test set es chico para sacar conclusiones financieras robustas. </a:t>
+            </a:r>
+          </a:p>
+          <a:p>
+            <a:pPr marL="171450" indent="-171450">
+              <a:buFontTx/>
+              <a:buChar char="-"/>
+            </a:pPr>
+            <a:r>
+              <a:rPr lang="es-ES" sz="1200" b="0" i="1" kern="1200" dirty="0">
+                <a:solidFill>
+                  <a:schemeClr val="tx1"/>
+                </a:solidFill>
+                <a:effectLst/>
+                <a:latin typeface="+mn-lt"/>
+                <a:ea typeface="+mn-ea"/>
+                <a:cs typeface="+mn-cs"/>
+              </a:rPr>
+              <a:t>Además, trabajamos con titulares agregados por día, no con artículos completos</a:t>
+            </a:r>
+          </a:p>
+          <a:p>
+            <a:pPr marL="171450" indent="-171450">
+              <a:buFontTx/>
+              <a:buChar char="-"/>
+            </a:pPr>
+            <a:r>
+              <a:rPr lang="es-ES" sz="1200" b="0" i="1" kern="1200" dirty="0">
+                <a:solidFill>
+                  <a:schemeClr val="tx1"/>
+                </a:solidFill>
+                <a:effectLst/>
+                <a:latin typeface="+mn-lt"/>
+                <a:ea typeface="+mn-ea"/>
+                <a:cs typeface="+mn-cs"/>
+              </a:rPr>
+              <a:t>GPT-2 </a:t>
+            </a:r>
+            <a:r>
+              <a:rPr lang="es-ES" sz="1200" b="0" i="1" kern="1200" dirty="0" err="1">
+                <a:solidFill>
+                  <a:schemeClr val="tx1"/>
+                </a:solidFill>
+                <a:effectLst/>
+                <a:latin typeface="+mn-lt"/>
+                <a:ea typeface="+mn-ea"/>
+                <a:cs typeface="+mn-cs"/>
+              </a:rPr>
+              <a:t>small</a:t>
+            </a:r>
+            <a:r>
+              <a:rPr lang="es-ES" sz="1200" b="0" i="1" kern="1200" dirty="0">
+                <a:solidFill>
+                  <a:schemeClr val="tx1"/>
+                </a:solidFill>
+                <a:effectLst/>
+                <a:latin typeface="+mn-lt"/>
+                <a:ea typeface="+mn-ea"/>
+                <a:cs typeface="+mn-cs"/>
+              </a:rPr>
+              <a:t> tiene capacidad limitada, por eso a veces genera texto genérico. </a:t>
+            </a:r>
+          </a:p>
+          <a:p>
+            <a:pPr marL="171450" indent="-171450">
+              <a:buFontTx/>
+              <a:buChar char="-"/>
+            </a:pPr>
+            <a:r>
+              <a:rPr lang="es-ES" sz="1200" b="0" i="1" kern="1200" dirty="0">
+                <a:solidFill>
+                  <a:schemeClr val="tx1"/>
+                </a:solidFill>
+                <a:effectLst/>
+                <a:latin typeface="+mn-lt"/>
+                <a:ea typeface="+mn-ea"/>
+                <a:cs typeface="+mn-cs"/>
+              </a:rPr>
+              <a:t>También usamos </a:t>
+            </a:r>
+            <a:r>
+              <a:rPr lang="es-ES" sz="1200" b="0" i="1" kern="1200" dirty="0" err="1">
+                <a:solidFill>
+                  <a:schemeClr val="tx1"/>
+                </a:solidFill>
+                <a:effectLst/>
+                <a:latin typeface="+mn-lt"/>
+                <a:ea typeface="+mn-ea"/>
+                <a:cs typeface="+mn-cs"/>
+              </a:rPr>
+              <a:t>FinBERT</a:t>
+            </a:r>
+            <a:r>
+              <a:rPr lang="es-ES" sz="1200" b="0" i="1" kern="1200" dirty="0">
+                <a:solidFill>
+                  <a:schemeClr val="tx1"/>
+                </a:solidFill>
+                <a:effectLst/>
+                <a:latin typeface="+mn-lt"/>
+                <a:ea typeface="+mn-ea"/>
+                <a:cs typeface="+mn-cs"/>
+              </a:rPr>
+              <a:t> como evaluador automático, que es útil, pero no es una verdad absoluta.</a:t>
+            </a:r>
+          </a:p>
+          <a:p>
+            <a:pPr marL="0" indent="0">
+              <a:buFontTx/>
+              <a:buNone/>
+            </a:pPr>
+            <a:endParaRPr lang="es-ES" sz="1200" b="0" i="1" kern="1200" dirty="0">
+              <a:solidFill>
+                <a:schemeClr val="tx1"/>
+              </a:solidFill>
+              <a:effectLst/>
+              <a:latin typeface="+mn-lt"/>
+              <a:ea typeface="+mn-ea"/>
+              <a:cs typeface="+mn-cs"/>
+            </a:endParaRPr>
+          </a:p>
+          <a:p>
+            <a:r>
+              <a:rPr lang="es-ES" sz="1200" b="0" i="1" kern="1200" dirty="0">
+                <a:solidFill>
+                  <a:schemeClr val="tx1"/>
+                </a:solidFill>
+                <a:effectLst/>
+                <a:latin typeface="+mn-lt"/>
+                <a:ea typeface="+mn-ea"/>
+                <a:cs typeface="+mn-cs"/>
+              </a:rPr>
+              <a:t>Con esas limitaciones en mente, la conclusión principal es que GPT-2 base puede generar texto financiero genérico, pero con baja calidad semántica. </a:t>
+            </a:r>
+          </a:p>
+          <a:p>
+            <a:r>
+              <a:rPr lang="es-ES" sz="1200" b="0" i="1" kern="1200" dirty="0">
+                <a:solidFill>
+                  <a:schemeClr val="tx1"/>
+                </a:solidFill>
+                <a:effectLst/>
+                <a:latin typeface="+mn-lt"/>
+                <a:ea typeface="+mn-ea"/>
+                <a:cs typeface="+mn-cs"/>
+              </a:rPr>
+              <a:t>El fine-</a:t>
+            </a:r>
+            <a:r>
+              <a:rPr lang="es-ES" sz="1200" b="0" i="1" kern="1200" dirty="0" err="1">
+                <a:solidFill>
+                  <a:schemeClr val="tx1"/>
+                </a:solidFill>
+                <a:effectLst/>
+                <a:latin typeface="+mn-lt"/>
+                <a:ea typeface="+mn-ea"/>
+                <a:cs typeface="+mn-cs"/>
+              </a:rPr>
+              <a:t>tuning</a:t>
+            </a:r>
+            <a:r>
+              <a:rPr lang="es-ES" sz="1200" b="0" i="1" kern="1200" dirty="0">
+                <a:solidFill>
+                  <a:schemeClr val="tx1"/>
+                </a:solidFill>
+                <a:effectLst/>
+                <a:latin typeface="+mn-lt"/>
+                <a:ea typeface="+mn-ea"/>
+                <a:cs typeface="+mn-cs"/>
+              </a:rPr>
+              <a:t> mejora métricas de NLP como ROUGE-L y </a:t>
+            </a:r>
+            <a:r>
+              <a:rPr lang="es-ES" sz="1200" b="0" i="1" kern="1200" dirty="0" err="1">
+                <a:solidFill>
+                  <a:schemeClr val="tx1"/>
+                </a:solidFill>
+                <a:effectLst/>
+                <a:latin typeface="+mn-lt"/>
+                <a:ea typeface="+mn-ea"/>
+                <a:cs typeface="+mn-cs"/>
+              </a:rPr>
+              <a:t>sentiment</a:t>
+            </a:r>
+            <a:r>
+              <a:rPr lang="es-ES" sz="1200" b="0" i="1" kern="1200" dirty="0">
+                <a:solidFill>
+                  <a:schemeClr val="tx1"/>
+                </a:solidFill>
+                <a:effectLst/>
+                <a:latin typeface="+mn-lt"/>
+                <a:ea typeface="+mn-ea"/>
+                <a:cs typeface="+mn-cs"/>
+              </a:rPr>
+              <a:t> match, especialmente en el run NVDA + AMD.</a:t>
+            </a:r>
+          </a:p>
+          <a:p>
+            <a:r>
+              <a:rPr lang="es-ES" sz="1200" b="0" i="1" kern="1200" dirty="0">
+                <a:solidFill>
+                  <a:schemeClr val="tx1"/>
+                </a:solidFill>
+                <a:effectLst/>
+                <a:latin typeface="+mn-lt"/>
+                <a:ea typeface="+mn-ea"/>
+                <a:cs typeface="+mn-cs"/>
+              </a:rPr>
+              <a:t>También vimos que estructurar la salida con </a:t>
+            </a:r>
+            <a:r>
+              <a:rPr lang="es-ES" sz="1200" b="0" i="1" kern="1200" dirty="0" err="1">
+                <a:solidFill>
+                  <a:schemeClr val="tx1"/>
+                </a:solidFill>
+                <a:effectLst/>
+                <a:latin typeface="+mn-lt"/>
+                <a:ea typeface="+mn-ea"/>
+                <a:cs typeface="+mn-cs"/>
+              </a:rPr>
+              <a:t>label</a:t>
+            </a:r>
+            <a:r>
+              <a:rPr lang="es-ES" sz="1200" b="0" i="1" kern="1200" dirty="0">
+                <a:solidFill>
+                  <a:schemeClr val="tx1"/>
+                </a:solidFill>
+                <a:effectLst/>
+                <a:latin typeface="+mn-lt"/>
+                <a:ea typeface="+mn-ea"/>
+                <a:cs typeface="+mn-cs"/>
+              </a:rPr>
+              <a:t> </a:t>
+            </a:r>
+            <a:r>
+              <a:rPr lang="es-ES" sz="1200" b="0" i="1" kern="1200" dirty="0" err="1">
+                <a:solidFill>
+                  <a:schemeClr val="tx1"/>
+                </a:solidFill>
+                <a:effectLst/>
+                <a:latin typeface="+mn-lt"/>
+                <a:ea typeface="+mn-ea"/>
+                <a:cs typeface="+mn-cs"/>
+              </a:rPr>
+              <a:t>scoring</a:t>
+            </a:r>
+            <a:r>
+              <a:rPr lang="es-ES" sz="1200" b="0" i="1" kern="1200" dirty="0">
+                <a:solidFill>
+                  <a:schemeClr val="tx1"/>
+                </a:solidFill>
+                <a:effectLst/>
+                <a:latin typeface="+mn-lt"/>
+                <a:ea typeface="+mn-ea"/>
+                <a:cs typeface="+mn-cs"/>
+              </a:rPr>
+              <a:t> ayuda a ordenar el problema, pero no convierte automáticamente al modelo en predictor financiero.</a:t>
+            </a:r>
+          </a:p>
+          <a:p>
+            <a:r>
+              <a:rPr lang="es-ES" sz="1200" b="0" i="1" kern="1200" dirty="0">
+                <a:solidFill>
+                  <a:schemeClr val="tx1"/>
+                </a:solidFill>
+                <a:effectLst/>
+                <a:latin typeface="+mn-lt"/>
+                <a:ea typeface="+mn-ea"/>
+                <a:cs typeface="+mn-cs"/>
+              </a:rPr>
+              <a:t>Finalmente, la </a:t>
+            </a:r>
+            <a:r>
+              <a:rPr lang="es-ES" sz="1200" b="0" i="1" kern="1200" dirty="0" err="1">
+                <a:solidFill>
+                  <a:schemeClr val="tx1"/>
+                </a:solidFill>
+                <a:effectLst/>
+                <a:latin typeface="+mn-lt"/>
+                <a:ea typeface="+mn-ea"/>
+                <a:cs typeface="+mn-cs"/>
+              </a:rPr>
+              <a:t>directional</a:t>
+            </a:r>
+            <a:r>
+              <a:rPr lang="es-ES" sz="1200" b="0" i="1" kern="1200" dirty="0">
+                <a:solidFill>
+                  <a:schemeClr val="tx1"/>
+                </a:solidFill>
+                <a:effectLst/>
+                <a:latin typeface="+mn-lt"/>
+                <a:ea typeface="+mn-ea"/>
+                <a:cs typeface="+mn-cs"/>
+              </a:rPr>
+              <a:t> </a:t>
+            </a:r>
+            <a:r>
+              <a:rPr lang="es-ES" sz="1200" b="0" i="1" kern="1200" dirty="0" err="1">
+                <a:solidFill>
+                  <a:schemeClr val="tx1"/>
+                </a:solidFill>
+                <a:effectLst/>
+                <a:latin typeface="+mn-lt"/>
+                <a:ea typeface="+mn-ea"/>
+                <a:cs typeface="+mn-cs"/>
+              </a:rPr>
+              <a:t>accuracy</a:t>
+            </a:r>
+            <a:r>
+              <a:rPr lang="es-ES" sz="1200" b="0" i="1" kern="1200" dirty="0">
+                <a:solidFill>
+                  <a:schemeClr val="tx1"/>
+                </a:solidFill>
+                <a:effectLst/>
+                <a:latin typeface="+mn-lt"/>
+                <a:ea typeface="+mn-ea"/>
+                <a:cs typeface="+mn-cs"/>
+              </a:rPr>
+              <a:t> queda como una señal exploratoria: no hay significancia estadística fuerte, y además vimos que puede ser engañosa si se mira aislada.</a:t>
+            </a:r>
+          </a:p>
+          <a:p>
+            <a:r>
+              <a:rPr lang="es-ES" sz="1200" b="0" i="1" kern="1200" dirty="0">
+                <a:solidFill>
+                  <a:schemeClr val="tx1"/>
+                </a:solidFill>
+                <a:effectLst/>
+                <a:latin typeface="+mn-lt"/>
+                <a:ea typeface="+mn-ea"/>
+                <a:cs typeface="+mn-cs"/>
+              </a:rPr>
+              <a:t>Entonces, el aporte principal del proyecto no es una estrategia de trading, sino un pipeline reproducible de NLP generativo con evaluación multicapa: textual, semántica y financiera.</a:t>
+            </a:r>
+          </a:p>
+        </p:txBody>
+      </p:sp>
+      <p:sp>
+        <p:nvSpPr>
+          <p:cNvPr id="4" name="Slide Number Placeholder 3"/>
+          <p:cNvSpPr>
+            <a:spLocks noGrp="1"/>
+          </p:cNvSpPr>
+          <p:nvPr>
+            <p:ph type="sldNum" sz="quarter" idx="10"/>
+          </p:nvPr>
+        </p:nvSpPr>
+        <p:spPr/>
+        <p:txBody>
+          <a:bodyPr/>
+          <a:lstStyle/>
+          <a:p>
+            <a:fld id="{F7021451-1387-4CA6-816F-3879F97B5CBC}" type="slidenum">
+              <a:rPr lang="en-US"/>
+              <a:t>13</a:t>
             </a:fld>
             <a:endParaRPr lang="en-US"/>
           </a:p>
@@ -1799,157 +2465,6 @@
           <a:p>
             <a:endParaRPr lang="en-US" dirty="0"/>
           </a:p>
-          <a:p>
-            <a:r>
-              <a:rPr lang="en-US" dirty="0"/>
-              <a:t>-</a:t>
-            </a:r>
-            <a:r>
-              <a:rPr lang="es-ES" b="0" i="0" dirty="0">
-                <a:solidFill>
-                  <a:srgbClr val="BFBFBF"/>
-                </a:solidFill>
-                <a:effectLst/>
-                <a:latin typeface="-apple-system"/>
-              </a:rPr>
-              <a:t>Durante el entrenamiento la pérdida está enmascarada sobre el </a:t>
-            </a:r>
-            <a:r>
-              <a:rPr lang="es-ES" b="0" i="0" dirty="0" err="1">
-                <a:solidFill>
-                  <a:srgbClr val="BFBFBF"/>
-                </a:solidFill>
-                <a:effectLst/>
-                <a:latin typeface="-apple-system"/>
-              </a:rPr>
-              <a:t>prompt</a:t>
-            </a:r>
-            <a:r>
-              <a:rPr lang="es-ES" b="0" i="0" dirty="0">
-                <a:solidFill>
-                  <a:srgbClr val="BFBFBF"/>
-                </a:solidFill>
-                <a:effectLst/>
-                <a:latin typeface="-apple-system"/>
-              </a:rPr>
-              <a:t>: las posiciones del </a:t>
-            </a:r>
-            <a:r>
-              <a:rPr lang="es-ES" b="0" i="0" dirty="0" err="1">
-                <a:solidFill>
-                  <a:srgbClr val="BFBFBF"/>
-                </a:solidFill>
-                <a:effectLst/>
-                <a:latin typeface="-apple-system"/>
-              </a:rPr>
-              <a:t>prompt</a:t>
-            </a:r>
-            <a:r>
-              <a:rPr lang="es-ES" b="0" i="0" dirty="0">
-                <a:solidFill>
-                  <a:srgbClr val="BFBFBF"/>
-                </a:solidFill>
-                <a:effectLst/>
-                <a:latin typeface="-apple-system"/>
-              </a:rPr>
-              <a:t> llevan </a:t>
-            </a:r>
-            <a:r>
-              <a:rPr lang="es-ES" dirty="0"/>
-              <a:t>-100</a:t>
-            </a:r>
-            <a:r>
-              <a:rPr lang="es-ES" b="0" i="0" dirty="0">
-                <a:solidFill>
-                  <a:srgbClr val="BFBFBF"/>
-                </a:solidFill>
-                <a:effectLst/>
-                <a:latin typeface="-apple-system"/>
-              </a:rPr>
-              <a:t> como </a:t>
-            </a:r>
-            <a:r>
-              <a:rPr lang="es-ES" b="0" i="0" dirty="0" err="1">
-                <a:solidFill>
-                  <a:srgbClr val="BFBFBF"/>
-                </a:solidFill>
-                <a:effectLst/>
-                <a:latin typeface="-apple-system"/>
-              </a:rPr>
-              <a:t>label</a:t>
-            </a:r>
-            <a:r>
-              <a:rPr lang="es-ES" b="0" i="0" dirty="0">
-                <a:solidFill>
-                  <a:srgbClr val="BFBFBF"/>
-                </a:solidFill>
-                <a:effectLst/>
-                <a:latin typeface="-apple-system"/>
-              </a:rPr>
-              <a:t>, que es la convención de </a:t>
-            </a:r>
-            <a:r>
-              <a:rPr lang="es-ES" b="0" i="0" dirty="0" err="1">
-                <a:solidFill>
-                  <a:srgbClr val="BFBFBF"/>
-                </a:solidFill>
-                <a:effectLst/>
-                <a:latin typeface="-apple-system"/>
-              </a:rPr>
-              <a:t>PyTorch</a:t>
-            </a:r>
-            <a:r>
-              <a:rPr lang="es-ES" b="0" i="0" dirty="0">
-                <a:solidFill>
-                  <a:srgbClr val="BFBFBF"/>
-                </a:solidFill>
-                <a:effectLst/>
-                <a:latin typeface="-apple-system"/>
-              </a:rPr>
-              <a:t> para 'ignorar'. Así el gradiente viene solo del </a:t>
-            </a:r>
-            <a:r>
-              <a:rPr lang="es-ES" b="0" i="0" dirty="0" err="1">
-                <a:solidFill>
-                  <a:srgbClr val="BFBFBF"/>
-                </a:solidFill>
-                <a:effectLst/>
-                <a:latin typeface="-apple-system"/>
-              </a:rPr>
-              <a:t>completion</a:t>
-            </a:r>
-            <a:r>
-              <a:rPr lang="es-ES" b="0" i="0" dirty="0">
-                <a:solidFill>
-                  <a:srgbClr val="BFBFBF"/>
-                </a:solidFill>
-                <a:effectLst/>
-                <a:latin typeface="-apple-system"/>
-              </a:rPr>
-              <a:t>. El modelo igual ve el </a:t>
-            </a:r>
-            <a:r>
-              <a:rPr lang="es-ES" b="0" i="0" dirty="0" err="1">
-                <a:solidFill>
-                  <a:srgbClr val="BFBFBF"/>
-                </a:solidFill>
-                <a:effectLst/>
-                <a:latin typeface="-apple-system"/>
-              </a:rPr>
-              <a:t>prompt</a:t>
-            </a:r>
-            <a:r>
-              <a:rPr lang="es-ES" b="0" i="0" dirty="0">
-                <a:solidFill>
-                  <a:srgbClr val="BFBFBF"/>
-                </a:solidFill>
-                <a:effectLst/>
-                <a:latin typeface="-apple-system"/>
-              </a:rPr>
-              <a:t> para condicionar, pero solo aprende a generar el target.</a:t>
-            </a:r>
-            <a:endParaRPr lang="en-US" dirty="0"/>
-          </a:p>
         </p:txBody>
       </p:sp>
       <p:sp>
@@ -2095,7 +2610,15 @@
             </a:r>
             <a:r>
               <a:rPr lang="en-US" dirty="0"/>
-              <a:t> la narrative de un día t+1. </a:t>
+              <a:t> la </a:t>
+            </a:r>
+            <a:r>
+              <a:rPr lang="en-US"/>
+              <a:t>narrativa </a:t>
+            </a:r>
+            <a:r>
+              <a:rPr lang="en-US" dirty="0"/>
+              <a:t>de un día t+1. </a:t>
             </a:r>
           </a:p>
           <a:p>
@@ -2184,216 +2707,153 @@
           <a:p>
             <a:r>
               <a:rPr lang="en-US" dirty="0"/>
-              <a:t>Un </a:t>
-            </a:r>
-            <a:r>
-              <a:rPr lang="en-US" dirty="0" err="1"/>
-              <a:t>detalle</a:t>
-            </a:r>
-            <a:r>
-              <a:rPr lang="en-US" dirty="0"/>
-              <a:t> de </a:t>
-            </a:r>
-            <a:r>
-              <a:rPr lang="en-US" dirty="0" err="1"/>
-              <a:t>diseño</a:t>
-            </a:r>
-            <a:r>
-              <a:rPr lang="en-US" dirty="0"/>
-              <a:t> </a:t>
-            </a:r>
-            <a:r>
-              <a:rPr lang="en-US" dirty="0" err="1"/>
-              <a:t>importante</a:t>
-            </a:r>
-            <a:r>
-              <a:rPr lang="en-US" dirty="0"/>
-              <a:t>: </a:t>
-            </a:r>
-            <a:r>
-              <a:rPr lang="en-US" dirty="0" err="1"/>
-              <a:t>durante</a:t>
-            </a:r>
-            <a:r>
-              <a:rPr lang="en-US" dirty="0"/>
-              <a:t> </a:t>
-            </a:r>
-            <a:r>
-              <a:rPr lang="en-US" dirty="0" err="1"/>
-              <a:t>el</a:t>
-            </a:r>
-            <a:r>
-              <a:rPr lang="en-US" dirty="0"/>
-              <a:t> </a:t>
-            </a:r>
-            <a:r>
-              <a:rPr lang="en-US" dirty="0" err="1"/>
-              <a:t>entrenamiento</a:t>
-            </a:r>
-            <a:r>
-              <a:rPr lang="en-US" dirty="0"/>
-              <a:t> la </a:t>
-            </a:r>
-            <a:r>
-              <a:rPr lang="en-US" dirty="0" err="1"/>
-              <a:t>perdida</a:t>
-            </a:r>
-            <a:r>
-              <a:rPr lang="en-US" dirty="0"/>
-              <a:t> </a:t>
-            </a:r>
-            <a:r>
-              <a:rPr lang="en-US" dirty="0" err="1"/>
-              <a:t>esta</a:t>
-            </a:r>
-            <a:r>
-              <a:rPr lang="en-US" dirty="0"/>
-              <a:t> </a:t>
-            </a:r>
-            <a:r>
-              <a:rPr lang="en-US" dirty="0" err="1"/>
-              <a:t>enmascarada</a:t>
-            </a:r>
-            <a:r>
-              <a:rPr lang="en-US" dirty="0"/>
-              <a:t> </a:t>
-            </a:r>
-            <a:r>
-              <a:rPr lang="en-US" dirty="0" err="1"/>
-              <a:t>sobre</a:t>
-            </a:r>
-            <a:r>
-              <a:rPr lang="en-US" dirty="0"/>
-              <a:t> </a:t>
-            </a:r>
-            <a:r>
-              <a:rPr lang="en-US" dirty="0" err="1"/>
-              <a:t>el</a:t>
-            </a:r>
-            <a:r>
-              <a:rPr lang="en-US" dirty="0"/>
-              <a:t> prompt. Se </a:t>
-            </a:r>
-            <a:r>
-              <a:rPr lang="en-US" dirty="0" err="1"/>
-              <a:t>ponen</a:t>
-            </a:r>
-            <a:r>
-              <a:rPr lang="en-US" dirty="0"/>
-              <a:t> -100 </a:t>
-            </a:r>
-            <a:r>
-              <a:rPr lang="en-US" dirty="0" err="1"/>
-              <a:t>en</a:t>
-            </a:r>
-            <a:r>
-              <a:rPr lang="en-US" dirty="0"/>
-              <a:t> las </a:t>
-            </a:r>
-            <a:r>
-              <a:rPr lang="en-US" dirty="0" err="1"/>
-              <a:t>posiciones</a:t>
-            </a:r>
-            <a:r>
-              <a:rPr lang="en-US" dirty="0"/>
-              <a:t> del prompt, </a:t>
-            </a:r>
-            <a:r>
-              <a:rPr lang="en-US" dirty="0" err="1"/>
-              <a:t>asi</a:t>
-            </a:r>
-            <a:r>
-              <a:rPr lang="en-US" dirty="0"/>
-              <a:t> </a:t>
-            </a:r>
-            <a:r>
-              <a:rPr lang="en-US" dirty="0" err="1"/>
-              <a:t>el</a:t>
-            </a:r>
-            <a:r>
-              <a:rPr lang="en-US" dirty="0"/>
-              <a:t> </a:t>
-            </a:r>
-            <a:r>
-              <a:rPr lang="en-US" dirty="0" err="1"/>
-              <a:t>gradiente</a:t>
-            </a:r>
-            <a:r>
-              <a:rPr lang="en-US" dirty="0"/>
-              <a:t> </a:t>
-            </a:r>
-            <a:r>
-              <a:rPr lang="en-US" dirty="0" err="1"/>
-              <a:t>viene</a:t>
-            </a:r>
-            <a:r>
-              <a:rPr lang="en-US" dirty="0"/>
-              <a:t> solo del completion. El </a:t>
-            </a:r>
-            <a:r>
-              <a:rPr lang="en-US" dirty="0" err="1"/>
-              <a:t>modelo</a:t>
-            </a:r>
-            <a:r>
-              <a:rPr lang="en-US" dirty="0"/>
-              <a:t> no </a:t>
-            </a:r>
-            <a:r>
-              <a:rPr lang="en-US" dirty="0" err="1"/>
-              <a:t>aprende</a:t>
-            </a:r>
-            <a:r>
-              <a:rPr lang="en-US" dirty="0"/>
-              <a:t> a </a:t>
-            </a:r>
-            <a:r>
-              <a:rPr lang="en-US" dirty="0" err="1"/>
-              <a:t>copiar</a:t>
-            </a:r>
-            <a:r>
-              <a:rPr lang="en-US" dirty="0"/>
-              <a:t> </a:t>
-            </a:r>
-            <a:r>
-              <a:rPr lang="en-US" dirty="0" err="1"/>
-              <a:t>el</a:t>
-            </a:r>
-            <a:r>
-              <a:rPr lang="en-US" dirty="0"/>
-              <a:t> </a:t>
-            </a:r>
-            <a:r>
-              <a:rPr lang="en-US" dirty="0" err="1"/>
-              <a:t>contexto</a:t>
-            </a:r>
-            <a:r>
-              <a:rPr lang="en-US" dirty="0"/>
-              <a:t>, </a:t>
-            </a:r>
-            <a:r>
-              <a:rPr lang="en-US" dirty="0" err="1"/>
-              <a:t>aprende</a:t>
-            </a:r>
-            <a:r>
-              <a:rPr lang="en-US" dirty="0"/>
-              <a:t> a </a:t>
-            </a:r>
-            <a:r>
-              <a:rPr lang="en-US" dirty="0" err="1"/>
-              <a:t>generar</a:t>
-            </a:r>
-            <a:r>
-              <a:rPr lang="en-US" dirty="0"/>
-              <a:t> </a:t>
-            </a:r>
-            <a:r>
-              <a:rPr lang="en-US" dirty="0" err="1"/>
-              <a:t>el</a:t>
-            </a:r>
-            <a:r>
-              <a:rPr lang="en-US" dirty="0"/>
-              <a:t> target. </a:t>
-            </a:r>
+              <a:t>-</a:t>
+            </a:r>
+            <a:r>
+              <a:rPr lang="es-ES" b="0" i="0" dirty="0">
+                <a:solidFill>
+                  <a:srgbClr val="BFBFBF"/>
+                </a:solidFill>
+                <a:effectLst/>
+                <a:latin typeface="-apple-system"/>
+              </a:rPr>
+              <a:t>Durante el entrenamiento la pérdida está enmascarada sobre el </a:t>
+            </a:r>
+            <a:r>
+              <a:rPr lang="es-ES" b="0" i="0" dirty="0" err="1">
+                <a:solidFill>
+                  <a:srgbClr val="BFBFBF"/>
+                </a:solidFill>
+                <a:effectLst/>
+                <a:latin typeface="-apple-system"/>
+              </a:rPr>
+              <a:t>prompt</a:t>
+            </a:r>
+            <a:r>
+              <a:rPr lang="es-ES" b="0" i="0" dirty="0">
+                <a:solidFill>
+                  <a:srgbClr val="BFBFBF"/>
+                </a:solidFill>
+                <a:effectLst/>
+                <a:latin typeface="-apple-system"/>
+              </a:rPr>
+              <a:t>: las posiciones del </a:t>
+            </a:r>
+            <a:r>
+              <a:rPr lang="es-ES" b="0" i="0" dirty="0" err="1">
+                <a:solidFill>
+                  <a:srgbClr val="BFBFBF"/>
+                </a:solidFill>
+                <a:effectLst/>
+                <a:latin typeface="-apple-system"/>
+              </a:rPr>
+              <a:t>prompt</a:t>
+            </a:r>
+            <a:r>
+              <a:rPr lang="es-ES" b="0" i="0" dirty="0">
+                <a:solidFill>
+                  <a:srgbClr val="BFBFBF"/>
+                </a:solidFill>
+                <a:effectLst/>
+                <a:latin typeface="-apple-system"/>
+              </a:rPr>
+              <a:t> llevan </a:t>
+            </a:r>
+            <a:r>
+              <a:rPr lang="es-ES" dirty="0"/>
+              <a:t>-100</a:t>
+            </a:r>
+            <a:r>
+              <a:rPr lang="es-ES" b="0" i="0" dirty="0">
+                <a:solidFill>
+                  <a:srgbClr val="BFBFBF"/>
+                </a:solidFill>
+                <a:effectLst/>
+                <a:latin typeface="-apple-system"/>
+              </a:rPr>
+              <a:t> como </a:t>
+            </a:r>
+            <a:r>
+              <a:rPr lang="es-ES" b="0" i="0" dirty="0" err="1">
+                <a:solidFill>
+                  <a:srgbClr val="BFBFBF"/>
+                </a:solidFill>
+                <a:effectLst/>
+                <a:latin typeface="-apple-system"/>
+              </a:rPr>
+              <a:t>label</a:t>
+            </a:r>
+            <a:r>
+              <a:rPr lang="es-ES" b="0" i="0" dirty="0">
+                <a:solidFill>
+                  <a:srgbClr val="BFBFBF"/>
+                </a:solidFill>
+                <a:effectLst/>
+                <a:latin typeface="-apple-system"/>
+              </a:rPr>
+              <a:t>, que es la convención de </a:t>
+            </a:r>
+            <a:r>
+              <a:rPr lang="es-ES" b="0" i="0" dirty="0" err="1">
+                <a:solidFill>
+                  <a:srgbClr val="BFBFBF"/>
+                </a:solidFill>
+                <a:effectLst/>
+                <a:latin typeface="-apple-system"/>
+              </a:rPr>
+              <a:t>PyTorch</a:t>
+            </a:r>
+            <a:r>
+              <a:rPr lang="es-ES" b="0" i="0" dirty="0">
+                <a:solidFill>
+                  <a:srgbClr val="BFBFBF"/>
+                </a:solidFill>
+                <a:effectLst/>
+                <a:latin typeface="-apple-system"/>
+              </a:rPr>
+              <a:t> para 'ignorar'. Así el gradiente viene solo del </a:t>
+            </a:r>
+            <a:r>
+              <a:rPr lang="es-ES" b="0" i="0" dirty="0" err="1">
+                <a:solidFill>
+                  <a:srgbClr val="BFBFBF"/>
+                </a:solidFill>
+                <a:effectLst/>
+                <a:latin typeface="-apple-system"/>
+              </a:rPr>
+              <a:t>completion</a:t>
+            </a:r>
+            <a:r>
+              <a:rPr lang="es-ES" b="0" i="0" dirty="0">
+                <a:solidFill>
+                  <a:srgbClr val="BFBFBF"/>
+                </a:solidFill>
+                <a:effectLst/>
+                <a:latin typeface="-apple-system"/>
+              </a:rPr>
+              <a:t>. El modelo igual ve el </a:t>
+            </a:r>
+            <a:r>
+              <a:rPr lang="es-ES" b="0" i="0" dirty="0" err="1">
+                <a:solidFill>
+                  <a:srgbClr val="BFBFBF"/>
+                </a:solidFill>
+                <a:effectLst/>
+                <a:latin typeface="-apple-system"/>
+              </a:rPr>
+              <a:t>prompt</a:t>
+            </a:r>
+            <a:r>
+              <a:rPr lang="es-ES" b="0" i="0" dirty="0">
+                <a:solidFill>
+                  <a:srgbClr val="BFBFBF"/>
+                </a:solidFill>
+                <a:effectLst/>
+                <a:latin typeface="-apple-system"/>
+              </a:rPr>
+              <a:t> para condicionar, pero solo aprende a generar el target.</a:t>
+            </a:r>
+            <a:endParaRPr lang="en-US" dirty="0"/>
           </a:p>
         </p:txBody>
       </p:sp>
@@ -2975,489 +3435,338 @@
           <a:bodyPr/>
           <a:lstStyle/>
           <a:p>
-            <a:pPr marL="171450" marR="0" lvl="0" indent="-171450" algn="l" defTabSz="914400" rtl="0" eaLnBrk="1" fontAlgn="auto" latinLnBrk="0" hangingPunct="1">
-              <a:lnSpc>
-                <a:spcPct val="100000"/>
-              </a:lnSpc>
-              <a:spcBef>
-                <a:spcPts val="0"/>
-              </a:spcBef>
-              <a:spcAft>
-                <a:spcPts val="0"/>
-              </a:spcAft>
-              <a:buClrTx/>
-              <a:buSzTx/>
-              <a:buFontTx/>
-              <a:buChar char="-"/>
-              <a:tabLst/>
-              <a:defRPr/>
-            </a:pPr>
-            <a:r>
-              <a:rPr lang="en-US" dirty="0"/>
-              <a:t>GPT-2 no fine-</a:t>
-            </a:r>
-            <a:r>
-              <a:rPr lang="en-US" dirty="0" err="1"/>
-              <a:t>tuneado</a:t>
-            </a:r>
-            <a:r>
-              <a:rPr lang="en-US" dirty="0"/>
+            <a:r>
+              <a:rPr lang="es-ES" sz="1200" b="0" i="1" kern="1200" dirty="0">
+                <a:solidFill>
+                  <a:schemeClr val="tx1"/>
+                </a:solidFill>
+                <a:effectLst/>
+                <a:latin typeface="+mn-lt"/>
+                <a:ea typeface="+mn-ea"/>
+                <a:cs typeface="+mn-cs"/>
+              </a:rPr>
+              <a:t>Esta </a:t>
+            </a:r>
+            <a:r>
+              <a:rPr lang="es-ES" sz="1200" b="0" i="1" kern="1200" dirty="0" err="1">
+                <a:solidFill>
+                  <a:schemeClr val="tx1"/>
+                </a:solidFill>
+                <a:effectLst/>
+                <a:latin typeface="+mn-lt"/>
+                <a:ea typeface="+mn-ea"/>
+                <a:cs typeface="+mn-cs"/>
+              </a:rPr>
+              <a:t>slide</a:t>
+            </a:r>
+            <a:r>
+              <a:rPr lang="es-ES" sz="1200" b="0" i="1" kern="1200" dirty="0">
+                <a:solidFill>
+                  <a:schemeClr val="tx1"/>
+                </a:solidFill>
+                <a:effectLst/>
+                <a:latin typeface="+mn-lt"/>
+                <a:ea typeface="+mn-ea"/>
+                <a:cs typeface="+mn-cs"/>
+              </a:rPr>
+              <a:t> no hay que leerla como un ranking de modelos, sino como una progresión experimental. Cada fila responde una pregunta distinta.</a:t>
+            </a:r>
+          </a:p>
+          <a:p>
+            <a:r>
+              <a:rPr lang="es-ES" sz="1200" b="0" i="1" kern="1200" dirty="0">
+                <a:solidFill>
+                  <a:schemeClr val="tx1"/>
+                </a:solidFill>
+                <a:effectLst/>
+                <a:latin typeface="+mn-lt"/>
+                <a:ea typeface="+mn-ea"/>
+                <a:cs typeface="+mn-cs"/>
+              </a:rPr>
+              <a:t>Primero, GPT-2 sin fine-</a:t>
+            </a:r>
+            <a:r>
+              <a:rPr lang="es-ES" sz="1200" b="0" i="1" kern="1200" dirty="0" err="1">
+                <a:solidFill>
+                  <a:schemeClr val="tx1"/>
+                </a:solidFill>
+                <a:effectLst/>
+                <a:latin typeface="+mn-lt"/>
+                <a:ea typeface="+mn-ea"/>
+                <a:cs typeface="+mn-cs"/>
+              </a:rPr>
+              <a:t>tuning</a:t>
+            </a:r>
+            <a:r>
+              <a:rPr lang="es-ES" sz="1200" b="0" i="1" kern="1200" dirty="0">
+                <a:solidFill>
+                  <a:schemeClr val="tx1"/>
+                </a:solidFill>
+                <a:effectLst/>
+                <a:latin typeface="+mn-lt"/>
+                <a:ea typeface="+mn-ea"/>
+                <a:cs typeface="+mn-cs"/>
+              </a:rPr>
+              <a:t> funciona como </a:t>
+            </a:r>
+            <a:r>
+              <a:rPr lang="es-ES" sz="1200" b="0" i="1" kern="1200" dirty="0" err="1">
+                <a:solidFill>
+                  <a:schemeClr val="tx1"/>
+                </a:solidFill>
+                <a:effectLst/>
+                <a:latin typeface="+mn-lt"/>
+                <a:ea typeface="+mn-ea"/>
+                <a:cs typeface="+mn-cs"/>
+              </a:rPr>
+              <a:t>baseline</a:t>
+            </a:r>
+            <a:r>
+              <a:rPr lang="es-ES" sz="1200" b="0" i="1" kern="1200" dirty="0">
+                <a:solidFill>
+                  <a:schemeClr val="tx1"/>
+                </a:solidFill>
+                <a:effectLst/>
+                <a:latin typeface="+mn-lt"/>
+                <a:ea typeface="+mn-ea"/>
+                <a:cs typeface="+mn-cs"/>
+              </a:rPr>
+              <a:t>: tiene baja calidad textual y semántica, con ROUGE-L de 0.040 y </a:t>
+            </a:r>
+            <a:r>
+              <a:rPr lang="es-ES" sz="1200" b="0" i="1" kern="1200" dirty="0" err="1">
+                <a:solidFill>
+                  <a:schemeClr val="tx1"/>
+                </a:solidFill>
+                <a:effectLst/>
+                <a:latin typeface="+mn-lt"/>
+                <a:ea typeface="+mn-ea"/>
+                <a:cs typeface="+mn-cs"/>
+              </a:rPr>
+              <a:t>sentiment</a:t>
+            </a:r>
+            <a:r>
+              <a:rPr lang="es-ES" sz="1200" b="0" i="1" kern="1200" dirty="0">
+                <a:solidFill>
+                  <a:schemeClr val="tx1"/>
+                </a:solidFill>
+                <a:effectLst/>
+                <a:latin typeface="+mn-lt"/>
+                <a:ea typeface="+mn-ea"/>
+                <a:cs typeface="+mn-cs"/>
+              </a:rPr>
+              <a:t> match de 0.273. Eso nos muestra el punto de partida.</a:t>
+            </a:r>
+          </a:p>
+          <a:p>
+            <a:r>
+              <a:rPr lang="es-ES" sz="1200" b="0" i="1" kern="1200" dirty="0">
+                <a:solidFill>
+                  <a:schemeClr val="tx1"/>
+                </a:solidFill>
+                <a:effectLst/>
+                <a:latin typeface="+mn-lt"/>
+                <a:ea typeface="+mn-ea"/>
+                <a:cs typeface="+mn-cs"/>
+              </a:rPr>
+              <a:t>Al hacer fine-</a:t>
+            </a:r>
+            <a:r>
+              <a:rPr lang="es-ES" sz="1200" b="0" i="1" kern="1200" dirty="0" err="1">
+                <a:solidFill>
+                  <a:schemeClr val="tx1"/>
+                </a:solidFill>
+                <a:effectLst/>
+                <a:latin typeface="+mn-lt"/>
+                <a:ea typeface="+mn-ea"/>
+                <a:cs typeface="+mn-cs"/>
+              </a:rPr>
+              <a:t>tuning</a:t>
+            </a:r>
+            <a:r>
+              <a:rPr lang="es-ES" sz="1200" b="0" i="1" kern="1200" dirty="0">
+                <a:solidFill>
+                  <a:schemeClr val="tx1"/>
+                </a:solidFill>
+                <a:effectLst/>
+                <a:latin typeface="+mn-lt"/>
+                <a:ea typeface="+mn-ea"/>
+                <a:cs typeface="+mn-cs"/>
+              </a:rPr>
+              <a:t>, las métricas de NLP mejoran: por ejemplo, NVDA + AMD llega al mejor ROUGE-L de la tabla, 0.074, y al mejor </a:t>
+            </a:r>
+            <a:r>
+              <a:rPr lang="es-ES" sz="1200" b="0" i="1" kern="1200" dirty="0" err="1">
+                <a:solidFill>
+                  <a:schemeClr val="tx1"/>
+                </a:solidFill>
+                <a:effectLst/>
+                <a:latin typeface="+mn-lt"/>
+                <a:ea typeface="+mn-ea"/>
+                <a:cs typeface="+mn-cs"/>
+              </a:rPr>
+              <a:t>sentiment</a:t>
+            </a:r>
+            <a:r>
+              <a:rPr lang="es-ES" sz="1200" b="0" i="1" kern="1200" dirty="0">
+                <a:solidFill>
+                  <a:schemeClr val="tx1"/>
+                </a:solidFill>
+                <a:effectLst/>
+                <a:latin typeface="+mn-lt"/>
+                <a:ea typeface="+mn-ea"/>
+                <a:cs typeface="+mn-cs"/>
+              </a:rPr>
+              <a:t> match, 0.442. Por eso lo tomo como el mejor balance textual y semántico.</a:t>
+            </a:r>
+          </a:p>
+          <a:p>
+            <a:r>
+              <a:rPr lang="es-ES" sz="1200" b="0" i="1" kern="1200" dirty="0">
+                <a:solidFill>
+                  <a:schemeClr val="tx1"/>
+                </a:solidFill>
+                <a:effectLst/>
+                <a:latin typeface="+mn-lt"/>
+                <a:ea typeface="+mn-ea"/>
+                <a:cs typeface="+mn-cs"/>
+              </a:rPr>
+              <a:t>Pero lo importante es que la </a:t>
+            </a:r>
+            <a:r>
+              <a:rPr lang="es-ES" sz="1200" b="0" i="1" kern="1200" dirty="0" err="1">
+                <a:solidFill>
+                  <a:schemeClr val="tx1"/>
+                </a:solidFill>
+                <a:effectLst/>
+                <a:latin typeface="+mn-lt"/>
+                <a:ea typeface="+mn-ea"/>
+                <a:cs typeface="+mn-cs"/>
+              </a:rPr>
+              <a:t>directional</a:t>
+            </a:r>
+            <a:r>
+              <a:rPr lang="es-ES" sz="1200" b="0" i="1" kern="1200" dirty="0">
+                <a:solidFill>
+                  <a:schemeClr val="tx1"/>
+                </a:solidFill>
+                <a:effectLst/>
+                <a:latin typeface="+mn-lt"/>
+                <a:ea typeface="+mn-ea"/>
+                <a:cs typeface="+mn-cs"/>
+              </a:rPr>
               <a:t> </a:t>
             </a:r>
             <a:r>
-              <a:rPr lang="en-US" dirty="0" err="1"/>
-              <a:t>fue</a:t>
-            </a:r>
-            <a:r>
-              <a:rPr lang="en-US" dirty="0"/>
-              <a:t> </a:t>
-            </a:r>
-            <a:r>
-              <a:rPr lang="en-US" dirty="0" err="1"/>
-              <a:t>el</a:t>
-            </a:r>
-            <a:r>
-              <a:rPr lang="en-US" dirty="0"/>
-              <a:t> baseline para </a:t>
-            </a:r>
-            <a:r>
-              <a:rPr lang="en-US" dirty="0" err="1"/>
-              <a:t>medir</a:t>
-            </a:r>
-            <a:r>
-              <a:rPr lang="en-US" dirty="0"/>
-              <a:t> </a:t>
-            </a:r>
-            <a:r>
-              <a:rPr lang="en-US" dirty="0" err="1"/>
-              <a:t>si</a:t>
-            </a:r>
-            <a:r>
-              <a:rPr lang="en-US" dirty="0"/>
-              <a:t> </a:t>
-            </a:r>
-            <a:r>
-              <a:rPr lang="en-US" dirty="0" err="1"/>
-              <a:t>el</a:t>
-            </a:r>
-            <a:r>
-              <a:rPr lang="en-US" dirty="0"/>
-              <a:t> </a:t>
-            </a:r>
-            <a:r>
-              <a:rPr lang="en-US" dirty="0" err="1"/>
-              <a:t>entrenamiento</a:t>
-            </a:r>
-            <a:r>
-              <a:rPr lang="en-US" dirty="0"/>
-              <a:t> </a:t>
-            </a:r>
-            <a:r>
-              <a:rPr lang="en-US" dirty="0" err="1"/>
-              <a:t>aportó</a:t>
-            </a:r>
-            <a:r>
-              <a:rPr lang="en-US" dirty="0"/>
-              <a:t> algo. </a:t>
-            </a:r>
-          </a:p>
-          <a:p>
-            <a:pPr marL="171450" indent="-171450">
-              <a:buFontTx/>
-              <a:buChar char="-"/>
-            </a:pPr>
-            <a:r>
-              <a:rPr lang="en-US" dirty="0"/>
-              <a:t>SPY/QQQ </a:t>
-            </a:r>
-            <a:r>
-              <a:rPr lang="en-US" dirty="0" err="1"/>
-              <a:t>fueron</a:t>
-            </a:r>
-            <a:r>
-              <a:rPr lang="en-US" dirty="0"/>
-              <a:t> </a:t>
-            </a:r>
-            <a:r>
-              <a:rPr lang="en-US" dirty="0" err="1"/>
-              <a:t>los</a:t>
-            </a:r>
-            <a:r>
-              <a:rPr lang="en-US" dirty="0"/>
-              <a:t> stocks </a:t>
-            </a:r>
-            <a:r>
-              <a:rPr lang="en-US" dirty="0" err="1"/>
-              <a:t>utilizados</a:t>
-            </a:r>
-            <a:r>
-              <a:rPr lang="en-US" dirty="0"/>
-              <a:t> para </a:t>
-            </a:r>
-            <a:r>
-              <a:rPr lang="en-US" dirty="0" err="1"/>
-              <a:t>hacer</a:t>
-            </a:r>
-            <a:r>
-              <a:rPr lang="en-US" dirty="0"/>
-              <a:t> </a:t>
-            </a:r>
-            <a:r>
-              <a:rPr lang="en-US" dirty="0" err="1"/>
-              <a:t>el</a:t>
-            </a:r>
-            <a:r>
-              <a:rPr lang="en-US" dirty="0"/>
-              <a:t> primer finetuning y </a:t>
-            </a:r>
-            <a:r>
-              <a:rPr lang="en-US" dirty="0" err="1"/>
-              <a:t>evaluación</a:t>
-            </a:r>
-            <a:endParaRPr lang="en-US" dirty="0"/>
-          </a:p>
-          <a:p>
-            <a:pPr marL="171450" indent="-171450">
-              <a:buFontTx/>
-              <a:buChar char="-"/>
-            </a:pPr>
-            <a:r>
-              <a:rPr lang="en-US" dirty="0"/>
-              <a:t>NVDA single sirve para ver comportamiento en un solo activo y tiene el mejor BERTScore. </a:t>
-            </a:r>
-          </a:p>
-          <a:p>
-            <a:pPr marL="171450" indent="-171450">
-              <a:buFontTx/>
-              <a:buChar char="-"/>
-            </a:pPr>
-            <a:r>
-              <a:rPr lang="en-US" dirty="0"/>
-              <a:t>NVDA + AMD es el run mas equilibrado en calidad textual y semantica. </a:t>
-            </a:r>
-          </a:p>
-          <a:p>
-            <a:pPr marL="171450" indent="-171450">
-              <a:buFontTx/>
-              <a:buChar char="-"/>
-            </a:pPr>
-            <a:r>
-              <a:rPr lang="en-US" dirty="0"/>
-              <a:t>NVDA direction features es la variante mas orientada a la </a:t>
-            </a:r>
-            <a:r>
-              <a:rPr lang="en-US" dirty="0" err="1"/>
-              <a:t>metrica</a:t>
-            </a:r>
-            <a:r>
-              <a:rPr lang="en-US" dirty="0"/>
-              <a:t> </a:t>
-            </a:r>
-            <a:r>
-              <a:rPr lang="en-US" dirty="0" err="1"/>
-              <a:t>financiera</a:t>
-            </a:r>
-            <a:endParaRPr lang="en-US" dirty="0"/>
-          </a:p>
-          <a:p>
-            <a:pPr marL="171450" indent="-171450">
-              <a:buFontTx/>
-              <a:buChar char="-"/>
-            </a:pPr>
-            <a:endParaRPr lang="en-US" dirty="0"/>
-          </a:p>
-          <a:p>
-            <a:pPr marL="0" marR="0" lvl="0" indent="0" algn="l" defTabSz="914400" rtl="0" eaLnBrk="1" fontAlgn="auto" latinLnBrk="0" hangingPunct="1">
-              <a:lnSpc>
-                <a:spcPct val="100000"/>
-              </a:lnSpc>
-              <a:spcBef>
-                <a:spcPts val="0"/>
-              </a:spcBef>
-              <a:spcAft>
-                <a:spcPts val="0"/>
-              </a:spcAft>
-              <a:buClrTx/>
-              <a:buSzTx/>
-              <a:buFontTx/>
-              <a:buNone/>
-              <a:tabLst/>
-              <a:defRPr/>
-            </a:pPr>
-            <a:r>
-              <a:rPr lang="en-US" dirty="0"/>
-              <a:t>Las </a:t>
-            </a:r>
-            <a:r>
-              <a:rPr lang="en-US" dirty="0" err="1"/>
-              <a:t>metricas</a:t>
-            </a:r>
-            <a:r>
-              <a:rPr lang="en-US" dirty="0"/>
-              <a:t> no se </a:t>
-            </a:r>
-            <a:r>
-              <a:rPr lang="en-US" dirty="0" err="1"/>
-              <a:t>mueven</a:t>
-            </a:r>
-            <a:r>
-              <a:rPr lang="en-US" dirty="0"/>
-              <a:t> juntas. </a:t>
-            </a:r>
-          </a:p>
-          <a:p>
-            <a:pPr marL="0" marR="0" lvl="0" indent="0" algn="l" defTabSz="914400" rtl="0" eaLnBrk="1" fontAlgn="auto" latinLnBrk="0" hangingPunct="1">
-              <a:lnSpc>
-                <a:spcPct val="100000"/>
-              </a:lnSpc>
-              <a:spcBef>
-                <a:spcPts val="0"/>
-              </a:spcBef>
-              <a:spcAft>
-                <a:spcPts val="0"/>
-              </a:spcAft>
-              <a:buClrTx/>
-              <a:buSzTx/>
-              <a:buFontTx/>
-              <a:buNone/>
-              <a:tabLst/>
-              <a:defRPr/>
-            </a:pPr>
-            <a:r>
-              <a:rPr lang="en-US" dirty="0"/>
-              <a:t>- GPT-2 sin fine-tuning </a:t>
-            </a:r>
-            <a:r>
-              <a:rPr lang="en-US" dirty="0" err="1"/>
-              <a:t>tiene</a:t>
-            </a:r>
-            <a:r>
-              <a:rPr lang="en-US" dirty="0"/>
-              <a:t> ROUGE-L bajo, 0.040, y sentiment match bajo, 0.273. Sin embargo </a:t>
-            </a:r>
-            <a:r>
-              <a:rPr lang="en-US" dirty="0" err="1"/>
-              <a:t>tiene</a:t>
-            </a:r>
-            <a:r>
-              <a:rPr lang="en-US" dirty="0"/>
-              <a:t> directional accuracy de 0.549 con coverage 1.0. </a:t>
-            </a:r>
-            <a:r>
-              <a:rPr lang="en-US" dirty="0" err="1"/>
-              <a:t>Esto</a:t>
-            </a:r>
-            <a:r>
-              <a:rPr lang="en-US" dirty="0"/>
-              <a:t> es </a:t>
-            </a:r>
-            <a:r>
-              <a:rPr lang="en-US" dirty="0" err="1"/>
-              <a:t>una</a:t>
-            </a:r>
-            <a:r>
-              <a:rPr lang="en-US" dirty="0"/>
-              <a:t> </a:t>
-            </a:r>
-            <a:r>
-              <a:rPr lang="en-US" dirty="0" err="1"/>
-              <a:t>alerta</a:t>
-            </a:r>
-            <a:r>
-              <a:rPr lang="en-US" dirty="0"/>
-              <a:t>: </a:t>
-            </a:r>
-            <a:r>
-              <a:rPr lang="en-US" dirty="0" err="1"/>
-              <a:t>una</a:t>
-            </a:r>
-            <a:r>
-              <a:rPr lang="en-US" dirty="0"/>
-              <a:t> </a:t>
-            </a:r>
-            <a:r>
-              <a:rPr lang="en-US" dirty="0" err="1"/>
-              <a:t>metrica</a:t>
-            </a:r>
-            <a:r>
-              <a:rPr lang="en-US" dirty="0"/>
-              <a:t> </a:t>
-            </a:r>
-            <a:r>
-              <a:rPr lang="en-US" dirty="0" err="1"/>
-              <a:t>financiera</a:t>
-            </a:r>
-            <a:r>
-              <a:rPr lang="en-US" dirty="0"/>
-              <a:t> </a:t>
-            </a:r>
-            <a:r>
-              <a:rPr lang="en-US" dirty="0" err="1"/>
-              <a:t>alta</a:t>
-            </a:r>
-            <a:r>
-              <a:rPr lang="en-US" dirty="0"/>
-              <a:t> </a:t>
-            </a:r>
-            <a:r>
-              <a:rPr lang="en-US" dirty="0" err="1"/>
-              <a:t>puede</a:t>
-            </a:r>
-            <a:r>
-              <a:rPr lang="en-US" dirty="0"/>
-              <a:t> </a:t>
-            </a:r>
-            <a:r>
-              <a:rPr lang="en-US" dirty="0" err="1"/>
-              <a:t>aparecer</a:t>
-            </a:r>
-            <a:r>
-              <a:rPr lang="en-US" dirty="0"/>
-              <a:t> </a:t>
-            </a:r>
-            <a:r>
-              <a:rPr lang="en-US" dirty="0" err="1"/>
-              <a:t>incluso</a:t>
-            </a:r>
-            <a:r>
-              <a:rPr lang="en-US" dirty="0"/>
-              <a:t> </a:t>
-            </a:r>
-            <a:r>
-              <a:rPr lang="en-US" dirty="0" err="1"/>
-              <a:t>cuando</a:t>
-            </a:r>
-            <a:r>
-              <a:rPr lang="en-US" dirty="0"/>
-              <a:t> la </a:t>
-            </a:r>
-            <a:r>
-              <a:rPr lang="en-US" dirty="0" err="1"/>
-              <a:t>calidad</a:t>
-            </a:r>
-            <a:r>
-              <a:rPr lang="en-US" dirty="0"/>
-              <a:t> </a:t>
-            </a:r>
-            <a:r>
-              <a:rPr lang="en-US" dirty="0" err="1"/>
-              <a:t>semantica</a:t>
-            </a:r>
-            <a:r>
-              <a:rPr lang="en-US" dirty="0"/>
-              <a:t> es </a:t>
-            </a:r>
-            <a:r>
-              <a:rPr lang="en-US" dirty="0" err="1"/>
-              <a:t>pobre</a:t>
-            </a:r>
-            <a:r>
-              <a:rPr lang="en-US" dirty="0"/>
-              <a:t>. El run NVDA + AMD </a:t>
-            </a:r>
-            <a:r>
-              <a:rPr lang="en-US" dirty="0" err="1"/>
-              <a:t>tiene</a:t>
-            </a:r>
-            <a:r>
-              <a:rPr lang="en-US" dirty="0"/>
-              <a:t> </a:t>
-            </a:r>
-            <a:r>
-              <a:rPr lang="en-US" dirty="0" err="1"/>
-              <a:t>mejor</a:t>
-            </a:r>
-            <a:r>
-              <a:rPr lang="en-US" dirty="0"/>
-              <a:t> </a:t>
-            </a:r>
-            <a:r>
-              <a:rPr lang="en-US" dirty="0" err="1"/>
-              <a:t>calidad</a:t>
-            </a:r>
-            <a:r>
-              <a:rPr lang="en-US" dirty="0"/>
-              <a:t> textual y </a:t>
-            </a:r>
-            <a:r>
-              <a:rPr lang="en-US" dirty="0" err="1"/>
-              <a:t>semantica</a:t>
-            </a:r>
-            <a:r>
-              <a:rPr lang="en-US" dirty="0"/>
-              <a:t>: ROUGE-L 0.074 y sentiment match 0.442, </a:t>
-            </a:r>
-            <a:r>
-              <a:rPr lang="en-US" dirty="0" err="1"/>
-              <a:t>pero</a:t>
-            </a:r>
-            <a:r>
-              <a:rPr lang="en-US" dirty="0"/>
-              <a:t> </a:t>
-            </a:r>
-            <a:r>
-              <a:rPr lang="en-US" dirty="0" err="1"/>
-              <a:t>su</a:t>
-            </a:r>
-            <a:r>
-              <a:rPr lang="en-US" dirty="0"/>
-              <a:t> directional accuracy es 0.530. El run con direction features </a:t>
-            </a:r>
-            <a:r>
-              <a:rPr lang="en-US" dirty="0" err="1"/>
-              <a:t>tiene</a:t>
-            </a:r>
-            <a:r>
-              <a:rPr lang="en-US" dirty="0"/>
-              <a:t> la </a:t>
-            </a:r>
-            <a:r>
-              <a:rPr lang="en-US" dirty="0" err="1"/>
-              <a:t>mejor</a:t>
-            </a:r>
-            <a:r>
-              <a:rPr lang="en-US" dirty="0"/>
-              <a:t> directional accuracy, 0.556, </a:t>
-            </a:r>
-            <a:r>
-              <a:rPr lang="en-US" dirty="0" err="1"/>
-              <a:t>pero</a:t>
-            </a:r>
-            <a:r>
-              <a:rPr lang="en-US" dirty="0"/>
-              <a:t> </a:t>
-            </a:r>
-            <a:r>
-              <a:rPr lang="en-US" dirty="0" err="1"/>
-              <a:t>tampoco</a:t>
-            </a:r>
-            <a:r>
-              <a:rPr lang="en-US" dirty="0"/>
-              <a:t> </a:t>
-            </a:r>
-            <a:r>
-              <a:rPr lang="en-US" dirty="0" err="1"/>
-              <a:t>alcanza</a:t>
-            </a:r>
-            <a:r>
-              <a:rPr lang="en-US" dirty="0"/>
-              <a:t> </a:t>
-            </a:r>
-            <a:r>
-              <a:rPr lang="en-US" dirty="0" err="1"/>
-              <a:t>significancia</a:t>
-            </a:r>
-            <a:r>
-              <a:rPr lang="en-US" dirty="0"/>
-              <a:t>.</a:t>
-            </a:r>
-          </a:p>
-          <a:p>
-            <a:pPr marL="0" indent="0">
-              <a:buFontTx/>
-              <a:buNone/>
-            </a:pPr>
-            <a:endParaRPr lang="en-US" dirty="0"/>
+              <a:rPr lang="es-ES" sz="1200" b="0" i="1" kern="1200" dirty="0" err="1">
+                <a:solidFill>
+                  <a:schemeClr val="tx1"/>
+                </a:solidFill>
+                <a:effectLst/>
+                <a:latin typeface="+mn-lt"/>
+                <a:ea typeface="+mn-ea"/>
+                <a:cs typeface="+mn-cs"/>
+              </a:rPr>
+              <a:t>accuracy</a:t>
+            </a:r>
+            <a:r>
+              <a:rPr lang="es-ES" sz="1200" b="0" i="1" kern="1200" dirty="0">
+                <a:solidFill>
+                  <a:schemeClr val="tx1"/>
+                </a:solidFill>
+                <a:effectLst/>
+                <a:latin typeface="+mn-lt"/>
+                <a:ea typeface="+mn-ea"/>
+                <a:cs typeface="+mn-cs"/>
+              </a:rPr>
+              <a:t> no sigue necesariamente esa mejora. GPT-2 base tiene 0.549, incluso con peor calidad semántica. Entonces esta métrica financiera hay que tomarla con cuidado: puede capturar sesgos del </a:t>
+            </a:r>
+            <a:r>
+              <a:rPr lang="es-ES" sz="1200" b="0" i="1" kern="1200" dirty="0" err="1">
+                <a:solidFill>
+                  <a:schemeClr val="tx1"/>
+                </a:solidFill>
+                <a:effectLst/>
+                <a:latin typeface="+mn-lt"/>
+                <a:ea typeface="+mn-ea"/>
+                <a:cs typeface="+mn-cs"/>
+              </a:rPr>
+              <a:t>dataset</a:t>
+            </a:r>
+            <a:r>
+              <a:rPr lang="es-ES" sz="1200" b="0" i="1" kern="1200" dirty="0">
+                <a:solidFill>
+                  <a:schemeClr val="tx1"/>
+                </a:solidFill>
+                <a:effectLst/>
+                <a:latin typeface="+mn-lt"/>
+                <a:ea typeface="+mn-ea"/>
+                <a:cs typeface="+mn-cs"/>
+              </a:rPr>
+              <a:t> o de la regla de etiquetado, no necesariamente comprensión financiera.</a:t>
+            </a:r>
+          </a:p>
+          <a:p>
+            <a:r>
+              <a:rPr lang="es-ES" sz="1200" b="0" i="1" kern="1200" dirty="0">
+                <a:solidFill>
+                  <a:schemeClr val="tx1"/>
+                </a:solidFill>
+                <a:effectLst/>
+                <a:latin typeface="+mn-lt"/>
+                <a:ea typeface="+mn-ea"/>
+                <a:cs typeface="+mn-cs"/>
+              </a:rPr>
+              <a:t>La conclusión de esta </a:t>
+            </a:r>
+            <a:r>
+              <a:rPr lang="es-ES" sz="1200" b="0" i="1" kern="1200" dirty="0" err="1">
+                <a:solidFill>
+                  <a:schemeClr val="tx1"/>
+                </a:solidFill>
+                <a:effectLst/>
+                <a:latin typeface="+mn-lt"/>
+                <a:ea typeface="+mn-ea"/>
+                <a:cs typeface="+mn-cs"/>
+              </a:rPr>
+              <a:t>slide</a:t>
+            </a:r>
+            <a:r>
+              <a:rPr lang="es-ES" sz="1200" b="0" i="1" kern="1200" dirty="0">
+                <a:solidFill>
+                  <a:schemeClr val="tx1"/>
+                </a:solidFill>
+                <a:effectLst/>
+                <a:latin typeface="+mn-lt"/>
+                <a:ea typeface="+mn-ea"/>
+                <a:cs typeface="+mn-cs"/>
+              </a:rPr>
+              <a:t> es: el fine-</a:t>
+            </a:r>
+            <a:r>
+              <a:rPr lang="es-ES" sz="1200" b="0" i="1" kern="1200" dirty="0" err="1">
+                <a:solidFill>
+                  <a:schemeClr val="tx1"/>
+                </a:solidFill>
+                <a:effectLst/>
+                <a:latin typeface="+mn-lt"/>
+                <a:ea typeface="+mn-ea"/>
+                <a:cs typeface="+mn-cs"/>
+              </a:rPr>
+              <a:t>tuning</a:t>
+            </a:r>
+            <a:r>
+              <a:rPr lang="es-ES" sz="1200" b="0" i="1" kern="1200" dirty="0">
+                <a:solidFill>
+                  <a:schemeClr val="tx1"/>
+                </a:solidFill>
+                <a:effectLst/>
+                <a:latin typeface="+mn-lt"/>
+                <a:ea typeface="+mn-ea"/>
+                <a:cs typeface="+mn-cs"/>
+              </a:rPr>
+              <a:t> mejora la adaptación al dominio, pero no alcanza para afirmar capacidad predictiva.</a:t>
+            </a:r>
           </a:p>
         </p:txBody>
       </p:sp>
@@ -3542,28 +3851,432 @@
           <a:lstStyle/>
           <a:p>
             <a:r>
-              <a:rPr lang="en-US" dirty="0"/>
-              <a:t>- Las curvas de loss muestran que hubo fine-tuning real: modelo ajusta la tarea de language modeling sobre el corpus financiero. </a:t>
-            </a:r>
-          </a:p>
-          <a:p>
-            <a:pPr marL="171450" indent="-171450">
-              <a:buFontTx/>
-              <a:buChar char="-"/>
-            </a:pPr>
-            <a:r>
-              <a:rPr lang="en-US" dirty="0"/>
-              <a:t>Tambien calculi perplexity como exponencial de la eval loss. Es una metrica clasica: menor perplexity significa que el modelo asigna mas probabilidad al texto de validacion. </a:t>
-            </a:r>
-          </a:p>
-          <a:p>
-            <a:pPr marL="171450" indent="-171450">
-              <a:buFontTx/>
-              <a:buChar char="-"/>
-            </a:pPr>
-            <a:r>
-              <a:rPr lang="en-US" dirty="0"/>
-              <a:t>Pero hay un hallazgo importante: el mejor valor de perplexity no coincide necesariamente con el mejor resultado financiero. Esto separa aprender a modelar texto de producir una senal util.</a:t>
+              <a:rPr lang="es-ES" sz="1200" b="0" i="1" kern="1200" dirty="0">
+                <a:solidFill>
+                  <a:schemeClr val="tx1"/>
+                </a:solidFill>
+                <a:effectLst/>
+                <a:latin typeface="+mn-lt"/>
+                <a:ea typeface="+mn-ea"/>
+                <a:cs typeface="+mn-cs"/>
+              </a:rPr>
+              <a:t>Esta </a:t>
+            </a:r>
+            <a:r>
+              <a:rPr lang="es-ES" sz="1200" b="0" i="1" kern="1200" dirty="0" err="1">
+                <a:solidFill>
+                  <a:schemeClr val="tx1"/>
+                </a:solidFill>
+                <a:effectLst/>
+                <a:latin typeface="+mn-lt"/>
+                <a:ea typeface="+mn-ea"/>
+                <a:cs typeface="+mn-cs"/>
+              </a:rPr>
+              <a:t>slide</a:t>
+            </a:r>
+            <a:r>
+              <a:rPr lang="es-ES" sz="1200" b="0" i="1" kern="1200" dirty="0">
+                <a:solidFill>
+                  <a:schemeClr val="tx1"/>
+                </a:solidFill>
+                <a:effectLst/>
+                <a:latin typeface="+mn-lt"/>
+                <a:ea typeface="+mn-ea"/>
+                <a:cs typeface="+mn-cs"/>
+              </a:rPr>
+              <a:t> separa dos ideas que suelen confundirse. La </a:t>
+            </a:r>
+            <a:r>
+              <a:rPr lang="es-ES" sz="1200" b="0" i="1" kern="1200" dirty="0" err="1">
+                <a:solidFill>
+                  <a:schemeClr val="tx1"/>
+                </a:solidFill>
+                <a:effectLst/>
+                <a:latin typeface="+mn-lt"/>
+                <a:ea typeface="+mn-ea"/>
+                <a:cs typeface="+mn-cs"/>
+              </a:rPr>
+              <a:t>loss</a:t>
+            </a:r>
+            <a:r>
+              <a:rPr lang="es-ES" sz="1200" b="0" i="1" kern="1200" dirty="0">
+                <a:solidFill>
+                  <a:schemeClr val="tx1"/>
+                </a:solidFill>
+                <a:effectLst/>
+                <a:latin typeface="+mn-lt"/>
+                <a:ea typeface="+mn-ea"/>
+                <a:cs typeface="+mn-cs"/>
+              </a:rPr>
+              <a:t> y la </a:t>
+            </a:r>
+            <a:r>
+              <a:rPr lang="es-ES" sz="1200" b="0" i="1" kern="1200" dirty="0" err="1">
+                <a:solidFill>
+                  <a:schemeClr val="tx1"/>
+                </a:solidFill>
+                <a:effectLst/>
+                <a:latin typeface="+mn-lt"/>
+                <a:ea typeface="+mn-ea"/>
+                <a:cs typeface="+mn-cs"/>
+              </a:rPr>
+              <a:t>perplexity</a:t>
+            </a:r>
+            <a:r>
+              <a:rPr lang="es-ES" sz="1200" b="0" i="1" kern="1200" dirty="0">
+                <a:solidFill>
+                  <a:schemeClr val="tx1"/>
+                </a:solidFill>
+                <a:effectLst/>
+                <a:latin typeface="+mn-lt"/>
+                <a:ea typeface="+mn-ea"/>
+                <a:cs typeface="+mn-cs"/>
+              </a:rPr>
+              <a:t> sirven para ver si el modelo aprendió el objetivo de entrenamiento.</a:t>
+            </a:r>
+          </a:p>
+          <a:p>
+            <a:r>
+              <a:rPr lang="es-ES" sz="1200" b="0" i="1" kern="1200" dirty="0">
+                <a:solidFill>
+                  <a:schemeClr val="tx1"/>
+                </a:solidFill>
+                <a:effectLst/>
+                <a:latin typeface="+mn-lt"/>
+                <a:ea typeface="+mn-ea"/>
+                <a:cs typeface="+mn-cs"/>
+              </a:rPr>
+              <a:t>En las curvas se ve que, dentro de cada experimento, tanto la training </a:t>
+            </a:r>
+            <a:r>
+              <a:rPr lang="es-ES" sz="1200" b="0" i="1" kern="1200" dirty="0" err="1">
+                <a:solidFill>
+                  <a:schemeClr val="tx1"/>
+                </a:solidFill>
+                <a:effectLst/>
+                <a:latin typeface="+mn-lt"/>
+                <a:ea typeface="+mn-ea"/>
+                <a:cs typeface="+mn-cs"/>
+              </a:rPr>
+              <a:t>loss</a:t>
+            </a:r>
+            <a:r>
+              <a:rPr lang="es-ES" sz="1200" b="0" i="1" kern="1200" dirty="0">
+                <a:solidFill>
+                  <a:schemeClr val="tx1"/>
+                </a:solidFill>
+                <a:effectLst/>
+                <a:latin typeface="+mn-lt"/>
+                <a:ea typeface="+mn-ea"/>
+                <a:cs typeface="+mn-cs"/>
+              </a:rPr>
+              <a:t> como la </a:t>
+            </a:r>
+            <a:r>
+              <a:rPr lang="es-ES" sz="1200" b="0" i="1" kern="1200" dirty="0" err="1">
+                <a:solidFill>
+                  <a:schemeClr val="tx1"/>
+                </a:solidFill>
+                <a:effectLst/>
+                <a:latin typeface="+mn-lt"/>
+                <a:ea typeface="+mn-ea"/>
+                <a:cs typeface="+mn-cs"/>
+              </a:rPr>
+              <a:t>validation</a:t>
+            </a:r>
+            <a:r>
+              <a:rPr lang="es-ES" sz="1200" b="0" i="1" kern="1200" dirty="0">
+                <a:solidFill>
+                  <a:schemeClr val="tx1"/>
+                </a:solidFill>
+                <a:effectLst/>
+                <a:latin typeface="+mn-lt"/>
+                <a:ea typeface="+mn-ea"/>
+                <a:cs typeface="+mn-cs"/>
+              </a:rPr>
+              <a:t> </a:t>
+            </a:r>
+            <a:r>
+              <a:rPr lang="es-ES" sz="1200" b="0" i="1" kern="1200" dirty="0" err="1">
+                <a:solidFill>
+                  <a:schemeClr val="tx1"/>
+                </a:solidFill>
+                <a:effectLst/>
+                <a:latin typeface="+mn-lt"/>
+                <a:ea typeface="+mn-ea"/>
+                <a:cs typeface="+mn-cs"/>
+              </a:rPr>
+              <a:t>loss</a:t>
+            </a:r>
+            <a:r>
+              <a:rPr lang="es-ES" sz="1200" b="0" i="1" kern="1200" dirty="0">
+                <a:solidFill>
+                  <a:schemeClr val="tx1"/>
+                </a:solidFill>
+                <a:effectLst/>
+                <a:latin typeface="+mn-lt"/>
+                <a:ea typeface="+mn-ea"/>
+                <a:cs typeface="+mn-cs"/>
+              </a:rPr>
+              <a:t> bajan. Eso indica que el fine-</a:t>
+            </a:r>
+            <a:r>
+              <a:rPr lang="es-ES" sz="1200" b="0" i="1" kern="1200" dirty="0" err="1">
+                <a:solidFill>
+                  <a:schemeClr val="tx1"/>
+                </a:solidFill>
+                <a:effectLst/>
+                <a:latin typeface="+mn-lt"/>
+                <a:ea typeface="+mn-ea"/>
+                <a:cs typeface="+mn-cs"/>
+              </a:rPr>
+              <a:t>tuning</a:t>
+            </a:r>
+            <a:r>
+              <a:rPr lang="es-ES" sz="1200" b="0" i="1" kern="1200" dirty="0">
+                <a:solidFill>
+                  <a:schemeClr val="tx1"/>
+                </a:solidFill>
+                <a:effectLst/>
+                <a:latin typeface="+mn-lt"/>
+                <a:ea typeface="+mn-ea"/>
+                <a:cs typeface="+mn-cs"/>
+              </a:rPr>
+              <a:t> efectivamente está ajustando GPT-2 al corpus y al formato del target.</a:t>
+            </a:r>
+          </a:p>
+          <a:p>
+            <a:r>
+              <a:rPr lang="es-ES" sz="1200" b="0" i="1" kern="1200" dirty="0">
+                <a:solidFill>
+                  <a:schemeClr val="tx1"/>
+                </a:solidFill>
+                <a:effectLst/>
+                <a:latin typeface="+mn-lt"/>
+                <a:ea typeface="+mn-ea"/>
+                <a:cs typeface="+mn-cs"/>
+              </a:rPr>
+              <a:t>Pero entre </a:t>
+            </a:r>
+            <a:r>
+              <a:rPr lang="es-ES" sz="1200" b="0" i="1" kern="1200" dirty="0" err="1">
+                <a:solidFill>
+                  <a:schemeClr val="tx1"/>
+                </a:solidFill>
+                <a:effectLst/>
+                <a:latin typeface="+mn-lt"/>
+                <a:ea typeface="+mn-ea"/>
+                <a:cs typeface="+mn-cs"/>
+              </a:rPr>
+              <a:t>runs</a:t>
+            </a:r>
+            <a:r>
+              <a:rPr lang="es-ES" sz="1200" b="0" i="1" kern="1200" dirty="0">
+                <a:solidFill>
+                  <a:schemeClr val="tx1"/>
+                </a:solidFill>
+                <a:effectLst/>
+                <a:latin typeface="+mn-lt"/>
+                <a:ea typeface="+mn-ea"/>
+                <a:cs typeface="+mn-cs"/>
+              </a:rPr>
+              <a:t> hay que tener cuidado: no todos tienen exactamente el mismo target. Algunos targets son más estructurados o más regulares, y por eso pueden ser más fáciles de predecir.</a:t>
+            </a:r>
+          </a:p>
+          <a:p>
+            <a:r>
+              <a:rPr lang="es-ES" sz="1200" b="0" i="1" kern="1200" dirty="0">
+                <a:solidFill>
+                  <a:schemeClr val="tx1"/>
+                </a:solidFill>
+                <a:effectLst/>
+                <a:latin typeface="+mn-lt"/>
+                <a:ea typeface="+mn-ea"/>
+                <a:cs typeface="+mn-cs"/>
+              </a:rPr>
+              <a:t>Por ejemplo, una variante estructurada tenía una </a:t>
+            </a:r>
+            <a:r>
+              <a:rPr lang="es-ES" sz="1200" b="0" i="1" kern="1200" dirty="0" err="1">
+                <a:solidFill>
+                  <a:schemeClr val="tx1"/>
+                </a:solidFill>
+                <a:effectLst/>
+                <a:latin typeface="+mn-lt"/>
+                <a:ea typeface="+mn-ea"/>
+                <a:cs typeface="+mn-cs"/>
+              </a:rPr>
+              <a:t>perplexity</a:t>
+            </a:r>
+            <a:r>
+              <a:rPr lang="es-ES" sz="1200" b="0" i="1" kern="1200" dirty="0">
+                <a:solidFill>
+                  <a:schemeClr val="tx1"/>
+                </a:solidFill>
+                <a:effectLst/>
+                <a:latin typeface="+mn-lt"/>
+                <a:ea typeface="+mn-ea"/>
+                <a:cs typeface="+mn-cs"/>
+              </a:rPr>
+              <a:t> más baja, alrededor de 9.7, pero no fue la mejor en ROUGE-L ni en </a:t>
+            </a:r>
+            <a:r>
+              <a:rPr lang="es-ES" sz="1200" b="0" i="1" kern="1200" dirty="0" err="1">
+                <a:solidFill>
+                  <a:schemeClr val="tx1"/>
+                </a:solidFill>
+                <a:effectLst/>
+                <a:latin typeface="+mn-lt"/>
+                <a:ea typeface="+mn-ea"/>
+                <a:cs typeface="+mn-cs"/>
+              </a:rPr>
+              <a:t>BERTScore</a:t>
+            </a:r>
+            <a:r>
+              <a:rPr lang="es-ES" sz="1200" b="0" i="1" kern="1200" dirty="0">
+                <a:solidFill>
+                  <a:schemeClr val="tx1"/>
+                </a:solidFill>
+                <a:effectLst/>
+                <a:latin typeface="+mn-lt"/>
+                <a:ea typeface="+mn-ea"/>
+                <a:cs typeface="+mn-cs"/>
+              </a:rPr>
+              <a:t>. Entonces menor </a:t>
+            </a:r>
+            <a:r>
+              <a:rPr lang="es-ES" sz="1200" b="0" i="1" kern="1200" dirty="0" err="1">
+                <a:solidFill>
+                  <a:schemeClr val="tx1"/>
+                </a:solidFill>
+                <a:effectLst/>
+                <a:latin typeface="+mn-lt"/>
+                <a:ea typeface="+mn-ea"/>
+                <a:cs typeface="+mn-cs"/>
+              </a:rPr>
+              <a:t>perplexity</a:t>
+            </a:r>
+            <a:r>
+              <a:rPr lang="es-ES" sz="1200" b="0" i="1" kern="1200" dirty="0">
+                <a:solidFill>
+                  <a:schemeClr val="tx1"/>
+                </a:solidFill>
+                <a:effectLst/>
+                <a:latin typeface="+mn-lt"/>
+                <a:ea typeface="+mn-ea"/>
+                <a:cs typeface="+mn-cs"/>
+              </a:rPr>
+              <a:t> no significa automáticamente mejor narrativa ni mejor señal financiera.</a:t>
+            </a:r>
+          </a:p>
+          <a:p>
+            <a:r>
+              <a:rPr lang="es-ES" sz="1200" b="0" i="1" kern="1200" dirty="0">
+                <a:solidFill>
+                  <a:schemeClr val="tx1"/>
+                </a:solidFill>
+                <a:effectLst/>
+                <a:latin typeface="+mn-lt"/>
+                <a:ea typeface="+mn-ea"/>
+                <a:cs typeface="+mn-cs"/>
+              </a:rPr>
+              <a:t>La conclusión es: la </a:t>
+            </a:r>
+            <a:r>
+              <a:rPr lang="es-ES" sz="1200" b="0" i="1" kern="1200" dirty="0" err="1">
+                <a:solidFill>
+                  <a:schemeClr val="tx1"/>
+                </a:solidFill>
+                <a:effectLst/>
+                <a:latin typeface="+mn-lt"/>
+                <a:ea typeface="+mn-ea"/>
+                <a:cs typeface="+mn-cs"/>
+              </a:rPr>
+              <a:t>loss</a:t>
+            </a:r>
+            <a:r>
+              <a:rPr lang="es-ES" sz="1200" b="0" i="1" kern="1200" dirty="0">
+                <a:solidFill>
+                  <a:schemeClr val="tx1"/>
+                </a:solidFill>
+                <a:effectLst/>
+                <a:latin typeface="+mn-lt"/>
+                <a:ea typeface="+mn-ea"/>
+                <a:cs typeface="+mn-cs"/>
+              </a:rPr>
+              <a:t> confirma aprendizaje, pero la calidad final hay que evaluarla con métricas externas: ROUGE, </a:t>
+            </a:r>
+            <a:r>
+              <a:rPr lang="es-ES" sz="1200" b="0" i="1" kern="1200" dirty="0" err="1">
+                <a:solidFill>
+                  <a:schemeClr val="tx1"/>
+                </a:solidFill>
+                <a:effectLst/>
+                <a:latin typeface="+mn-lt"/>
+                <a:ea typeface="+mn-ea"/>
+                <a:cs typeface="+mn-cs"/>
+              </a:rPr>
+              <a:t>BERTScore</a:t>
+            </a:r>
+            <a:r>
+              <a:rPr lang="es-ES" sz="1200" b="0" i="1" kern="1200" dirty="0">
+                <a:solidFill>
+                  <a:schemeClr val="tx1"/>
+                </a:solidFill>
+                <a:effectLst/>
+                <a:latin typeface="+mn-lt"/>
+                <a:ea typeface="+mn-ea"/>
+                <a:cs typeface="+mn-cs"/>
+              </a:rPr>
+              <a:t>, sentimiento y </a:t>
+            </a:r>
+            <a:r>
+              <a:rPr lang="es-ES" sz="1200" b="0" i="1" kern="1200" dirty="0" err="1">
+                <a:solidFill>
+                  <a:schemeClr val="tx1"/>
+                </a:solidFill>
+                <a:effectLst/>
+                <a:latin typeface="+mn-lt"/>
+                <a:ea typeface="+mn-ea"/>
+                <a:cs typeface="+mn-cs"/>
+              </a:rPr>
+              <a:t>directional</a:t>
+            </a:r>
+            <a:r>
+              <a:rPr lang="es-ES" sz="1200" b="0" i="1" kern="1200" dirty="0">
+                <a:solidFill>
+                  <a:schemeClr val="tx1"/>
+                </a:solidFill>
+                <a:effectLst/>
+                <a:latin typeface="+mn-lt"/>
+                <a:ea typeface="+mn-ea"/>
+                <a:cs typeface="+mn-cs"/>
+              </a:rPr>
+              <a:t> </a:t>
+            </a:r>
+            <a:r>
+              <a:rPr lang="es-ES" sz="1200" b="0" i="1" kern="1200" dirty="0" err="1">
+                <a:solidFill>
+                  <a:schemeClr val="tx1"/>
+                </a:solidFill>
+                <a:effectLst/>
+                <a:latin typeface="+mn-lt"/>
+                <a:ea typeface="+mn-ea"/>
+                <a:cs typeface="+mn-cs"/>
+              </a:rPr>
+              <a:t>accuracy</a:t>
+            </a:r>
+            <a:r>
+              <a:rPr lang="es-ES" sz="1200" b="0" i="1" kern="1200" dirty="0">
+                <a:solidFill>
+                  <a:schemeClr val="tx1"/>
+                </a:solidFill>
+                <a:effectLst/>
+                <a:latin typeface="+mn-lt"/>
+                <a:ea typeface="+mn-ea"/>
+                <a:cs typeface="+mn-cs"/>
+              </a:rPr>
+              <a:t>.</a:t>
             </a:r>
           </a:p>
         </p:txBody>
@@ -3965,6 +4678,13 @@
             <a:prstDash val="solid"/>
           </a:ln>
         </p:spPr>
+        <p:txBody>
+          <a:bodyPr/>
+          <a:lstStyle/>
+          <a:p>
+            <a:endParaRPr lang="es-AR"/>
+          </a:p>
+        </p:txBody>
       </p:sp>
       <p:sp>
         <p:nvSpPr>
@@ -3992,6 +4712,13 @@
             <a:prstDash val="solid"/>
           </a:ln>
         </p:spPr>
+        <p:txBody>
+          <a:bodyPr/>
+          <a:lstStyle/>
+          <a:p>
+            <a:endParaRPr lang="es-AR"/>
+          </a:p>
+        </p:txBody>
       </p:sp>
       <p:sp>
         <p:nvSpPr>
@@ -4019,6 +4746,13 @@
             <a:prstDash val="solid"/>
           </a:ln>
         </p:spPr>
+        <p:txBody>
+          <a:bodyPr/>
+          <a:lstStyle/>
+          <a:p>
+            <a:endParaRPr lang="es-AR"/>
+          </a:p>
+        </p:txBody>
       </p:sp>
       <p:sp>
         <p:nvSpPr>
@@ -4046,6 +4780,13 @@
             <a:prstDash val="solid"/>
           </a:ln>
         </p:spPr>
+        <p:txBody>
+          <a:bodyPr/>
+          <a:lstStyle/>
+          <a:p>
+            <a:endParaRPr lang="es-AR"/>
+          </a:p>
+        </p:txBody>
       </p:sp>
       <p:sp>
         <p:nvSpPr>
@@ -4073,6 +4814,13 @@
             <a:prstDash val="solid"/>
           </a:ln>
         </p:spPr>
+        <p:txBody>
+          <a:bodyPr/>
+          <a:lstStyle/>
+          <a:p>
+            <a:endParaRPr lang="es-AR"/>
+          </a:p>
+        </p:txBody>
       </p:sp>
       <p:sp>
         <p:nvSpPr>
@@ -4100,6 +4848,13 @@
             <a:prstDash val="solid"/>
           </a:ln>
         </p:spPr>
+        <p:txBody>
+          <a:bodyPr/>
+          <a:lstStyle/>
+          <a:p>
+            <a:endParaRPr lang="es-AR"/>
+          </a:p>
+        </p:txBody>
       </p:sp>
       <p:sp>
         <p:nvSpPr>
@@ -4276,6 +5031,13 @@
             <a:prstDash val="solid"/>
           </a:ln>
         </p:spPr>
+        <p:txBody>
+          <a:bodyPr/>
+          <a:lstStyle/>
+          <a:p>
+            <a:endParaRPr lang="es-AR"/>
+          </a:p>
+        </p:txBody>
       </p:sp>
       <p:sp>
         <p:nvSpPr>
@@ -4329,15 +5091,7 @@
 
 <file path=ppt/slides/slide10.xml><?xml version="1.0" encoding="utf-8"?>
 <p:sld xmlns:a="http://schemas.openxmlformats.org/drawingml/2006/main" xmlns:r="http://schemas.openxmlformats.org/officeDocument/2006/relationships" xmlns:p="http://schemas.openxmlformats.org/presentationml/2006/main">
-  <p:cSld name="Slide 10">
-    <p:bg>
-      <p:bgPr>
-        <a:solidFill>
-          <a:srgbClr val="FFFFFF"/>
-        </a:solidFill>
-        <a:effectLst/>
-      </p:bgPr>
-    </p:bg>
+  <p:cSld>
     <p:spTree>
       <p:nvGrpSpPr>
         <p:cNvPr id="1" name=""/>
@@ -4385,7 +5139,7 @@
                 <a:ea typeface="Georgia" pitchFamily="34" charset="-122"/>
                 <a:cs typeface="Arial" panose="020B0604020202020204" pitchFamily="34" charset="0"/>
               </a:rPr>
-              <a:t>Matrices de confusión</a:t>
+              <a:t>Semántica y señal direccional</a:t>
             </a:r>
             <a:endParaRPr lang="en-US" sz="2800" dirty="0">
               <a:latin typeface="Arial" panose="020B0604020202020204" pitchFamily="34" charset="0"/>
@@ -4469,7 +5223,7 @@
                 <a:ea typeface="Calibri" pitchFamily="34" charset="-122"/>
                 <a:cs typeface="Arial" panose="020B0604020202020204" pitchFamily="34" charset="0"/>
               </a:rPr>
-              <a:t>Sentimiento real vs. generado (FinBERT) y señal direccional vs. dirección real del activo.</a:t>
+              <a:t>Sentimiento real vs. generado y señal direccional vs. dirección real del activo.</a:t>
             </a:r>
             <a:endParaRPr lang="en-US" sz="1200" dirty="0">
               <a:latin typeface="Arial" panose="020B0604020202020204" pitchFamily="34" charset="0"/>
@@ -4509,6 +5263,16 @@
             </a:outerShdw>
           </a:effectLst>
         </p:spPr>
+        <p:txBody>
+          <a:bodyPr/>
+          <a:lstStyle/>
+          <a:p>
+            <a:endParaRPr lang="es-AR">
+              <a:latin typeface="Arial" panose="020B0604020202020204" pitchFamily="34" charset="0"/>
+              <a:cs typeface="Arial" panose="020B0604020202020204" pitchFamily="34" charset="0"/>
+            </a:endParaRPr>
+          </a:p>
+        </p:txBody>
       </p:sp>
       <p:sp>
         <p:nvSpPr>
@@ -4543,7 +5307,7 @@
                 <a:ea typeface="Calibri" pitchFamily="34" charset="-122"/>
                 <a:cs typeface="Arial" panose="020B0604020202020204" pitchFamily="34" charset="0"/>
               </a:rPr>
-              <a:t>Semántica · GPT-2 base</a:t>
+              <a:t>Semántica · GPT-2 no fine-tune</a:t>
             </a:r>
             <a:endParaRPr lang="en-US" sz="1100" dirty="0">
               <a:latin typeface="Arial" panose="020B0604020202020204" pitchFamily="34" charset="0"/>
@@ -4612,7 +5376,7 @@
                 <a:ea typeface="Calibri" pitchFamily="34" charset="-122"/>
                 <a:cs typeface="Arial" panose="020B0604020202020204" pitchFamily="34" charset="0"/>
               </a:rPr>
-              <a:t>Match de sentimiento bajo: dispersión fuera de la diagonal.</a:t>
+              <a:t>Sentiment match = 0.273. Dispersión fuera de la diagonal.</a:t>
             </a:r>
             <a:endParaRPr lang="en-US" sz="870" dirty="0">
               <a:latin typeface="Arial" panose="020B0604020202020204" pitchFamily="34" charset="0"/>
@@ -4652,6 +5416,16 @@
             </a:outerShdw>
           </a:effectLst>
         </p:spPr>
+        <p:txBody>
+          <a:bodyPr/>
+          <a:lstStyle/>
+          <a:p>
+            <a:endParaRPr lang="es-AR">
+              <a:latin typeface="Arial" panose="020B0604020202020204" pitchFamily="34" charset="0"/>
+              <a:cs typeface="Arial" panose="020B0604020202020204" pitchFamily="34" charset="0"/>
+            </a:endParaRPr>
+          </a:p>
+        </p:txBody>
       </p:sp>
       <p:sp>
         <p:nvSpPr>
@@ -4755,7 +5529,7 @@
                 <a:ea typeface="Calibri" pitchFamily="34" charset="-122"/>
                 <a:cs typeface="Arial" panose="020B0604020202020204" pitchFamily="34" charset="0"/>
               </a:rPr>
-              <a:t>El fine-tuning mejora, pero no supera el baseline neutral.</a:t>
+              <a:t>Sentiment match = 0.442. El fine-tuning mejora la alineación semántica.</a:t>
             </a:r>
             <a:endParaRPr lang="en-US" sz="870" dirty="0">
               <a:latin typeface="Arial" panose="020B0604020202020204" pitchFamily="34" charset="0"/>
@@ -4795,6 +5569,16 @@
             </a:outerShdw>
           </a:effectLst>
         </p:spPr>
+        <p:txBody>
+          <a:bodyPr/>
+          <a:lstStyle/>
+          <a:p>
+            <a:endParaRPr lang="es-AR">
+              <a:latin typeface="Arial" panose="020B0604020202020204" pitchFamily="34" charset="0"/>
+              <a:cs typeface="Arial" panose="020B0604020202020204" pitchFamily="34" charset="0"/>
+            </a:endParaRPr>
+          </a:p>
+        </p:txBody>
       </p:sp>
       <p:sp>
         <p:nvSpPr>
@@ -4829,7 +5613,7 @@
                 <a:ea typeface="Calibri" pitchFamily="34" charset="-122"/>
                 <a:cs typeface="Arial" panose="020B0604020202020204" pitchFamily="34" charset="0"/>
               </a:rPr>
-              <a:t>Financiera · direction features</a:t>
+              <a:t>Financiera · NVDA + AMD</a:t>
             </a:r>
             <a:endParaRPr lang="en-US" sz="1100" dirty="0">
               <a:latin typeface="Arial" panose="020B0604020202020204" pitchFamily="34" charset="0"/>
@@ -4898,7 +5682,7 @@
                 <a:ea typeface="Calibri" pitchFamily="34" charset="-122"/>
                 <a:cs typeface="Arial" panose="020B0604020202020204" pitchFamily="34" charset="0"/>
               </a:rPr>
-              <a:t>Dir. acc. 0.556 y coverage total, pero p ≈ 0.225.</a:t>
+              <a:t>Dir. acc. 0.530 con coverage 0.361 y p ≈ 0.579.</a:t>
             </a:r>
             <a:endParaRPr lang="en-US" sz="870" dirty="0">
               <a:latin typeface="Arial" panose="020B0604020202020204" pitchFamily="34" charset="0"/>
@@ -4938,31 +5722,17 @@
             </a:outerShdw>
           </a:effectLst>
         </p:spPr>
-      </p:sp>
-      <p:pic>
-        <p:nvPicPr>
-          <p:cNvPr id="19" name="Image 3" descr="icon_search.png"/>
-          <p:cNvPicPr>
-            <a:picLocks noChangeAspect="1"/>
-          </p:cNvPicPr>
-          <p:nvPr/>
-        </p:nvPicPr>
-        <p:blipFill>
-          <a:blip r:embed="rId6"/>
-          <a:stretch>
-            <a:fillRect/>
-          </a:stretch>
-        </p:blipFill>
-        <p:spPr>
-          <a:xfrm>
-            <a:off x="914400" y="5468112"/>
-            <a:ext cx="329184" cy="329184"/>
-          </a:xfrm>
-          <a:prstGeom prst="rect">
-            <a:avLst/>
-          </a:prstGeom>
-        </p:spPr>
-      </p:pic>
+        <p:txBody>
+          <a:bodyPr/>
+          <a:lstStyle/>
+          <a:p>
+            <a:endParaRPr lang="es-AR">
+              <a:latin typeface="Arial" panose="020B0604020202020204" pitchFamily="34" charset="0"/>
+              <a:cs typeface="Arial" panose="020B0604020202020204" pitchFamily="34" charset="0"/>
+            </a:endParaRPr>
+          </a:p>
+        </p:txBody>
+      </p:sp>
       <p:sp>
         <p:nvSpPr>
           <p:cNvPr id="20" name="Text 14"/>
@@ -4971,8 +5741,8 @@
         </p:nvSpPr>
         <p:spPr>
           <a:xfrm>
-            <a:off x="1389888" y="5285232"/>
-            <a:ext cx="9966960" cy="713232"/>
+            <a:off x="992378" y="5301742"/>
+            <a:ext cx="10510774" cy="713232"/>
           </a:xfrm>
           <a:prstGeom prst="rect">
             <a:avLst/>
@@ -5010,7 +5780,7 @@
                 <a:ea typeface="Calibri" pitchFamily="34" charset="-122"/>
                 <a:cs typeface="Arial" panose="020B0604020202020204" pitchFamily="34" charset="0"/>
               </a:rPr>
-              <a:t>el modelo genera lenguaje financiero pero controla mal el tono; y la matriz financiera, aun con coverage total, no aporta evidencia estadística fuerte.</a:t>
+              <a:t>el fine-tuning mejora la alineación semántica, pero el baseline neutral sigue siendo competitivo y la señal financiera no aporta evidencia estadística fuerte.</a:t>
             </a:r>
             <a:endParaRPr lang="en-US" sz="1100" dirty="0">
               <a:latin typeface="Arial" panose="020B0604020202020204" pitchFamily="34" charset="0"/>
@@ -5021,14 +5791,20 @@
       </p:sp>
       <p:sp>
         <p:nvSpPr>
-          <p:cNvPr id="21" name="Text 15"/>
-          <p:cNvSpPr/>
-          <p:nvPr/>
-        </p:nvSpPr>
-        <p:spPr>
-          <a:xfrm>
-            <a:off x="640080" y="6473952"/>
-            <a:ext cx="7315200" cy="274320"/>
+          <p:cNvPr id="2" name="Text 7">
+            <a:extLst>
+              <a:ext uri="{FF2B5EF4-FFF2-40B4-BE49-F238E27FC236}">
+                <a16:creationId xmlns:a16="http://schemas.microsoft.com/office/drawing/2014/main" id="{AC0BBD17-578C-EE2E-1451-AFD91E4EB33E}"/>
+              </a:ext>
+            </a:extLst>
+          </p:cNvPr>
+          <p:cNvSpPr/>
+          <p:nvPr/>
+        </p:nvSpPr>
+        <p:spPr>
+          <a:xfrm>
+            <a:off x="6977627" y="6031484"/>
+            <a:ext cx="4573988" cy="795528"/>
           </a:xfrm>
           <a:prstGeom prst="rect">
             <a:avLst/>
@@ -5040,21 +5816,64 @@
           <a:bodyPr wrap="square" lIns="0" tIns="0" rIns="0" bIns="0" rtlCol="0" anchor="ctr"/>
           <a:lstStyle/>
           <a:p>
-            <a:pPr marL="0" indent="0">
+            <a:pPr marL="0" indent="0" algn="r">
               <a:buNone/>
             </a:pPr>
             <a:r>
-              <a:rPr lang="en-US" sz="850" dirty="0">
-                <a:solidFill>
-                  <a:srgbClr val="667085"/>
+              <a:rPr lang="en-US" sz="1100" b="1" kern="0" spc="200" dirty="0">
+                <a:solidFill>
+                  <a:schemeClr val="bg2">
+                    <a:lumMod val="75000"/>
+                  </a:schemeClr>
                 </a:solidFill>
                 <a:latin typeface="Arial" panose="020B0604020202020204" pitchFamily="34" charset="0"/>
                 <a:ea typeface="Calibri" pitchFamily="34" charset="-122"/>
                 <a:cs typeface="Arial" panose="020B0604020202020204" pitchFamily="34" charset="0"/>
               </a:rPr>
-              <a:t>Fine-tuning de GPT-2  ·  Narrativas financieras  ·  NLP</a:t>
-            </a:r>
-            <a:endParaRPr lang="en-US" sz="850" dirty="0">
+              <a:t>PROCESAMIENTO DE LENGUAJE NATURAL</a:t>
+            </a:r>
+          </a:p>
+          <a:p>
+            <a:pPr marL="0" indent="0" algn="r">
+              <a:buNone/>
+            </a:pPr>
+            <a:r>
+              <a:rPr lang="en-US" sz="1100" b="1" kern="0" spc="200" dirty="0">
+                <a:solidFill>
+                  <a:schemeClr val="bg2">
+                    <a:lumMod val="75000"/>
+                  </a:schemeClr>
+                </a:solidFill>
+                <a:latin typeface="Arial" panose="020B0604020202020204" pitchFamily="34" charset="0"/>
+                <a:ea typeface="Calibri" pitchFamily="34" charset="-122"/>
+                <a:cs typeface="Arial" panose="020B0604020202020204" pitchFamily="34" charset="0"/>
+              </a:rPr>
+              <a:t>Universidad de San Andres – MIA</a:t>
+            </a:r>
+          </a:p>
+          <a:p>
+            <a:pPr marL="0" indent="0" algn="r">
+              <a:buNone/>
+            </a:pPr>
+            <a:r>
+              <a:rPr lang="en-US" sz="1100" b="1" kern="0" spc="200" dirty="0">
+                <a:solidFill>
+                  <a:schemeClr val="bg2">
+                    <a:lumMod val="75000"/>
+                  </a:schemeClr>
+                </a:solidFill>
+                <a:latin typeface="Arial" panose="020B0604020202020204" pitchFamily="34" charset="0"/>
+                <a:ea typeface="Calibri" pitchFamily="34" charset="-122"/>
+                <a:cs typeface="Arial" panose="020B0604020202020204" pitchFamily="34" charset="0"/>
+              </a:rPr>
+              <a:t>Luciano Rielo</a:t>
+            </a:r>
+            <a:endParaRPr lang="en-US" sz="1100" dirty="0">
+              <a:solidFill>
+                <a:schemeClr val="bg2">
+                  <a:lumMod val="75000"/>
+                </a:schemeClr>
+              </a:solidFill>
               <a:latin typeface="Arial" panose="020B0604020202020204" pitchFamily="34" charset="0"/>
               <a:cs typeface="Arial" panose="020B0604020202020204" pitchFamily="34" charset="0"/>
             </a:endParaRPr>
@@ -5071,15 +5890,7 @@
 
 <file path=ppt/slides/slide11.xml><?xml version="1.0" encoding="utf-8"?>
 <p:sld xmlns:a="http://schemas.openxmlformats.org/drawingml/2006/main" xmlns:r="http://schemas.openxmlformats.org/officeDocument/2006/relationships" xmlns:p="http://schemas.openxmlformats.org/presentationml/2006/main">
-  <p:cSld name="Slide 11">
-    <p:bg>
-      <p:bgPr>
-        <a:solidFill>
-          <a:srgbClr val="FFFFFF"/>
-        </a:solidFill>
-        <a:effectLst/>
-      </p:bgPr>
-    </p:bg>
+  <p:cSld>
     <p:spTree>
       <p:nvGrpSpPr>
         <p:cNvPr id="1" name=""/>
@@ -5096,14 +5907,14 @@
       </p:grpSpPr>
       <p:sp>
         <p:nvSpPr>
-          <p:cNvPr id="2" name="Text 0"/>
-          <p:cNvSpPr/>
-          <p:nvPr/>
-        </p:nvSpPr>
-        <p:spPr>
-          <a:xfrm>
-            <a:off x="640080" y="384048"/>
-            <a:ext cx="8686800" cy="292608"/>
+          <p:cNvPr id="3" name="Text 1"/>
+          <p:cNvSpPr/>
+          <p:nvPr/>
+        </p:nvSpPr>
+        <p:spPr>
+          <a:xfrm>
+            <a:off x="640080" y="640080"/>
+            <a:ext cx="10332720" cy="749808"/>
           </a:xfrm>
           <a:prstGeom prst="rect">
             <a:avLst/>
@@ -5119,30 +5930,75 @@
               <a:buNone/>
             </a:pPr>
             <a:r>
-              <a:rPr lang="en-US" sz="1150" b="1" kern="0" spc="300" dirty="0">
-                <a:solidFill>
-                  <a:srgbClr val="2A7F8C"/>
-                </a:solidFill>
-                <a:latin typeface="Calibri" pitchFamily="34" charset="0"/>
-                <a:ea typeface="Calibri" pitchFamily="34" charset="-122"/>
-                <a:cs typeface="Calibri" pitchFamily="34" charset="-120"/>
-              </a:rPr>
-              <a:t>ANÁLISIS</a:t>
-            </a:r>
-            <a:endParaRPr lang="en-US" sz="1150" dirty="0"/>
-          </a:p>
-        </p:txBody>
-      </p:sp>
-      <p:sp>
-        <p:nvSpPr>
-          <p:cNvPr id="3" name="Text 1"/>
-          <p:cNvSpPr/>
-          <p:nvPr/>
-        </p:nvSpPr>
-        <p:spPr>
-          <a:xfrm>
-            <a:off x="640080" y="640080"/>
-            <a:ext cx="10332720" cy="749808"/>
+              <a:rPr lang="en-US" sz="2800" b="1" dirty="0">
+                <a:solidFill>
+                  <a:srgbClr val="23304A"/>
+                </a:solidFill>
+                <a:latin typeface="Arial" panose="020B0604020202020204" pitchFamily="34" charset="0"/>
+                <a:ea typeface="Georgia" pitchFamily="34" charset="-122"/>
+                <a:cs typeface="Arial" panose="020B0604020202020204" pitchFamily="34" charset="0"/>
+              </a:rPr>
+              <a:t>Ejemplos cualitativos</a:t>
+            </a:r>
+            <a:endParaRPr lang="en-US" sz="2800" dirty="0">
+              <a:latin typeface="Arial" panose="020B0604020202020204" pitchFamily="34" charset="0"/>
+              <a:cs typeface="Arial" panose="020B0604020202020204" pitchFamily="34" charset="0"/>
+            </a:endParaRPr>
+          </a:p>
+        </p:txBody>
+      </p:sp>
+      <p:sp>
+        <p:nvSpPr>
+          <p:cNvPr id="4" name="Text 2"/>
+          <p:cNvSpPr/>
+          <p:nvPr/>
+        </p:nvSpPr>
+        <p:spPr>
+          <a:xfrm>
+            <a:off x="10820095" y="365760"/>
+            <a:ext cx="731520" cy="457200"/>
+          </a:xfrm>
+          <a:prstGeom prst="rect">
+            <a:avLst/>
+          </a:prstGeom>
+          <a:noFill/>
+          <a:ln/>
+        </p:spPr>
+        <p:txBody>
+          <a:bodyPr wrap="square" lIns="0" tIns="0" rIns="0" bIns="0" rtlCol="0" anchor="ctr"/>
+          <a:lstStyle/>
+          <a:p>
+            <a:pPr marL="0" indent="0" algn="r">
+              <a:buNone/>
+            </a:pPr>
+            <a:r>
+              <a:rPr lang="en-US" sz="1500" b="1" dirty="0">
+                <a:solidFill>
+                  <a:srgbClr val="D6DEE4"/>
+                </a:solidFill>
+                <a:latin typeface="Arial" panose="020B0604020202020204" pitchFamily="34" charset="0"/>
+                <a:ea typeface="Georgia" pitchFamily="34" charset="-122"/>
+                <a:cs typeface="Arial" panose="020B0604020202020204" pitchFamily="34" charset="0"/>
+              </a:rPr>
+              <a:t>11</a:t>
+            </a:r>
+            <a:endParaRPr lang="en-US" sz="1500" dirty="0">
+              <a:latin typeface="Arial" panose="020B0604020202020204" pitchFamily="34" charset="0"/>
+              <a:cs typeface="Arial" panose="020B0604020202020204" pitchFamily="34" charset="0"/>
+            </a:endParaRPr>
+          </a:p>
+        </p:txBody>
+      </p:sp>
+      <p:sp>
+        <p:nvSpPr>
+          <p:cNvPr id="5" name="Text 3"/>
+          <p:cNvSpPr/>
+          <p:nvPr/>
+        </p:nvSpPr>
+        <p:spPr>
+          <a:xfrm>
+            <a:off x="640080" y="1463040"/>
+            <a:ext cx="10881360" cy="329184"/>
           </a:xfrm>
           <a:prstGeom prst="rect">
             <a:avLst/>
@@ -5158,95 +6014,20 @@
               <a:buNone/>
             </a:pPr>
             <a:r>
-              <a:rPr lang="en-US" sz="2800" b="1" dirty="0">
-                <a:solidFill>
-                  <a:srgbClr val="23304A"/>
-                </a:solidFill>
-                <a:latin typeface="Georgia" pitchFamily="34" charset="0"/>
-                <a:ea typeface="Georgia" pitchFamily="34" charset="-122"/>
-                <a:cs typeface="Georgia" pitchFamily="34" charset="-120"/>
-              </a:rPr>
-              <a:t>Ejemplos cualitativos</a:t>
-            </a:r>
-            <a:endParaRPr lang="en-US" sz="2800" dirty="0"/>
-          </a:p>
-        </p:txBody>
-      </p:sp>
-      <p:sp>
-        <p:nvSpPr>
-          <p:cNvPr id="4" name="Text 2"/>
-          <p:cNvSpPr/>
-          <p:nvPr/>
-        </p:nvSpPr>
-        <p:spPr>
-          <a:xfrm>
-            <a:off x="10820095" y="365760"/>
-            <a:ext cx="731520" cy="457200"/>
-          </a:xfrm>
-          <a:prstGeom prst="rect">
-            <a:avLst/>
-          </a:prstGeom>
-          <a:noFill/>
-          <a:ln/>
-        </p:spPr>
-        <p:txBody>
-          <a:bodyPr wrap="square" lIns="0" tIns="0" rIns="0" bIns="0" rtlCol="0" anchor="ctr"/>
-          <a:lstStyle/>
-          <a:p>
-            <a:pPr marL="0" indent="0" algn="r">
-              <a:buNone/>
-            </a:pPr>
-            <a:r>
-              <a:rPr lang="en-US" sz="1500" b="1" dirty="0">
-                <a:solidFill>
-                  <a:srgbClr val="D6DEE4"/>
-                </a:solidFill>
-                <a:latin typeface="Georgia" pitchFamily="34" charset="0"/>
-                <a:ea typeface="Georgia" pitchFamily="34" charset="-122"/>
-                <a:cs typeface="Georgia" pitchFamily="34" charset="-120"/>
-              </a:rPr>
-              <a:t>11</a:t>
-            </a:r>
-            <a:endParaRPr lang="en-US" sz="1500" dirty="0"/>
-          </a:p>
-        </p:txBody>
-      </p:sp>
-      <p:sp>
-        <p:nvSpPr>
-          <p:cNvPr id="5" name="Text 3"/>
-          <p:cNvSpPr/>
-          <p:nvPr/>
-        </p:nvSpPr>
-        <p:spPr>
-          <a:xfrm>
-            <a:off x="640080" y="1463040"/>
-            <a:ext cx="10881360" cy="329184"/>
-          </a:xfrm>
-          <a:prstGeom prst="rect">
-            <a:avLst/>
-          </a:prstGeom>
-          <a:noFill/>
-          <a:ln/>
-        </p:spPr>
-        <p:txBody>
-          <a:bodyPr wrap="square" lIns="0" tIns="0" rIns="0" bIns="0" rtlCol="0" anchor="ctr"/>
-          <a:lstStyle/>
-          <a:p>
-            <a:pPr marL="0" indent="0">
-              <a:buNone/>
-            </a:pPr>
-            <a:r>
               <a:rPr lang="en-US" sz="1200" dirty="0">
                 <a:solidFill>
                   <a:srgbClr val="667085"/>
                 </a:solidFill>
-                <a:latin typeface="Calibri" pitchFamily="34" charset="0"/>
+                <a:latin typeface="Arial" panose="020B0604020202020204" pitchFamily="34" charset="0"/>
                 <a:ea typeface="Calibri" pitchFamily="34" charset="-122"/>
-                <a:cs typeface="Calibri" pitchFamily="34" charset="-120"/>
+                <a:cs typeface="Arial" panose="020B0604020202020204" pitchFamily="34" charset="0"/>
               </a:rPr>
               <a:t>Mirar ejemplos cambia la lectura: las métricas agregadas necesitan inspección cualitativa.</a:t>
             </a:r>
-            <a:endParaRPr lang="en-US" sz="1200" dirty="0"/>
+            <a:endParaRPr lang="en-US" sz="1200" dirty="0">
+              <a:latin typeface="Arial" panose="020B0604020202020204" pitchFamily="34" charset="0"/>
+              <a:cs typeface="Arial" panose="020B0604020202020204" pitchFamily="34" charset="0"/>
+            </a:endParaRPr>
           </a:p>
         </p:txBody>
       </p:sp>
@@ -5281,6 +6062,16 @@
             </a:outerShdw>
           </a:effectLst>
         </p:spPr>
+        <p:txBody>
+          <a:bodyPr/>
+          <a:lstStyle/>
+          <a:p>
+            <a:endParaRPr lang="es-AR">
+              <a:latin typeface="Arial" panose="020B0604020202020204" pitchFamily="34" charset="0"/>
+              <a:cs typeface="Arial" panose="020B0604020202020204" pitchFamily="34" charset="0"/>
+            </a:endParaRPr>
+          </a:p>
+        </p:txBody>
       </p:sp>
       <p:sp>
         <p:nvSpPr>
@@ -5306,6 +6097,16 @@
             <a:prstDash val="solid"/>
           </a:ln>
         </p:spPr>
+        <p:txBody>
+          <a:bodyPr/>
+          <a:lstStyle/>
+          <a:p>
+            <a:endParaRPr lang="es-AR">
+              <a:latin typeface="Arial" panose="020B0604020202020204" pitchFamily="34" charset="0"/>
+              <a:cs typeface="Arial" panose="020B0604020202020204" pitchFamily="34" charset="0"/>
+            </a:endParaRPr>
+          </a:p>
+        </p:txBody>
       </p:sp>
       <p:pic>
         <p:nvPicPr>
@@ -5360,13 +6161,16 @@
                 <a:solidFill>
                   <a:srgbClr val="23304A"/>
                 </a:solidFill>
-                <a:latin typeface="Calibri" pitchFamily="34" charset="0"/>
+                <a:latin typeface="Arial" panose="020B0604020202020204" pitchFamily="34" charset="0"/>
                 <a:ea typeface="Calibri" pitchFamily="34" charset="-122"/>
-                <a:cs typeface="Calibri" pitchFamily="34" charset="-120"/>
+                <a:cs typeface="Arial" panose="020B0604020202020204" pitchFamily="34" charset="0"/>
               </a:rPr>
               <a:t>El fine-tuning mejora la alineación</a:t>
             </a:r>
-            <a:endParaRPr lang="en-US" sz="1250" dirty="0"/>
+            <a:endParaRPr lang="en-US" sz="1250" dirty="0">
+              <a:latin typeface="Arial" panose="020B0604020202020204" pitchFamily="34" charset="0"/>
+              <a:cs typeface="Arial" panose="020B0604020202020204" pitchFamily="34" charset="0"/>
+            </a:endParaRPr>
           </a:p>
         </p:txBody>
       </p:sp>
@@ -5399,13 +6203,16 @@
                 <a:solidFill>
                   <a:srgbClr val="667085"/>
                 </a:solidFill>
-                <a:latin typeface="Consolas" pitchFamily="34" charset="0"/>
+                <a:latin typeface="Arial" panose="020B0604020202020204" pitchFamily="34" charset="0"/>
                 <a:ea typeface="Consolas" pitchFamily="34" charset="-122"/>
-                <a:cs typeface="Consolas" pitchFamily="34" charset="-120"/>
+                <a:cs typeface="Arial" panose="020B0604020202020204" pitchFamily="34" charset="0"/>
               </a:rPr>
               <a:t>AMD · 2023-06-21</a:t>
             </a:r>
-            <a:endParaRPr lang="en-US" sz="850" dirty="0"/>
+            <a:endParaRPr lang="en-US" sz="850" dirty="0">
+              <a:latin typeface="Arial" panose="020B0604020202020204" pitchFamily="34" charset="0"/>
+              <a:cs typeface="Arial" panose="020B0604020202020204" pitchFamily="34" charset="0"/>
+            </a:endParaRPr>
           </a:p>
         </p:txBody>
       </p:sp>
@@ -5435,6 +6242,16 @@
             <a:prstDash val="solid"/>
           </a:ln>
         </p:spPr>
+        <p:txBody>
+          <a:bodyPr/>
+          <a:lstStyle/>
+          <a:p>
+            <a:endParaRPr lang="es-AR">
+              <a:latin typeface="Arial" panose="020B0604020202020204" pitchFamily="34" charset="0"/>
+              <a:cs typeface="Arial" panose="020B0604020202020204" pitchFamily="34" charset="0"/>
+            </a:endParaRPr>
+          </a:p>
+        </p:txBody>
       </p:sp>
       <p:sp>
         <p:nvSpPr>
@@ -5465,13 +6282,16 @@
                 <a:solidFill>
                   <a:srgbClr val="2A7F8C"/>
                 </a:solidFill>
-                <a:latin typeface="Consolas" pitchFamily="34" charset="0"/>
+                <a:latin typeface="Arial" panose="020B0604020202020204" pitchFamily="34" charset="0"/>
                 <a:ea typeface="Consolas" pitchFamily="34" charset="-122"/>
-                <a:cs typeface="Consolas" pitchFamily="34" charset="-120"/>
+                <a:cs typeface="Arial" panose="020B0604020202020204" pitchFamily="34" charset="0"/>
               </a:rPr>
               <a:t>ROUGE-L: 0.031 → 0.179</a:t>
             </a:r>
-            <a:endParaRPr lang="en-US" sz="950" dirty="0"/>
+            <a:endParaRPr lang="en-US" sz="950" dirty="0">
+              <a:latin typeface="Arial" panose="020B0604020202020204" pitchFamily="34" charset="0"/>
+              <a:cs typeface="Arial" panose="020B0604020202020204" pitchFamily="34" charset="0"/>
+            </a:endParaRPr>
           </a:p>
         </p:txBody>
       </p:sp>
@@ -5504,13 +6324,16 @@
                 <a:solidFill>
                   <a:srgbClr val="667085"/>
                 </a:solidFill>
-                <a:latin typeface="Calibri" pitchFamily="34" charset="0"/>
+                <a:latin typeface="Arial" panose="020B0604020202020204" pitchFamily="34" charset="0"/>
                 <a:ea typeface="Calibri" pitchFamily="34" charset="-122"/>
-                <a:cs typeface="Calibri" pitchFamily="34" charset="-120"/>
+                <a:cs typeface="Arial" panose="020B0604020202020204" pitchFamily="34" charset="0"/>
               </a:rPr>
               <a:t>GPT-2 BASE</a:t>
             </a:r>
-            <a:endParaRPr lang="en-US" sz="850" dirty="0"/>
+            <a:endParaRPr lang="en-US" sz="850" dirty="0">
+              <a:latin typeface="Arial" panose="020B0604020202020204" pitchFamily="34" charset="0"/>
+              <a:cs typeface="Arial" panose="020B0604020202020204" pitchFamily="34" charset="0"/>
+            </a:endParaRPr>
           </a:p>
         </p:txBody>
       </p:sp>
@@ -5546,13 +6369,16 @@
                 <a:solidFill>
                   <a:srgbClr val="23304A"/>
                 </a:solidFill>
-                <a:latin typeface="Calibri" pitchFamily="34" charset="0"/>
+                <a:latin typeface="Arial" panose="020B0604020202020204" pitchFamily="34" charset="0"/>
                 <a:ea typeface="Calibri" pitchFamily="34" charset="-122"/>
-                <a:cs typeface="Calibri" pitchFamily="34" charset="-120"/>
+                <a:cs typeface="Arial" panose="020B0604020202020204" pitchFamily="34" charset="0"/>
               </a:rPr>
               <a:t>Texto genérico, divagante y fuera de dominio; describe CPUs de 2017 sin foco financiero.</a:t>
             </a:r>
-            <a:endParaRPr lang="en-US" sz="950" dirty="0"/>
+            <a:endParaRPr lang="en-US" sz="950" dirty="0">
+              <a:latin typeface="Arial" panose="020B0604020202020204" pitchFamily="34" charset="0"/>
+              <a:cs typeface="Arial" panose="020B0604020202020204" pitchFamily="34" charset="0"/>
+            </a:endParaRPr>
           </a:p>
         </p:txBody>
       </p:sp>
@@ -5585,13 +6411,16 @@
                 <a:solidFill>
                   <a:srgbClr val="2A7F8C"/>
                 </a:solidFill>
-                <a:latin typeface="Calibri" pitchFamily="34" charset="0"/>
+                <a:latin typeface="Arial" panose="020B0604020202020204" pitchFamily="34" charset="0"/>
                 <a:ea typeface="Calibri" pitchFamily="34" charset="-122"/>
-                <a:cs typeface="Calibri" pitchFamily="34" charset="-120"/>
+                <a:cs typeface="Arial" panose="020B0604020202020204" pitchFamily="34" charset="0"/>
               </a:rPr>
               <a:t>FINE-TUNED / VARIANTE</a:t>
             </a:r>
-            <a:endParaRPr lang="en-US" sz="850" dirty="0"/>
+            <a:endParaRPr lang="en-US" sz="850" dirty="0">
+              <a:latin typeface="Arial" panose="020B0604020202020204" pitchFamily="34" charset="0"/>
+              <a:cs typeface="Arial" panose="020B0604020202020204" pitchFamily="34" charset="0"/>
+            </a:endParaRPr>
           </a:p>
         </p:txBody>
       </p:sp>
@@ -5627,13 +6456,16 @@
                 <a:solidFill>
                   <a:srgbClr val="23304A"/>
                 </a:solidFill>
-                <a:latin typeface="Calibri" pitchFamily="34" charset="0"/>
+                <a:latin typeface="Arial" panose="020B0604020202020204" pitchFamily="34" charset="0"/>
                 <a:ea typeface="Calibri" pitchFamily="34" charset="-122"/>
-                <a:cs typeface="Calibri" pitchFamily="34" charset="-120"/>
+                <a:cs typeface="Arial" panose="020B0604020202020204" pitchFamily="34" charset="0"/>
               </a:rPr>
               <a:t>Genera formato de titular financiero real: "Earnings Conference Call Transcripts… Micron Technology".</a:t>
             </a:r>
-            <a:endParaRPr lang="en-US" sz="950" dirty="0"/>
+            <a:endParaRPr lang="en-US" sz="950" dirty="0">
+              <a:latin typeface="Arial" panose="020B0604020202020204" pitchFamily="34" charset="0"/>
+              <a:cs typeface="Arial" panose="020B0604020202020204" pitchFamily="34" charset="0"/>
+            </a:endParaRPr>
           </a:p>
         </p:txBody>
       </p:sp>
@@ -5661,6 +6493,16 @@
             <a:prstDash val="solid"/>
           </a:ln>
         </p:spPr>
+        <p:txBody>
+          <a:bodyPr/>
+          <a:lstStyle/>
+          <a:p>
+            <a:endParaRPr lang="es-AR">
+              <a:latin typeface="Arial" panose="020B0604020202020204" pitchFamily="34" charset="0"/>
+              <a:cs typeface="Arial" panose="020B0604020202020204" pitchFamily="34" charset="0"/>
+            </a:endParaRPr>
+          </a:p>
+        </p:txBody>
       </p:sp>
       <p:sp>
         <p:nvSpPr>
@@ -5694,13 +6536,16 @@
                 <a:solidFill>
                   <a:srgbClr val="23304A"/>
                 </a:solidFill>
-                <a:latin typeface="Calibri" pitchFamily="34" charset="0"/>
+                <a:latin typeface="Arial" panose="020B0604020202020204" pitchFamily="34" charset="0"/>
                 <a:ea typeface="Calibri" pitchFamily="34" charset="-122"/>
-                <a:cs typeface="Calibri" pitchFamily="34" charset="-120"/>
+                <a:cs typeface="Arial" panose="020B0604020202020204" pitchFamily="34" charset="0"/>
               </a:rPr>
               <a:t>El entrenamiento sí adapta el modelo al vocabulario y formato del dominio.</a:t>
             </a:r>
-            <a:endParaRPr lang="en-US" sz="900" dirty="0"/>
+            <a:endParaRPr lang="en-US" sz="900" dirty="0">
+              <a:latin typeface="Arial" panose="020B0604020202020204" pitchFamily="34" charset="0"/>
+              <a:cs typeface="Arial" panose="020B0604020202020204" pitchFamily="34" charset="0"/>
+            </a:endParaRPr>
           </a:p>
         </p:txBody>
       </p:sp>
@@ -5735,6 +6580,16 @@
             </a:outerShdw>
           </a:effectLst>
         </p:spPr>
+        <p:txBody>
+          <a:bodyPr/>
+          <a:lstStyle/>
+          <a:p>
+            <a:endParaRPr lang="es-AR">
+              <a:latin typeface="Arial" panose="020B0604020202020204" pitchFamily="34" charset="0"/>
+              <a:cs typeface="Arial" panose="020B0604020202020204" pitchFamily="34" charset="0"/>
+            </a:endParaRPr>
+          </a:p>
+        </p:txBody>
       </p:sp>
       <p:sp>
         <p:nvSpPr>
@@ -5760,6 +6615,16 @@
             <a:prstDash val="solid"/>
           </a:ln>
         </p:spPr>
+        <p:txBody>
+          <a:bodyPr/>
+          <a:lstStyle/>
+          <a:p>
+            <a:endParaRPr lang="es-AR">
+              <a:latin typeface="Arial" panose="020B0604020202020204" pitchFamily="34" charset="0"/>
+              <a:cs typeface="Arial" panose="020B0604020202020204" pitchFamily="34" charset="0"/>
+            </a:endParaRPr>
+          </a:p>
+        </p:txBody>
       </p:sp>
       <p:pic>
         <p:nvPicPr>
@@ -5814,13 +6679,16 @@
                 <a:solidFill>
                   <a:srgbClr val="23304A"/>
                 </a:solidFill>
-                <a:latin typeface="Calibri" pitchFamily="34" charset="0"/>
+                <a:latin typeface="Arial" panose="020B0604020202020204" pitchFamily="34" charset="0"/>
                 <a:ea typeface="Calibri" pitchFamily="34" charset="-122"/>
-                <a:cs typeface="Calibri" pitchFamily="34" charset="-120"/>
+                <a:cs typeface="Arial" panose="020B0604020202020204" pitchFamily="34" charset="0"/>
               </a:rPr>
               <a:t>La métrica financiera puede engañar</a:t>
             </a:r>
-            <a:endParaRPr lang="en-US" sz="1250" dirty="0"/>
+            <a:endParaRPr lang="en-US" sz="1250" dirty="0">
+              <a:latin typeface="Arial" panose="020B0604020202020204" pitchFamily="34" charset="0"/>
+              <a:cs typeface="Arial" panose="020B0604020202020204" pitchFamily="34" charset="0"/>
+            </a:endParaRPr>
           </a:p>
         </p:txBody>
       </p:sp>
@@ -5853,13 +6721,16 @@
                 <a:solidFill>
                   <a:srgbClr val="667085"/>
                 </a:solidFill>
-                <a:latin typeface="Consolas" pitchFamily="34" charset="0"/>
+                <a:latin typeface="Arial" panose="020B0604020202020204" pitchFamily="34" charset="0"/>
                 <a:ea typeface="Consolas" pitchFamily="34" charset="-122"/>
-                <a:cs typeface="Consolas" pitchFamily="34" charset="-120"/>
+                <a:cs typeface="Arial" panose="020B0604020202020204" pitchFamily="34" charset="0"/>
               </a:rPr>
               <a:t>AMD · 2023-05-04</a:t>
             </a:r>
-            <a:endParaRPr lang="en-US" sz="850" dirty="0"/>
+            <a:endParaRPr lang="en-US" sz="850" dirty="0">
+              <a:latin typeface="Arial" panose="020B0604020202020204" pitchFamily="34" charset="0"/>
+              <a:cs typeface="Arial" panose="020B0604020202020204" pitchFamily="34" charset="0"/>
+            </a:endParaRPr>
           </a:p>
         </p:txBody>
       </p:sp>
@@ -5889,6 +6760,16 @@
             <a:prstDash val="solid"/>
           </a:ln>
         </p:spPr>
+        <p:txBody>
+          <a:bodyPr/>
+          <a:lstStyle/>
+          <a:p>
+            <a:endParaRPr lang="es-AR">
+              <a:latin typeface="Arial" panose="020B0604020202020204" pitchFamily="34" charset="0"/>
+              <a:cs typeface="Arial" panose="020B0604020202020204" pitchFamily="34" charset="0"/>
+            </a:endParaRPr>
+          </a:p>
+        </p:txBody>
       </p:sp>
       <p:sp>
         <p:nvSpPr>
@@ -5919,13 +6800,16 @@
                 <a:solidFill>
                   <a:srgbClr val="C8923B"/>
                 </a:solidFill>
-                <a:latin typeface="Consolas" pitchFamily="34" charset="0"/>
+                <a:latin typeface="Arial" panose="020B0604020202020204" pitchFamily="34" charset="0"/>
                 <a:ea typeface="Consolas" pitchFamily="34" charset="-122"/>
-                <a:cs typeface="Consolas" pitchFamily="34" charset="-120"/>
+                <a:cs typeface="Arial" panose="020B0604020202020204" pitchFamily="34" charset="0"/>
               </a:rPr>
               <a:t>Dirección correcta: GPT-2 base SÍ</a:t>
             </a:r>
-            <a:endParaRPr lang="en-US" sz="950" dirty="0"/>
+            <a:endParaRPr lang="en-US" sz="950" dirty="0">
+              <a:latin typeface="Arial" panose="020B0604020202020204" pitchFamily="34" charset="0"/>
+              <a:cs typeface="Arial" panose="020B0604020202020204" pitchFamily="34" charset="0"/>
+            </a:endParaRPr>
           </a:p>
         </p:txBody>
       </p:sp>
@@ -5958,13 +6842,16 @@
                 <a:solidFill>
                   <a:srgbClr val="667085"/>
                 </a:solidFill>
-                <a:latin typeface="Calibri" pitchFamily="34" charset="0"/>
+                <a:latin typeface="Arial" panose="020B0604020202020204" pitchFamily="34" charset="0"/>
                 <a:ea typeface="Calibri" pitchFamily="34" charset="-122"/>
-                <a:cs typeface="Calibri" pitchFamily="34" charset="-120"/>
+                <a:cs typeface="Arial" panose="020B0604020202020204" pitchFamily="34" charset="0"/>
               </a:rPr>
               <a:t>GPT-2 BASE</a:t>
             </a:r>
-            <a:endParaRPr lang="en-US" sz="850" dirty="0"/>
+            <a:endParaRPr lang="en-US" sz="850" dirty="0">
+              <a:latin typeface="Arial" panose="020B0604020202020204" pitchFamily="34" charset="0"/>
+              <a:cs typeface="Arial" panose="020B0604020202020204" pitchFamily="34" charset="0"/>
+            </a:endParaRPr>
           </a:p>
         </p:txBody>
       </p:sp>
@@ -6000,13 +6887,16 @@
                 <a:solidFill>
                   <a:srgbClr val="23304A"/>
                 </a:solidFill>
-                <a:latin typeface="Calibri" pitchFamily="34" charset="0"/>
+                <a:latin typeface="Arial" panose="020B0604020202020204" pitchFamily="34" charset="0"/>
                 <a:ea typeface="Calibri" pitchFamily="34" charset="-122"/>
-                <a:cs typeface="Calibri" pitchFamily="34" charset="-120"/>
+                <a:cs typeface="Arial" panose="020B0604020202020204" pitchFamily="34" charset="0"/>
               </a:rPr>
               <a:t>Acierta la dirección, pero la narrativa es pobre: una nota suelta de la CNBC sin relación clara.</a:t>
             </a:r>
-            <a:endParaRPr lang="en-US" sz="950" dirty="0"/>
+            <a:endParaRPr lang="en-US" sz="950" dirty="0">
+              <a:latin typeface="Arial" panose="020B0604020202020204" pitchFamily="34" charset="0"/>
+              <a:cs typeface="Arial" panose="020B0604020202020204" pitchFamily="34" charset="0"/>
+            </a:endParaRPr>
           </a:p>
         </p:txBody>
       </p:sp>
@@ -6039,13 +6929,16 @@
                 <a:solidFill>
                   <a:srgbClr val="2A7F8C"/>
                 </a:solidFill>
-                <a:latin typeface="Calibri" pitchFamily="34" charset="0"/>
+                <a:latin typeface="Arial" panose="020B0604020202020204" pitchFamily="34" charset="0"/>
                 <a:ea typeface="Calibri" pitchFamily="34" charset="-122"/>
-                <a:cs typeface="Calibri" pitchFamily="34" charset="-120"/>
+                <a:cs typeface="Arial" panose="020B0604020202020204" pitchFamily="34" charset="0"/>
               </a:rPr>
               <a:t>FINE-TUNED / VARIANTE</a:t>
             </a:r>
-            <a:endParaRPr lang="en-US" sz="850" dirty="0"/>
+            <a:endParaRPr lang="en-US" sz="850" dirty="0">
+              <a:latin typeface="Arial" panose="020B0604020202020204" pitchFamily="34" charset="0"/>
+              <a:cs typeface="Arial" panose="020B0604020202020204" pitchFamily="34" charset="0"/>
+            </a:endParaRPr>
           </a:p>
         </p:txBody>
       </p:sp>
@@ -6081,13 +6974,16 @@
                 <a:solidFill>
                   <a:srgbClr val="23304A"/>
                 </a:solidFill>
-                <a:latin typeface="Calibri" pitchFamily="34" charset="0"/>
+                <a:latin typeface="Arial" panose="020B0604020202020204" pitchFamily="34" charset="0"/>
                 <a:ea typeface="Calibri" pitchFamily="34" charset="-122"/>
-                <a:cs typeface="Calibri" pitchFamily="34" charset="-120"/>
+                <a:cs typeface="Arial" panose="020B0604020202020204" pitchFamily="34" charset="0"/>
               </a:rPr>
               <a:t>El fine-tuned falla la dirección pese a producir un texto más cercano al dominio.</a:t>
             </a:r>
-            <a:endParaRPr lang="en-US" sz="950" dirty="0"/>
+            <a:endParaRPr lang="en-US" sz="950" dirty="0">
+              <a:latin typeface="Arial" panose="020B0604020202020204" pitchFamily="34" charset="0"/>
+              <a:cs typeface="Arial" panose="020B0604020202020204" pitchFamily="34" charset="0"/>
+            </a:endParaRPr>
           </a:p>
         </p:txBody>
       </p:sp>
@@ -6115,6 +7011,16 @@
             <a:prstDash val="solid"/>
           </a:ln>
         </p:spPr>
+        <p:txBody>
+          <a:bodyPr/>
+          <a:lstStyle/>
+          <a:p>
+            <a:endParaRPr lang="es-AR">
+              <a:latin typeface="Arial" panose="020B0604020202020204" pitchFamily="34" charset="0"/>
+              <a:cs typeface="Arial" panose="020B0604020202020204" pitchFamily="34" charset="0"/>
+            </a:endParaRPr>
+          </a:p>
+        </p:txBody>
       </p:sp>
       <p:sp>
         <p:nvSpPr>
@@ -6148,26 +7054,35 @@
                 <a:solidFill>
                   <a:srgbClr val="23304A"/>
                 </a:solidFill>
-                <a:latin typeface="Calibri" pitchFamily="34" charset="0"/>
+                <a:latin typeface="Arial" panose="020B0604020202020204" pitchFamily="34" charset="0"/>
                 <a:ea typeface="Calibri" pitchFamily="34" charset="-122"/>
-                <a:cs typeface="Calibri" pitchFamily="34" charset="-120"/>
+                <a:cs typeface="Arial" panose="020B0604020202020204" pitchFamily="34" charset="0"/>
               </a:rPr>
               <a:t>Acertar la dirección no implica una buena narrativa: dir. acc. sola no alcanza.</a:t>
             </a:r>
-            <a:endParaRPr lang="en-US" sz="900" dirty="0"/>
-          </a:p>
-        </p:txBody>
-      </p:sp>
-      <p:sp>
-        <p:nvSpPr>
-          <p:cNvPr id="32" name="Text 28"/>
-          <p:cNvSpPr/>
-          <p:nvPr/>
-        </p:nvSpPr>
-        <p:spPr>
-          <a:xfrm>
-            <a:off x="640080" y="6473952"/>
-            <a:ext cx="7315200" cy="274320"/>
+            <a:endParaRPr lang="en-US" sz="900" dirty="0">
+              <a:latin typeface="Arial" panose="020B0604020202020204" pitchFamily="34" charset="0"/>
+              <a:cs typeface="Arial" panose="020B0604020202020204" pitchFamily="34" charset="0"/>
+            </a:endParaRPr>
+          </a:p>
+        </p:txBody>
+      </p:sp>
+      <p:sp>
+        <p:nvSpPr>
+          <p:cNvPr id="33" name="Text 7">
+            <a:extLst>
+              <a:ext uri="{FF2B5EF4-FFF2-40B4-BE49-F238E27FC236}">
+                <a16:creationId xmlns:a16="http://schemas.microsoft.com/office/drawing/2014/main" id="{72B5E875-FB5B-3AD9-B3BB-F672517A416E}"/>
+              </a:ext>
+            </a:extLst>
+          </p:cNvPr>
+          <p:cNvSpPr/>
+          <p:nvPr/>
+        </p:nvSpPr>
+        <p:spPr>
+          <a:xfrm>
+            <a:off x="6977627" y="6031484"/>
+            <a:ext cx="4573988" cy="795528"/>
           </a:xfrm>
           <a:prstGeom prst="rect">
             <a:avLst/>
@@ -6179,21 +7094,67 @@
           <a:bodyPr wrap="square" lIns="0" tIns="0" rIns="0" bIns="0" rtlCol="0" anchor="ctr"/>
           <a:lstStyle/>
           <a:p>
-            <a:pPr marL="0" indent="0">
+            <a:pPr marL="0" indent="0" algn="r">
               <a:buNone/>
             </a:pPr>
             <a:r>
-              <a:rPr lang="en-US" sz="850" dirty="0">
-                <a:solidFill>
-                  <a:srgbClr val="667085"/>
-                </a:solidFill>
-                <a:latin typeface="Calibri" pitchFamily="34" charset="0"/>
+              <a:rPr lang="en-US" sz="1100" b="1" kern="0" spc="200" dirty="0">
+                <a:solidFill>
+                  <a:schemeClr val="bg2">
+                    <a:lumMod val="75000"/>
+                  </a:schemeClr>
+                </a:solidFill>
+                <a:latin typeface="Arial" panose="020B0604020202020204" pitchFamily="34" charset="0"/>
                 <a:ea typeface="Calibri" pitchFamily="34" charset="-122"/>
-                <a:cs typeface="Calibri" pitchFamily="34" charset="-120"/>
-              </a:rPr>
-              <a:t>Fine-tuning de GPT-2  ·  Narrativas financieras  ·  NLP</a:t>
-            </a:r>
-            <a:endParaRPr lang="en-US" sz="850" dirty="0"/>
+                <a:cs typeface="Arial" panose="020B0604020202020204" pitchFamily="34" charset="0"/>
+              </a:rPr>
+              <a:t>PROCESAMIENTO DE LENGUAJE NATURAL</a:t>
+            </a:r>
+          </a:p>
+          <a:p>
+            <a:pPr marL="0" indent="0" algn="r">
+              <a:buNone/>
+            </a:pPr>
+            <a:r>
+              <a:rPr lang="en-US" sz="1100" b="1" kern="0" spc="200" dirty="0">
+                <a:solidFill>
+                  <a:schemeClr val="bg2">
+                    <a:lumMod val="75000"/>
+                  </a:schemeClr>
+                </a:solidFill>
+                <a:latin typeface="Arial" panose="020B0604020202020204" pitchFamily="34" charset="0"/>
+                <a:ea typeface="Calibri" pitchFamily="34" charset="-122"/>
+                <a:cs typeface="Arial" panose="020B0604020202020204" pitchFamily="34" charset="0"/>
+              </a:rPr>
+              <a:t>Universidad de San Andres – MIA</a:t>
+            </a:r>
+          </a:p>
+          <a:p>
+            <a:pPr marL="0" indent="0" algn="r">
+              <a:buNone/>
+            </a:pPr>
+            <a:r>
+              <a:rPr lang="en-US" sz="1100" b="1" kern="0" spc="200" dirty="0">
+                <a:solidFill>
+                  <a:schemeClr val="bg2">
+                    <a:lumMod val="75000"/>
+                  </a:schemeClr>
+                </a:solidFill>
+                <a:latin typeface="Arial" panose="020B0604020202020204" pitchFamily="34" charset="0"/>
+                <a:ea typeface="Calibri" pitchFamily="34" charset="-122"/>
+                <a:cs typeface="Arial" panose="020B0604020202020204" pitchFamily="34" charset="0"/>
+              </a:rPr>
+              <a:t>Luciano Rielo</a:t>
+            </a:r>
+            <a:endParaRPr lang="en-US" sz="1100" dirty="0">
+              <a:solidFill>
+                <a:schemeClr val="bg2">
+                  <a:lumMod val="75000"/>
+                </a:schemeClr>
+              </a:solidFill>
+              <a:latin typeface="Arial" panose="020B0604020202020204" pitchFamily="34" charset="0"/>
+              <a:cs typeface="Arial" panose="020B0604020202020204" pitchFamily="34" charset="0"/>
+            </a:endParaRPr>
           </a:p>
         </p:txBody>
       </p:sp>
@@ -6207,15 +7168,7 @@
 
 <file path=ppt/slides/slide12.xml><?xml version="1.0" encoding="utf-8"?>
 <p:sld xmlns:a="http://schemas.openxmlformats.org/drawingml/2006/main" xmlns:r="http://schemas.openxmlformats.org/officeDocument/2006/relationships" xmlns:p="http://schemas.openxmlformats.org/presentationml/2006/main">
-  <p:cSld name="Slide 12">
-    <p:bg>
-      <p:bgPr>
-        <a:solidFill>
-          <a:srgbClr val="1E2A4A"/>
-        </a:solidFill>
-        <a:effectLst/>
-      </p:bgPr>
-    </p:bg>
+  <p:cSld>
     <p:spTree>
       <p:nvGrpSpPr>
         <p:cNvPr id="1" name=""/>
@@ -6238,8 +7191,1066 @@
         </p:nvSpPr>
         <p:spPr>
           <a:xfrm>
-            <a:off x="640080" y="384048"/>
-            <a:ext cx="8229600" cy="292608"/>
+            <a:off x="609600" y="243840"/>
+            <a:ext cx="10972800" cy="548640"/>
+          </a:xfrm>
+          <a:prstGeom prst="rect">
+            <a:avLst/>
+          </a:prstGeom>
+          <a:noFill/>
+          <a:ln/>
+        </p:spPr>
+        <p:txBody>
+          <a:bodyPr wrap="square" lIns="0" tIns="0" rIns="0" bIns="0" rtlCol="0" anchor="ctr"/>
+          <a:lstStyle/>
+          <a:p>
+            <a:r>
+              <a:rPr lang="en-US" sz="2933" b="1" dirty="0">
+                <a:solidFill>
+                  <a:srgbClr val="FFFFFF"/>
+                </a:solidFill>
+                <a:latin typeface="Calibri" pitchFamily="34" charset="0"/>
+                <a:ea typeface="Calibri" pitchFamily="34" charset="-122"/>
+                <a:cs typeface="Calibri" pitchFamily="34" charset="-120"/>
+              </a:rPr>
+              <a:t>Ejemplos cualitativos: qué cambia con fine-tuning</a:t>
+            </a:r>
+            <a:endParaRPr lang="en-US" sz="2933" dirty="0"/>
+          </a:p>
+        </p:txBody>
+      </p:sp>
+      <p:sp>
+        <p:nvSpPr>
+          <p:cNvPr id="4" name="Shape 2"/>
+          <p:cNvSpPr/>
+          <p:nvPr/>
+        </p:nvSpPr>
+        <p:spPr>
+          <a:xfrm>
+            <a:off x="487680" y="1341120"/>
+            <a:ext cx="5364480" cy="4267200"/>
+          </a:xfrm>
+          <a:prstGeom prst="rect">
+            <a:avLst/>
+          </a:prstGeom>
+          <a:solidFill>
+            <a:srgbClr val="16213E"/>
+          </a:solidFill>
+          <a:ln/>
+          <a:effectLst>
+            <a:outerShdw blurRad="101600" dist="25400" dir="8100000" algn="bl" rotWithShape="0">
+              <a:srgbClr val="000000">
+                <a:alpha val="30000"/>
+              </a:srgbClr>
+            </a:outerShdw>
+          </a:effectLst>
+        </p:spPr>
+        <p:txBody>
+          <a:bodyPr/>
+          <a:lstStyle/>
+          <a:p>
+            <a:endParaRPr lang="es-AR" sz="2400"/>
+          </a:p>
+        </p:txBody>
+      </p:sp>
+      <p:sp>
+        <p:nvSpPr>
+          <p:cNvPr id="5" name="Shape 3"/>
+          <p:cNvSpPr/>
+          <p:nvPr/>
+        </p:nvSpPr>
+        <p:spPr>
+          <a:xfrm>
+            <a:off x="487680" y="1341120"/>
+            <a:ext cx="5364480" cy="48768"/>
+          </a:xfrm>
+          <a:prstGeom prst="rect">
+            <a:avLst/>
+          </a:prstGeom>
+          <a:solidFill>
+            <a:srgbClr val="00B4D8"/>
+          </a:solidFill>
+          <a:ln/>
+        </p:spPr>
+        <p:txBody>
+          <a:bodyPr/>
+          <a:lstStyle/>
+          <a:p>
+            <a:endParaRPr lang="es-AR" sz="2400"/>
+          </a:p>
+        </p:txBody>
+      </p:sp>
+      <p:sp>
+        <p:nvSpPr>
+          <p:cNvPr id="6" name="Text 4"/>
+          <p:cNvSpPr/>
+          <p:nvPr/>
+        </p:nvSpPr>
+        <p:spPr>
+          <a:xfrm>
+            <a:off x="670560" y="1524000"/>
+            <a:ext cx="4998720" cy="341376"/>
+          </a:xfrm>
+          <a:prstGeom prst="rect">
+            <a:avLst/>
+          </a:prstGeom>
+          <a:noFill/>
+          <a:ln/>
+        </p:spPr>
+        <p:txBody>
+          <a:bodyPr wrap="square" lIns="0" tIns="0" rIns="0" bIns="0" rtlCol="0" anchor="ctr"/>
+          <a:lstStyle/>
+          <a:p>
+            <a:r>
+              <a:rPr lang="en-US" sz="1733" b="1" dirty="0">
+                <a:solidFill>
+                  <a:srgbClr val="00B4D8"/>
+                </a:solidFill>
+                <a:latin typeface="Calibri" pitchFamily="34" charset="0"/>
+                <a:ea typeface="Calibri" pitchFamily="34" charset="-122"/>
+                <a:cs typeface="Calibri" pitchFamily="34" charset="-120"/>
+              </a:rPr>
+              <a:t>Caso A · mejora semántica</a:t>
+            </a:r>
+            <a:endParaRPr lang="en-US" sz="1733" dirty="0"/>
+          </a:p>
+        </p:txBody>
+      </p:sp>
+      <p:sp>
+        <p:nvSpPr>
+          <p:cNvPr id="7" name="Text 5"/>
+          <p:cNvSpPr/>
+          <p:nvPr/>
+        </p:nvSpPr>
+        <p:spPr>
+          <a:xfrm>
+            <a:off x="670560" y="1889760"/>
+            <a:ext cx="4998720" cy="268224"/>
+          </a:xfrm>
+          <a:prstGeom prst="rect">
+            <a:avLst/>
+          </a:prstGeom>
+          <a:noFill/>
+          <a:ln/>
+        </p:spPr>
+        <p:txBody>
+          <a:bodyPr wrap="square" lIns="0" tIns="0" rIns="0" bIns="0" rtlCol="0" anchor="ctr"/>
+          <a:lstStyle/>
+          <a:p>
+            <a:r>
+              <a:rPr lang="en-US" sz="1333" dirty="0">
+                <a:solidFill>
+                  <a:srgbClr val="A0A0B8"/>
+                </a:solidFill>
+                <a:latin typeface="Consolas" pitchFamily="34" charset="0"/>
+                <a:ea typeface="Consolas" pitchFamily="34" charset="-122"/>
+                <a:cs typeface="Consolas" pitchFamily="34" charset="-120"/>
+              </a:rPr>
+              <a:t>AMD · target 2023-06-21</a:t>
+            </a:r>
+            <a:endParaRPr lang="en-US" sz="1333" dirty="0"/>
+          </a:p>
+        </p:txBody>
+      </p:sp>
+      <p:sp>
+        <p:nvSpPr>
+          <p:cNvPr id="8" name="Text 6"/>
+          <p:cNvSpPr/>
+          <p:nvPr/>
+        </p:nvSpPr>
+        <p:spPr>
+          <a:xfrm>
+            <a:off x="670560" y="2194560"/>
+            <a:ext cx="4998720" cy="268224"/>
+          </a:xfrm>
+          <a:prstGeom prst="rect">
+            <a:avLst/>
+          </a:prstGeom>
+          <a:noFill/>
+          <a:ln/>
+        </p:spPr>
+        <p:txBody>
+          <a:bodyPr wrap="square" lIns="0" tIns="0" rIns="0" bIns="0" rtlCol="0" anchor="ctr"/>
+          <a:lstStyle/>
+          <a:p>
+            <a:r>
+              <a:rPr lang="en-US" sz="1333" dirty="0">
+                <a:solidFill>
+                  <a:srgbClr val="A0A0B8"/>
+                </a:solidFill>
+              </a:rPr>
+              <a:t>ROUGE-L: </a:t>
+            </a:r>
+            <a:r>
+              <a:rPr lang="en-US" sz="1333" b="1" dirty="0">
+                <a:solidFill>
+                  <a:srgbClr val="48BB78"/>
+                </a:solidFill>
+              </a:rPr>
+              <a:t>0.031 → 0.179</a:t>
+            </a:r>
+            <a:r>
+              <a:rPr lang="en-US" sz="1333" dirty="0">
+                <a:solidFill>
+                  <a:srgbClr val="A0A0B8"/>
+                </a:solidFill>
+              </a:rPr>
+              <a:t>    Sentimiento: </a:t>
+            </a:r>
+            <a:r>
+              <a:rPr lang="en-US" sz="1333" b="1" dirty="0">
+                <a:solidFill>
+                  <a:srgbClr val="48BB78"/>
+                </a:solidFill>
+              </a:rPr>
+              <a:t>base falla · fine-tuned acierta</a:t>
+            </a:r>
+            <a:endParaRPr lang="en-US" sz="1333" dirty="0"/>
+          </a:p>
+        </p:txBody>
+      </p:sp>
+      <p:sp>
+        <p:nvSpPr>
+          <p:cNvPr id="9" name="Text 7"/>
+          <p:cNvSpPr/>
+          <p:nvPr/>
+        </p:nvSpPr>
+        <p:spPr>
+          <a:xfrm>
+            <a:off x="670560" y="2560320"/>
+            <a:ext cx="4998720" cy="219456"/>
+          </a:xfrm>
+          <a:prstGeom prst="rect">
+            <a:avLst/>
+          </a:prstGeom>
+          <a:noFill/>
+          <a:ln/>
+        </p:spPr>
+        <p:txBody>
+          <a:bodyPr wrap="square" lIns="0" tIns="0" rIns="0" bIns="0" rtlCol="0" anchor="ctr"/>
+          <a:lstStyle/>
+          <a:p>
+            <a:r>
+              <a:rPr lang="en-US" sz="1200" b="1" dirty="0">
+                <a:solidFill>
+                  <a:srgbClr val="E0E0F0"/>
+                </a:solidFill>
+                <a:latin typeface="Calibri" pitchFamily="34" charset="0"/>
+                <a:ea typeface="Calibri" pitchFamily="34" charset="-122"/>
+                <a:cs typeface="Calibri" pitchFamily="34" charset="-120"/>
+              </a:rPr>
+              <a:t>Noticia real:</a:t>
+            </a:r>
+            <a:endParaRPr lang="en-US" sz="1200" dirty="0"/>
+          </a:p>
+        </p:txBody>
+      </p:sp>
+      <p:sp>
+        <p:nvSpPr>
+          <p:cNvPr id="10" name="Text 8"/>
+          <p:cNvSpPr/>
+          <p:nvPr/>
+        </p:nvSpPr>
+        <p:spPr>
+          <a:xfrm>
+            <a:off x="670560" y="2779776"/>
+            <a:ext cx="4998720" cy="426720"/>
+          </a:xfrm>
+          <a:prstGeom prst="rect">
+            <a:avLst/>
+          </a:prstGeom>
+          <a:noFill/>
+          <a:ln/>
+        </p:spPr>
+        <p:txBody>
+          <a:bodyPr wrap="square" lIns="0" tIns="0" rIns="0" bIns="0" rtlCol="0" anchor="ctr"/>
+          <a:lstStyle/>
+          <a:p>
+            <a:r>
+              <a:rPr lang="en-US" sz="1133" i="1" dirty="0">
+                <a:solidFill>
+                  <a:srgbClr val="A0A0B8"/>
+                </a:solidFill>
+                <a:latin typeface="Consolas" pitchFamily="34" charset="0"/>
+                <a:ea typeface="Consolas" pitchFamily="34" charset="-122"/>
+                <a:cs typeface="Consolas" pitchFamily="34" charset="-120"/>
+              </a:rPr>
+              <a:t>Noteworthy Wednesday Option Activity: SBGI, AMD, HUM</a:t>
+            </a:r>
+            <a:endParaRPr lang="en-US" sz="1133" dirty="0"/>
+          </a:p>
+          <a:p>
+            <a:r>
+              <a:rPr lang="en-US" sz="1133" i="1" dirty="0">
+                <a:solidFill>
+                  <a:srgbClr val="A0A0B8"/>
+                </a:solidFill>
+                <a:latin typeface="Consolas" pitchFamily="34" charset="0"/>
+                <a:ea typeface="Consolas" pitchFamily="34" charset="-122"/>
+                <a:cs typeface="Consolas" pitchFamily="34" charset="-120"/>
+              </a:rPr>
+              <a:t>Unusual Options Activity and Flow in AMD</a:t>
+            </a:r>
+            <a:endParaRPr lang="en-US" sz="1133" dirty="0"/>
+          </a:p>
+        </p:txBody>
+      </p:sp>
+      <p:sp>
+        <p:nvSpPr>
+          <p:cNvPr id="11" name="Text 9"/>
+          <p:cNvSpPr/>
+          <p:nvPr/>
+        </p:nvSpPr>
+        <p:spPr>
+          <a:xfrm>
+            <a:off x="670560" y="3243072"/>
+            <a:ext cx="4998720" cy="219456"/>
+          </a:xfrm>
+          <a:prstGeom prst="rect">
+            <a:avLst/>
+          </a:prstGeom>
+          <a:noFill/>
+          <a:ln/>
+        </p:spPr>
+        <p:txBody>
+          <a:bodyPr wrap="square" lIns="0" tIns="0" rIns="0" bIns="0" rtlCol="0" anchor="ctr"/>
+          <a:lstStyle/>
+          <a:p>
+            <a:r>
+              <a:rPr lang="en-US" sz="1200" b="1" dirty="0">
+                <a:solidFill>
+                  <a:srgbClr val="E94560"/>
+                </a:solidFill>
+                <a:latin typeface="Calibri" pitchFamily="34" charset="0"/>
+                <a:ea typeface="Calibri" pitchFamily="34" charset="-122"/>
+                <a:cs typeface="Calibri" pitchFamily="34" charset="-120"/>
+              </a:rPr>
+              <a:t>GPT-2 base:</a:t>
+            </a:r>
+            <a:endParaRPr lang="en-US" sz="1200" dirty="0"/>
+          </a:p>
+        </p:txBody>
+      </p:sp>
+      <p:sp>
+        <p:nvSpPr>
+          <p:cNvPr id="12" name="Text 10"/>
+          <p:cNvSpPr/>
+          <p:nvPr/>
+        </p:nvSpPr>
+        <p:spPr>
+          <a:xfrm>
+            <a:off x="670560" y="3462528"/>
+            <a:ext cx="4998720" cy="426720"/>
+          </a:xfrm>
+          <a:prstGeom prst="rect">
+            <a:avLst/>
+          </a:prstGeom>
+          <a:solidFill>
+            <a:srgbClr val="1A1A2E"/>
+          </a:solidFill>
+          <a:ln/>
+        </p:spPr>
+        <p:txBody>
+          <a:bodyPr wrap="square" lIns="0" tIns="0" rIns="0" bIns="0" rtlCol="0" anchor="ctr"/>
+          <a:lstStyle/>
+          <a:p>
+            <a:r>
+              <a:rPr lang="en-US" sz="1133" dirty="0">
+                <a:solidFill>
+                  <a:srgbClr val="E94560"/>
+                </a:solidFill>
+                <a:latin typeface="Consolas" pitchFamily="34" charset="0"/>
+                <a:ea typeface="Consolas" pitchFamily="34" charset="-122"/>
+                <a:cs typeface="Consolas" pitchFamily="34" charset="-120"/>
+              </a:rPr>
+              <a:t>"AMD has been in talks with Intel about their next generation of CPUs and GPUs..."</a:t>
+            </a:r>
+            <a:endParaRPr lang="en-US" sz="1133" dirty="0"/>
+          </a:p>
+        </p:txBody>
+      </p:sp>
+      <p:sp>
+        <p:nvSpPr>
+          <p:cNvPr id="13" name="Text 11"/>
+          <p:cNvSpPr/>
+          <p:nvPr/>
+        </p:nvSpPr>
+        <p:spPr>
+          <a:xfrm>
+            <a:off x="670560" y="3925824"/>
+            <a:ext cx="4998720" cy="219456"/>
+          </a:xfrm>
+          <a:prstGeom prst="rect">
+            <a:avLst/>
+          </a:prstGeom>
+          <a:noFill/>
+          <a:ln/>
+        </p:spPr>
+        <p:txBody>
+          <a:bodyPr wrap="square" lIns="0" tIns="0" rIns="0" bIns="0" rtlCol="0" anchor="ctr"/>
+          <a:lstStyle/>
+          <a:p>
+            <a:r>
+              <a:rPr lang="en-US" sz="1200" b="1" dirty="0">
+                <a:solidFill>
+                  <a:srgbClr val="00B4D8"/>
+                </a:solidFill>
+                <a:latin typeface="Calibri" pitchFamily="34" charset="0"/>
+                <a:ea typeface="Calibri" pitchFamily="34" charset="-122"/>
+                <a:cs typeface="Calibri" pitchFamily="34" charset="-120"/>
+              </a:rPr>
+              <a:t>Fine-tuned (NVDA+AMD):</a:t>
+            </a:r>
+            <a:endParaRPr lang="en-US" sz="1200" dirty="0"/>
+          </a:p>
+        </p:txBody>
+      </p:sp>
+      <p:sp>
+        <p:nvSpPr>
+          <p:cNvPr id="14" name="Text 12"/>
+          <p:cNvSpPr/>
+          <p:nvPr/>
+        </p:nvSpPr>
+        <p:spPr>
+          <a:xfrm>
+            <a:off x="670560" y="4145280"/>
+            <a:ext cx="4998720" cy="426720"/>
+          </a:xfrm>
+          <a:prstGeom prst="rect">
+            <a:avLst/>
+          </a:prstGeom>
+          <a:solidFill>
+            <a:srgbClr val="1A1A2E"/>
+          </a:solidFill>
+          <a:ln/>
+        </p:spPr>
+        <p:txBody>
+          <a:bodyPr wrap="square" lIns="0" tIns="0" rIns="0" bIns="0" rtlCol="0" anchor="ctr"/>
+          <a:lstStyle/>
+          <a:p>
+            <a:r>
+              <a:rPr lang="en-US" sz="1133" dirty="0">
+                <a:solidFill>
+                  <a:srgbClr val="00B4D8"/>
+                </a:solidFill>
+                <a:latin typeface="Consolas" pitchFamily="34" charset="0"/>
+                <a:ea typeface="Consolas" pitchFamily="34" charset="-122"/>
+                <a:cs typeface="Consolas" pitchFamily="34" charset="-120"/>
+              </a:rPr>
+              <a:t>"...Intel and Advanced Micro Devices (AMD) in Q1 Earnings Conference Call Transcripts..."</a:t>
+            </a:r>
+            <a:endParaRPr lang="en-US" sz="1133" dirty="0"/>
+          </a:p>
+        </p:txBody>
+      </p:sp>
+      <p:sp>
+        <p:nvSpPr>
+          <p:cNvPr id="15" name="Text 13"/>
+          <p:cNvSpPr/>
+          <p:nvPr/>
+        </p:nvSpPr>
+        <p:spPr>
+          <a:xfrm>
+            <a:off x="670560" y="4724400"/>
+            <a:ext cx="4998720" cy="365760"/>
+          </a:xfrm>
+          <a:prstGeom prst="rect">
+            <a:avLst/>
+          </a:prstGeom>
+          <a:noFill/>
+          <a:ln/>
+        </p:spPr>
+        <p:txBody>
+          <a:bodyPr wrap="square" lIns="0" tIns="0" rIns="0" bIns="0" rtlCol="0" anchor="ctr"/>
+          <a:lstStyle/>
+          <a:p>
+            <a:r>
+              <a:rPr lang="en-US" sz="1133" i="1" dirty="0">
+                <a:solidFill>
+                  <a:srgbClr val="E0E0F0"/>
+                </a:solidFill>
+                <a:latin typeface="Calibri" pitchFamily="34" charset="0"/>
+                <a:ea typeface="Calibri" pitchFamily="34" charset="-122"/>
+                <a:cs typeface="Calibri" pitchFamily="34" charset="-120"/>
+              </a:rPr>
+              <a:t>El fine-tuned se acerca más al formato de titular financiero y mejora el match semántico.</a:t>
+            </a:r>
+            <a:endParaRPr lang="en-US" sz="1133" dirty="0"/>
+          </a:p>
+        </p:txBody>
+      </p:sp>
+      <p:sp>
+        <p:nvSpPr>
+          <p:cNvPr id="16" name="Shape 14"/>
+          <p:cNvSpPr/>
+          <p:nvPr/>
+        </p:nvSpPr>
+        <p:spPr>
+          <a:xfrm>
+            <a:off x="6339840" y="1341120"/>
+            <a:ext cx="5364480" cy="4267200"/>
+          </a:xfrm>
+          <a:prstGeom prst="rect">
+            <a:avLst/>
+          </a:prstGeom>
+          <a:solidFill>
+            <a:srgbClr val="16213E"/>
+          </a:solidFill>
+          <a:ln/>
+          <a:effectLst>
+            <a:outerShdw blurRad="101600" dist="25400" dir="8100000" algn="bl" rotWithShape="0">
+              <a:srgbClr val="000000">
+                <a:alpha val="30000"/>
+              </a:srgbClr>
+            </a:outerShdw>
+          </a:effectLst>
+        </p:spPr>
+        <p:txBody>
+          <a:bodyPr/>
+          <a:lstStyle/>
+          <a:p>
+            <a:endParaRPr lang="es-AR" sz="2400"/>
+          </a:p>
+        </p:txBody>
+      </p:sp>
+      <p:sp>
+        <p:nvSpPr>
+          <p:cNvPr id="17" name="Shape 15"/>
+          <p:cNvSpPr/>
+          <p:nvPr/>
+        </p:nvSpPr>
+        <p:spPr>
+          <a:xfrm>
+            <a:off x="6339840" y="1341120"/>
+            <a:ext cx="5364480" cy="48768"/>
+          </a:xfrm>
+          <a:prstGeom prst="rect">
+            <a:avLst/>
+          </a:prstGeom>
+          <a:solidFill>
+            <a:srgbClr val="E94560"/>
+          </a:solidFill>
+          <a:ln/>
+        </p:spPr>
+        <p:txBody>
+          <a:bodyPr/>
+          <a:lstStyle/>
+          <a:p>
+            <a:endParaRPr lang="es-AR" sz="2400"/>
+          </a:p>
+        </p:txBody>
+      </p:sp>
+      <p:sp>
+        <p:nvSpPr>
+          <p:cNvPr id="18" name="Text 16"/>
+          <p:cNvSpPr/>
+          <p:nvPr/>
+        </p:nvSpPr>
+        <p:spPr>
+          <a:xfrm>
+            <a:off x="6522720" y="1524000"/>
+            <a:ext cx="4998720" cy="341376"/>
+          </a:xfrm>
+          <a:prstGeom prst="rect">
+            <a:avLst/>
+          </a:prstGeom>
+          <a:noFill/>
+          <a:ln/>
+        </p:spPr>
+        <p:txBody>
+          <a:bodyPr wrap="square" lIns="0" tIns="0" rIns="0" bIns="0" rtlCol="0" anchor="ctr"/>
+          <a:lstStyle/>
+          <a:p>
+            <a:r>
+              <a:rPr lang="en-US" sz="1733" b="1" dirty="0">
+                <a:solidFill>
+                  <a:srgbClr val="E94560"/>
+                </a:solidFill>
+                <a:latin typeface="Calibri" pitchFamily="34" charset="0"/>
+                <a:ea typeface="Calibri" pitchFamily="34" charset="-122"/>
+                <a:cs typeface="Calibri" pitchFamily="34" charset="-120"/>
+              </a:rPr>
+              <a:t>Caso B · directional accuracy no alcanza</a:t>
+            </a:r>
+            <a:endParaRPr lang="en-US" sz="1733" dirty="0"/>
+          </a:p>
+        </p:txBody>
+      </p:sp>
+      <p:sp>
+        <p:nvSpPr>
+          <p:cNvPr id="19" name="Text 17"/>
+          <p:cNvSpPr/>
+          <p:nvPr/>
+        </p:nvSpPr>
+        <p:spPr>
+          <a:xfrm>
+            <a:off x="6522720" y="1889760"/>
+            <a:ext cx="4998720" cy="268224"/>
+          </a:xfrm>
+          <a:prstGeom prst="rect">
+            <a:avLst/>
+          </a:prstGeom>
+          <a:noFill/>
+          <a:ln/>
+        </p:spPr>
+        <p:txBody>
+          <a:bodyPr wrap="square" lIns="0" tIns="0" rIns="0" bIns="0" rtlCol="0" anchor="ctr"/>
+          <a:lstStyle/>
+          <a:p>
+            <a:r>
+              <a:rPr lang="en-US" sz="1333" dirty="0">
+                <a:solidFill>
+                  <a:srgbClr val="A0A0B8"/>
+                </a:solidFill>
+                <a:latin typeface="Consolas" pitchFamily="34" charset="0"/>
+                <a:ea typeface="Consolas" pitchFamily="34" charset="-122"/>
+                <a:cs typeface="Consolas" pitchFamily="34" charset="-120"/>
+              </a:rPr>
+              <a:t>AMD · target 2023-05-04</a:t>
+            </a:r>
+            <a:endParaRPr lang="en-US" sz="1333" dirty="0"/>
+          </a:p>
+        </p:txBody>
+      </p:sp>
+      <p:sp>
+        <p:nvSpPr>
+          <p:cNvPr id="20" name="Text 18"/>
+          <p:cNvSpPr/>
+          <p:nvPr/>
+        </p:nvSpPr>
+        <p:spPr>
+          <a:xfrm>
+            <a:off x="6522720" y="2194560"/>
+            <a:ext cx="4998720" cy="243840"/>
+          </a:xfrm>
+          <a:prstGeom prst="rect">
+            <a:avLst/>
+          </a:prstGeom>
+          <a:noFill/>
+          <a:ln/>
+        </p:spPr>
+        <p:txBody>
+          <a:bodyPr wrap="square" lIns="0" tIns="0" rIns="0" bIns="0" rtlCol="0" anchor="ctr"/>
+          <a:lstStyle/>
+          <a:p>
+            <a:r>
+              <a:rPr lang="en-US" sz="1267" dirty="0">
+                <a:solidFill>
+                  <a:srgbClr val="A0A0B8"/>
+                </a:solidFill>
+              </a:rPr>
+              <a:t>Dir. correcta: </a:t>
+            </a:r>
+            <a:r>
+              <a:rPr lang="en-US" sz="1267" b="1" dirty="0">
+                <a:solidFill>
+                  <a:srgbClr val="E94560"/>
+                </a:solidFill>
+              </a:rPr>
+              <a:t>base sí · fine-tuned no</a:t>
+            </a:r>
+            <a:endParaRPr lang="en-US" sz="1267" dirty="0"/>
+          </a:p>
+        </p:txBody>
+      </p:sp>
+      <p:sp>
+        <p:nvSpPr>
+          <p:cNvPr id="21" name="Text 19"/>
+          <p:cNvSpPr/>
+          <p:nvPr/>
+        </p:nvSpPr>
+        <p:spPr>
+          <a:xfrm>
+            <a:off x="6522720" y="2438400"/>
+            <a:ext cx="4998720" cy="243840"/>
+          </a:xfrm>
+          <a:prstGeom prst="rect">
+            <a:avLst/>
+          </a:prstGeom>
+          <a:noFill/>
+          <a:ln/>
+        </p:spPr>
+        <p:txBody>
+          <a:bodyPr wrap="square" lIns="0" tIns="0" rIns="0" bIns="0" rtlCol="0" anchor="ctr"/>
+          <a:lstStyle/>
+          <a:p>
+            <a:r>
+              <a:rPr lang="en-US" sz="1267" dirty="0">
+                <a:solidFill>
+                  <a:srgbClr val="A0A0B8"/>
+                </a:solidFill>
+              </a:rPr>
+              <a:t>ROUGE-L: </a:t>
+            </a:r>
+            <a:r>
+              <a:rPr lang="en-US" sz="1267" b="1" dirty="0">
+                <a:solidFill>
+                  <a:srgbClr val="A0A0B8"/>
+                </a:solidFill>
+              </a:rPr>
+              <a:t>0.000 → 0.035</a:t>
+            </a:r>
+            <a:endParaRPr lang="en-US" sz="1267" dirty="0"/>
+          </a:p>
+        </p:txBody>
+      </p:sp>
+      <p:sp>
+        <p:nvSpPr>
+          <p:cNvPr id="22" name="Text 20"/>
+          <p:cNvSpPr/>
+          <p:nvPr/>
+        </p:nvSpPr>
+        <p:spPr>
+          <a:xfrm>
+            <a:off x="6522720" y="2779776"/>
+            <a:ext cx="4998720" cy="219456"/>
+          </a:xfrm>
+          <a:prstGeom prst="rect">
+            <a:avLst/>
+          </a:prstGeom>
+          <a:noFill/>
+          <a:ln/>
+        </p:spPr>
+        <p:txBody>
+          <a:bodyPr wrap="square" lIns="0" tIns="0" rIns="0" bIns="0" rtlCol="0" anchor="ctr"/>
+          <a:lstStyle/>
+          <a:p>
+            <a:r>
+              <a:rPr lang="en-US" sz="1200" b="1" dirty="0">
+                <a:solidFill>
+                  <a:srgbClr val="E0E0F0"/>
+                </a:solidFill>
+                <a:latin typeface="Calibri" pitchFamily="34" charset="0"/>
+                <a:ea typeface="Calibri" pitchFamily="34" charset="-122"/>
+                <a:cs typeface="Calibri" pitchFamily="34" charset="-120"/>
+              </a:rPr>
+              <a:t>Noticia real:</a:t>
+            </a:r>
+            <a:endParaRPr lang="en-US" sz="1200" dirty="0"/>
+          </a:p>
+        </p:txBody>
+      </p:sp>
+      <p:sp>
+        <p:nvSpPr>
+          <p:cNvPr id="23" name="Text 21"/>
+          <p:cNvSpPr/>
+          <p:nvPr/>
+        </p:nvSpPr>
+        <p:spPr>
+          <a:xfrm>
+            <a:off x="6522720" y="2999232"/>
+            <a:ext cx="4998720" cy="426720"/>
+          </a:xfrm>
+          <a:prstGeom prst="rect">
+            <a:avLst/>
+          </a:prstGeom>
+          <a:noFill/>
+          <a:ln/>
+        </p:spPr>
+        <p:txBody>
+          <a:bodyPr wrap="square" lIns="0" tIns="0" rIns="0" bIns="0" rtlCol="0" anchor="ctr"/>
+          <a:lstStyle/>
+          <a:p>
+            <a:r>
+              <a:rPr lang="en-US" sz="1133" i="1" dirty="0">
+                <a:solidFill>
+                  <a:srgbClr val="A0A0B8"/>
+                </a:solidFill>
+                <a:latin typeface="Consolas" pitchFamily="34" charset="0"/>
+                <a:ea typeface="Consolas" pitchFamily="34" charset="-122"/>
+                <a:cs typeface="Consolas" pitchFamily="34" charset="-120"/>
+              </a:rPr>
+              <a:t>Why AMD Stock Zoomed Higher on AI News Today</a:t>
+            </a:r>
+            <a:endParaRPr lang="en-US" sz="1133" dirty="0"/>
+          </a:p>
+          <a:p>
+            <a:r>
+              <a:rPr lang="en-US" sz="1133" i="1" dirty="0">
+                <a:solidFill>
+                  <a:srgbClr val="A0A0B8"/>
+                </a:solidFill>
+                <a:latin typeface="Consolas" pitchFamily="34" charset="0"/>
+                <a:ea typeface="Consolas" pitchFamily="34" charset="-122"/>
+                <a:cs typeface="Consolas" pitchFamily="34" charset="-120"/>
+              </a:rPr>
+              <a:t>Qualcomm amplifies chip gloom with 'sobering report'</a:t>
+            </a:r>
+            <a:endParaRPr lang="en-US" sz="1133" dirty="0"/>
+          </a:p>
+        </p:txBody>
+      </p:sp>
+      <p:sp>
+        <p:nvSpPr>
+          <p:cNvPr id="24" name="Text 22"/>
+          <p:cNvSpPr/>
+          <p:nvPr/>
+        </p:nvSpPr>
+        <p:spPr>
+          <a:xfrm>
+            <a:off x="6522720" y="3462528"/>
+            <a:ext cx="4998720" cy="219456"/>
+          </a:xfrm>
+          <a:prstGeom prst="rect">
+            <a:avLst/>
+          </a:prstGeom>
+          <a:noFill/>
+          <a:ln/>
+        </p:spPr>
+        <p:txBody>
+          <a:bodyPr wrap="square" lIns="0" tIns="0" rIns="0" bIns="0" rtlCol="0" anchor="ctr"/>
+          <a:lstStyle/>
+          <a:p>
+            <a:r>
+              <a:rPr lang="en-US" sz="1200" b="1" dirty="0">
+                <a:solidFill>
+                  <a:srgbClr val="E94560"/>
+                </a:solidFill>
+                <a:latin typeface="Calibri" pitchFamily="34" charset="0"/>
+                <a:ea typeface="Calibri" pitchFamily="34" charset="-122"/>
+                <a:cs typeface="Calibri" pitchFamily="34" charset="-120"/>
+              </a:rPr>
+              <a:t>GPT-2 base:</a:t>
+            </a:r>
+            <a:endParaRPr lang="en-US" sz="1200" dirty="0"/>
+          </a:p>
+        </p:txBody>
+      </p:sp>
+      <p:sp>
+        <p:nvSpPr>
+          <p:cNvPr id="25" name="Text 23"/>
+          <p:cNvSpPr/>
+          <p:nvPr/>
+        </p:nvSpPr>
+        <p:spPr>
+          <a:xfrm>
+            <a:off x="6522720" y="3681984"/>
+            <a:ext cx="4998720" cy="426720"/>
+          </a:xfrm>
+          <a:prstGeom prst="rect">
+            <a:avLst/>
+          </a:prstGeom>
+          <a:solidFill>
+            <a:srgbClr val="1A1A2E"/>
+          </a:solidFill>
+          <a:ln/>
+        </p:spPr>
+        <p:txBody>
+          <a:bodyPr wrap="square" lIns="0" tIns="0" rIns="0" bIns="0" rtlCol="0" anchor="ctr"/>
+          <a:lstStyle/>
+          <a:p>
+            <a:r>
+              <a:rPr lang="en-US" sz="1133" dirty="0">
+                <a:solidFill>
+                  <a:srgbClr val="E94560"/>
+                </a:solidFill>
+                <a:latin typeface="Consolas" pitchFamily="34" charset="0"/>
+                <a:ea typeface="Consolas" pitchFamily="34" charset="-122"/>
+                <a:cs typeface="Consolas" pitchFamily="34" charset="-120"/>
+              </a:rPr>
+              <a:t>"10/20 at 11 AM EDT | CNBC Newsroom – 'The Dow Jones Industrial Average has fallen...'"</a:t>
+            </a:r>
+            <a:endParaRPr lang="en-US" sz="1133" dirty="0"/>
+          </a:p>
+        </p:txBody>
+      </p:sp>
+      <p:sp>
+        <p:nvSpPr>
+          <p:cNvPr id="26" name="Text 24"/>
+          <p:cNvSpPr/>
+          <p:nvPr/>
+        </p:nvSpPr>
+        <p:spPr>
+          <a:xfrm>
+            <a:off x="6522720" y="4145280"/>
+            <a:ext cx="4998720" cy="219456"/>
+          </a:xfrm>
+          <a:prstGeom prst="rect">
+            <a:avLst/>
+          </a:prstGeom>
+          <a:noFill/>
+          <a:ln/>
+        </p:spPr>
+        <p:txBody>
+          <a:bodyPr wrap="square" lIns="0" tIns="0" rIns="0" bIns="0" rtlCol="0" anchor="ctr"/>
+          <a:lstStyle/>
+          <a:p>
+            <a:r>
+              <a:rPr lang="en-US" sz="1200" b="1" dirty="0">
+                <a:solidFill>
+                  <a:srgbClr val="00B4D8"/>
+                </a:solidFill>
+                <a:latin typeface="Calibri" pitchFamily="34" charset="0"/>
+                <a:ea typeface="Calibri" pitchFamily="34" charset="-122"/>
+                <a:cs typeface="Calibri" pitchFamily="34" charset="-120"/>
+              </a:rPr>
+              <a:t>Fine-tuned (NVDA+AMD):</a:t>
+            </a:r>
+            <a:endParaRPr lang="en-US" sz="1200" dirty="0"/>
+          </a:p>
+        </p:txBody>
+      </p:sp>
+      <p:sp>
+        <p:nvSpPr>
+          <p:cNvPr id="27" name="Text 25"/>
+          <p:cNvSpPr/>
+          <p:nvPr/>
+        </p:nvSpPr>
+        <p:spPr>
+          <a:xfrm>
+            <a:off x="6522720" y="4364736"/>
+            <a:ext cx="4998720" cy="426720"/>
+          </a:xfrm>
+          <a:prstGeom prst="rect">
+            <a:avLst/>
+          </a:prstGeom>
+          <a:solidFill>
+            <a:srgbClr val="1A1A2E"/>
+          </a:solidFill>
+          <a:ln/>
+        </p:spPr>
+        <p:txBody>
+          <a:bodyPr wrap="square" lIns="0" tIns="0" rIns="0" bIns="0" rtlCol="0" anchor="ctr"/>
+          <a:lstStyle/>
+          <a:p>
+            <a:r>
+              <a:rPr lang="en-US" sz="1133" dirty="0">
+                <a:solidFill>
+                  <a:srgbClr val="00B4D8"/>
+                </a:solidFill>
+                <a:latin typeface="Consolas" pitchFamily="34" charset="0"/>
+                <a:ea typeface="Consolas" pitchFamily="34" charset="-122"/>
+                <a:cs typeface="Consolas" pitchFamily="34" charset="-120"/>
+              </a:rPr>
+              <a:t>"Intel's New Chips Could Make It a Winner... 3 Reasons To Invest $100 In NVIDIA Today!"</a:t>
+            </a:r>
+            <a:endParaRPr lang="en-US" sz="1133" dirty="0"/>
+          </a:p>
+        </p:txBody>
+      </p:sp>
+      <p:sp>
+        <p:nvSpPr>
+          <p:cNvPr id="28" name="Text 26"/>
+          <p:cNvSpPr/>
+          <p:nvPr/>
+        </p:nvSpPr>
+        <p:spPr>
+          <a:xfrm>
+            <a:off x="6522720" y="4828032"/>
+            <a:ext cx="4998720" cy="365760"/>
+          </a:xfrm>
+          <a:prstGeom prst="rect">
+            <a:avLst/>
+          </a:prstGeom>
+          <a:noFill/>
+          <a:ln/>
+        </p:spPr>
+        <p:txBody>
+          <a:bodyPr wrap="square" lIns="0" tIns="0" rIns="0" bIns="0" rtlCol="0" anchor="ctr"/>
+          <a:lstStyle/>
+          <a:p>
+            <a:r>
+              <a:rPr lang="en-US" sz="1133" i="1" dirty="0">
+                <a:solidFill>
+                  <a:srgbClr val="E0E0F0"/>
+                </a:solidFill>
+                <a:latin typeface="Calibri" pitchFamily="34" charset="0"/>
+                <a:ea typeface="Calibri" pitchFamily="34" charset="-122"/>
+                <a:cs typeface="Calibri" pitchFamily="34" charset="-120"/>
+              </a:rPr>
+              <a:t>GPT-2 base acierta la dirección, pero el texto es genérico. Directional accuracy sola no valida calidad.</a:t>
+            </a:r>
+            <a:endParaRPr lang="en-US" sz="1133" dirty="0"/>
+          </a:p>
+        </p:txBody>
+      </p:sp>
+      <p:sp>
+        <p:nvSpPr>
+          <p:cNvPr id="29" name="Shape 27"/>
+          <p:cNvSpPr/>
+          <p:nvPr/>
+        </p:nvSpPr>
+        <p:spPr>
+          <a:xfrm>
+            <a:off x="487680" y="5852160"/>
+            <a:ext cx="11216640" cy="670560"/>
+          </a:xfrm>
+          <a:prstGeom prst="rect">
+            <a:avLst/>
+          </a:prstGeom>
+          <a:solidFill>
+            <a:srgbClr val="0F3460"/>
+          </a:solidFill>
+          <a:ln/>
+          <a:effectLst>
+            <a:outerShdw blurRad="50800" dist="12700" dir="8100000" algn="bl" rotWithShape="0">
+              <a:srgbClr val="000000">
+                <a:alpha val="20000"/>
+              </a:srgbClr>
+            </a:outerShdw>
+          </a:effectLst>
+        </p:spPr>
+        <p:txBody>
+          <a:bodyPr/>
+          <a:lstStyle/>
+          <a:p>
+            <a:endParaRPr lang="es-AR" sz="2400"/>
+          </a:p>
+        </p:txBody>
+      </p:sp>
+      <p:sp>
+        <p:nvSpPr>
+          <p:cNvPr id="30" name="Text 28"/>
+          <p:cNvSpPr/>
+          <p:nvPr/>
+        </p:nvSpPr>
+        <p:spPr>
+          <a:xfrm>
+            <a:off x="731520" y="5913120"/>
+            <a:ext cx="10728960" cy="548640"/>
+          </a:xfrm>
+          <a:prstGeom prst="rect">
+            <a:avLst/>
+          </a:prstGeom>
+          <a:noFill/>
+          <a:ln/>
+        </p:spPr>
+        <p:txBody>
+          <a:bodyPr wrap="square" lIns="0" tIns="0" rIns="0" bIns="0" rtlCol="0" anchor="ctr"/>
+          <a:lstStyle/>
+          <a:p>
+            <a:pPr algn="ctr"/>
+            <a:r>
+              <a:rPr lang="en-US" sz="1333" dirty="0">
+                <a:solidFill>
+                  <a:srgbClr val="E0E0F0"/>
+                </a:solidFill>
+                <a:latin typeface="Calibri" pitchFamily="34" charset="0"/>
+                <a:ea typeface="Calibri" pitchFamily="34" charset="-122"/>
+                <a:cs typeface="Calibri" pitchFamily="34" charset="-120"/>
+              </a:rPr>
+              <a:t>La inspección cualitativa confirma la lectura de métricas: fine-tuning mejora lenguaje financiero, pero una señal direccional correcta no implica una buena narrativa.</a:t>
+            </a:r>
+            <a:endParaRPr lang="en-US" sz="1333" dirty="0"/>
+          </a:p>
+        </p:txBody>
+      </p:sp>
+      <p:sp>
+        <p:nvSpPr>
+          <p:cNvPr id="31" name="Text 1">
+            <a:extLst>
+              <a:ext uri="{FF2B5EF4-FFF2-40B4-BE49-F238E27FC236}">
+                <a16:creationId xmlns:a16="http://schemas.microsoft.com/office/drawing/2014/main" id="{F2754BDD-2019-BBD5-EF0E-06B8B6B82F66}"/>
+              </a:ext>
+            </a:extLst>
+          </p:cNvPr>
+          <p:cNvSpPr/>
+          <p:nvPr/>
+        </p:nvSpPr>
+        <p:spPr>
+          <a:xfrm>
+            <a:off x="487680" y="304546"/>
+            <a:ext cx="10332720" cy="749808"/>
           </a:xfrm>
           <a:prstGeom prst="rect">
             <a:avLst/>
@@ -6255,20 +8266,48 @@
               <a:buNone/>
             </a:pPr>
             <a:r>
-              <a:rPr lang="en-US" sz="1150" b="1" kern="0" spc="300" dirty="0">
-                <a:solidFill>
-                  <a:srgbClr val="2A7F8C"/>
-                </a:solidFill>
-                <a:latin typeface="Calibri" pitchFamily="34" charset="0"/>
-                <a:ea typeface="Calibri" pitchFamily="34" charset="-122"/>
-                <a:cs typeface="Calibri" pitchFamily="34" charset="-120"/>
-              </a:rPr>
-              <a:t>CIERRE</a:t>
-            </a:r>
-            <a:endParaRPr lang="en-US" sz="1150" dirty="0"/>
-          </a:p>
-        </p:txBody>
-      </p:sp>
+              <a:rPr lang="en-US" sz="2800" b="1" dirty="0">
+                <a:solidFill>
+                  <a:srgbClr val="23304A"/>
+                </a:solidFill>
+                <a:latin typeface="Arial" panose="020B0604020202020204" pitchFamily="34" charset="0"/>
+                <a:ea typeface="Georgia" pitchFamily="34" charset="-122"/>
+                <a:cs typeface="Arial" panose="020B0604020202020204" pitchFamily="34" charset="0"/>
+              </a:rPr>
+              <a:t>Ejemplos cualitativos</a:t>
+            </a:r>
+            <a:endParaRPr lang="en-US" sz="2800" dirty="0">
+              <a:latin typeface="Arial" panose="020B0604020202020204" pitchFamily="34" charset="0"/>
+              <a:cs typeface="Arial" panose="020B0604020202020204" pitchFamily="34" charset="0"/>
+            </a:endParaRPr>
+          </a:p>
+        </p:txBody>
+      </p:sp>
+    </p:spTree>
+  </p:cSld>
+  <p:clrMapOvr>
+    <a:masterClrMapping/>
+  </p:clrMapOvr>
+</p:sld>
+</file>
+
+<file path=ppt/slides/slide13.xml><?xml version="1.0" encoding="utf-8"?>
+<p:sld xmlns:a="http://schemas.openxmlformats.org/drawingml/2006/main" xmlns:r="http://schemas.openxmlformats.org/officeDocument/2006/relationships" xmlns:p="http://schemas.openxmlformats.org/presentationml/2006/main">
+  <p:cSld>
+    <p:spTree>
+      <p:nvGrpSpPr>
+        <p:cNvPr id="1" name=""/>
+        <p:cNvGrpSpPr/>
+        <p:nvPr/>
+      </p:nvGrpSpPr>
+      <p:grpSpPr>
+        <a:xfrm>
+          <a:off x="0" y="0"/>
+          <a:ext cx="0" cy="0"/>
+          <a:chOff x="0" y="0"/>
+          <a:chExt cx="0" cy="0"/>
+        </a:xfrm>
+      </p:grpSpPr>
       <p:sp>
         <p:nvSpPr>
           <p:cNvPr id="3" name="Text 1"/>
@@ -6298,13 +8337,16 @@
                 <a:solidFill>
                   <a:srgbClr val="FFFFFF"/>
                 </a:solidFill>
-                <a:latin typeface="Georgia" pitchFamily="34" charset="0"/>
+                <a:latin typeface="Arial" panose="020B0604020202020204" pitchFamily="34" charset="0"/>
                 <a:ea typeface="Georgia" pitchFamily="34" charset="-122"/>
-                <a:cs typeface="Georgia" pitchFamily="34" charset="-120"/>
+                <a:cs typeface="Arial" panose="020B0604020202020204" pitchFamily="34" charset="0"/>
               </a:rPr>
               <a:t>Limitaciones y conclusiones</a:t>
             </a:r>
-            <a:endParaRPr lang="en-US" sz="2800" dirty="0"/>
+            <a:endParaRPr lang="en-US" sz="2800" dirty="0">
+              <a:latin typeface="Arial" panose="020B0604020202020204" pitchFamily="34" charset="0"/>
+              <a:cs typeface="Arial" panose="020B0604020202020204" pitchFamily="34" charset="0"/>
+            </a:endParaRPr>
           </a:p>
         </p:txBody>
       </p:sp>
@@ -6337,13 +8379,16 @@
                 <a:solidFill>
                   <a:srgbClr val="3A4E72"/>
                 </a:solidFill>
-                <a:latin typeface="Georgia" pitchFamily="34" charset="0"/>
+                <a:latin typeface="Arial" panose="020B0604020202020204" pitchFamily="34" charset="0"/>
                 <a:ea typeface="Georgia" pitchFamily="34" charset="-122"/>
-                <a:cs typeface="Georgia" pitchFamily="34" charset="-120"/>
+                <a:cs typeface="Arial" panose="020B0604020202020204" pitchFamily="34" charset="0"/>
               </a:rPr>
               <a:t>12</a:t>
             </a:r>
-            <a:endParaRPr lang="en-US" sz="1500" dirty="0"/>
+            <a:endParaRPr lang="en-US" sz="1500" dirty="0">
+              <a:latin typeface="Arial" panose="020B0604020202020204" pitchFamily="34" charset="0"/>
+              <a:cs typeface="Arial" panose="020B0604020202020204" pitchFamily="34" charset="0"/>
+            </a:endParaRPr>
           </a:p>
         </p:txBody>
       </p:sp>
@@ -6355,7 +8400,7 @@
         </p:nvSpPr>
         <p:spPr>
           <a:xfrm>
-            <a:off x="640080" y="1600200"/>
+            <a:off x="589280" y="1478788"/>
             <a:ext cx="5074920" cy="4334256"/>
           </a:xfrm>
           <a:prstGeom prst="rect">
@@ -6371,31 +8416,17 @@
             <a:prstDash val="solid"/>
           </a:ln>
         </p:spPr>
-      </p:sp>
-      <p:pic>
-        <p:nvPicPr>
-          <p:cNvPr id="6" name="Image 0" descr="icon_warn.png"/>
-          <p:cNvPicPr>
-            <a:picLocks noChangeAspect="1"/>
-          </p:cNvPicPr>
-          <p:nvPr/>
-        </p:nvPicPr>
-        <p:blipFill>
-          <a:blip r:embed="rId3"/>
-          <a:stretch>
-            <a:fillRect/>
-          </a:stretch>
-        </p:blipFill>
-        <p:spPr>
-          <a:xfrm>
-            <a:off x="914400" y="1856232"/>
-            <a:ext cx="329184" cy="329184"/>
-          </a:xfrm>
-          <a:prstGeom prst="rect">
-            <a:avLst/>
-          </a:prstGeom>
-        </p:spPr>
-      </p:pic>
+        <p:txBody>
+          <a:bodyPr/>
+          <a:lstStyle/>
+          <a:p>
+            <a:endParaRPr lang="es-AR">
+              <a:latin typeface="Arial" panose="020B0604020202020204" pitchFamily="34" charset="0"/>
+              <a:cs typeface="Arial" panose="020B0604020202020204" pitchFamily="34" charset="0"/>
+            </a:endParaRPr>
+          </a:p>
+        </p:txBody>
+      </p:sp>
       <p:sp>
         <p:nvSpPr>
           <p:cNvPr id="7" name="Text 4"/>
@@ -6404,7 +8435,7 @@
         </p:nvSpPr>
         <p:spPr>
           <a:xfrm>
-            <a:off x="1353312" y="1837944"/>
+            <a:off x="900176" y="2009140"/>
             <a:ext cx="4160520" cy="365760"/>
           </a:xfrm>
           <a:prstGeom prst="rect">
@@ -6425,13 +8456,16 @@
                 <a:solidFill>
                   <a:srgbClr val="FFFFFF"/>
                 </a:solidFill>
-                <a:latin typeface="Georgia" pitchFamily="34" charset="0"/>
+                <a:latin typeface="Arial" panose="020B0604020202020204" pitchFamily="34" charset="0"/>
                 <a:ea typeface="Georgia" pitchFamily="34" charset="-122"/>
-                <a:cs typeface="Georgia" pitchFamily="34" charset="-120"/>
+                <a:cs typeface="Arial" panose="020B0604020202020204" pitchFamily="34" charset="0"/>
               </a:rPr>
               <a:t>Limitaciones</a:t>
             </a:r>
-            <a:endParaRPr lang="en-US" sz="1600" dirty="0"/>
+            <a:endParaRPr lang="en-US" sz="1600" dirty="0">
+              <a:latin typeface="Arial" panose="020B0604020202020204" pitchFamily="34" charset="0"/>
+              <a:cs typeface="Arial" panose="020B0604020202020204" pitchFamily="34" charset="0"/>
+            </a:endParaRPr>
           </a:p>
         </p:txBody>
       </p:sp>
@@ -6443,7 +8477,7 @@
         </p:nvSpPr>
         <p:spPr>
           <a:xfrm>
-            <a:off x="950976" y="2331720"/>
+            <a:off x="900176" y="2210308"/>
             <a:ext cx="4526280" cy="3374136"/>
           </a:xfrm>
           <a:prstGeom prst="rect">
@@ -6468,13 +8502,16 @@
                 <a:solidFill>
                   <a:srgbClr val="C2CEDF"/>
                 </a:solidFill>
-                <a:latin typeface="Calibri" pitchFamily="34" charset="0"/>
+                <a:latin typeface="Arial" panose="020B0604020202020204" pitchFamily="34" charset="0"/>
                 <a:ea typeface="Calibri" pitchFamily="34" charset="-122"/>
-                <a:cs typeface="Calibri" pitchFamily="34" charset="-120"/>
+                <a:cs typeface="Arial" panose="020B0604020202020204" pitchFamily="34" charset="0"/>
               </a:rPr>
               <a:t>Dataset de test pequeño para concluir robustez.</a:t>
             </a:r>
-            <a:endParaRPr lang="en-US" sz="1100" dirty="0"/>
+            <a:endParaRPr lang="en-US" sz="1100" dirty="0">
+              <a:latin typeface="Arial" panose="020B0604020202020204" pitchFamily="34" charset="0"/>
+              <a:cs typeface="Arial" panose="020B0604020202020204" pitchFamily="34" charset="0"/>
+            </a:endParaRPr>
           </a:p>
           <a:p>
             <a:pPr marL="342900" indent="-342900">
@@ -6489,13 +8526,16 @@
                 <a:solidFill>
                   <a:srgbClr val="C2CEDF"/>
                 </a:solidFill>
-                <a:latin typeface="Calibri" pitchFamily="34" charset="0"/>
+                <a:latin typeface="Arial" panose="020B0604020202020204" pitchFamily="34" charset="0"/>
                 <a:ea typeface="Calibri" pitchFamily="34" charset="-122"/>
-                <a:cs typeface="Calibri" pitchFamily="34" charset="-120"/>
-              </a:rPr>
-              <a:t>Titulares agregados por día, no artículos completos.</a:t>
-            </a:r>
-            <a:endParaRPr lang="en-US" sz="1100" dirty="0"/>
+                <a:cs typeface="Arial" panose="020B0604020202020204" pitchFamily="34" charset="0"/>
+              </a:rPr>
+              <a:t>GPT-2 small: capacidad limitada, salidas genéricas.</a:t>
+            </a:r>
+            <a:endParaRPr lang="en-US" sz="1100" dirty="0">
+              <a:latin typeface="Arial" panose="020B0604020202020204" pitchFamily="34" charset="0"/>
+              <a:cs typeface="Arial" panose="020B0604020202020204" pitchFamily="34" charset="0"/>
+            </a:endParaRPr>
           </a:p>
           <a:p>
             <a:pPr marL="342900" indent="-342900">
@@ -6510,13 +8550,16 @@
                 <a:solidFill>
                   <a:srgbClr val="C2CEDF"/>
                 </a:solidFill>
-                <a:latin typeface="Calibri" pitchFamily="34" charset="0"/>
+                <a:latin typeface="Arial" panose="020B0604020202020204" pitchFamily="34" charset="0"/>
                 <a:ea typeface="Calibri" pitchFamily="34" charset="-122"/>
-                <a:cs typeface="Calibri" pitchFamily="34" charset="-120"/>
-              </a:rPr>
-              <a:t>GPT-2 small: capacidad limitada, salidas genéricas.</a:t>
-            </a:r>
-            <a:endParaRPr lang="en-US" sz="1100" dirty="0"/>
+                <a:cs typeface="Arial" panose="020B0604020202020204" pitchFamily="34" charset="0"/>
+              </a:rPr>
+              <a:t>FinBERT es un evaluador automático imperfecto.</a:t>
+            </a:r>
+            <a:endParaRPr lang="en-US" sz="1100" dirty="0">
+              <a:latin typeface="Arial" panose="020B0604020202020204" pitchFamily="34" charset="0"/>
+              <a:cs typeface="Arial" panose="020B0604020202020204" pitchFamily="34" charset="0"/>
+            </a:endParaRPr>
           </a:p>
           <a:p>
             <a:pPr marL="342900" indent="-342900">
@@ -6531,13 +8574,16 @@
                 <a:solidFill>
                   <a:srgbClr val="C2CEDF"/>
                 </a:solidFill>
-                <a:latin typeface="Calibri" pitchFamily="34" charset="0"/>
+                <a:latin typeface="Arial" panose="020B0604020202020204" pitchFamily="34" charset="0"/>
                 <a:ea typeface="Calibri" pitchFamily="34" charset="-122"/>
-                <a:cs typeface="Calibri" pitchFamily="34" charset="-120"/>
-              </a:rPr>
-              <a:t>FinBERT es un evaluador automático imperfecto.</a:t>
-            </a:r>
-            <a:endParaRPr lang="en-US" sz="1100" dirty="0"/>
+                <a:cs typeface="Arial" panose="020B0604020202020204" pitchFamily="34" charset="0"/>
+              </a:rPr>
+              <a:t>La dir. accuracy depende de la distribución de clases.</a:t>
+            </a:r>
+            <a:endParaRPr lang="en-US" sz="1100" dirty="0">
+              <a:latin typeface="Arial" panose="020B0604020202020204" pitchFamily="34" charset="0"/>
+              <a:cs typeface="Arial" panose="020B0604020202020204" pitchFamily="34" charset="0"/>
+            </a:endParaRPr>
           </a:p>
           <a:p>
             <a:pPr marL="342900" indent="-342900">
@@ -6552,34 +8598,16 @@
                 <a:solidFill>
                   <a:srgbClr val="C2CEDF"/>
                 </a:solidFill>
-                <a:latin typeface="Calibri" pitchFamily="34" charset="0"/>
+                <a:latin typeface="Arial" panose="020B0604020202020204" pitchFamily="34" charset="0"/>
                 <a:ea typeface="Calibri" pitchFamily="34" charset="-122"/>
-                <a:cs typeface="Calibri" pitchFamily="34" charset="-120"/>
-              </a:rPr>
-              <a:t>La dir. accuracy depende de la distribución de clases.</a:t>
-            </a:r>
-            <a:endParaRPr lang="en-US" sz="1100" dirty="0"/>
-          </a:p>
-          <a:p>
-            <a:pPr marL="342900" indent="-342900">
-              <a:spcAft>
-                <a:spcPts val="900"/>
-              </a:spcAft>
-              <a:buSzPct val="100000"/>
-              <a:buChar char="–"/>
-            </a:pPr>
-            <a:r>
-              <a:rPr lang="en-US" sz="1100" dirty="0">
-                <a:solidFill>
-                  <a:srgbClr val="C2CEDF"/>
-                </a:solidFill>
-                <a:latin typeface="Calibri" pitchFamily="34" charset="0"/>
-                <a:ea typeface="Calibri" pitchFamily="34" charset="-122"/>
-                <a:cs typeface="Calibri" pitchFamily="34" charset="-120"/>
+                <a:cs typeface="Arial" panose="020B0604020202020204" pitchFamily="34" charset="0"/>
               </a:rPr>
               <a:t>Sin significancia estadística fuerte (p &lt; 0.05).</a:t>
             </a:r>
-            <a:endParaRPr lang="en-US" sz="1100" dirty="0"/>
+            <a:endParaRPr lang="en-US" sz="1100" dirty="0">
+              <a:latin typeface="Arial" panose="020B0604020202020204" pitchFamily="34" charset="0"/>
+              <a:cs typeface="Arial" panose="020B0604020202020204" pitchFamily="34" charset="0"/>
+            </a:endParaRPr>
           </a:p>
         </p:txBody>
       </p:sp>
@@ -6591,7 +8619,7 @@
         </p:nvSpPr>
         <p:spPr>
           <a:xfrm>
-            <a:off x="6016752" y="1600200"/>
+            <a:off x="5975096" y="1961388"/>
             <a:ext cx="5534863" cy="713232"/>
           </a:xfrm>
           <a:prstGeom prst="rect">
@@ -6607,6 +8635,16 @@
             <a:prstDash val="solid"/>
           </a:ln>
         </p:spPr>
+        <p:txBody>
+          <a:bodyPr/>
+          <a:lstStyle/>
+          <a:p>
+            <a:endParaRPr lang="es-AR">
+              <a:latin typeface="Arial" panose="020B0604020202020204" pitchFamily="34" charset="0"/>
+              <a:cs typeface="Arial" panose="020B0604020202020204" pitchFamily="34" charset="0"/>
+            </a:endParaRPr>
+          </a:p>
+        </p:txBody>
       </p:sp>
       <p:sp>
         <p:nvSpPr>
@@ -6616,7 +8654,7 @@
         </p:nvSpPr>
         <p:spPr>
           <a:xfrm>
-            <a:off x="6199632" y="1764792"/>
+            <a:off x="6157976" y="2125980"/>
             <a:ext cx="384048" cy="384048"/>
           </a:xfrm>
           <a:prstGeom prst="ellipse">
@@ -6632,6 +8670,16 @@
             <a:prstDash val="solid"/>
           </a:ln>
         </p:spPr>
+        <p:txBody>
+          <a:bodyPr/>
+          <a:lstStyle/>
+          <a:p>
+            <a:endParaRPr lang="es-AR">
+              <a:latin typeface="Arial" panose="020B0604020202020204" pitchFamily="34" charset="0"/>
+              <a:cs typeface="Arial" panose="020B0604020202020204" pitchFamily="34" charset="0"/>
+            </a:endParaRPr>
+          </a:p>
+        </p:txBody>
       </p:sp>
       <p:pic>
         <p:nvPicPr>
@@ -6642,14 +8690,14 @@
           <p:nvPr/>
         </p:nvPicPr>
         <p:blipFill>
-          <a:blip r:embed="rId4"/>
+          <a:blip r:embed="rId3"/>
           <a:stretch>
             <a:fillRect/>
           </a:stretch>
         </p:blipFill>
         <p:spPr>
           <a:xfrm>
-            <a:off x="6291072" y="1856232"/>
+            <a:off x="6249416" y="2217420"/>
             <a:ext cx="201168" cy="201168"/>
           </a:xfrm>
           <a:prstGeom prst="rect">
@@ -6665,7 +8713,7 @@
         </p:nvSpPr>
         <p:spPr>
           <a:xfrm>
-            <a:off x="6766560" y="1600200"/>
+            <a:off x="6724904" y="1961388"/>
             <a:ext cx="4602175" cy="713232"/>
           </a:xfrm>
           <a:prstGeom prst="rect">
@@ -6689,13 +8737,16 @@
                 <a:solidFill>
                   <a:srgbClr val="E6ECF5"/>
                 </a:solidFill>
-                <a:latin typeface="Calibri" pitchFamily="34" charset="0"/>
+                <a:latin typeface="Arial" panose="020B0604020202020204" pitchFamily="34" charset="0"/>
                 <a:ea typeface="Calibri" pitchFamily="34" charset="-122"/>
-                <a:cs typeface="Calibri" pitchFamily="34" charset="-120"/>
-              </a:rPr>
-              <a:t>GPT-2 fine-tuneado aprende vocabulario, estilo y formato financiero.</a:t>
-            </a:r>
-            <a:endParaRPr lang="en-US" sz="1080" dirty="0"/>
+                <a:cs typeface="Arial" panose="020B0604020202020204" pitchFamily="34" charset="0"/>
+              </a:rPr>
+              <a:t>GPT-2 base genera texto financiero genérico, con baja calidad semántica.</a:t>
+            </a:r>
+            <a:endParaRPr lang="en-US" sz="1080" dirty="0">
+              <a:latin typeface="Arial" panose="020B0604020202020204" pitchFamily="34" charset="0"/>
+              <a:cs typeface="Arial" panose="020B0604020202020204" pitchFamily="34" charset="0"/>
+            </a:endParaRPr>
           </a:p>
         </p:txBody>
       </p:sp>
@@ -6707,7 +8758,7 @@
         </p:nvSpPr>
         <p:spPr>
           <a:xfrm>
-            <a:off x="6016752" y="2441448"/>
+            <a:off x="5975096" y="2802636"/>
             <a:ext cx="5534863" cy="713232"/>
           </a:xfrm>
           <a:prstGeom prst="rect">
@@ -6723,6 +8774,16 @@
             <a:prstDash val="solid"/>
           </a:ln>
         </p:spPr>
+        <p:txBody>
+          <a:bodyPr/>
+          <a:lstStyle/>
+          <a:p>
+            <a:endParaRPr lang="es-AR">
+              <a:latin typeface="Arial" panose="020B0604020202020204" pitchFamily="34" charset="0"/>
+              <a:cs typeface="Arial" panose="020B0604020202020204" pitchFamily="34" charset="0"/>
+            </a:endParaRPr>
+          </a:p>
+        </p:txBody>
       </p:sp>
       <p:sp>
         <p:nvSpPr>
@@ -6732,7 +8793,7 @@
         </p:nvSpPr>
         <p:spPr>
           <a:xfrm>
-            <a:off x="6199632" y="2606040"/>
+            <a:off x="6157976" y="2967228"/>
             <a:ext cx="384048" cy="384048"/>
           </a:xfrm>
           <a:prstGeom prst="ellipse">
@@ -6748,6 +8809,16 @@
             <a:prstDash val="solid"/>
           </a:ln>
         </p:spPr>
+        <p:txBody>
+          <a:bodyPr/>
+          <a:lstStyle/>
+          <a:p>
+            <a:endParaRPr lang="es-AR">
+              <a:latin typeface="Arial" panose="020B0604020202020204" pitchFamily="34" charset="0"/>
+              <a:cs typeface="Arial" panose="020B0604020202020204" pitchFamily="34" charset="0"/>
+            </a:endParaRPr>
+          </a:p>
+        </p:txBody>
       </p:sp>
       <p:pic>
         <p:nvPicPr>
@@ -6758,14 +8829,14 @@
           <p:nvPr/>
         </p:nvPicPr>
         <p:blipFill>
-          <a:blip r:embed="rId5"/>
+          <a:blip r:embed="rId4"/>
           <a:stretch>
             <a:fillRect/>
           </a:stretch>
         </p:blipFill>
         <p:spPr>
           <a:xfrm>
-            <a:off x="6291072" y="2697480"/>
+            <a:off x="6249416" y="3058668"/>
             <a:ext cx="201168" cy="201168"/>
           </a:xfrm>
           <a:prstGeom prst="rect">
@@ -6781,7 +8852,7 @@
         </p:nvSpPr>
         <p:spPr>
           <a:xfrm>
-            <a:off x="6766560" y="2441448"/>
+            <a:off x="6724904" y="2802636"/>
             <a:ext cx="4602175" cy="713232"/>
           </a:xfrm>
           <a:prstGeom prst="rect">
@@ -6805,25 +8876,28 @@
                 <a:solidFill>
                   <a:srgbClr val="E6ECF5"/>
                 </a:solidFill>
-                <a:latin typeface="Calibri" pitchFamily="34" charset="0"/>
+                <a:latin typeface="Arial" panose="020B0604020202020204" pitchFamily="34" charset="0"/>
                 <a:ea typeface="Calibri" pitchFamily="34" charset="-122"/>
-                <a:cs typeface="Calibri" pitchFamily="34" charset="-120"/>
-              </a:rPr>
-              <a:t>El fine-tuning mejora la calidad textual y semántica frente al modelo base.</a:t>
-            </a:r>
-            <a:endParaRPr lang="en-US" sz="1080" dirty="0"/>
-          </a:p>
-        </p:txBody>
-      </p:sp>
-      <p:sp>
-        <p:nvSpPr>
-          <p:cNvPr id="17" name="Shape 12"/>
-          <p:cNvSpPr/>
-          <p:nvPr/>
-        </p:nvSpPr>
-        <p:spPr>
-          <a:xfrm>
-            <a:off x="6016752" y="3282696"/>
+                <a:cs typeface="Arial" panose="020B0604020202020204" pitchFamily="34" charset="0"/>
+              </a:rPr>
+              <a:t>El fine-tuning mejora ROUGE-L y sentiment match frente al modelo base.</a:t>
+            </a:r>
+            <a:endParaRPr lang="en-US" sz="1080" dirty="0">
+              <a:latin typeface="Arial" panose="020B0604020202020204" pitchFamily="34" charset="0"/>
+              <a:cs typeface="Arial" panose="020B0604020202020204" pitchFamily="34" charset="0"/>
+            </a:endParaRPr>
+          </a:p>
+        </p:txBody>
+      </p:sp>
+      <p:sp>
+        <p:nvSpPr>
+          <p:cNvPr id="21" name="Shape 15"/>
+          <p:cNvSpPr/>
+          <p:nvPr/>
+        </p:nvSpPr>
+        <p:spPr>
+          <a:xfrm>
+            <a:off x="5965952" y="3662172"/>
             <a:ext cx="5534863" cy="713232"/>
           </a:xfrm>
           <a:prstGeom prst="rect">
@@ -6839,16 +8913,26 @@
             <a:prstDash val="solid"/>
           </a:ln>
         </p:spPr>
-      </p:sp>
-      <p:sp>
-        <p:nvSpPr>
-          <p:cNvPr id="18" name="Shape 13"/>
-          <p:cNvSpPr/>
-          <p:nvPr/>
-        </p:nvSpPr>
-        <p:spPr>
-          <a:xfrm>
-            <a:off x="6199632" y="3447288"/>
+        <p:txBody>
+          <a:bodyPr/>
+          <a:lstStyle/>
+          <a:p>
+            <a:endParaRPr lang="es-AR">
+              <a:latin typeface="Arial" panose="020B0604020202020204" pitchFamily="34" charset="0"/>
+              <a:cs typeface="Arial" panose="020B0604020202020204" pitchFamily="34" charset="0"/>
+            </a:endParaRPr>
+          </a:p>
+        </p:txBody>
+      </p:sp>
+      <p:sp>
+        <p:nvSpPr>
+          <p:cNvPr id="22" name="Shape 16"/>
+          <p:cNvSpPr/>
+          <p:nvPr/>
+        </p:nvSpPr>
+        <p:spPr>
+          <a:xfrm>
+            <a:off x="6148832" y="3826764"/>
             <a:ext cx="384048" cy="384048"/>
           </a:xfrm>
           <a:prstGeom prst="ellipse">
@@ -6864,24 +8948,34 @@
             <a:prstDash val="solid"/>
           </a:ln>
         </p:spPr>
+        <p:txBody>
+          <a:bodyPr/>
+          <a:lstStyle/>
+          <a:p>
+            <a:endParaRPr lang="es-AR">
+              <a:latin typeface="Arial" panose="020B0604020202020204" pitchFamily="34" charset="0"/>
+              <a:cs typeface="Arial" panose="020B0604020202020204" pitchFamily="34" charset="0"/>
+            </a:endParaRPr>
+          </a:p>
+        </p:txBody>
       </p:sp>
       <p:pic>
         <p:nvPicPr>
-          <p:cNvPr id="19" name="Image 3" descr="icon_exchange_w.png"/>
+          <p:cNvPr id="23" name="Image 4" descr="icon_warn_w.png"/>
           <p:cNvPicPr>
             <a:picLocks noChangeAspect="1"/>
           </p:cNvPicPr>
           <p:nvPr/>
         </p:nvPicPr>
         <p:blipFill>
-          <a:blip r:embed="rId6"/>
+          <a:blip r:embed="rId5"/>
           <a:stretch>
             <a:fillRect/>
           </a:stretch>
         </p:blipFill>
         <p:spPr>
           <a:xfrm>
-            <a:off x="6291072" y="3538728"/>
+            <a:off x="6240272" y="3918204"/>
             <a:ext cx="201168" cy="201168"/>
           </a:xfrm>
           <a:prstGeom prst="rect">
@@ -6891,13 +8985,13 @@
       </p:pic>
       <p:sp>
         <p:nvSpPr>
-          <p:cNvPr id="20" name="Text 14"/>
-          <p:cNvSpPr/>
-          <p:nvPr/>
-        </p:nvSpPr>
-        <p:spPr>
-          <a:xfrm>
-            <a:off x="6766560" y="3282696"/>
+          <p:cNvPr id="24" name="Text 17"/>
+          <p:cNvSpPr/>
+          <p:nvPr/>
+        </p:nvSpPr>
+        <p:spPr>
+          <a:xfrm>
+            <a:off x="6715760" y="3662172"/>
             <a:ext cx="4602175" cy="713232"/>
           </a:xfrm>
           <a:prstGeom prst="rect">
@@ -6921,129 +9015,16 @@
                 <a:solidFill>
                   <a:srgbClr val="E6ECF5"/>
                 </a:solidFill>
-                <a:latin typeface="Calibri" pitchFamily="34" charset="0"/>
+                <a:latin typeface="Arial" panose="020B0604020202020204" pitchFamily="34" charset="0"/>
                 <a:ea typeface="Calibri" pitchFamily="34" charset="-122"/>
-                <a:cs typeface="Calibri" pitchFamily="34" charset="-120"/>
-              </a:rPr>
-              <a:t>Las métricas textual, semántica y financiera no son equivalentes.</a:t>
-            </a:r>
-            <a:endParaRPr lang="en-US" sz="1080" dirty="0"/>
-          </a:p>
-        </p:txBody>
-      </p:sp>
-      <p:sp>
-        <p:nvSpPr>
-          <p:cNvPr id="21" name="Shape 15"/>
-          <p:cNvSpPr/>
-          <p:nvPr/>
-        </p:nvSpPr>
-        <p:spPr>
-          <a:xfrm>
-            <a:off x="6016752" y="4123944"/>
-            <a:ext cx="5534863" cy="713232"/>
-          </a:xfrm>
-          <a:prstGeom prst="rect">
-            <a:avLst/>
-          </a:prstGeom>
-          <a:solidFill>
-            <a:srgbClr val="243150"/>
-          </a:solidFill>
-          <a:ln w="12700">
-            <a:solidFill>
-              <a:srgbClr val="2E3C58"/>
-            </a:solidFill>
-            <a:prstDash val="solid"/>
-          </a:ln>
-        </p:spPr>
-      </p:sp>
-      <p:sp>
-        <p:nvSpPr>
-          <p:cNvPr id="22" name="Shape 16"/>
-          <p:cNvSpPr/>
-          <p:nvPr/>
-        </p:nvSpPr>
-        <p:spPr>
-          <a:xfrm>
-            <a:off x="6199632" y="4288536"/>
-            <a:ext cx="384048" cy="384048"/>
-          </a:xfrm>
-          <a:prstGeom prst="ellipse">
-            <a:avLst/>
-          </a:prstGeom>
-          <a:solidFill>
-            <a:srgbClr val="2A7F8C"/>
-          </a:solidFill>
-          <a:ln w="12700">
-            <a:solidFill>
-              <a:srgbClr val="333333"/>
-            </a:solidFill>
-            <a:prstDash val="solid"/>
-          </a:ln>
-        </p:spPr>
-      </p:sp>
-      <p:pic>
-        <p:nvPicPr>
-          <p:cNvPr id="23" name="Image 4" descr="icon_warn_w.png"/>
-          <p:cNvPicPr>
-            <a:picLocks noChangeAspect="1"/>
-          </p:cNvPicPr>
-          <p:nvPr/>
-        </p:nvPicPr>
-        <p:blipFill>
-          <a:blip r:embed="rId7"/>
-          <a:stretch>
-            <a:fillRect/>
-          </a:stretch>
-        </p:blipFill>
-        <p:spPr>
-          <a:xfrm>
-            <a:off x="6291072" y="4379976"/>
-            <a:ext cx="201168" cy="201168"/>
-          </a:xfrm>
-          <a:prstGeom prst="rect">
-            <a:avLst/>
-          </a:prstGeom>
-        </p:spPr>
-      </p:pic>
-      <p:sp>
-        <p:nvSpPr>
-          <p:cNvPr id="24" name="Text 17"/>
-          <p:cNvSpPr/>
-          <p:nvPr/>
-        </p:nvSpPr>
-        <p:spPr>
-          <a:xfrm>
-            <a:off x="6766560" y="4123944"/>
-            <a:ext cx="4602175" cy="713232"/>
-          </a:xfrm>
-          <a:prstGeom prst="rect">
-            <a:avLst/>
-          </a:prstGeom>
-          <a:noFill/>
-          <a:ln/>
-        </p:spPr>
-        <p:txBody>
-          <a:bodyPr wrap="square" lIns="0" tIns="0" rIns="0" bIns="0" rtlCol="0" anchor="ctr"/>
-          <a:lstStyle/>
-          <a:p>
-            <a:pPr marL="0" indent="0">
-              <a:lnSpc>
-                <a:spcPct val="108000"/>
-              </a:lnSpc>
-              <a:buNone/>
-            </a:pPr>
-            <a:r>
-              <a:rPr lang="en-US" sz="1080" dirty="0">
-                <a:solidFill>
-                  <a:srgbClr val="E6ECF5"/>
-                </a:solidFill>
-                <a:latin typeface="Calibri" pitchFamily="34" charset="0"/>
-                <a:ea typeface="Calibri" pitchFamily="34" charset="-122"/>
-                <a:cs typeface="Calibri" pitchFamily="34" charset="-120"/>
-              </a:rPr>
-              <a:t>La directional accuracy no es concluyente sin coverage ni significancia.</a:t>
-            </a:r>
-            <a:endParaRPr lang="en-US" sz="1080" dirty="0"/>
+                <a:cs typeface="Arial" panose="020B0604020202020204" pitchFamily="34" charset="0"/>
+              </a:rPr>
+              <a:t>Directional accuracy queda como señal exploratoria, no como evidencia predictiva.</a:t>
+            </a:r>
+            <a:endParaRPr lang="en-US" sz="1080" dirty="0">
+              <a:latin typeface="Arial" panose="020B0604020202020204" pitchFamily="34" charset="0"/>
+              <a:cs typeface="Arial" panose="020B0604020202020204" pitchFamily="34" charset="0"/>
+            </a:endParaRPr>
           </a:p>
         </p:txBody>
       </p:sp>
@@ -7055,7 +9036,7 @@
         </p:nvSpPr>
         <p:spPr>
           <a:xfrm>
-            <a:off x="6016752" y="5001768"/>
+            <a:off x="5965952" y="4539996"/>
             <a:ext cx="5534863" cy="841248"/>
           </a:xfrm>
           <a:prstGeom prst="rect">
@@ -7078,6 +9059,16 @@
             </a:outerShdw>
           </a:effectLst>
         </p:spPr>
+        <p:txBody>
+          <a:bodyPr/>
+          <a:lstStyle/>
+          <a:p>
+            <a:endParaRPr lang="es-AR">
+              <a:latin typeface="Arial" panose="020B0604020202020204" pitchFamily="34" charset="0"/>
+              <a:cs typeface="Arial" panose="020B0604020202020204" pitchFamily="34" charset="0"/>
+            </a:endParaRPr>
+          </a:p>
+        </p:txBody>
       </p:sp>
       <p:pic>
         <p:nvPicPr>
@@ -7088,14 +9079,14 @@
           <p:nvPr/>
         </p:nvPicPr>
         <p:blipFill>
-          <a:blip r:embed="rId8"/>
+          <a:blip r:embed="rId6"/>
           <a:stretch>
             <a:fillRect/>
           </a:stretch>
         </p:blipFill>
         <p:spPr>
           <a:xfrm>
-            <a:off x="6254496" y="5248656"/>
+            <a:off x="6203696" y="4786884"/>
             <a:ext cx="347472" cy="347472"/>
           </a:xfrm>
           <a:prstGeom prst="rect">
@@ -7111,7 +9102,7 @@
         </p:nvSpPr>
         <p:spPr>
           <a:xfrm>
-            <a:off x="6766560" y="5001768"/>
+            <a:off x="6715760" y="4539996"/>
             <a:ext cx="4602175" cy="841248"/>
           </a:xfrm>
           <a:prstGeom prst="rect">
@@ -7135,9 +9126,9 @@
                 <a:solidFill>
                   <a:srgbClr val="F7EEDD"/>
                 </a:solidFill>
-                <a:latin typeface="Calibri" pitchFamily="34" charset="0"/>
+                <a:latin typeface="Arial" panose="020B0604020202020204" pitchFamily="34" charset="0"/>
                 <a:ea typeface="Calibri" pitchFamily="34" charset="-122"/>
-                <a:cs typeface="Calibri" pitchFamily="34" charset="-120"/>
+                <a:cs typeface="Arial" panose="020B0604020202020204" pitchFamily="34" charset="0"/>
               </a:rPr>
               <a:t>Aporte principal:  </a:t>
             </a:r>
@@ -7146,49 +9137,35 @@
                 <a:solidFill>
                   <a:srgbClr val="FFFFFF"/>
                 </a:solidFill>
-                <a:latin typeface="Calibri" pitchFamily="34" charset="0"/>
+                <a:latin typeface="Arial" panose="020B0604020202020204" pitchFamily="34" charset="0"/>
                 <a:ea typeface="Calibri" pitchFamily="34" charset="-122"/>
-                <a:cs typeface="Calibri" pitchFamily="34" charset="-120"/>
+                <a:cs typeface="Arial" panose="020B0604020202020204" pitchFamily="34" charset="0"/>
               </a:rPr>
               <a:t>un pipeline reproducible de NLP generativo con evaluación crítica multicapa.</a:t>
             </a:r>
-            <a:endParaRPr lang="en-US" sz="1100" dirty="0"/>
-          </a:p>
-        </p:txBody>
-      </p:sp>
-      <p:sp>
-        <p:nvSpPr>
-          <p:cNvPr id="28" name="Shape 20"/>
-          <p:cNvSpPr/>
-          <p:nvPr/>
-        </p:nvSpPr>
-        <p:spPr>
-          <a:xfrm>
-            <a:off x="640080" y="6053328"/>
-            <a:ext cx="10911535" cy="0"/>
-          </a:xfrm>
-          <a:prstGeom prst="line">
-            <a:avLst/>
-          </a:prstGeom>
-          <a:noFill/>
-          <a:ln w="12700">
-            <a:solidFill>
-              <a:srgbClr val="2E3C58"/>
-            </a:solidFill>
-            <a:prstDash val="solid"/>
-          </a:ln>
-        </p:spPr>
-      </p:sp>
-      <p:sp>
-        <p:nvSpPr>
-          <p:cNvPr id="29" name="Text 21"/>
-          <p:cNvSpPr/>
-          <p:nvPr/>
-        </p:nvSpPr>
-        <p:spPr>
-          <a:xfrm>
-            <a:off x="640080" y="6199632"/>
-            <a:ext cx="2194560" cy="274320"/>
+            <a:endParaRPr lang="en-US" sz="1100" dirty="0">
+              <a:latin typeface="Arial" panose="020B0604020202020204" pitchFamily="34" charset="0"/>
+              <a:cs typeface="Arial" panose="020B0604020202020204" pitchFamily="34" charset="0"/>
+            </a:endParaRPr>
+          </a:p>
+        </p:txBody>
+      </p:sp>
+      <p:sp>
+        <p:nvSpPr>
+          <p:cNvPr id="31" name="Text 1">
+            <a:extLst>
+              <a:ext uri="{FF2B5EF4-FFF2-40B4-BE49-F238E27FC236}">
+                <a16:creationId xmlns:a16="http://schemas.microsoft.com/office/drawing/2014/main" id="{4C0C426D-E54C-77B5-7AD3-C48A124BACE6}"/>
+              </a:ext>
+            </a:extLst>
+          </p:cNvPr>
+          <p:cNvSpPr/>
+          <p:nvPr/>
+        </p:nvSpPr>
+        <p:spPr>
+          <a:xfrm>
+            <a:off x="487680" y="304546"/>
+            <a:ext cx="10332720" cy="749808"/>
           </a:xfrm>
           <a:prstGeom prst="rect">
             <a:avLst/>
@@ -7204,56 +9181,20 @@
               <a:buNone/>
             </a:pPr>
             <a:r>
-              <a:rPr lang="en-US" sz="900" b="1" kern="0" spc="200" dirty="0">
-                <a:solidFill>
-                  <a:srgbClr val="2A7F8C"/>
-                </a:solidFill>
-                <a:latin typeface="Calibri" pitchFamily="34" charset="0"/>
-                <a:ea typeface="Calibri" pitchFamily="34" charset="-122"/>
-                <a:cs typeface="Calibri" pitchFamily="34" charset="-120"/>
-              </a:rPr>
-              <a:t>PRÓXIMOS PASOS</a:t>
-            </a:r>
-            <a:endParaRPr lang="en-US" sz="900" dirty="0"/>
-          </a:p>
-        </p:txBody>
-      </p:sp>
-      <p:sp>
-        <p:nvSpPr>
-          <p:cNvPr id="30" name="Text 22"/>
-          <p:cNvSpPr/>
-          <p:nvPr/>
-        </p:nvSpPr>
-        <p:spPr>
-          <a:xfrm>
-            <a:off x="2880360" y="6181344"/>
-            <a:ext cx="8762695" cy="310896"/>
-          </a:xfrm>
-          <a:prstGeom prst="rect">
-            <a:avLst/>
-          </a:prstGeom>
-          <a:noFill/>
-          <a:ln/>
-        </p:spPr>
-        <p:txBody>
-          <a:bodyPr wrap="square" lIns="0" tIns="0" rIns="0" bIns="0" rtlCol="0" anchor="ctr"/>
-          <a:lstStyle/>
-          <a:p>
-            <a:pPr marL="0" indent="0">
-              <a:buNone/>
-            </a:pPr>
-            <a:r>
-              <a:rPr lang="en-US" sz="900" dirty="0">
-                <a:solidFill>
-                  <a:srgbClr val="9FB0CC"/>
-                </a:solidFill>
-                <a:latin typeface="Calibri" pitchFamily="34" charset="0"/>
-                <a:ea typeface="Calibri" pitchFamily="34" charset="-122"/>
-                <a:cs typeface="Calibri" pitchFamily="34" charset="-120"/>
-              </a:rPr>
-              <a:t>Baselines estadísticos de dirección  ·  más datos y tickers  ·  GPT-2 medium o modelo financiero  ·  mejor control de la salida  ·  evaluación humana de plausibilidad</a:t>
-            </a:r>
-            <a:endParaRPr lang="en-US" sz="900" dirty="0"/>
+              <a:rPr lang="en-US" sz="2800" b="1" dirty="0" err="1">
+                <a:solidFill>
+                  <a:srgbClr val="23304A"/>
+                </a:solidFill>
+                <a:latin typeface="Arial" panose="020B0604020202020204" pitchFamily="34" charset="0"/>
+                <a:ea typeface="Georgia" pitchFamily="34" charset="-122"/>
+                <a:cs typeface="Arial" panose="020B0604020202020204" pitchFamily="34" charset="0"/>
+              </a:rPr>
+              <a:t>Conclusiones</a:t>
+            </a:r>
+            <a:endParaRPr lang="en-US" sz="2800" dirty="0">
+              <a:latin typeface="Arial" panose="020B0604020202020204" pitchFamily="34" charset="0"/>
+              <a:cs typeface="Arial" panose="020B0604020202020204" pitchFamily="34" charset="0"/>
+            </a:endParaRPr>
           </a:p>
         </p:txBody>
       </p:sp>
@@ -7491,6 +9432,13 @@
             </a:outerShdw>
           </a:effectLst>
         </p:spPr>
+        <p:txBody>
+          <a:bodyPr/>
+          <a:lstStyle/>
+          <a:p>
+            <a:endParaRPr lang="es-AR"/>
+          </a:p>
+        </p:txBody>
       </p:sp>
       <p:sp>
         <p:nvSpPr>
@@ -7518,6 +9466,13 @@
             <a:prstDash val="solid"/>
           </a:ln>
         </p:spPr>
+        <p:txBody>
+          <a:bodyPr/>
+          <a:lstStyle/>
+          <a:p>
+            <a:endParaRPr lang="es-AR"/>
+          </a:p>
+        </p:txBody>
       </p:sp>
       <p:sp>
         <p:nvSpPr>
@@ -7703,6 +9658,13 @@
             </a:outerShdw>
           </a:effectLst>
         </p:spPr>
+        <p:txBody>
+          <a:bodyPr/>
+          <a:lstStyle/>
+          <a:p>
+            <a:endParaRPr lang="es-AR"/>
+          </a:p>
+        </p:txBody>
       </p:sp>
       <p:sp>
         <p:nvSpPr>
@@ -7728,6 +9690,13 @@
             <a:prstDash val="solid"/>
           </a:ln>
         </p:spPr>
+        <p:txBody>
+          <a:bodyPr/>
+          <a:lstStyle/>
+          <a:p>
+            <a:endParaRPr lang="es-AR"/>
+          </a:p>
+        </p:txBody>
       </p:sp>
       <p:sp>
         <p:nvSpPr>
@@ -7913,6 +9882,13 @@
             </a:outerShdw>
           </a:effectLst>
         </p:spPr>
+        <p:txBody>
+          <a:bodyPr/>
+          <a:lstStyle/>
+          <a:p>
+            <a:endParaRPr lang="es-AR"/>
+          </a:p>
+        </p:txBody>
       </p:sp>
       <p:sp>
         <p:nvSpPr>
@@ -7941,6 +9917,13 @@
             <a:prstDash val="solid"/>
           </a:ln>
         </p:spPr>
+        <p:txBody>
+          <a:bodyPr/>
+          <a:lstStyle/>
+          <a:p>
+            <a:endParaRPr lang="es-AR"/>
+          </a:p>
+        </p:txBody>
       </p:sp>
       <p:sp>
         <p:nvSpPr>
@@ -8126,6 +10109,13 @@
             </a:outerShdw>
           </a:effectLst>
         </p:spPr>
+        <p:txBody>
+          <a:bodyPr/>
+          <a:lstStyle/>
+          <a:p>
+            <a:endParaRPr lang="es-AR"/>
+          </a:p>
+        </p:txBody>
       </p:sp>
       <p:sp>
         <p:nvSpPr>
@@ -8464,6 +10454,13 @@
             </a:outerShdw>
           </a:effectLst>
         </p:spPr>
+        <p:txBody>
+          <a:bodyPr/>
+          <a:lstStyle/>
+          <a:p>
+            <a:endParaRPr lang="es-AR"/>
+          </a:p>
+        </p:txBody>
       </p:sp>
       <p:pic>
         <p:nvPicPr>
@@ -8607,6 +10604,13 @@
             </a:outerShdw>
           </a:effectLst>
         </p:spPr>
+        <p:txBody>
+          <a:bodyPr/>
+          <a:lstStyle/>
+          <a:p>
+            <a:endParaRPr lang="es-AR"/>
+          </a:p>
+        </p:txBody>
       </p:sp>
       <p:pic>
         <p:nvPicPr>
@@ -8750,6 +10754,13 @@
             </a:outerShdw>
           </a:effectLst>
         </p:spPr>
+        <p:txBody>
+          <a:bodyPr/>
+          <a:lstStyle/>
+          <a:p>
+            <a:endParaRPr lang="es-AR"/>
+          </a:p>
+        </p:txBody>
       </p:sp>
       <p:pic>
         <p:nvPicPr>
@@ -8893,6 +10904,13 @@
             </a:outerShdw>
           </a:effectLst>
         </p:spPr>
+        <p:txBody>
+          <a:bodyPr/>
+          <a:lstStyle/>
+          <a:p>
+            <a:endParaRPr lang="es-AR"/>
+          </a:p>
+        </p:txBody>
       </p:sp>
       <p:pic>
         <p:nvPicPr>
@@ -9036,6 +11054,13 @@
             </a:outerShdw>
           </a:effectLst>
         </p:spPr>
+        <p:txBody>
+          <a:bodyPr/>
+          <a:lstStyle/>
+          <a:p>
+            <a:endParaRPr lang="es-AR"/>
+          </a:p>
+        </p:txBody>
       </p:sp>
       <p:pic>
         <p:nvPicPr>
@@ -9179,6 +11204,13 @@
             </a:outerShdw>
           </a:effectLst>
         </p:spPr>
+        <p:txBody>
+          <a:bodyPr/>
+          <a:lstStyle/>
+          <a:p>
+            <a:endParaRPr lang="es-AR"/>
+          </a:p>
+        </p:txBody>
       </p:sp>
       <p:pic>
         <p:nvPicPr>
@@ -9530,6 +11562,13 @@
             </a:outerShdw>
           </a:effectLst>
         </p:spPr>
+        <p:txBody>
+          <a:bodyPr/>
+          <a:lstStyle/>
+          <a:p>
+            <a:endParaRPr lang="es-AR"/>
+          </a:p>
+        </p:txBody>
       </p:sp>
       <p:sp>
         <p:nvSpPr>
@@ -9555,6 +11594,13 @@
             <a:prstDash val="solid"/>
           </a:ln>
         </p:spPr>
+        <p:txBody>
+          <a:bodyPr/>
+          <a:lstStyle/>
+          <a:p>
+            <a:endParaRPr lang="es-AR"/>
+          </a:p>
+        </p:txBody>
       </p:sp>
       <p:pic>
         <p:nvPicPr>
@@ -9764,6 +11810,13 @@
             </a:outerShdw>
           </a:effectLst>
         </p:spPr>
+        <p:txBody>
+          <a:bodyPr/>
+          <a:lstStyle/>
+          <a:p>
+            <a:endParaRPr lang="es-AR"/>
+          </a:p>
+        </p:txBody>
       </p:sp>
       <p:sp>
         <p:nvSpPr>
@@ -9789,6 +11842,13 @@
             <a:prstDash val="solid"/>
           </a:ln>
         </p:spPr>
+        <p:txBody>
+          <a:bodyPr/>
+          <a:lstStyle/>
+          <a:p>
+            <a:endParaRPr lang="es-AR"/>
+          </a:p>
+        </p:txBody>
       </p:sp>
       <p:pic>
         <p:nvPicPr>
@@ -9998,6 +12058,13 @@
             </a:outerShdw>
           </a:effectLst>
         </p:spPr>
+        <p:txBody>
+          <a:bodyPr/>
+          <a:lstStyle/>
+          <a:p>
+            <a:endParaRPr lang="es-AR"/>
+          </a:p>
+        </p:txBody>
       </p:sp>
       <p:sp>
         <p:nvSpPr>
@@ -10023,6 +12090,13 @@
             <a:prstDash val="solid"/>
           </a:ln>
         </p:spPr>
+        <p:txBody>
+          <a:bodyPr/>
+          <a:lstStyle/>
+          <a:p>
+            <a:endParaRPr lang="es-AR"/>
+          </a:p>
+        </p:txBody>
       </p:sp>
       <p:pic>
         <p:nvPicPr>
@@ -10232,6 +12306,13 @@
             </a:outerShdw>
           </a:effectLst>
         </p:spPr>
+        <p:txBody>
+          <a:bodyPr/>
+          <a:lstStyle/>
+          <a:p>
+            <a:endParaRPr lang="es-AR"/>
+          </a:p>
+        </p:txBody>
       </p:sp>
       <p:sp>
         <p:nvSpPr>
@@ -10257,6 +12338,13 @@
             <a:prstDash val="solid"/>
           </a:ln>
         </p:spPr>
+        <p:txBody>
+          <a:bodyPr/>
+          <a:lstStyle/>
+          <a:p>
+            <a:endParaRPr lang="es-AR"/>
+          </a:p>
+        </p:txBody>
       </p:sp>
       <p:pic>
         <p:nvPicPr>
@@ -10466,6 +12554,13 @@
             </a:outerShdw>
           </a:effectLst>
         </p:spPr>
+        <p:txBody>
+          <a:bodyPr/>
+          <a:lstStyle/>
+          <a:p>
+            <a:endParaRPr lang="es-AR"/>
+          </a:p>
+        </p:txBody>
       </p:sp>
       <p:sp>
         <p:nvSpPr>
@@ -10491,6 +12586,13 @@
             <a:prstDash val="solid"/>
           </a:ln>
         </p:spPr>
+        <p:txBody>
+          <a:bodyPr/>
+          <a:lstStyle/>
+          <a:p>
+            <a:endParaRPr lang="es-AR"/>
+          </a:p>
+        </p:txBody>
       </p:sp>
       <p:pic>
         <p:nvPicPr>
@@ -10700,6 +12802,13 @@
             </a:outerShdw>
           </a:effectLst>
         </p:spPr>
+        <p:txBody>
+          <a:bodyPr/>
+          <a:lstStyle/>
+          <a:p>
+            <a:endParaRPr lang="es-AR"/>
+          </a:p>
+        </p:txBody>
       </p:sp>
       <p:sp>
         <p:nvSpPr>
@@ -10725,6 +12834,13 @@
             <a:prstDash val="solid"/>
           </a:ln>
         </p:spPr>
+        <p:txBody>
+          <a:bodyPr/>
+          <a:lstStyle/>
+          <a:p>
+            <a:endParaRPr lang="es-AR"/>
+          </a:p>
+        </p:txBody>
       </p:sp>
       <p:pic>
         <p:nvPicPr>
@@ -10903,6 +13019,13 @@
             <a:prstDash val="solid"/>
           </a:ln>
         </p:spPr>
+        <p:txBody>
+          <a:bodyPr/>
+          <a:lstStyle/>
+          <a:p>
+            <a:endParaRPr lang="es-AR"/>
+          </a:p>
+        </p:txBody>
       </p:sp>
       <p:sp>
         <p:nvSpPr>
@@ -11191,6 +13314,13 @@
             </a:outerShdw>
           </a:effectLst>
         </p:spPr>
+        <p:txBody>
+          <a:bodyPr/>
+          <a:lstStyle/>
+          <a:p>
+            <a:endParaRPr lang="es-AR"/>
+          </a:p>
+        </p:txBody>
       </p:sp>
       <p:pic>
         <p:nvPicPr>
@@ -11329,6 +13459,13 @@
             <a:prstDash val="solid"/>
           </a:ln>
         </p:spPr>
+        <p:txBody>
+          <a:bodyPr/>
+          <a:lstStyle/>
+          <a:p>
+            <a:endParaRPr lang="es-AR"/>
+          </a:p>
+        </p:txBody>
       </p:sp>
       <p:sp>
         <p:nvSpPr>
@@ -11422,6 +13559,13 @@
             <a:prstDash val="solid"/>
           </a:ln>
         </p:spPr>
+        <p:txBody>
+          <a:bodyPr/>
+          <a:lstStyle/>
+          <a:p>
+            <a:endParaRPr lang="es-AR"/>
+          </a:p>
+        </p:txBody>
       </p:sp>
       <p:sp>
         <p:nvSpPr>
@@ -11515,6 +13659,13 @@
             <a:prstDash val="solid"/>
           </a:ln>
         </p:spPr>
+        <p:txBody>
+          <a:bodyPr/>
+          <a:lstStyle/>
+          <a:p>
+            <a:endParaRPr lang="es-AR"/>
+          </a:p>
+        </p:txBody>
       </p:sp>
       <p:sp>
         <p:nvSpPr>
@@ -11608,6 +13759,13 @@
             <a:prstDash val="solid"/>
           </a:ln>
         </p:spPr>
+        <p:txBody>
+          <a:bodyPr/>
+          <a:lstStyle/>
+          <a:p>
+            <a:endParaRPr lang="es-AR"/>
+          </a:p>
+        </p:txBody>
       </p:sp>
       <p:sp>
         <p:nvSpPr>
@@ -11766,6 +13924,13 @@
             </a:outerShdw>
           </a:effectLst>
         </p:spPr>
+        <p:txBody>
+          <a:bodyPr/>
+          <a:lstStyle/>
+          <a:p>
+            <a:endParaRPr lang="es-AR"/>
+          </a:p>
+        </p:txBody>
       </p:sp>
       <p:pic>
         <p:nvPicPr>
@@ -12024,6 +14189,13 @@
             </a:outerShdw>
           </a:effectLst>
         </p:spPr>
+        <p:txBody>
+          <a:bodyPr/>
+          <a:lstStyle/>
+          <a:p>
+            <a:endParaRPr lang="es-AR"/>
+          </a:p>
+        </p:txBody>
       </p:sp>
       <p:pic>
         <p:nvPicPr>
@@ -12128,149 +14300,6 @@
                 <a:cs typeface="Arial" panose="020B0604020202020204" pitchFamily="34" charset="0"/>
               </a:rPr>
               <a:t>70 / 15 / 15 ordenado por fecha, sin shuffle. Evita el leakage de información futura, fundamental en finanzas.</a:t>
-            </a:r>
-            <a:endParaRPr lang="en-US" sz="980" dirty="0">
-              <a:latin typeface="Arial" panose="020B0604020202020204" pitchFamily="34" charset="0"/>
-              <a:cs typeface="Arial" panose="020B0604020202020204" pitchFamily="34" charset="0"/>
-            </a:endParaRPr>
-          </a:p>
-        </p:txBody>
-      </p:sp>
-      <p:sp>
-        <p:nvSpPr>
-          <p:cNvPr id="39" name="Shape 29"/>
-          <p:cNvSpPr/>
-          <p:nvPr/>
-        </p:nvSpPr>
-        <p:spPr>
-          <a:xfrm>
-            <a:off x="6217920" y="4709160"/>
-            <a:ext cx="5330952" cy="1280160"/>
-          </a:xfrm>
-          <a:prstGeom prst="rect">
-            <a:avLst/>
-          </a:prstGeom>
-          <a:solidFill>
-            <a:srgbClr val="1E2A4A"/>
-          </a:solidFill>
-          <a:ln w="12700">
-            <a:solidFill>
-              <a:srgbClr val="1E2A4A"/>
-            </a:solidFill>
-            <a:prstDash val="solid"/>
-          </a:ln>
-          <a:effectLst>
-            <a:outerShdw blurRad="114300" dist="38100" dir="8100000" algn="bl" rotWithShape="0">
-              <a:srgbClr val="1E2A4A">
-                <a:alpha val="14000"/>
-              </a:srgbClr>
-            </a:outerShdw>
-          </a:effectLst>
-        </p:spPr>
-      </p:sp>
-      <p:pic>
-        <p:nvPicPr>
-          <p:cNvPr id="41" name="Image 8" descr="icon_sliders.png"/>
-          <p:cNvPicPr>
-            <a:picLocks noChangeAspect="1"/>
-          </p:cNvPicPr>
-          <p:nvPr/>
-        </p:nvPicPr>
-        <p:blipFill>
-          <a:blip r:embed="rId9"/>
-          <a:stretch>
-            <a:fillRect/>
-          </a:stretch>
-        </p:blipFill>
-        <p:spPr>
-          <a:xfrm>
-            <a:off x="6437376" y="4910328"/>
-            <a:ext cx="274320" cy="274320"/>
-          </a:xfrm>
-          <a:prstGeom prst="rect">
-            <a:avLst/>
-          </a:prstGeom>
-        </p:spPr>
-      </p:pic>
-      <p:sp>
-        <p:nvSpPr>
-          <p:cNvPr id="42" name="Text 31"/>
-          <p:cNvSpPr/>
-          <p:nvPr/>
-        </p:nvSpPr>
-        <p:spPr>
-          <a:xfrm>
-            <a:off x="6803136" y="4855464"/>
-            <a:ext cx="4553712" cy="384048"/>
-          </a:xfrm>
-          <a:prstGeom prst="rect">
-            <a:avLst/>
-          </a:prstGeom>
-          <a:noFill/>
-          <a:ln/>
-        </p:spPr>
-        <p:txBody>
-          <a:bodyPr wrap="square" lIns="0" tIns="0" rIns="0" bIns="0" rtlCol="0" anchor="ctr"/>
-          <a:lstStyle/>
-          <a:p>
-            <a:pPr marL="0" indent="0">
-              <a:buNone/>
-            </a:pPr>
-            <a:r>
-              <a:rPr lang="en-US" sz="1200" b="1" dirty="0">
-                <a:solidFill>
-                  <a:srgbClr val="FFFFFF"/>
-                </a:solidFill>
-                <a:latin typeface="Arial" panose="020B0604020202020204" pitchFamily="34" charset="0"/>
-                <a:ea typeface="Calibri" pitchFamily="34" charset="-122"/>
-                <a:cs typeface="Arial" panose="020B0604020202020204" pitchFamily="34" charset="0"/>
-              </a:rPr>
-              <a:t>Pérdida enmascarada sobre el prompt</a:t>
-            </a:r>
-            <a:endParaRPr lang="en-US" sz="1200" dirty="0">
-              <a:latin typeface="Arial" panose="020B0604020202020204" pitchFamily="34" charset="0"/>
-              <a:cs typeface="Arial" panose="020B0604020202020204" pitchFamily="34" charset="0"/>
-            </a:endParaRPr>
-          </a:p>
-        </p:txBody>
-      </p:sp>
-      <p:sp>
-        <p:nvSpPr>
-          <p:cNvPr id="43" name="Text 32"/>
-          <p:cNvSpPr/>
-          <p:nvPr/>
-        </p:nvSpPr>
-        <p:spPr>
-          <a:xfrm>
-            <a:off x="6455664" y="5239512"/>
-            <a:ext cx="4873752" cy="685800"/>
-          </a:xfrm>
-          <a:prstGeom prst="rect">
-            <a:avLst/>
-          </a:prstGeom>
-          <a:noFill/>
-          <a:ln/>
-        </p:spPr>
-        <p:txBody>
-          <a:bodyPr wrap="square" lIns="0" tIns="0" rIns="0" bIns="0" rtlCol="0" anchor="ctr"/>
-          <a:lstStyle/>
-          <a:p>
-            <a:pPr marL="0" indent="0">
-              <a:lnSpc>
-                <a:spcPct val="115000"/>
-              </a:lnSpc>
-              <a:buNone/>
-            </a:pPr>
-            <a:r>
-              <a:rPr lang="en-US" sz="980" dirty="0">
-                <a:solidFill>
-                  <a:srgbClr val="C2CEDF"/>
-                </a:solidFill>
-                <a:latin typeface="Arial" panose="020B0604020202020204" pitchFamily="34" charset="0"/>
-                <a:ea typeface="Calibri" pitchFamily="34" charset="-122"/>
-                <a:cs typeface="Arial" panose="020B0604020202020204" pitchFamily="34" charset="0"/>
-              </a:rPr>
-              <a:t>Se asignan -100 a las posiciones del prompt: el gradiente proviene solo del completion. El modelo no copia el contexto, genera el target.</a:t>
             </a:r>
             <a:endParaRPr lang="en-US" sz="980" dirty="0">
               <a:latin typeface="Arial" panose="020B0604020202020204" pitchFamily="34" charset="0"/>
@@ -12573,6 +14602,13 @@
             </a:outerShdw>
           </a:effectLst>
         </p:spPr>
+        <p:txBody>
+          <a:bodyPr/>
+          <a:lstStyle/>
+          <a:p>
+            <a:endParaRPr lang="es-AR"/>
+          </a:p>
+        </p:txBody>
       </p:sp>
       <p:sp>
         <p:nvSpPr>
@@ -12598,6 +14634,13 @@
             <a:prstDash val="solid"/>
           </a:ln>
         </p:spPr>
+        <p:txBody>
+          <a:bodyPr/>
+          <a:lstStyle/>
+          <a:p>
+            <a:endParaRPr lang="es-AR"/>
+          </a:p>
+        </p:txBody>
       </p:sp>
       <p:sp>
         <p:nvSpPr>
@@ -12623,6 +14666,13 @@
             <a:prstDash val="solid"/>
           </a:ln>
         </p:spPr>
+        <p:txBody>
+          <a:bodyPr/>
+          <a:lstStyle/>
+          <a:p>
+            <a:endParaRPr lang="es-AR"/>
+          </a:p>
+        </p:txBody>
       </p:sp>
       <p:sp>
         <p:nvSpPr>
@@ -12648,6 +14698,13 @@
             <a:prstDash val="solid"/>
           </a:ln>
         </p:spPr>
+        <p:txBody>
+          <a:bodyPr/>
+          <a:lstStyle/>
+          <a:p>
+            <a:endParaRPr lang="es-AR"/>
+          </a:p>
+        </p:txBody>
       </p:sp>
       <p:sp>
         <p:nvSpPr>
@@ -12673,6 +14730,13 @@
             <a:prstDash val="solid"/>
           </a:ln>
         </p:spPr>
+        <p:txBody>
+          <a:bodyPr/>
+          <a:lstStyle/>
+          <a:p>
+            <a:endParaRPr lang="es-AR"/>
+          </a:p>
+        </p:txBody>
       </p:sp>
       <p:sp>
         <p:nvSpPr>
@@ -13019,6 +15083,13 @@
             <a:prstDash val="solid"/>
           </a:ln>
         </p:spPr>
+        <p:txBody>
+          <a:bodyPr/>
+          <a:lstStyle/>
+          <a:p>
+            <a:endParaRPr lang="es-AR"/>
+          </a:p>
+        </p:txBody>
       </p:sp>
       <p:sp>
         <p:nvSpPr>
@@ -13104,6 +15175,13 @@
             </a:outerShdw>
           </a:effectLst>
         </p:spPr>
+        <p:txBody>
+          <a:bodyPr/>
+          <a:lstStyle/>
+          <a:p>
+            <a:endParaRPr lang="es-AR"/>
+          </a:p>
+        </p:txBody>
       </p:sp>
       <p:pic>
         <p:nvPicPr>
@@ -13247,6 +15325,13 @@
             </a:outerShdw>
           </a:effectLst>
         </p:spPr>
+        <p:txBody>
+          <a:bodyPr/>
+          <a:lstStyle/>
+          <a:p>
+            <a:endParaRPr lang="es-AR"/>
+          </a:p>
+        </p:txBody>
       </p:sp>
       <p:pic>
         <p:nvPicPr>
@@ -13390,6 +15475,13 @@
             </a:outerShdw>
           </a:effectLst>
         </p:spPr>
+        <p:txBody>
+          <a:bodyPr/>
+          <a:lstStyle/>
+          <a:p>
+            <a:endParaRPr lang="es-AR"/>
+          </a:p>
+        </p:txBody>
       </p:sp>
       <p:pic>
         <p:nvPicPr>
@@ -13741,6 +15833,13 @@
             </a:outerShdw>
           </a:effectLst>
         </p:spPr>
+        <p:txBody>
+          <a:bodyPr/>
+          <a:lstStyle/>
+          <a:p>
+            <a:endParaRPr lang="es-AR"/>
+          </a:p>
+        </p:txBody>
       </p:sp>
       <p:sp>
         <p:nvSpPr>
@@ -13766,6 +15865,13 @@
             <a:prstDash val="solid"/>
           </a:ln>
         </p:spPr>
+        <p:txBody>
+          <a:bodyPr/>
+          <a:lstStyle/>
+          <a:p>
+            <a:endParaRPr lang="es-AR"/>
+          </a:p>
+        </p:txBody>
       </p:sp>
       <p:sp>
         <p:nvSpPr>
@@ -13833,6 +15939,13 @@
             <a:prstDash val="solid"/>
           </a:ln>
         </p:spPr>
+        <p:txBody>
+          <a:bodyPr/>
+          <a:lstStyle/>
+          <a:p>
+            <a:endParaRPr lang="es-AR"/>
+          </a:p>
+        </p:txBody>
       </p:sp>
       <p:pic>
         <p:nvPicPr>
@@ -13976,6 +16089,13 @@
             </a:outerShdw>
           </a:effectLst>
         </p:spPr>
+        <p:txBody>
+          <a:bodyPr/>
+          <a:lstStyle/>
+          <a:p>
+            <a:endParaRPr lang="es-AR"/>
+          </a:p>
+        </p:txBody>
       </p:sp>
       <p:sp>
         <p:nvSpPr>
@@ -14001,6 +16121,13 @@
             <a:prstDash val="solid"/>
           </a:ln>
         </p:spPr>
+        <p:txBody>
+          <a:bodyPr/>
+          <a:lstStyle/>
+          <a:p>
+            <a:endParaRPr lang="es-AR"/>
+          </a:p>
+        </p:txBody>
       </p:sp>
       <p:sp>
         <p:nvSpPr>
@@ -14068,6 +16195,13 @@
             <a:prstDash val="solid"/>
           </a:ln>
         </p:spPr>
+        <p:txBody>
+          <a:bodyPr/>
+          <a:lstStyle/>
+          <a:p>
+            <a:endParaRPr lang="es-AR"/>
+          </a:p>
+        </p:txBody>
       </p:sp>
       <p:pic>
         <p:nvPicPr>
@@ -14211,6 +16345,13 @@
             </a:outerShdw>
           </a:effectLst>
         </p:spPr>
+        <p:txBody>
+          <a:bodyPr/>
+          <a:lstStyle/>
+          <a:p>
+            <a:endParaRPr lang="es-AR"/>
+          </a:p>
+        </p:txBody>
       </p:sp>
       <p:sp>
         <p:nvSpPr>
@@ -14236,6 +16377,13 @@
             <a:prstDash val="solid"/>
           </a:ln>
         </p:spPr>
+        <p:txBody>
+          <a:bodyPr/>
+          <a:lstStyle/>
+          <a:p>
+            <a:endParaRPr lang="es-AR"/>
+          </a:p>
+        </p:txBody>
       </p:sp>
       <p:sp>
         <p:nvSpPr>
@@ -14303,6 +16451,13 @@
             <a:prstDash val="solid"/>
           </a:ln>
         </p:spPr>
+        <p:txBody>
+          <a:bodyPr/>
+          <a:lstStyle/>
+          <a:p>
+            <a:endParaRPr lang="es-AR"/>
+          </a:p>
+        </p:txBody>
       </p:sp>
       <p:pic>
         <p:nvPicPr>
@@ -14467,15 +16622,7 @@
 
 <file path=ppt/slides/slide8.xml><?xml version="1.0" encoding="utf-8"?>
 <p:sld xmlns:a="http://schemas.openxmlformats.org/drawingml/2006/main" xmlns:r="http://schemas.openxmlformats.org/officeDocument/2006/relationships" xmlns:p="http://schemas.openxmlformats.org/presentationml/2006/main">
-  <p:cSld name="Slide 7">
-    <p:bg>
-      <p:bgPr>
-        <a:solidFill>
-          <a:srgbClr val="FFFFFF"/>
-        </a:solidFill>
-        <a:effectLst/>
-      </p:bgPr>
-    </p:bg>
+  <p:cSld>
     <p:spTree>
       <p:nvGrpSpPr>
         <p:cNvPr id="1" name=""/>
@@ -14523,7 +16670,7 @@
                 <a:ea typeface="Georgia" pitchFamily="34" charset="-122"/>
                 <a:cs typeface="Arial" panose="020B0604020202020204" pitchFamily="34" charset="0"/>
               </a:rPr>
-              <a:t>Resultados</a:t>
+              <a:t>Resultados: progresión experimental</a:t>
             </a:r>
             <a:endParaRPr lang="en-US" sz="2800" dirty="0">
               <a:latin typeface="Arial" panose="020B0604020202020204" pitchFamily="34" charset="0"/>
@@ -14565,7 +16712,7 @@
                 <a:ea typeface="Georgia" pitchFamily="34" charset="-122"/>
                 <a:cs typeface="Arial" panose="020B0604020202020204" pitchFamily="34" charset="0"/>
               </a:rPr>
-              <a:t>07</a:t>
+              <a:t>08</a:t>
             </a:r>
             <a:endParaRPr lang="en-US" sz="1500" dirty="0">
               <a:latin typeface="Arial" panose="020B0604020202020204" pitchFamily="34" charset="0"/>
@@ -14607,7 +16754,7 @@
                 <a:ea typeface="Calibri" pitchFamily="34" charset="-122"/>
                 <a:cs typeface="Arial" panose="020B0604020202020204" pitchFamily="34" charset="0"/>
               </a:rPr>
-              <a:t>No todos los runs responden la misma pregunta: cada uno cumple un rol distinto.</a:t>
+              <a:t>No es un ranking de modelos: cada run responde un paso distinto de la progresión.</a:t>
             </a:r>
             <a:endParaRPr lang="en-US" sz="1200" dirty="0">
               <a:latin typeface="Arial" panose="020B0604020202020204" pitchFamily="34" charset="0"/>
@@ -14622,13 +16769,7 @@
           <p:cNvGraphicFramePr>
             <a:graphicFrameLocks noGrp="1"/>
           </p:cNvGraphicFramePr>
-          <p:nvPr>
-            <p:extLst>
-              <p:ext uri="{D42A27DB-BD31-4B8C-83A1-F6EECF244321}">
-                <p14:modId xmlns:p14="http://schemas.microsoft.com/office/powerpoint/2010/main" val="2398250395"/>
-              </p:ext>
-            </p:extLst>
-          </p:nvPr>
+          <p:nvPr/>
         </p:nvGraphicFramePr>
         <p:xfrm>
           <a:off x="640080" y="1874520"/>
@@ -15184,13 +17325,496 @@
                       <a:r>
                         <a:rPr lang="en-US" sz="1000" b="1" dirty="0">
                           <a:solidFill>
+                            <a:srgbClr val="C8923B"/>
+                          </a:solidFill>
+                          <a:latin typeface="Calibri" pitchFamily="34" charset="0"/>
+                          <a:ea typeface="Calibri" pitchFamily="34" charset="-122"/>
+                          <a:cs typeface="Calibri" pitchFamily="34" charset="-120"/>
+                        </a:rPr>
+                        <a:t>GPT-2 no fine-tune</a:t>
+                      </a:r>
+                      <a:endParaRPr lang="en-US" sz="1000" dirty="0">
+                        <a:latin typeface="Calibri" charset="0"/>
+                        <a:ea typeface="Calibri" charset="0"/>
+                        <a:cs typeface="Calibri" charset="0"/>
+                      </a:endParaRPr>
+                    </a:p>
+                  </a:txBody>
+                  <a:tcPr marL="38100" marR="38100" marT="38100" marB="38100" anchor="ctr">
+                    <a:lnL w="12700" cap="flat" cmpd="sng" algn="ctr">
+                      <a:solidFill>
+                        <a:srgbClr val="D6DEE4"/>
+                      </a:solidFill>
+                      <a:prstDash val="solid"/>
+                      <a:round/>
+                      <a:headEnd type="none" w="med" len="med"/>
+                      <a:tailEnd type="none" w="med" len="med"/>
+                    </a:lnL>
+                    <a:lnR w="12700" cap="flat" cmpd="sng" algn="ctr">
+                      <a:solidFill>
+                        <a:srgbClr val="D6DEE4"/>
+                      </a:solidFill>
+                      <a:prstDash val="solid"/>
+                      <a:round/>
+                      <a:headEnd type="none" w="med" len="med"/>
+                      <a:tailEnd type="none" w="med" len="med"/>
+                    </a:lnR>
+                    <a:lnT w="12700" cap="flat" cmpd="sng" algn="ctr">
+                      <a:solidFill>
+                        <a:srgbClr val="D6DEE4"/>
+                      </a:solidFill>
+                      <a:prstDash val="solid"/>
+                      <a:round/>
+                      <a:headEnd type="none" w="med" len="med"/>
+                      <a:tailEnd type="none" w="med" len="med"/>
+                    </a:lnT>
+                    <a:lnB w="12700" cap="flat" cmpd="sng" algn="ctr">
+                      <a:solidFill>
+                        <a:srgbClr val="D6DEE4"/>
+                      </a:solidFill>
+                      <a:prstDash val="solid"/>
+                      <a:round/>
+                      <a:headEnd type="none" w="med" len="med"/>
+                      <a:tailEnd type="none" w="med" len="med"/>
+                    </a:lnB>
+                    <a:solidFill>
+                      <a:srgbClr val="F7EEDD"/>
+                    </a:solidFill>
+                  </a:tcPr>
+                </a:tc>
+                <a:tc>
+                  <a:txBody>
+                    <a:bodyPr/>
+                    <a:lstStyle/>
+                    <a:p>
+                      <a:pPr marL="0" indent="0" algn="l">
+                        <a:buNone/>
+                      </a:pPr>
+                      <a:r>
+                        <a:rPr lang="en-US" sz="1000" i="1" dirty="0">
+                          <a:solidFill>
+                            <a:srgbClr val="667085"/>
+                          </a:solidFill>
+                          <a:latin typeface="Calibri" pitchFamily="34" charset="0"/>
+                          <a:ea typeface="Calibri" pitchFamily="34" charset="-122"/>
+                          <a:cs typeface="Calibri" pitchFamily="34" charset="-120"/>
+                        </a:rPr>
+                        <a:t>Paso 1 · baseline</a:t>
+                      </a:r>
+                      <a:endParaRPr lang="en-US" sz="1000" dirty="0">
+                        <a:latin typeface="Calibri" charset="0"/>
+                        <a:ea typeface="Calibri" charset="0"/>
+                        <a:cs typeface="Calibri" charset="0"/>
+                      </a:endParaRPr>
+                    </a:p>
+                  </a:txBody>
+                  <a:tcPr marL="38100" marR="38100" marT="38100" marB="38100" anchor="ctr">
+                    <a:lnL w="12700" cap="flat" cmpd="sng" algn="ctr">
+                      <a:solidFill>
+                        <a:srgbClr val="D6DEE4"/>
+                      </a:solidFill>
+                      <a:prstDash val="solid"/>
+                      <a:round/>
+                      <a:headEnd type="none" w="med" len="med"/>
+                      <a:tailEnd type="none" w="med" len="med"/>
+                    </a:lnL>
+                    <a:lnR w="12700" cap="flat" cmpd="sng" algn="ctr">
+                      <a:solidFill>
+                        <a:srgbClr val="D6DEE4"/>
+                      </a:solidFill>
+                      <a:prstDash val="solid"/>
+                      <a:round/>
+                      <a:headEnd type="none" w="med" len="med"/>
+                      <a:tailEnd type="none" w="med" len="med"/>
+                    </a:lnR>
+                    <a:lnT w="12700" cap="flat" cmpd="sng" algn="ctr">
+                      <a:solidFill>
+                        <a:srgbClr val="D6DEE4"/>
+                      </a:solidFill>
+                      <a:prstDash val="solid"/>
+                      <a:round/>
+                      <a:headEnd type="none" w="med" len="med"/>
+                      <a:tailEnd type="none" w="med" len="med"/>
+                    </a:lnT>
+                    <a:lnB w="12700" cap="flat" cmpd="sng" algn="ctr">
+                      <a:solidFill>
+                        <a:srgbClr val="D6DEE4"/>
+                      </a:solidFill>
+                      <a:prstDash val="solid"/>
+                      <a:round/>
+                      <a:headEnd type="none" w="med" len="med"/>
+                      <a:tailEnd type="none" w="med" len="med"/>
+                    </a:lnB>
+                    <a:solidFill>
+                      <a:srgbClr val="F4F7F9"/>
+                    </a:solidFill>
+                  </a:tcPr>
+                </a:tc>
+                <a:tc>
+                  <a:txBody>
+                    <a:bodyPr/>
+                    <a:lstStyle/>
+                    <a:p>
+                      <a:pPr marL="0" indent="0" algn="ctr">
+                        <a:buNone/>
+                      </a:pPr>
+                      <a:r>
+                        <a:rPr lang="en-US" sz="1050" dirty="0">
+                          <a:solidFill>
                             <a:srgbClr val="23304A"/>
                           </a:solidFill>
                           <a:latin typeface="Calibri" pitchFamily="34" charset="0"/>
                           <a:ea typeface="Calibri" pitchFamily="34" charset="-122"/>
                           <a:cs typeface="Calibri" pitchFamily="34" charset="-120"/>
                         </a:rPr>
-                        <a:t>SPY/QQQ baseline</a:t>
+                        <a:t>0.040</a:t>
+                      </a:r>
+                      <a:endParaRPr lang="en-US" sz="1050" dirty="0">
+                        <a:latin typeface="Calibri" charset="0"/>
+                        <a:ea typeface="Calibri" charset="0"/>
+                        <a:cs typeface="Calibri" charset="0"/>
+                      </a:endParaRPr>
+                    </a:p>
+                  </a:txBody>
+                  <a:tcPr marL="38100" marR="38100" marT="38100" marB="38100" anchor="ctr">
+                    <a:lnL w="12700" cap="flat" cmpd="sng" algn="ctr">
+                      <a:solidFill>
+                        <a:srgbClr val="D6DEE4"/>
+                      </a:solidFill>
+                      <a:prstDash val="solid"/>
+                      <a:round/>
+                      <a:headEnd type="none" w="med" len="med"/>
+                      <a:tailEnd type="none" w="med" len="med"/>
+                    </a:lnL>
+                    <a:lnR w="12700" cap="flat" cmpd="sng" algn="ctr">
+                      <a:solidFill>
+                        <a:srgbClr val="D6DEE4"/>
+                      </a:solidFill>
+                      <a:prstDash val="solid"/>
+                      <a:round/>
+                      <a:headEnd type="none" w="med" len="med"/>
+                      <a:tailEnd type="none" w="med" len="med"/>
+                    </a:lnR>
+                    <a:lnT w="12700" cap="flat" cmpd="sng" algn="ctr">
+                      <a:solidFill>
+                        <a:srgbClr val="D6DEE4"/>
+                      </a:solidFill>
+                      <a:prstDash val="solid"/>
+                      <a:round/>
+                      <a:headEnd type="none" w="med" len="med"/>
+                      <a:tailEnd type="none" w="med" len="med"/>
+                    </a:lnT>
+                    <a:lnB w="12700" cap="flat" cmpd="sng" algn="ctr">
+                      <a:solidFill>
+                        <a:srgbClr val="D6DEE4"/>
+                      </a:solidFill>
+                      <a:prstDash val="solid"/>
+                      <a:round/>
+                      <a:headEnd type="none" w="med" len="med"/>
+                      <a:tailEnd type="none" w="med" len="med"/>
+                    </a:lnB>
+                    <a:solidFill>
+                      <a:srgbClr val="F4F7F9"/>
+                    </a:solidFill>
+                  </a:tcPr>
+                </a:tc>
+                <a:tc>
+                  <a:txBody>
+                    <a:bodyPr/>
+                    <a:lstStyle/>
+                    <a:p>
+                      <a:pPr marL="0" indent="0" algn="ctr">
+                        <a:buNone/>
+                      </a:pPr>
+                      <a:r>
+                        <a:rPr lang="en-US" sz="1050" dirty="0">
+                          <a:solidFill>
+                            <a:srgbClr val="23304A"/>
+                          </a:solidFill>
+                          <a:latin typeface="Calibri" pitchFamily="34" charset="0"/>
+                          <a:ea typeface="Calibri" pitchFamily="34" charset="-122"/>
+                          <a:cs typeface="Calibri" pitchFamily="34" charset="-120"/>
+                        </a:rPr>
+                        <a:t>n/a</a:t>
+                      </a:r>
+                      <a:endParaRPr lang="en-US" sz="1050" dirty="0">
+                        <a:latin typeface="Calibri" charset="0"/>
+                        <a:ea typeface="Calibri" charset="0"/>
+                        <a:cs typeface="Calibri" charset="0"/>
+                      </a:endParaRPr>
+                    </a:p>
+                  </a:txBody>
+                  <a:tcPr marL="38100" marR="38100" marT="38100" marB="38100" anchor="ctr">
+                    <a:lnL w="12700" cap="flat" cmpd="sng" algn="ctr">
+                      <a:solidFill>
+                        <a:srgbClr val="D6DEE4"/>
+                      </a:solidFill>
+                      <a:prstDash val="solid"/>
+                      <a:round/>
+                      <a:headEnd type="none" w="med" len="med"/>
+                      <a:tailEnd type="none" w="med" len="med"/>
+                    </a:lnL>
+                    <a:lnR w="12700" cap="flat" cmpd="sng" algn="ctr">
+                      <a:solidFill>
+                        <a:srgbClr val="D6DEE4"/>
+                      </a:solidFill>
+                      <a:prstDash val="solid"/>
+                      <a:round/>
+                      <a:headEnd type="none" w="med" len="med"/>
+                      <a:tailEnd type="none" w="med" len="med"/>
+                    </a:lnR>
+                    <a:lnT w="12700" cap="flat" cmpd="sng" algn="ctr">
+                      <a:solidFill>
+                        <a:srgbClr val="D6DEE4"/>
+                      </a:solidFill>
+                      <a:prstDash val="solid"/>
+                      <a:round/>
+                      <a:headEnd type="none" w="med" len="med"/>
+                      <a:tailEnd type="none" w="med" len="med"/>
+                    </a:lnT>
+                    <a:lnB w="12700" cap="flat" cmpd="sng" algn="ctr">
+                      <a:solidFill>
+                        <a:srgbClr val="D6DEE4"/>
+                      </a:solidFill>
+                      <a:prstDash val="solid"/>
+                      <a:round/>
+                      <a:headEnd type="none" w="med" len="med"/>
+                      <a:tailEnd type="none" w="med" len="med"/>
+                    </a:lnB>
+                    <a:solidFill>
+                      <a:srgbClr val="F4F7F9"/>
+                    </a:solidFill>
+                  </a:tcPr>
+                </a:tc>
+                <a:tc>
+                  <a:txBody>
+                    <a:bodyPr/>
+                    <a:lstStyle/>
+                    <a:p>
+                      <a:pPr marL="0" indent="0" algn="ctr">
+                        <a:buNone/>
+                      </a:pPr>
+                      <a:r>
+                        <a:rPr lang="en-US" sz="1050" dirty="0">
+                          <a:solidFill>
+                            <a:srgbClr val="23304A"/>
+                          </a:solidFill>
+                          <a:latin typeface="Calibri" pitchFamily="34" charset="0"/>
+                          <a:ea typeface="Calibri" pitchFamily="34" charset="-122"/>
+                          <a:cs typeface="Calibri" pitchFamily="34" charset="-120"/>
+                        </a:rPr>
+                        <a:t>0.273</a:t>
+                      </a:r>
+                      <a:endParaRPr lang="en-US" sz="1050" dirty="0">
+                        <a:latin typeface="Calibri" charset="0"/>
+                        <a:ea typeface="Calibri" charset="0"/>
+                        <a:cs typeface="Calibri" charset="0"/>
+                      </a:endParaRPr>
+                    </a:p>
+                  </a:txBody>
+                  <a:tcPr marL="38100" marR="38100" marT="38100" marB="38100" anchor="ctr">
+                    <a:lnL w="12700" cap="flat" cmpd="sng" algn="ctr">
+                      <a:solidFill>
+                        <a:srgbClr val="D6DEE4"/>
+                      </a:solidFill>
+                      <a:prstDash val="solid"/>
+                      <a:round/>
+                      <a:headEnd type="none" w="med" len="med"/>
+                      <a:tailEnd type="none" w="med" len="med"/>
+                    </a:lnL>
+                    <a:lnR w="12700" cap="flat" cmpd="sng" algn="ctr">
+                      <a:solidFill>
+                        <a:srgbClr val="D6DEE4"/>
+                      </a:solidFill>
+                      <a:prstDash val="solid"/>
+                      <a:round/>
+                      <a:headEnd type="none" w="med" len="med"/>
+                      <a:tailEnd type="none" w="med" len="med"/>
+                    </a:lnR>
+                    <a:lnT w="12700" cap="flat" cmpd="sng" algn="ctr">
+                      <a:solidFill>
+                        <a:srgbClr val="D6DEE4"/>
+                      </a:solidFill>
+                      <a:prstDash val="solid"/>
+                      <a:round/>
+                      <a:headEnd type="none" w="med" len="med"/>
+                      <a:tailEnd type="none" w="med" len="med"/>
+                    </a:lnT>
+                    <a:lnB w="12700" cap="flat" cmpd="sng" algn="ctr">
+                      <a:solidFill>
+                        <a:srgbClr val="D6DEE4"/>
+                      </a:solidFill>
+                      <a:prstDash val="solid"/>
+                      <a:round/>
+                      <a:headEnd type="none" w="med" len="med"/>
+                      <a:tailEnd type="none" w="med" len="med"/>
+                    </a:lnB>
+                    <a:solidFill>
+                      <a:srgbClr val="F4F7F9"/>
+                    </a:solidFill>
+                  </a:tcPr>
+                </a:tc>
+                <a:tc>
+                  <a:txBody>
+                    <a:bodyPr/>
+                    <a:lstStyle/>
+                    <a:p>
+                      <a:pPr marL="0" indent="0" algn="ctr">
+                        <a:buNone/>
+                      </a:pPr>
+                      <a:r>
+                        <a:rPr lang="en-US" sz="1050" dirty="0">
+                          <a:solidFill>
+                            <a:srgbClr val="23304A"/>
+                          </a:solidFill>
+                          <a:latin typeface="Calibri" pitchFamily="34" charset="0"/>
+                          <a:ea typeface="Calibri" pitchFamily="34" charset="-122"/>
+                          <a:cs typeface="Calibri" pitchFamily="34" charset="-120"/>
+                        </a:rPr>
+                        <a:t>0.549</a:t>
+                      </a:r>
+                      <a:endParaRPr lang="en-US" sz="1050" dirty="0">
+                        <a:latin typeface="Calibri" charset="0"/>
+                        <a:ea typeface="Calibri" charset="0"/>
+                        <a:cs typeface="Calibri" charset="0"/>
+                      </a:endParaRPr>
+                    </a:p>
+                  </a:txBody>
+                  <a:tcPr marL="38100" marR="38100" marT="38100" marB="38100" anchor="ctr">
+                    <a:lnL w="12700" cap="flat" cmpd="sng" algn="ctr">
+                      <a:solidFill>
+                        <a:srgbClr val="D6DEE4"/>
+                      </a:solidFill>
+                      <a:prstDash val="solid"/>
+                      <a:round/>
+                      <a:headEnd type="none" w="med" len="med"/>
+                      <a:tailEnd type="none" w="med" len="med"/>
+                    </a:lnL>
+                    <a:lnR w="12700" cap="flat" cmpd="sng" algn="ctr">
+                      <a:solidFill>
+                        <a:srgbClr val="D6DEE4"/>
+                      </a:solidFill>
+                      <a:prstDash val="solid"/>
+                      <a:round/>
+                      <a:headEnd type="none" w="med" len="med"/>
+                      <a:tailEnd type="none" w="med" len="med"/>
+                    </a:lnR>
+                    <a:lnT w="12700" cap="flat" cmpd="sng" algn="ctr">
+                      <a:solidFill>
+                        <a:srgbClr val="D6DEE4"/>
+                      </a:solidFill>
+                      <a:prstDash val="solid"/>
+                      <a:round/>
+                      <a:headEnd type="none" w="med" len="med"/>
+                      <a:tailEnd type="none" w="med" len="med"/>
+                    </a:lnT>
+                    <a:lnB w="12700" cap="flat" cmpd="sng" algn="ctr">
+                      <a:solidFill>
+                        <a:srgbClr val="D6DEE4"/>
+                      </a:solidFill>
+                      <a:prstDash val="solid"/>
+                      <a:round/>
+                      <a:headEnd type="none" w="med" len="med"/>
+                      <a:tailEnd type="none" w="med" len="med"/>
+                    </a:lnB>
+                    <a:solidFill>
+                      <a:srgbClr val="F4F7F9"/>
+                    </a:solidFill>
+                  </a:tcPr>
+                </a:tc>
+                <a:tc>
+                  <a:txBody>
+                    <a:bodyPr/>
+                    <a:lstStyle/>
+                    <a:p>
+                      <a:pPr marL="0" indent="0" algn="ctr">
+                        <a:buNone/>
+                      </a:pPr>
+                      <a:r>
+                        <a:rPr lang="en-US" sz="1050" dirty="0">
+                          <a:solidFill>
+                            <a:srgbClr val="23304A"/>
+                          </a:solidFill>
+                          <a:latin typeface="Calibri" pitchFamily="34" charset="0"/>
+                          <a:ea typeface="Calibri" pitchFamily="34" charset="-122"/>
+                          <a:cs typeface="Calibri" pitchFamily="34" charset="-120"/>
+                        </a:rPr>
+                        <a:t>1.000</a:t>
+                      </a:r>
+                      <a:endParaRPr lang="en-US" sz="1050" dirty="0">
+                        <a:latin typeface="Calibri" charset="0"/>
+                        <a:ea typeface="Calibri" charset="0"/>
+                        <a:cs typeface="Calibri" charset="0"/>
+                      </a:endParaRPr>
+                    </a:p>
+                  </a:txBody>
+                  <a:tcPr marL="38100" marR="38100" marT="38100" marB="38100" anchor="ctr">
+                    <a:lnL w="12700" cap="flat" cmpd="sng" algn="ctr">
+                      <a:solidFill>
+                        <a:srgbClr val="D6DEE4"/>
+                      </a:solidFill>
+                      <a:prstDash val="solid"/>
+                      <a:round/>
+                      <a:headEnd type="none" w="med" len="med"/>
+                      <a:tailEnd type="none" w="med" len="med"/>
+                    </a:lnL>
+                    <a:lnR w="12700" cap="flat" cmpd="sng" algn="ctr">
+                      <a:solidFill>
+                        <a:srgbClr val="D6DEE4"/>
+                      </a:solidFill>
+                      <a:prstDash val="solid"/>
+                      <a:round/>
+                      <a:headEnd type="none" w="med" len="med"/>
+                      <a:tailEnd type="none" w="med" len="med"/>
+                    </a:lnR>
+                    <a:lnT w="12700" cap="flat" cmpd="sng" algn="ctr">
+                      <a:solidFill>
+                        <a:srgbClr val="D6DEE4"/>
+                      </a:solidFill>
+                      <a:prstDash val="solid"/>
+                      <a:round/>
+                      <a:headEnd type="none" w="med" len="med"/>
+                      <a:tailEnd type="none" w="med" len="med"/>
+                    </a:lnT>
+                    <a:lnB w="12700" cap="flat" cmpd="sng" algn="ctr">
+                      <a:solidFill>
+                        <a:srgbClr val="D6DEE4"/>
+                      </a:solidFill>
+                      <a:prstDash val="solid"/>
+                      <a:round/>
+                      <a:headEnd type="none" w="med" len="med"/>
+                      <a:tailEnd type="none" w="med" len="med"/>
+                    </a:lnB>
+                    <a:solidFill>
+                      <a:srgbClr val="F4F7F9"/>
+                    </a:solidFill>
+                  </a:tcPr>
+                </a:tc>
+                <a:extLst>
+                  <a:ext uri="{0D108BD9-81ED-4DB2-BD59-A6C34878D82A}">
+                    <a16:rowId xmlns:a16="http://schemas.microsoft.com/office/drawing/2014/main" val="10001"/>
+                  </a:ext>
+                </a:extLst>
+              </a:tr>
+              <a:tr h="365760">
+                <a:tc>
+                  <a:txBody>
+                    <a:bodyPr/>
+                    <a:lstStyle/>
+                    <a:p>
+                      <a:pPr marL="0" indent="0" algn="l">
+                        <a:buNone/>
+                      </a:pPr>
+                      <a:r>
+                        <a:rPr lang="en-US" sz="1000" b="1" dirty="0">
+                          <a:solidFill>
+                            <a:srgbClr val="23304A"/>
+                          </a:solidFill>
+                          <a:latin typeface="Calibri" pitchFamily="34" charset="0"/>
+                          <a:ea typeface="Calibri" pitchFamily="34" charset="-122"/>
+                          <a:cs typeface="Calibri" pitchFamily="34" charset="-120"/>
+                        </a:rPr>
+                        <a:t>SPY/QQQ fine-tuned</a:t>
                       </a:r>
                       <a:endParaRPr lang="en-US" sz="1000" dirty="0">
                         <a:latin typeface="Calibri" charset="0"/>
@@ -15258,7 +17882,7 @@
                           <a:ea typeface="Calibri" pitchFamily="34" charset="-122"/>
                           <a:cs typeface="Calibri" pitchFamily="34" charset="-120"/>
                         </a:rPr>
-                        <a:t>Primer finetuning</a:t>
+                        <a:t>Paso 2 · dominio amplio</a:t>
                       </a:r>
                       <a:endParaRPr lang="en-US" sz="1000" dirty="0">
                         <a:latin typeface="Calibri" charset="0"/>
@@ -15598,7 +18222,7 @@
                           <a:ea typeface="Calibri" pitchFamily="34" charset="-122"/>
                           <a:cs typeface="Calibri" pitchFamily="34" charset="-120"/>
                         </a:rPr>
-                        <a:t>0.47</a:t>
+                        <a:t>0.472</a:t>
                       </a:r>
                       <a:endParaRPr lang="en-US" sz="1050" dirty="0">
                         <a:latin typeface="Calibri" charset="0"/>
@@ -15646,489 +18270,6 @@
                     </a:lnB>
                     <a:solidFill>
                       <a:srgbClr val="FFFFFF"/>
-                    </a:solidFill>
-                  </a:tcPr>
-                </a:tc>
-                <a:extLst>
-                  <a:ext uri="{0D108BD9-81ED-4DB2-BD59-A6C34878D82A}">
-                    <a16:rowId xmlns:a16="http://schemas.microsoft.com/office/drawing/2014/main" val="10001"/>
-                  </a:ext>
-                </a:extLst>
-              </a:tr>
-              <a:tr h="365760">
-                <a:tc>
-                  <a:txBody>
-                    <a:bodyPr/>
-                    <a:lstStyle/>
-                    <a:p>
-                      <a:pPr marL="0" indent="0" algn="l">
-                        <a:buNone/>
-                      </a:pPr>
-                      <a:r>
-                        <a:rPr lang="en-US" sz="1000" b="1" dirty="0">
-                          <a:solidFill>
-                            <a:srgbClr val="C8923B"/>
-                          </a:solidFill>
-                          <a:latin typeface="Calibri" pitchFamily="34" charset="0"/>
-                          <a:ea typeface="Calibri" pitchFamily="34" charset="-122"/>
-                          <a:cs typeface="Calibri" pitchFamily="34" charset="-120"/>
-                        </a:rPr>
-                        <a:t>GPT-2 no fine-tune</a:t>
-                      </a:r>
-                      <a:endParaRPr lang="en-US" sz="1000" dirty="0">
-                        <a:latin typeface="Calibri" charset="0"/>
-                        <a:ea typeface="Calibri" charset="0"/>
-                        <a:cs typeface="Calibri" charset="0"/>
-                      </a:endParaRPr>
-                    </a:p>
-                  </a:txBody>
-                  <a:tcPr marL="38100" marR="38100" marT="38100" marB="38100" anchor="ctr">
-                    <a:lnL w="12700" cap="flat" cmpd="sng" algn="ctr">
-                      <a:solidFill>
-                        <a:srgbClr val="D6DEE4"/>
-                      </a:solidFill>
-                      <a:prstDash val="solid"/>
-                      <a:round/>
-                      <a:headEnd type="none" w="med" len="med"/>
-                      <a:tailEnd type="none" w="med" len="med"/>
-                    </a:lnL>
-                    <a:lnR w="12700" cap="flat" cmpd="sng" algn="ctr">
-                      <a:solidFill>
-                        <a:srgbClr val="D6DEE4"/>
-                      </a:solidFill>
-                      <a:prstDash val="solid"/>
-                      <a:round/>
-                      <a:headEnd type="none" w="med" len="med"/>
-                      <a:tailEnd type="none" w="med" len="med"/>
-                    </a:lnR>
-                    <a:lnT w="12700" cap="flat" cmpd="sng" algn="ctr">
-                      <a:solidFill>
-                        <a:srgbClr val="D6DEE4"/>
-                      </a:solidFill>
-                      <a:prstDash val="solid"/>
-                      <a:round/>
-                      <a:headEnd type="none" w="med" len="med"/>
-                      <a:tailEnd type="none" w="med" len="med"/>
-                    </a:lnT>
-                    <a:lnB w="12700" cap="flat" cmpd="sng" algn="ctr">
-                      <a:solidFill>
-                        <a:srgbClr val="D6DEE4"/>
-                      </a:solidFill>
-                      <a:prstDash val="solid"/>
-                      <a:round/>
-                      <a:headEnd type="none" w="med" len="med"/>
-                      <a:tailEnd type="none" w="med" len="med"/>
-                    </a:lnB>
-                    <a:solidFill>
-                      <a:srgbClr val="F7EEDD"/>
-                    </a:solidFill>
-                  </a:tcPr>
-                </a:tc>
-                <a:tc>
-                  <a:txBody>
-                    <a:bodyPr/>
-                    <a:lstStyle/>
-                    <a:p>
-                      <a:pPr marL="0" indent="0" algn="l">
-                        <a:buNone/>
-                      </a:pPr>
-                      <a:r>
-                        <a:rPr lang="en-US" sz="1000" i="1" dirty="0">
-                          <a:solidFill>
-                            <a:srgbClr val="667085"/>
-                          </a:solidFill>
-                          <a:latin typeface="Calibri" pitchFamily="34" charset="0"/>
-                          <a:ea typeface="Calibri" pitchFamily="34" charset="-122"/>
-                          <a:cs typeface="Calibri" pitchFamily="34" charset="-120"/>
-                        </a:rPr>
-                        <a:t>Baseline de modelo</a:t>
-                      </a:r>
-                      <a:endParaRPr lang="en-US" sz="1000" dirty="0">
-                        <a:latin typeface="Calibri" charset="0"/>
-                        <a:ea typeface="Calibri" charset="0"/>
-                        <a:cs typeface="Calibri" charset="0"/>
-                      </a:endParaRPr>
-                    </a:p>
-                  </a:txBody>
-                  <a:tcPr marL="38100" marR="38100" marT="38100" marB="38100" anchor="ctr">
-                    <a:lnL w="12700" cap="flat" cmpd="sng" algn="ctr">
-                      <a:solidFill>
-                        <a:srgbClr val="D6DEE4"/>
-                      </a:solidFill>
-                      <a:prstDash val="solid"/>
-                      <a:round/>
-                      <a:headEnd type="none" w="med" len="med"/>
-                      <a:tailEnd type="none" w="med" len="med"/>
-                    </a:lnL>
-                    <a:lnR w="12700" cap="flat" cmpd="sng" algn="ctr">
-                      <a:solidFill>
-                        <a:srgbClr val="D6DEE4"/>
-                      </a:solidFill>
-                      <a:prstDash val="solid"/>
-                      <a:round/>
-                      <a:headEnd type="none" w="med" len="med"/>
-                      <a:tailEnd type="none" w="med" len="med"/>
-                    </a:lnR>
-                    <a:lnT w="12700" cap="flat" cmpd="sng" algn="ctr">
-                      <a:solidFill>
-                        <a:srgbClr val="D6DEE4"/>
-                      </a:solidFill>
-                      <a:prstDash val="solid"/>
-                      <a:round/>
-                      <a:headEnd type="none" w="med" len="med"/>
-                      <a:tailEnd type="none" w="med" len="med"/>
-                    </a:lnT>
-                    <a:lnB w="12700" cap="flat" cmpd="sng" algn="ctr">
-                      <a:solidFill>
-                        <a:srgbClr val="D6DEE4"/>
-                      </a:solidFill>
-                      <a:prstDash val="solid"/>
-                      <a:round/>
-                      <a:headEnd type="none" w="med" len="med"/>
-                      <a:tailEnd type="none" w="med" len="med"/>
-                    </a:lnB>
-                    <a:solidFill>
-                      <a:srgbClr val="F4F7F9"/>
-                    </a:solidFill>
-                  </a:tcPr>
-                </a:tc>
-                <a:tc>
-                  <a:txBody>
-                    <a:bodyPr/>
-                    <a:lstStyle/>
-                    <a:p>
-                      <a:pPr marL="0" indent="0" algn="ctr">
-                        <a:buNone/>
-                      </a:pPr>
-                      <a:r>
-                        <a:rPr lang="en-US" sz="1050" dirty="0">
-                          <a:solidFill>
-                            <a:srgbClr val="23304A"/>
-                          </a:solidFill>
-                          <a:latin typeface="Calibri" pitchFamily="34" charset="0"/>
-                          <a:ea typeface="Calibri" pitchFamily="34" charset="-122"/>
-                          <a:cs typeface="Calibri" pitchFamily="34" charset="-120"/>
-                        </a:rPr>
-                        <a:t>0.040</a:t>
-                      </a:r>
-                      <a:endParaRPr lang="en-US" sz="1050" dirty="0">
-                        <a:latin typeface="Calibri" charset="0"/>
-                        <a:ea typeface="Calibri" charset="0"/>
-                        <a:cs typeface="Calibri" charset="0"/>
-                      </a:endParaRPr>
-                    </a:p>
-                  </a:txBody>
-                  <a:tcPr marL="38100" marR="38100" marT="38100" marB="38100" anchor="ctr">
-                    <a:lnL w="12700" cap="flat" cmpd="sng" algn="ctr">
-                      <a:solidFill>
-                        <a:srgbClr val="D6DEE4"/>
-                      </a:solidFill>
-                      <a:prstDash val="solid"/>
-                      <a:round/>
-                      <a:headEnd type="none" w="med" len="med"/>
-                      <a:tailEnd type="none" w="med" len="med"/>
-                    </a:lnL>
-                    <a:lnR w="12700" cap="flat" cmpd="sng" algn="ctr">
-                      <a:solidFill>
-                        <a:srgbClr val="D6DEE4"/>
-                      </a:solidFill>
-                      <a:prstDash val="solid"/>
-                      <a:round/>
-                      <a:headEnd type="none" w="med" len="med"/>
-                      <a:tailEnd type="none" w="med" len="med"/>
-                    </a:lnR>
-                    <a:lnT w="12700" cap="flat" cmpd="sng" algn="ctr">
-                      <a:solidFill>
-                        <a:srgbClr val="D6DEE4"/>
-                      </a:solidFill>
-                      <a:prstDash val="solid"/>
-                      <a:round/>
-                      <a:headEnd type="none" w="med" len="med"/>
-                      <a:tailEnd type="none" w="med" len="med"/>
-                    </a:lnT>
-                    <a:lnB w="12700" cap="flat" cmpd="sng" algn="ctr">
-                      <a:solidFill>
-                        <a:srgbClr val="D6DEE4"/>
-                      </a:solidFill>
-                      <a:prstDash val="solid"/>
-                      <a:round/>
-                      <a:headEnd type="none" w="med" len="med"/>
-                      <a:tailEnd type="none" w="med" len="med"/>
-                    </a:lnB>
-                    <a:solidFill>
-                      <a:srgbClr val="F4F7F9"/>
-                    </a:solidFill>
-                  </a:tcPr>
-                </a:tc>
-                <a:tc>
-                  <a:txBody>
-                    <a:bodyPr/>
-                    <a:lstStyle/>
-                    <a:p>
-                      <a:pPr marL="0" indent="0" algn="ctr">
-                        <a:buNone/>
-                      </a:pPr>
-                      <a:r>
-                        <a:rPr lang="en-US" sz="1050" dirty="0">
-                          <a:solidFill>
-                            <a:srgbClr val="23304A"/>
-                          </a:solidFill>
-                          <a:latin typeface="Calibri" pitchFamily="34" charset="0"/>
-                          <a:ea typeface="Calibri" pitchFamily="34" charset="-122"/>
-                          <a:cs typeface="Calibri" pitchFamily="34" charset="-120"/>
-                        </a:rPr>
-                        <a:t>—</a:t>
-                      </a:r>
-                      <a:endParaRPr lang="en-US" sz="1050" dirty="0">
-                        <a:latin typeface="Calibri" charset="0"/>
-                        <a:ea typeface="Calibri" charset="0"/>
-                        <a:cs typeface="Calibri" charset="0"/>
-                      </a:endParaRPr>
-                    </a:p>
-                  </a:txBody>
-                  <a:tcPr marL="38100" marR="38100" marT="38100" marB="38100" anchor="ctr">
-                    <a:lnL w="12700" cap="flat" cmpd="sng" algn="ctr">
-                      <a:solidFill>
-                        <a:srgbClr val="D6DEE4"/>
-                      </a:solidFill>
-                      <a:prstDash val="solid"/>
-                      <a:round/>
-                      <a:headEnd type="none" w="med" len="med"/>
-                      <a:tailEnd type="none" w="med" len="med"/>
-                    </a:lnL>
-                    <a:lnR w="12700" cap="flat" cmpd="sng" algn="ctr">
-                      <a:solidFill>
-                        <a:srgbClr val="D6DEE4"/>
-                      </a:solidFill>
-                      <a:prstDash val="solid"/>
-                      <a:round/>
-                      <a:headEnd type="none" w="med" len="med"/>
-                      <a:tailEnd type="none" w="med" len="med"/>
-                    </a:lnR>
-                    <a:lnT w="12700" cap="flat" cmpd="sng" algn="ctr">
-                      <a:solidFill>
-                        <a:srgbClr val="D6DEE4"/>
-                      </a:solidFill>
-                      <a:prstDash val="solid"/>
-                      <a:round/>
-                      <a:headEnd type="none" w="med" len="med"/>
-                      <a:tailEnd type="none" w="med" len="med"/>
-                    </a:lnT>
-                    <a:lnB w="12700" cap="flat" cmpd="sng" algn="ctr">
-                      <a:solidFill>
-                        <a:srgbClr val="D6DEE4"/>
-                      </a:solidFill>
-                      <a:prstDash val="solid"/>
-                      <a:round/>
-                      <a:headEnd type="none" w="med" len="med"/>
-                      <a:tailEnd type="none" w="med" len="med"/>
-                    </a:lnB>
-                    <a:solidFill>
-                      <a:srgbClr val="F4F7F9"/>
-                    </a:solidFill>
-                  </a:tcPr>
-                </a:tc>
-                <a:tc>
-                  <a:txBody>
-                    <a:bodyPr/>
-                    <a:lstStyle/>
-                    <a:p>
-                      <a:pPr marL="0" indent="0" algn="ctr">
-                        <a:buNone/>
-                      </a:pPr>
-                      <a:r>
-                        <a:rPr lang="en-US" sz="1050" dirty="0">
-                          <a:solidFill>
-                            <a:srgbClr val="23304A"/>
-                          </a:solidFill>
-                          <a:latin typeface="Calibri" pitchFamily="34" charset="0"/>
-                          <a:ea typeface="Calibri" pitchFamily="34" charset="-122"/>
-                          <a:cs typeface="Calibri" pitchFamily="34" charset="-120"/>
-                        </a:rPr>
-                        <a:t>0.273</a:t>
-                      </a:r>
-                      <a:endParaRPr lang="en-US" sz="1050" dirty="0">
-                        <a:latin typeface="Calibri" charset="0"/>
-                        <a:ea typeface="Calibri" charset="0"/>
-                        <a:cs typeface="Calibri" charset="0"/>
-                      </a:endParaRPr>
-                    </a:p>
-                  </a:txBody>
-                  <a:tcPr marL="38100" marR="38100" marT="38100" marB="38100" anchor="ctr">
-                    <a:lnL w="12700" cap="flat" cmpd="sng" algn="ctr">
-                      <a:solidFill>
-                        <a:srgbClr val="D6DEE4"/>
-                      </a:solidFill>
-                      <a:prstDash val="solid"/>
-                      <a:round/>
-                      <a:headEnd type="none" w="med" len="med"/>
-                      <a:tailEnd type="none" w="med" len="med"/>
-                    </a:lnL>
-                    <a:lnR w="12700" cap="flat" cmpd="sng" algn="ctr">
-                      <a:solidFill>
-                        <a:srgbClr val="D6DEE4"/>
-                      </a:solidFill>
-                      <a:prstDash val="solid"/>
-                      <a:round/>
-                      <a:headEnd type="none" w="med" len="med"/>
-                      <a:tailEnd type="none" w="med" len="med"/>
-                    </a:lnR>
-                    <a:lnT w="12700" cap="flat" cmpd="sng" algn="ctr">
-                      <a:solidFill>
-                        <a:srgbClr val="D6DEE4"/>
-                      </a:solidFill>
-                      <a:prstDash val="solid"/>
-                      <a:round/>
-                      <a:headEnd type="none" w="med" len="med"/>
-                      <a:tailEnd type="none" w="med" len="med"/>
-                    </a:lnT>
-                    <a:lnB w="12700" cap="flat" cmpd="sng" algn="ctr">
-                      <a:solidFill>
-                        <a:srgbClr val="D6DEE4"/>
-                      </a:solidFill>
-                      <a:prstDash val="solid"/>
-                      <a:round/>
-                      <a:headEnd type="none" w="med" len="med"/>
-                      <a:tailEnd type="none" w="med" len="med"/>
-                    </a:lnB>
-                    <a:solidFill>
-                      <a:srgbClr val="F4F7F9"/>
-                    </a:solidFill>
-                  </a:tcPr>
-                </a:tc>
-                <a:tc>
-                  <a:txBody>
-                    <a:bodyPr/>
-                    <a:lstStyle/>
-                    <a:p>
-                      <a:pPr marL="0" indent="0" algn="ctr">
-                        <a:buNone/>
-                      </a:pPr>
-                      <a:r>
-                        <a:rPr lang="en-US" sz="1050" dirty="0">
-                          <a:solidFill>
-                            <a:srgbClr val="23304A"/>
-                          </a:solidFill>
-                          <a:latin typeface="Calibri" pitchFamily="34" charset="0"/>
-                          <a:ea typeface="Calibri" pitchFamily="34" charset="-122"/>
-                          <a:cs typeface="Calibri" pitchFamily="34" charset="-120"/>
-                        </a:rPr>
-                        <a:t>0.549</a:t>
-                      </a:r>
-                      <a:endParaRPr lang="en-US" sz="1050" dirty="0">
-                        <a:latin typeface="Calibri" charset="0"/>
-                        <a:ea typeface="Calibri" charset="0"/>
-                        <a:cs typeface="Calibri" charset="0"/>
-                      </a:endParaRPr>
-                    </a:p>
-                  </a:txBody>
-                  <a:tcPr marL="38100" marR="38100" marT="38100" marB="38100" anchor="ctr">
-                    <a:lnL w="12700" cap="flat" cmpd="sng" algn="ctr">
-                      <a:solidFill>
-                        <a:srgbClr val="D6DEE4"/>
-                      </a:solidFill>
-                      <a:prstDash val="solid"/>
-                      <a:round/>
-                      <a:headEnd type="none" w="med" len="med"/>
-                      <a:tailEnd type="none" w="med" len="med"/>
-                    </a:lnL>
-                    <a:lnR w="12700" cap="flat" cmpd="sng" algn="ctr">
-                      <a:solidFill>
-                        <a:srgbClr val="D6DEE4"/>
-                      </a:solidFill>
-                      <a:prstDash val="solid"/>
-                      <a:round/>
-                      <a:headEnd type="none" w="med" len="med"/>
-                      <a:tailEnd type="none" w="med" len="med"/>
-                    </a:lnR>
-                    <a:lnT w="12700" cap="flat" cmpd="sng" algn="ctr">
-                      <a:solidFill>
-                        <a:srgbClr val="D6DEE4"/>
-                      </a:solidFill>
-                      <a:prstDash val="solid"/>
-                      <a:round/>
-                      <a:headEnd type="none" w="med" len="med"/>
-                      <a:tailEnd type="none" w="med" len="med"/>
-                    </a:lnT>
-                    <a:lnB w="12700" cap="flat" cmpd="sng" algn="ctr">
-                      <a:solidFill>
-                        <a:srgbClr val="D6DEE4"/>
-                      </a:solidFill>
-                      <a:prstDash val="solid"/>
-                      <a:round/>
-                      <a:headEnd type="none" w="med" len="med"/>
-                      <a:tailEnd type="none" w="med" len="med"/>
-                    </a:lnB>
-                    <a:solidFill>
-                      <a:srgbClr val="F4F7F9"/>
-                    </a:solidFill>
-                  </a:tcPr>
-                </a:tc>
-                <a:tc>
-                  <a:txBody>
-                    <a:bodyPr/>
-                    <a:lstStyle/>
-                    <a:p>
-                      <a:pPr marL="0" indent="0" algn="ctr">
-                        <a:buNone/>
-                      </a:pPr>
-                      <a:r>
-                        <a:rPr lang="en-US" sz="1050" dirty="0">
-                          <a:solidFill>
-                            <a:srgbClr val="23304A"/>
-                          </a:solidFill>
-                          <a:latin typeface="Calibri" pitchFamily="34" charset="0"/>
-                          <a:ea typeface="Calibri" pitchFamily="34" charset="-122"/>
-                          <a:cs typeface="Calibri" pitchFamily="34" charset="-120"/>
-                        </a:rPr>
-                        <a:t>1.00</a:t>
-                      </a:r>
-                      <a:endParaRPr lang="en-US" sz="1050" dirty="0">
-                        <a:latin typeface="Calibri" charset="0"/>
-                        <a:ea typeface="Calibri" charset="0"/>
-                        <a:cs typeface="Calibri" charset="0"/>
-                      </a:endParaRPr>
-                    </a:p>
-                  </a:txBody>
-                  <a:tcPr marL="38100" marR="38100" marT="38100" marB="38100" anchor="ctr">
-                    <a:lnL w="12700" cap="flat" cmpd="sng" algn="ctr">
-                      <a:solidFill>
-                        <a:srgbClr val="D6DEE4"/>
-                      </a:solidFill>
-                      <a:prstDash val="solid"/>
-                      <a:round/>
-                      <a:headEnd type="none" w="med" len="med"/>
-                      <a:tailEnd type="none" w="med" len="med"/>
-                    </a:lnL>
-                    <a:lnR w="12700" cap="flat" cmpd="sng" algn="ctr">
-                      <a:solidFill>
-                        <a:srgbClr val="D6DEE4"/>
-                      </a:solidFill>
-                      <a:prstDash val="solid"/>
-                      <a:round/>
-                      <a:headEnd type="none" w="med" len="med"/>
-                      <a:tailEnd type="none" w="med" len="med"/>
-                    </a:lnR>
-                    <a:lnT w="12700" cap="flat" cmpd="sng" algn="ctr">
-                      <a:solidFill>
-                        <a:srgbClr val="D6DEE4"/>
-                      </a:solidFill>
-                      <a:prstDash val="solid"/>
-                      <a:round/>
-                      <a:headEnd type="none" w="med" len="med"/>
-                      <a:tailEnd type="none" w="med" len="med"/>
-                    </a:lnT>
-                    <a:lnB w="12700" cap="flat" cmpd="sng" algn="ctr">
-                      <a:solidFill>
-                        <a:srgbClr val="D6DEE4"/>
-                      </a:solidFill>
-                      <a:prstDash val="solid"/>
-                      <a:round/>
-                      <a:headEnd type="none" w="med" len="med"/>
-                      <a:tailEnd type="none" w="med" len="med"/>
-                    </a:lnB>
-                    <a:solidFill>
-                      <a:srgbClr val="F4F7F9"/>
                     </a:solidFill>
                   </a:tcPr>
                 </a:tc>
@@ -16224,7 +18365,7 @@
                           <a:ea typeface="Calibri" pitchFamily="34" charset="-122"/>
                           <a:cs typeface="Calibri" pitchFamily="34" charset="-120"/>
                         </a:rPr>
-                        <a:t>Mejor BERTScore</a:t>
+                        <a:t>Paso 3 · especialización</a:t>
                       </a:r>
                       <a:endParaRPr lang="en-US" sz="1000" dirty="0">
                         <a:latin typeface="Calibri" charset="0"/>
@@ -16564,7 +18705,7 @@
                           <a:ea typeface="Calibri" pitchFamily="34" charset="-122"/>
                           <a:cs typeface="Calibri" pitchFamily="34" charset="-120"/>
                         </a:rPr>
-                        <a:t>0.59</a:t>
+                        <a:t>0.591</a:t>
                       </a:r>
                       <a:endParaRPr lang="en-US" sz="1050" dirty="0">
                         <a:latin typeface="Calibri" charset="0"/>
@@ -16633,13 +18774,496 @@
                       <a:r>
                         <a:rPr lang="en-US" sz="1000" b="1" dirty="0">
                           <a:solidFill>
+                            <a:srgbClr val="23304A"/>
+                          </a:solidFill>
+                          <a:latin typeface="Calibri" pitchFamily="34" charset="0"/>
+                          <a:ea typeface="Calibri" pitchFamily="34" charset="-122"/>
+                          <a:cs typeface="Calibri" pitchFamily="34" charset="-120"/>
+                        </a:rPr>
+                        <a:t>NVDA label scoring</a:t>
+                      </a:r>
+                      <a:endParaRPr lang="en-US" sz="1000" dirty="0">
+                        <a:latin typeface="Calibri" charset="0"/>
+                        <a:ea typeface="Calibri" charset="0"/>
+                        <a:cs typeface="Calibri" charset="0"/>
+                      </a:endParaRPr>
+                    </a:p>
+                  </a:txBody>
+                  <a:tcPr marL="38100" marR="38100" marT="38100" marB="38100" anchor="ctr">
+                    <a:lnL w="12700" cap="flat" cmpd="sng" algn="ctr">
+                      <a:solidFill>
+                        <a:srgbClr val="D6DEE4"/>
+                      </a:solidFill>
+                      <a:prstDash val="solid"/>
+                      <a:round/>
+                      <a:headEnd type="none" w="med" len="med"/>
+                      <a:tailEnd type="none" w="med" len="med"/>
+                    </a:lnL>
+                    <a:lnR w="12700" cap="flat" cmpd="sng" algn="ctr">
+                      <a:solidFill>
+                        <a:srgbClr val="D6DEE4"/>
+                      </a:solidFill>
+                      <a:prstDash val="solid"/>
+                      <a:round/>
+                      <a:headEnd type="none" w="med" len="med"/>
+                      <a:tailEnd type="none" w="med" len="med"/>
+                    </a:lnR>
+                    <a:lnT w="12700" cap="flat" cmpd="sng" algn="ctr">
+                      <a:solidFill>
+                        <a:srgbClr val="D6DEE4"/>
+                      </a:solidFill>
+                      <a:prstDash val="solid"/>
+                      <a:round/>
+                      <a:headEnd type="none" w="med" len="med"/>
+                      <a:tailEnd type="none" w="med" len="med"/>
+                    </a:lnT>
+                    <a:lnB w="12700" cap="flat" cmpd="sng" algn="ctr">
+                      <a:solidFill>
+                        <a:srgbClr val="D6DEE4"/>
+                      </a:solidFill>
+                      <a:prstDash val="solid"/>
+                      <a:round/>
+                      <a:headEnd type="none" w="med" len="med"/>
+                      <a:tailEnd type="none" w="med" len="med"/>
+                    </a:lnB>
+                    <a:solidFill>
+                      <a:srgbClr val="FFFFFF"/>
+                    </a:solidFill>
+                  </a:tcPr>
+                </a:tc>
+                <a:tc>
+                  <a:txBody>
+                    <a:bodyPr/>
+                    <a:lstStyle/>
+                    <a:p>
+                      <a:pPr marL="0" indent="0" algn="l">
+                        <a:buNone/>
+                      </a:pPr>
+                      <a:r>
+                        <a:rPr lang="en-US" sz="1000" i="1" dirty="0">
+                          <a:solidFill>
+                            <a:srgbClr val="667085"/>
+                          </a:solidFill>
+                          <a:latin typeface="Calibri" pitchFamily="34" charset="0"/>
+                          <a:ea typeface="Calibri" pitchFamily="34" charset="-122"/>
+                          <a:cs typeface="Calibri" pitchFamily="34" charset="-120"/>
+                        </a:rPr>
+                        <a:t>Paso 4 · estructura</a:t>
+                      </a:r>
+                      <a:endParaRPr lang="en-US" sz="1000" dirty="0">
+                        <a:latin typeface="Calibri" charset="0"/>
+                        <a:ea typeface="Calibri" charset="0"/>
+                        <a:cs typeface="Calibri" charset="0"/>
+                      </a:endParaRPr>
+                    </a:p>
+                  </a:txBody>
+                  <a:tcPr marL="38100" marR="38100" marT="38100" marB="38100" anchor="ctr">
+                    <a:lnL w="12700" cap="flat" cmpd="sng" algn="ctr">
+                      <a:solidFill>
+                        <a:srgbClr val="D6DEE4"/>
+                      </a:solidFill>
+                      <a:prstDash val="solid"/>
+                      <a:round/>
+                      <a:headEnd type="none" w="med" len="med"/>
+                      <a:tailEnd type="none" w="med" len="med"/>
+                    </a:lnL>
+                    <a:lnR w="12700" cap="flat" cmpd="sng" algn="ctr">
+                      <a:solidFill>
+                        <a:srgbClr val="D6DEE4"/>
+                      </a:solidFill>
+                      <a:prstDash val="solid"/>
+                      <a:round/>
+                      <a:headEnd type="none" w="med" len="med"/>
+                      <a:tailEnd type="none" w="med" len="med"/>
+                    </a:lnR>
+                    <a:lnT w="12700" cap="flat" cmpd="sng" algn="ctr">
+                      <a:solidFill>
+                        <a:srgbClr val="D6DEE4"/>
+                      </a:solidFill>
+                      <a:prstDash val="solid"/>
+                      <a:round/>
+                      <a:headEnd type="none" w="med" len="med"/>
+                      <a:tailEnd type="none" w="med" len="med"/>
+                    </a:lnT>
+                    <a:lnB w="12700" cap="flat" cmpd="sng" algn="ctr">
+                      <a:solidFill>
+                        <a:srgbClr val="D6DEE4"/>
+                      </a:solidFill>
+                      <a:prstDash val="solid"/>
+                      <a:round/>
+                      <a:headEnd type="none" w="med" len="med"/>
+                      <a:tailEnd type="none" w="med" len="med"/>
+                    </a:lnB>
+                    <a:solidFill>
+                      <a:srgbClr val="FFFFFF"/>
+                    </a:solidFill>
+                  </a:tcPr>
+                </a:tc>
+                <a:tc>
+                  <a:txBody>
+                    <a:bodyPr/>
+                    <a:lstStyle/>
+                    <a:p>
+                      <a:pPr marL="0" indent="0" algn="ctr">
+                        <a:buNone/>
+                      </a:pPr>
+                      <a:r>
+                        <a:rPr lang="en-US" sz="1050" dirty="0">
+                          <a:solidFill>
+                            <a:srgbClr val="23304A"/>
+                          </a:solidFill>
+                          <a:latin typeface="Calibri" pitchFamily="34" charset="0"/>
+                          <a:ea typeface="Calibri" pitchFamily="34" charset="-122"/>
+                          <a:cs typeface="Calibri" pitchFamily="34" charset="-120"/>
+                        </a:rPr>
+                        <a:t>0.066</a:t>
+                      </a:r>
+                      <a:endParaRPr lang="en-US" sz="1050" dirty="0">
+                        <a:latin typeface="Calibri" charset="0"/>
+                        <a:ea typeface="Calibri" charset="0"/>
+                        <a:cs typeface="Calibri" charset="0"/>
+                      </a:endParaRPr>
+                    </a:p>
+                  </a:txBody>
+                  <a:tcPr marL="38100" marR="38100" marT="38100" marB="38100" anchor="ctr">
+                    <a:lnL w="12700" cap="flat" cmpd="sng" algn="ctr">
+                      <a:solidFill>
+                        <a:srgbClr val="D6DEE4"/>
+                      </a:solidFill>
+                      <a:prstDash val="solid"/>
+                      <a:round/>
+                      <a:headEnd type="none" w="med" len="med"/>
+                      <a:tailEnd type="none" w="med" len="med"/>
+                    </a:lnL>
+                    <a:lnR w="12700" cap="flat" cmpd="sng" algn="ctr">
+                      <a:solidFill>
+                        <a:srgbClr val="D6DEE4"/>
+                      </a:solidFill>
+                      <a:prstDash val="solid"/>
+                      <a:round/>
+                      <a:headEnd type="none" w="med" len="med"/>
+                      <a:tailEnd type="none" w="med" len="med"/>
+                    </a:lnR>
+                    <a:lnT w="12700" cap="flat" cmpd="sng" algn="ctr">
+                      <a:solidFill>
+                        <a:srgbClr val="D6DEE4"/>
+                      </a:solidFill>
+                      <a:prstDash val="solid"/>
+                      <a:round/>
+                      <a:headEnd type="none" w="med" len="med"/>
+                      <a:tailEnd type="none" w="med" len="med"/>
+                    </a:lnT>
+                    <a:lnB w="12700" cap="flat" cmpd="sng" algn="ctr">
+                      <a:solidFill>
+                        <a:srgbClr val="D6DEE4"/>
+                      </a:solidFill>
+                      <a:prstDash val="solid"/>
+                      <a:round/>
+                      <a:headEnd type="none" w="med" len="med"/>
+                      <a:tailEnd type="none" w="med" len="med"/>
+                    </a:lnB>
+                    <a:solidFill>
+                      <a:srgbClr val="FFFFFF"/>
+                    </a:solidFill>
+                  </a:tcPr>
+                </a:tc>
+                <a:tc>
+                  <a:txBody>
+                    <a:bodyPr/>
+                    <a:lstStyle/>
+                    <a:p>
+                      <a:pPr marL="0" indent="0" algn="ctr">
+                        <a:buNone/>
+                      </a:pPr>
+                      <a:r>
+                        <a:rPr lang="en-US" sz="1050" dirty="0">
+                          <a:solidFill>
+                            <a:srgbClr val="23304A"/>
+                          </a:solidFill>
+                          <a:latin typeface="Calibri" pitchFamily="34" charset="0"/>
+                          <a:ea typeface="Calibri" pitchFamily="34" charset="-122"/>
+                          <a:cs typeface="Calibri" pitchFamily="34" charset="-120"/>
+                        </a:rPr>
+                        <a:t>0.740</a:t>
+                      </a:r>
+                      <a:endParaRPr lang="en-US" sz="1050" dirty="0">
+                        <a:latin typeface="Calibri" charset="0"/>
+                        <a:ea typeface="Calibri" charset="0"/>
+                        <a:cs typeface="Calibri" charset="0"/>
+                      </a:endParaRPr>
+                    </a:p>
+                  </a:txBody>
+                  <a:tcPr marL="38100" marR="38100" marT="38100" marB="38100" anchor="ctr">
+                    <a:lnL w="12700" cap="flat" cmpd="sng" algn="ctr">
+                      <a:solidFill>
+                        <a:srgbClr val="D6DEE4"/>
+                      </a:solidFill>
+                      <a:prstDash val="solid"/>
+                      <a:round/>
+                      <a:headEnd type="none" w="med" len="med"/>
+                      <a:tailEnd type="none" w="med" len="med"/>
+                    </a:lnL>
+                    <a:lnR w="12700" cap="flat" cmpd="sng" algn="ctr">
+                      <a:solidFill>
+                        <a:srgbClr val="D6DEE4"/>
+                      </a:solidFill>
+                      <a:prstDash val="solid"/>
+                      <a:round/>
+                      <a:headEnd type="none" w="med" len="med"/>
+                      <a:tailEnd type="none" w="med" len="med"/>
+                    </a:lnR>
+                    <a:lnT w="12700" cap="flat" cmpd="sng" algn="ctr">
+                      <a:solidFill>
+                        <a:srgbClr val="D6DEE4"/>
+                      </a:solidFill>
+                      <a:prstDash val="solid"/>
+                      <a:round/>
+                      <a:headEnd type="none" w="med" len="med"/>
+                      <a:tailEnd type="none" w="med" len="med"/>
+                    </a:lnT>
+                    <a:lnB w="12700" cap="flat" cmpd="sng" algn="ctr">
+                      <a:solidFill>
+                        <a:srgbClr val="D6DEE4"/>
+                      </a:solidFill>
+                      <a:prstDash val="solid"/>
+                      <a:round/>
+                      <a:headEnd type="none" w="med" len="med"/>
+                      <a:tailEnd type="none" w="med" len="med"/>
+                    </a:lnB>
+                    <a:solidFill>
+                      <a:srgbClr val="FFFFFF"/>
+                    </a:solidFill>
+                  </a:tcPr>
+                </a:tc>
+                <a:tc>
+                  <a:txBody>
+                    <a:bodyPr/>
+                    <a:lstStyle/>
+                    <a:p>
+                      <a:pPr marL="0" indent="0" algn="ctr">
+                        <a:buNone/>
+                      </a:pPr>
+                      <a:r>
+                        <a:rPr lang="en-US" sz="1050" dirty="0">
+                          <a:solidFill>
+                            <a:srgbClr val="23304A"/>
+                          </a:solidFill>
+                          <a:latin typeface="Calibri" pitchFamily="34" charset="0"/>
+                          <a:ea typeface="Calibri" pitchFamily="34" charset="-122"/>
+                          <a:cs typeface="Calibri" pitchFamily="34" charset="-120"/>
+                        </a:rPr>
+                        <a:t>0.376</a:t>
+                      </a:r>
+                      <a:endParaRPr lang="en-US" sz="1050" dirty="0">
+                        <a:latin typeface="Calibri" charset="0"/>
+                        <a:ea typeface="Calibri" charset="0"/>
+                        <a:cs typeface="Calibri" charset="0"/>
+                      </a:endParaRPr>
+                    </a:p>
+                  </a:txBody>
+                  <a:tcPr marL="38100" marR="38100" marT="38100" marB="38100" anchor="ctr">
+                    <a:lnL w="12700" cap="flat" cmpd="sng" algn="ctr">
+                      <a:solidFill>
+                        <a:srgbClr val="D6DEE4"/>
+                      </a:solidFill>
+                      <a:prstDash val="solid"/>
+                      <a:round/>
+                      <a:headEnd type="none" w="med" len="med"/>
+                      <a:tailEnd type="none" w="med" len="med"/>
+                    </a:lnL>
+                    <a:lnR w="12700" cap="flat" cmpd="sng" algn="ctr">
+                      <a:solidFill>
+                        <a:srgbClr val="D6DEE4"/>
+                      </a:solidFill>
+                      <a:prstDash val="solid"/>
+                      <a:round/>
+                      <a:headEnd type="none" w="med" len="med"/>
+                      <a:tailEnd type="none" w="med" len="med"/>
+                    </a:lnR>
+                    <a:lnT w="12700" cap="flat" cmpd="sng" algn="ctr">
+                      <a:solidFill>
+                        <a:srgbClr val="D6DEE4"/>
+                      </a:solidFill>
+                      <a:prstDash val="solid"/>
+                      <a:round/>
+                      <a:headEnd type="none" w="med" len="med"/>
+                      <a:tailEnd type="none" w="med" len="med"/>
+                    </a:lnT>
+                    <a:lnB w="12700" cap="flat" cmpd="sng" algn="ctr">
+                      <a:solidFill>
+                        <a:srgbClr val="D6DEE4"/>
+                      </a:solidFill>
+                      <a:prstDash val="solid"/>
+                      <a:round/>
+                      <a:headEnd type="none" w="med" len="med"/>
+                      <a:tailEnd type="none" w="med" len="med"/>
+                    </a:lnB>
+                    <a:solidFill>
+                      <a:srgbClr val="FFFFFF"/>
+                    </a:solidFill>
+                  </a:tcPr>
+                </a:tc>
+                <a:tc>
+                  <a:txBody>
+                    <a:bodyPr/>
+                    <a:lstStyle/>
+                    <a:p>
+                      <a:pPr marL="0" indent="0" algn="ctr">
+                        <a:buNone/>
+                      </a:pPr>
+                      <a:r>
+                        <a:rPr lang="en-US" sz="1050" dirty="0">
+                          <a:solidFill>
+                            <a:srgbClr val="23304A"/>
+                          </a:solidFill>
+                          <a:latin typeface="Calibri" pitchFamily="34" charset="0"/>
+                          <a:ea typeface="Calibri" pitchFamily="34" charset="-122"/>
+                          <a:cs typeface="Calibri" pitchFamily="34" charset="-120"/>
+                        </a:rPr>
+                        <a:t>0.496</a:t>
+                      </a:r>
+                      <a:endParaRPr lang="en-US" sz="1050" dirty="0">
+                        <a:latin typeface="Calibri" charset="0"/>
+                        <a:ea typeface="Calibri" charset="0"/>
+                        <a:cs typeface="Calibri" charset="0"/>
+                      </a:endParaRPr>
+                    </a:p>
+                  </a:txBody>
+                  <a:tcPr marL="38100" marR="38100" marT="38100" marB="38100" anchor="ctr">
+                    <a:lnL w="12700" cap="flat" cmpd="sng" algn="ctr">
+                      <a:solidFill>
+                        <a:srgbClr val="D6DEE4"/>
+                      </a:solidFill>
+                      <a:prstDash val="solid"/>
+                      <a:round/>
+                      <a:headEnd type="none" w="med" len="med"/>
+                      <a:tailEnd type="none" w="med" len="med"/>
+                    </a:lnL>
+                    <a:lnR w="12700" cap="flat" cmpd="sng" algn="ctr">
+                      <a:solidFill>
+                        <a:srgbClr val="D6DEE4"/>
+                      </a:solidFill>
+                      <a:prstDash val="solid"/>
+                      <a:round/>
+                      <a:headEnd type="none" w="med" len="med"/>
+                      <a:tailEnd type="none" w="med" len="med"/>
+                    </a:lnR>
+                    <a:lnT w="12700" cap="flat" cmpd="sng" algn="ctr">
+                      <a:solidFill>
+                        <a:srgbClr val="D6DEE4"/>
+                      </a:solidFill>
+                      <a:prstDash val="solid"/>
+                      <a:round/>
+                      <a:headEnd type="none" w="med" len="med"/>
+                      <a:tailEnd type="none" w="med" len="med"/>
+                    </a:lnT>
+                    <a:lnB w="12700" cap="flat" cmpd="sng" algn="ctr">
+                      <a:solidFill>
+                        <a:srgbClr val="D6DEE4"/>
+                      </a:solidFill>
+                      <a:prstDash val="solid"/>
+                      <a:round/>
+                      <a:headEnd type="none" w="med" len="med"/>
+                      <a:tailEnd type="none" w="med" len="med"/>
+                    </a:lnB>
+                    <a:solidFill>
+                      <a:srgbClr val="FFFFFF"/>
+                    </a:solidFill>
+                  </a:tcPr>
+                </a:tc>
+                <a:tc>
+                  <a:txBody>
+                    <a:bodyPr/>
+                    <a:lstStyle/>
+                    <a:p>
+                      <a:pPr marL="0" indent="0" algn="ctr">
+                        <a:buNone/>
+                      </a:pPr>
+                      <a:r>
+                        <a:rPr lang="en-US" sz="1050" dirty="0">
+                          <a:solidFill>
+                            <a:srgbClr val="23304A"/>
+                          </a:solidFill>
+                          <a:latin typeface="Calibri" pitchFamily="34" charset="0"/>
+                          <a:ea typeface="Calibri" pitchFamily="34" charset="-122"/>
+                          <a:cs typeface="Calibri" pitchFamily="34" charset="-120"/>
+                        </a:rPr>
+                        <a:t>1.000</a:t>
+                      </a:r>
+                      <a:endParaRPr lang="en-US" sz="1050" dirty="0">
+                        <a:latin typeface="Calibri" charset="0"/>
+                        <a:ea typeface="Calibri" charset="0"/>
+                        <a:cs typeface="Calibri" charset="0"/>
+                      </a:endParaRPr>
+                    </a:p>
+                  </a:txBody>
+                  <a:tcPr marL="38100" marR="38100" marT="38100" marB="38100" anchor="ctr">
+                    <a:lnL w="12700" cap="flat" cmpd="sng" algn="ctr">
+                      <a:solidFill>
+                        <a:srgbClr val="D6DEE4"/>
+                      </a:solidFill>
+                      <a:prstDash val="solid"/>
+                      <a:round/>
+                      <a:headEnd type="none" w="med" len="med"/>
+                      <a:tailEnd type="none" w="med" len="med"/>
+                    </a:lnL>
+                    <a:lnR w="12700" cap="flat" cmpd="sng" algn="ctr">
+                      <a:solidFill>
+                        <a:srgbClr val="D6DEE4"/>
+                      </a:solidFill>
+                      <a:prstDash val="solid"/>
+                      <a:round/>
+                      <a:headEnd type="none" w="med" len="med"/>
+                      <a:tailEnd type="none" w="med" len="med"/>
+                    </a:lnR>
+                    <a:lnT w="12700" cap="flat" cmpd="sng" algn="ctr">
+                      <a:solidFill>
+                        <a:srgbClr val="D6DEE4"/>
+                      </a:solidFill>
+                      <a:prstDash val="solid"/>
+                      <a:round/>
+                      <a:headEnd type="none" w="med" len="med"/>
+                      <a:tailEnd type="none" w="med" len="med"/>
+                    </a:lnT>
+                    <a:lnB w="12700" cap="flat" cmpd="sng" algn="ctr">
+                      <a:solidFill>
+                        <a:srgbClr val="D6DEE4"/>
+                      </a:solidFill>
+                      <a:prstDash val="solid"/>
+                      <a:round/>
+                      <a:headEnd type="none" w="med" len="med"/>
+                      <a:tailEnd type="none" w="med" len="med"/>
+                    </a:lnB>
+                    <a:solidFill>
+                      <a:srgbClr val="FFFFFF"/>
+                    </a:solidFill>
+                  </a:tcPr>
+                </a:tc>
+                <a:extLst>
+                  <a:ext uri="{0D108BD9-81ED-4DB2-BD59-A6C34878D82A}">
+                    <a16:rowId xmlns:a16="http://schemas.microsoft.com/office/drawing/2014/main" val="10004"/>
+                  </a:ext>
+                </a:extLst>
+              </a:tr>
+              <a:tr h="365760">
+                <a:tc>
+                  <a:txBody>
+                    <a:bodyPr/>
+                    <a:lstStyle/>
+                    <a:p>
+                      <a:pPr marL="0" indent="0" algn="l">
+                        <a:buNone/>
+                      </a:pPr>
+                      <a:r>
+                        <a:rPr lang="en-US" sz="1000" b="1" dirty="0">
+                          <a:solidFill>
                             <a:srgbClr val="2A7F8C"/>
                           </a:solidFill>
                           <a:latin typeface="Calibri" pitchFamily="34" charset="0"/>
                           <a:ea typeface="Calibri" pitchFamily="34" charset="-122"/>
                           <a:cs typeface="Calibri" pitchFamily="34" charset="-120"/>
                         </a:rPr>
-                        <a:t>NVDA + AMD</a:t>
+                        <a:t>NVDA + AMD: mejor balance</a:t>
                       </a:r>
                       <a:endParaRPr lang="en-US" sz="1000" dirty="0">
                         <a:latin typeface="Calibri" charset="0"/>
@@ -16707,7 +19331,7 @@
                           <a:ea typeface="Calibri" pitchFamily="34" charset="-122"/>
                           <a:cs typeface="Calibri" pitchFamily="34" charset="-120"/>
                         </a:rPr>
-                        <a:t>Mejor equilibrio</a:t>
+                        <a:t>Paso 5 · multi-ticker</a:t>
                       </a:r>
                       <a:endParaRPr lang="en-US" sz="1000" dirty="0">
                         <a:latin typeface="Calibri" charset="0"/>
@@ -17047,7 +19671,7 @@
                           <a:ea typeface="Calibri" pitchFamily="34" charset="-122"/>
                           <a:cs typeface="Calibri" pitchFamily="34" charset="-120"/>
                         </a:rPr>
-                        <a:t>0.36</a:t>
+                        <a:t>0.361</a:t>
                       </a:r>
                       <a:endParaRPr lang="en-US" sz="1050" dirty="0">
                         <a:latin typeface="Calibri" charset="0"/>
@@ -17100,489 +19724,6 @@
                 </a:tc>
                 <a:extLst>
                   <a:ext uri="{0D108BD9-81ED-4DB2-BD59-A6C34878D82A}">
-                    <a16:rowId xmlns:a16="http://schemas.microsoft.com/office/drawing/2014/main" val="10004"/>
-                  </a:ext>
-                </a:extLst>
-              </a:tr>
-              <a:tr h="365760">
-                <a:tc>
-                  <a:txBody>
-                    <a:bodyPr/>
-                    <a:lstStyle/>
-                    <a:p>
-                      <a:pPr marL="0" indent="0" algn="l">
-                        <a:buNone/>
-                      </a:pPr>
-                      <a:r>
-                        <a:rPr lang="en-US" sz="1000" b="1" dirty="0">
-                          <a:solidFill>
-                            <a:srgbClr val="C8923B"/>
-                          </a:solidFill>
-                          <a:latin typeface="Calibri" pitchFamily="34" charset="0"/>
-                          <a:ea typeface="Calibri" pitchFamily="34" charset="-122"/>
-                          <a:cs typeface="Calibri" pitchFamily="34" charset="-120"/>
-                        </a:rPr>
-                        <a:t>NVDA direction feat.</a:t>
-                      </a:r>
-                      <a:endParaRPr lang="en-US" sz="1000" dirty="0">
-                        <a:latin typeface="Calibri" charset="0"/>
-                        <a:ea typeface="Calibri" charset="0"/>
-                        <a:cs typeface="Calibri" charset="0"/>
-                      </a:endParaRPr>
-                    </a:p>
-                  </a:txBody>
-                  <a:tcPr marL="38100" marR="38100" marT="38100" marB="38100" anchor="ctr">
-                    <a:lnL w="12700" cap="flat" cmpd="sng" algn="ctr">
-                      <a:solidFill>
-                        <a:srgbClr val="D6DEE4"/>
-                      </a:solidFill>
-                      <a:prstDash val="solid"/>
-                      <a:round/>
-                      <a:headEnd type="none" w="med" len="med"/>
-                      <a:tailEnd type="none" w="med" len="med"/>
-                    </a:lnL>
-                    <a:lnR w="12700" cap="flat" cmpd="sng" algn="ctr">
-                      <a:solidFill>
-                        <a:srgbClr val="D6DEE4"/>
-                      </a:solidFill>
-                      <a:prstDash val="solid"/>
-                      <a:round/>
-                      <a:headEnd type="none" w="med" len="med"/>
-                      <a:tailEnd type="none" w="med" len="med"/>
-                    </a:lnR>
-                    <a:lnT w="12700" cap="flat" cmpd="sng" algn="ctr">
-                      <a:solidFill>
-                        <a:srgbClr val="D6DEE4"/>
-                      </a:solidFill>
-                      <a:prstDash val="solid"/>
-                      <a:round/>
-                      <a:headEnd type="none" w="med" len="med"/>
-                      <a:tailEnd type="none" w="med" len="med"/>
-                    </a:lnT>
-                    <a:lnB w="12700" cap="flat" cmpd="sng" algn="ctr">
-                      <a:solidFill>
-                        <a:srgbClr val="D6DEE4"/>
-                      </a:solidFill>
-                      <a:prstDash val="solid"/>
-                      <a:round/>
-                      <a:headEnd type="none" w="med" len="med"/>
-                      <a:tailEnd type="none" w="med" len="med"/>
-                    </a:lnB>
-                    <a:solidFill>
-                      <a:srgbClr val="F7EEDD"/>
-                    </a:solidFill>
-                  </a:tcPr>
-                </a:tc>
-                <a:tc>
-                  <a:txBody>
-                    <a:bodyPr/>
-                    <a:lstStyle/>
-                    <a:p>
-                      <a:pPr marL="0" indent="0" algn="l">
-                        <a:buNone/>
-                      </a:pPr>
-                      <a:r>
-                        <a:rPr lang="en-US" sz="1000" i="1" dirty="0">
-                          <a:solidFill>
-                            <a:srgbClr val="667085"/>
-                          </a:solidFill>
-                          <a:latin typeface="Calibri" pitchFamily="34" charset="0"/>
-                          <a:ea typeface="Calibri" pitchFamily="34" charset="-122"/>
-                          <a:cs typeface="Calibri" pitchFamily="34" charset="-120"/>
-                        </a:rPr>
-                        <a:t>Mejor dir. acc.</a:t>
-                      </a:r>
-                      <a:endParaRPr lang="en-US" sz="1000" dirty="0">
-                        <a:latin typeface="Calibri" charset="0"/>
-                        <a:ea typeface="Calibri" charset="0"/>
-                        <a:cs typeface="Calibri" charset="0"/>
-                      </a:endParaRPr>
-                    </a:p>
-                  </a:txBody>
-                  <a:tcPr marL="38100" marR="38100" marT="38100" marB="38100" anchor="ctr">
-                    <a:lnL w="12700" cap="flat" cmpd="sng" algn="ctr">
-                      <a:solidFill>
-                        <a:srgbClr val="D6DEE4"/>
-                      </a:solidFill>
-                      <a:prstDash val="solid"/>
-                      <a:round/>
-                      <a:headEnd type="none" w="med" len="med"/>
-                      <a:tailEnd type="none" w="med" len="med"/>
-                    </a:lnL>
-                    <a:lnR w="12700" cap="flat" cmpd="sng" algn="ctr">
-                      <a:solidFill>
-                        <a:srgbClr val="D6DEE4"/>
-                      </a:solidFill>
-                      <a:prstDash val="solid"/>
-                      <a:round/>
-                      <a:headEnd type="none" w="med" len="med"/>
-                      <a:tailEnd type="none" w="med" len="med"/>
-                    </a:lnR>
-                    <a:lnT w="12700" cap="flat" cmpd="sng" algn="ctr">
-                      <a:solidFill>
-                        <a:srgbClr val="D6DEE4"/>
-                      </a:solidFill>
-                      <a:prstDash val="solid"/>
-                      <a:round/>
-                      <a:headEnd type="none" w="med" len="med"/>
-                      <a:tailEnd type="none" w="med" len="med"/>
-                    </a:lnT>
-                    <a:lnB w="12700" cap="flat" cmpd="sng" algn="ctr">
-                      <a:solidFill>
-                        <a:srgbClr val="D6DEE4"/>
-                      </a:solidFill>
-                      <a:prstDash val="solid"/>
-                      <a:round/>
-                      <a:headEnd type="none" w="med" len="med"/>
-                      <a:tailEnd type="none" w="med" len="med"/>
-                    </a:lnB>
-                    <a:solidFill>
-                      <a:srgbClr val="FFFFFF"/>
-                    </a:solidFill>
-                  </a:tcPr>
-                </a:tc>
-                <a:tc>
-                  <a:txBody>
-                    <a:bodyPr/>
-                    <a:lstStyle/>
-                    <a:p>
-                      <a:pPr marL="0" indent="0" algn="ctr">
-                        <a:buNone/>
-                      </a:pPr>
-                      <a:r>
-                        <a:rPr lang="en-US" sz="1050" dirty="0">
-                          <a:solidFill>
-                            <a:srgbClr val="23304A"/>
-                          </a:solidFill>
-                          <a:latin typeface="Calibri" pitchFamily="34" charset="0"/>
-                          <a:ea typeface="Calibri" pitchFamily="34" charset="-122"/>
-                          <a:cs typeface="Calibri" pitchFamily="34" charset="-120"/>
-                        </a:rPr>
-                        <a:t>0.063</a:t>
-                      </a:r>
-                      <a:endParaRPr lang="en-US" sz="1050" dirty="0">
-                        <a:latin typeface="Calibri" charset="0"/>
-                        <a:ea typeface="Calibri" charset="0"/>
-                        <a:cs typeface="Calibri" charset="0"/>
-                      </a:endParaRPr>
-                    </a:p>
-                  </a:txBody>
-                  <a:tcPr marL="38100" marR="38100" marT="38100" marB="38100" anchor="ctr">
-                    <a:lnL w="12700" cap="flat" cmpd="sng" algn="ctr">
-                      <a:solidFill>
-                        <a:srgbClr val="D6DEE4"/>
-                      </a:solidFill>
-                      <a:prstDash val="solid"/>
-                      <a:round/>
-                      <a:headEnd type="none" w="med" len="med"/>
-                      <a:tailEnd type="none" w="med" len="med"/>
-                    </a:lnL>
-                    <a:lnR w="12700" cap="flat" cmpd="sng" algn="ctr">
-                      <a:solidFill>
-                        <a:srgbClr val="D6DEE4"/>
-                      </a:solidFill>
-                      <a:prstDash val="solid"/>
-                      <a:round/>
-                      <a:headEnd type="none" w="med" len="med"/>
-                      <a:tailEnd type="none" w="med" len="med"/>
-                    </a:lnR>
-                    <a:lnT w="12700" cap="flat" cmpd="sng" algn="ctr">
-                      <a:solidFill>
-                        <a:srgbClr val="D6DEE4"/>
-                      </a:solidFill>
-                      <a:prstDash val="solid"/>
-                      <a:round/>
-                      <a:headEnd type="none" w="med" len="med"/>
-                      <a:tailEnd type="none" w="med" len="med"/>
-                    </a:lnT>
-                    <a:lnB w="12700" cap="flat" cmpd="sng" algn="ctr">
-                      <a:solidFill>
-                        <a:srgbClr val="D6DEE4"/>
-                      </a:solidFill>
-                      <a:prstDash val="solid"/>
-                      <a:round/>
-                      <a:headEnd type="none" w="med" len="med"/>
-                      <a:tailEnd type="none" w="med" len="med"/>
-                    </a:lnB>
-                    <a:solidFill>
-                      <a:srgbClr val="FFFFFF"/>
-                    </a:solidFill>
-                  </a:tcPr>
-                </a:tc>
-                <a:tc>
-                  <a:txBody>
-                    <a:bodyPr/>
-                    <a:lstStyle/>
-                    <a:p>
-                      <a:pPr marL="0" indent="0" algn="ctr">
-                        <a:buNone/>
-                      </a:pPr>
-                      <a:r>
-                        <a:rPr lang="en-US" sz="1050" dirty="0">
-                          <a:solidFill>
-                            <a:srgbClr val="23304A"/>
-                          </a:solidFill>
-                          <a:latin typeface="Calibri" pitchFamily="34" charset="0"/>
-                          <a:ea typeface="Calibri" pitchFamily="34" charset="-122"/>
-                          <a:cs typeface="Calibri" pitchFamily="34" charset="-120"/>
-                        </a:rPr>
-                        <a:t>0.734</a:t>
-                      </a:r>
-                      <a:endParaRPr lang="en-US" sz="1050" dirty="0">
-                        <a:latin typeface="Calibri" charset="0"/>
-                        <a:ea typeface="Calibri" charset="0"/>
-                        <a:cs typeface="Calibri" charset="0"/>
-                      </a:endParaRPr>
-                    </a:p>
-                  </a:txBody>
-                  <a:tcPr marL="38100" marR="38100" marT="38100" marB="38100" anchor="ctr">
-                    <a:lnL w="12700" cap="flat" cmpd="sng" algn="ctr">
-                      <a:solidFill>
-                        <a:srgbClr val="D6DEE4"/>
-                      </a:solidFill>
-                      <a:prstDash val="solid"/>
-                      <a:round/>
-                      <a:headEnd type="none" w="med" len="med"/>
-                      <a:tailEnd type="none" w="med" len="med"/>
-                    </a:lnL>
-                    <a:lnR w="12700" cap="flat" cmpd="sng" algn="ctr">
-                      <a:solidFill>
-                        <a:srgbClr val="D6DEE4"/>
-                      </a:solidFill>
-                      <a:prstDash val="solid"/>
-                      <a:round/>
-                      <a:headEnd type="none" w="med" len="med"/>
-                      <a:tailEnd type="none" w="med" len="med"/>
-                    </a:lnR>
-                    <a:lnT w="12700" cap="flat" cmpd="sng" algn="ctr">
-                      <a:solidFill>
-                        <a:srgbClr val="D6DEE4"/>
-                      </a:solidFill>
-                      <a:prstDash val="solid"/>
-                      <a:round/>
-                      <a:headEnd type="none" w="med" len="med"/>
-                      <a:tailEnd type="none" w="med" len="med"/>
-                    </a:lnT>
-                    <a:lnB w="12700" cap="flat" cmpd="sng" algn="ctr">
-                      <a:solidFill>
-                        <a:srgbClr val="D6DEE4"/>
-                      </a:solidFill>
-                      <a:prstDash val="solid"/>
-                      <a:round/>
-                      <a:headEnd type="none" w="med" len="med"/>
-                      <a:tailEnd type="none" w="med" len="med"/>
-                    </a:lnB>
-                    <a:solidFill>
-                      <a:srgbClr val="FFFFFF"/>
-                    </a:solidFill>
-                  </a:tcPr>
-                </a:tc>
-                <a:tc>
-                  <a:txBody>
-                    <a:bodyPr/>
-                    <a:lstStyle/>
-                    <a:p>
-                      <a:pPr marL="0" indent="0" algn="ctr">
-                        <a:buNone/>
-                      </a:pPr>
-                      <a:r>
-                        <a:rPr lang="en-US" sz="1050" dirty="0">
-                          <a:solidFill>
-                            <a:srgbClr val="23304A"/>
-                          </a:solidFill>
-                          <a:latin typeface="Calibri" pitchFamily="34" charset="0"/>
-                          <a:ea typeface="Calibri" pitchFamily="34" charset="-122"/>
-                          <a:cs typeface="Calibri" pitchFamily="34" charset="-120"/>
-                        </a:rPr>
-                        <a:t>0.346</a:t>
-                      </a:r>
-                      <a:endParaRPr lang="en-US" sz="1050" dirty="0">
-                        <a:latin typeface="Calibri" charset="0"/>
-                        <a:ea typeface="Calibri" charset="0"/>
-                        <a:cs typeface="Calibri" charset="0"/>
-                      </a:endParaRPr>
-                    </a:p>
-                  </a:txBody>
-                  <a:tcPr marL="38100" marR="38100" marT="38100" marB="38100" anchor="ctr">
-                    <a:lnL w="12700" cap="flat" cmpd="sng" algn="ctr">
-                      <a:solidFill>
-                        <a:srgbClr val="D6DEE4"/>
-                      </a:solidFill>
-                      <a:prstDash val="solid"/>
-                      <a:round/>
-                      <a:headEnd type="none" w="med" len="med"/>
-                      <a:tailEnd type="none" w="med" len="med"/>
-                    </a:lnL>
-                    <a:lnR w="12700" cap="flat" cmpd="sng" algn="ctr">
-                      <a:solidFill>
-                        <a:srgbClr val="D6DEE4"/>
-                      </a:solidFill>
-                      <a:prstDash val="solid"/>
-                      <a:round/>
-                      <a:headEnd type="none" w="med" len="med"/>
-                      <a:tailEnd type="none" w="med" len="med"/>
-                    </a:lnR>
-                    <a:lnT w="12700" cap="flat" cmpd="sng" algn="ctr">
-                      <a:solidFill>
-                        <a:srgbClr val="D6DEE4"/>
-                      </a:solidFill>
-                      <a:prstDash val="solid"/>
-                      <a:round/>
-                      <a:headEnd type="none" w="med" len="med"/>
-                      <a:tailEnd type="none" w="med" len="med"/>
-                    </a:lnT>
-                    <a:lnB w="12700" cap="flat" cmpd="sng" algn="ctr">
-                      <a:solidFill>
-                        <a:srgbClr val="D6DEE4"/>
-                      </a:solidFill>
-                      <a:prstDash val="solid"/>
-                      <a:round/>
-                      <a:headEnd type="none" w="med" len="med"/>
-                      <a:tailEnd type="none" w="med" len="med"/>
-                    </a:lnB>
-                    <a:solidFill>
-                      <a:srgbClr val="FFFFFF"/>
-                    </a:solidFill>
-                  </a:tcPr>
-                </a:tc>
-                <a:tc>
-                  <a:txBody>
-                    <a:bodyPr/>
-                    <a:lstStyle/>
-                    <a:p>
-                      <a:pPr marL="0" indent="0" algn="ctr">
-                        <a:buNone/>
-                      </a:pPr>
-                      <a:r>
-                        <a:rPr lang="en-US" sz="1050" dirty="0">
-                          <a:solidFill>
-                            <a:srgbClr val="23304A"/>
-                          </a:solidFill>
-                          <a:latin typeface="Calibri" pitchFamily="34" charset="0"/>
-                          <a:ea typeface="Calibri" pitchFamily="34" charset="-122"/>
-                          <a:cs typeface="Calibri" pitchFamily="34" charset="-120"/>
-                        </a:rPr>
-                        <a:t>0.556</a:t>
-                      </a:r>
-                      <a:endParaRPr lang="en-US" sz="1050" dirty="0">
-                        <a:latin typeface="Calibri" charset="0"/>
-                        <a:ea typeface="Calibri" charset="0"/>
-                        <a:cs typeface="Calibri" charset="0"/>
-                      </a:endParaRPr>
-                    </a:p>
-                  </a:txBody>
-                  <a:tcPr marL="38100" marR="38100" marT="38100" marB="38100" anchor="ctr">
-                    <a:lnL w="12700" cap="flat" cmpd="sng" algn="ctr">
-                      <a:solidFill>
-                        <a:srgbClr val="D6DEE4"/>
-                      </a:solidFill>
-                      <a:prstDash val="solid"/>
-                      <a:round/>
-                      <a:headEnd type="none" w="med" len="med"/>
-                      <a:tailEnd type="none" w="med" len="med"/>
-                    </a:lnL>
-                    <a:lnR w="12700" cap="flat" cmpd="sng" algn="ctr">
-                      <a:solidFill>
-                        <a:srgbClr val="D6DEE4"/>
-                      </a:solidFill>
-                      <a:prstDash val="solid"/>
-                      <a:round/>
-                      <a:headEnd type="none" w="med" len="med"/>
-                      <a:tailEnd type="none" w="med" len="med"/>
-                    </a:lnR>
-                    <a:lnT w="12700" cap="flat" cmpd="sng" algn="ctr">
-                      <a:solidFill>
-                        <a:srgbClr val="D6DEE4"/>
-                      </a:solidFill>
-                      <a:prstDash val="solid"/>
-                      <a:round/>
-                      <a:headEnd type="none" w="med" len="med"/>
-                      <a:tailEnd type="none" w="med" len="med"/>
-                    </a:lnT>
-                    <a:lnB w="12700" cap="flat" cmpd="sng" algn="ctr">
-                      <a:solidFill>
-                        <a:srgbClr val="D6DEE4"/>
-                      </a:solidFill>
-                      <a:prstDash val="solid"/>
-                      <a:round/>
-                      <a:headEnd type="none" w="med" len="med"/>
-                      <a:tailEnd type="none" w="med" len="med"/>
-                    </a:lnB>
-                    <a:solidFill>
-                      <a:srgbClr val="FFFFFF"/>
-                    </a:solidFill>
-                  </a:tcPr>
-                </a:tc>
-                <a:tc>
-                  <a:txBody>
-                    <a:bodyPr/>
-                    <a:lstStyle/>
-                    <a:p>
-                      <a:pPr marL="0" indent="0" algn="ctr">
-                        <a:buNone/>
-                      </a:pPr>
-                      <a:r>
-                        <a:rPr lang="en-US" sz="1050" dirty="0">
-                          <a:solidFill>
-                            <a:srgbClr val="23304A"/>
-                          </a:solidFill>
-                          <a:latin typeface="Calibri" pitchFamily="34" charset="0"/>
-                          <a:ea typeface="Calibri" pitchFamily="34" charset="-122"/>
-                          <a:cs typeface="Calibri" pitchFamily="34" charset="-120"/>
-                        </a:rPr>
-                        <a:t>1.00</a:t>
-                      </a:r>
-                      <a:endParaRPr lang="en-US" sz="1050" dirty="0">
-                        <a:latin typeface="Calibri" charset="0"/>
-                        <a:ea typeface="Calibri" charset="0"/>
-                        <a:cs typeface="Calibri" charset="0"/>
-                      </a:endParaRPr>
-                    </a:p>
-                  </a:txBody>
-                  <a:tcPr marL="38100" marR="38100" marT="38100" marB="38100" anchor="ctr">
-                    <a:lnL w="12700" cap="flat" cmpd="sng" algn="ctr">
-                      <a:solidFill>
-                        <a:srgbClr val="D6DEE4"/>
-                      </a:solidFill>
-                      <a:prstDash val="solid"/>
-                      <a:round/>
-                      <a:headEnd type="none" w="med" len="med"/>
-                      <a:tailEnd type="none" w="med" len="med"/>
-                    </a:lnL>
-                    <a:lnR w="12700" cap="flat" cmpd="sng" algn="ctr">
-                      <a:solidFill>
-                        <a:srgbClr val="D6DEE4"/>
-                      </a:solidFill>
-                      <a:prstDash val="solid"/>
-                      <a:round/>
-                      <a:headEnd type="none" w="med" len="med"/>
-                      <a:tailEnd type="none" w="med" len="med"/>
-                    </a:lnR>
-                    <a:lnT w="12700" cap="flat" cmpd="sng" algn="ctr">
-                      <a:solidFill>
-                        <a:srgbClr val="D6DEE4"/>
-                      </a:solidFill>
-                      <a:prstDash val="solid"/>
-                      <a:round/>
-                      <a:headEnd type="none" w="med" len="med"/>
-                      <a:tailEnd type="none" w="med" len="med"/>
-                    </a:lnT>
-                    <a:lnB w="12700" cap="flat" cmpd="sng" algn="ctr">
-                      <a:solidFill>
-                        <a:srgbClr val="D6DEE4"/>
-                      </a:solidFill>
-                      <a:prstDash val="solid"/>
-                      <a:round/>
-                      <a:headEnd type="none" w="med" len="med"/>
-                      <a:tailEnd type="none" w="med" len="med"/>
-                    </a:lnB>
-                    <a:solidFill>
-                      <a:srgbClr val="FFFFFF"/>
-                    </a:solidFill>
-                  </a:tcPr>
-                </a:tc>
-                <a:extLst>
-                  <a:ext uri="{0D108BD9-81ED-4DB2-BD59-A6C34878D82A}">
                     <a16:rowId xmlns:a16="http://schemas.microsoft.com/office/drawing/2014/main" val="10005"/>
                   </a:ext>
                 </a:extLst>
@@ -17615,31 +19756,13 @@
             <a:prstDash val="solid"/>
           </a:ln>
         </p:spPr>
-      </p:sp>
-      <p:sp>
-        <p:nvSpPr>
-          <p:cNvPr id="6" name="Shape 5"/>
-          <p:cNvSpPr/>
-          <p:nvPr/>
-        </p:nvSpPr>
-        <p:spPr>
-          <a:xfrm>
-            <a:off x="640080" y="4434840"/>
-            <a:ext cx="64008" cy="1463040"/>
-          </a:xfrm>
-          <a:prstGeom prst="rect">
-            <a:avLst/>
-          </a:prstGeom>
-          <a:solidFill>
-            <a:srgbClr val="C8923B"/>
-          </a:solidFill>
-          <a:ln w="12700">
-            <a:solidFill>
-              <a:srgbClr val="333333"/>
-            </a:solidFill>
-            <a:prstDash val="solid"/>
-          </a:ln>
-        </p:spPr>
+        <p:txBody>
+          <a:bodyPr/>
+          <a:lstStyle/>
+          <a:p>
+            <a:endParaRPr lang="es-AR"/>
+          </a:p>
+        </p:txBody>
       </p:sp>
       <p:pic>
         <p:nvPicPr>
@@ -17698,7 +19821,7 @@
                 <a:ea typeface="Calibri" pitchFamily="34" charset="-122"/>
                 <a:cs typeface="Arial" panose="020B0604020202020204" pitchFamily="34" charset="0"/>
               </a:rPr>
-              <a:t>Baseline sin fine-tuning</a:t>
+              <a:t>Fine-tuning mejora NLP</a:t>
             </a:r>
             <a:endParaRPr lang="en-US" sz="1150" dirty="0">
               <a:latin typeface="Arial" panose="020B0604020202020204" pitchFamily="34" charset="0"/>
@@ -17743,7 +19866,7 @@
                 <a:ea typeface="Calibri" pitchFamily="34" charset="-122"/>
                 <a:cs typeface="Arial" panose="020B0604020202020204" pitchFamily="34" charset="0"/>
               </a:rPr>
-              <a:t>ROUGE-L y sentiment bajos, pero dir. acc. alta: una alerta sobre la métrica financiera.</a:t>
+              <a:t>El fine-tuning mejora ROUGE-L y sentiment match frente a GPT-2 base.</a:t>
             </a:r>
             <a:endParaRPr lang="en-US" sz="970" dirty="0">
               <a:latin typeface="Arial" panose="020B0604020202020204" pitchFamily="34" charset="0"/>
@@ -17776,31 +19899,13 @@
             <a:prstDash val="solid"/>
           </a:ln>
         </p:spPr>
-      </p:sp>
-      <p:sp>
-        <p:nvSpPr>
-          <p:cNvPr id="13" name="Shape 9"/>
-          <p:cNvSpPr/>
-          <p:nvPr/>
-        </p:nvSpPr>
-        <p:spPr>
-          <a:xfrm>
-            <a:off x="4343400" y="4434840"/>
-            <a:ext cx="64008" cy="1463040"/>
-          </a:xfrm>
-          <a:prstGeom prst="rect">
-            <a:avLst/>
-          </a:prstGeom>
-          <a:solidFill>
-            <a:srgbClr val="2A7F8C"/>
-          </a:solidFill>
-          <a:ln w="12700">
-            <a:solidFill>
-              <a:srgbClr val="333333"/>
-            </a:solidFill>
-            <a:prstDash val="solid"/>
-          </a:ln>
-        </p:spPr>
+        <p:txBody>
+          <a:bodyPr/>
+          <a:lstStyle/>
+          <a:p>
+            <a:endParaRPr lang="es-AR"/>
+          </a:p>
+        </p:txBody>
       </p:sp>
       <p:pic>
         <p:nvPicPr>
@@ -17904,7 +20009,7 @@
                 <a:ea typeface="Calibri" pitchFamily="34" charset="-122"/>
                 <a:cs typeface="Arial" panose="020B0604020202020204" pitchFamily="34" charset="0"/>
               </a:rPr>
-              <a:t>El run más equilibrado en calidad textual y semántica. Defendible como modelo general.</a:t>
+              <a:t>Mejor balance textual y semántico de la selección.</a:t>
             </a:r>
             <a:endParaRPr lang="en-US" sz="970" dirty="0">
               <a:latin typeface="Arial" panose="020B0604020202020204" pitchFamily="34" charset="0"/>
@@ -17937,31 +20042,13 @@
             <a:prstDash val="solid"/>
           </a:ln>
         </p:spPr>
-      </p:sp>
-      <p:sp>
-        <p:nvSpPr>
-          <p:cNvPr id="18" name="Shape 13"/>
-          <p:cNvSpPr/>
-          <p:nvPr/>
-        </p:nvSpPr>
-        <p:spPr>
-          <a:xfrm>
-            <a:off x="8046720" y="4434840"/>
-            <a:ext cx="64008" cy="1463040"/>
-          </a:xfrm>
-          <a:prstGeom prst="rect">
-            <a:avLst/>
-          </a:prstGeom>
-          <a:solidFill>
-            <a:srgbClr val="C8923B"/>
-          </a:solidFill>
-          <a:ln w="12700">
-            <a:solidFill>
-              <a:srgbClr val="333333"/>
-            </a:solidFill>
-            <a:prstDash val="solid"/>
-          </a:ln>
-        </p:spPr>
+        <p:txBody>
+          <a:bodyPr/>
+          <a:lstStyle/>
+          <a:p>
+            <a:endParaRPr lang="es-AR"/>
+          </a:p>
+        </p:txBody>
       </p:sp>
       <p:pic>
         <p:nvPicPr>
@@ -18020,7 +20107,7 @@
                 <a:ea typeface="Calibri" pitchFamily="34" charset="-122"/>
                 <a:cs typeface="Arial" panose="020B0604020202020204" pitchFamily="34" charset="0"/>
               </a:rPr>
-              <a:t>NVDA direction features</a:t>
+              <a:t>Dir. accuracy no sigue al NLP</a:t>
             </a:r>
             <a:endParaRPr lang="en-US" sz="1150" dirty="0">
               <a:latin typeface="Arial" panose="020B0604020202020204" pitchFamily="34" charset="0"/>
@@ -18065,7 +20152,7 @@
                 <a:ea typeface="Calibri" pitchFamily="34" charset="-122"/>
                 <a:cs typeface="Arial" panose="020B0604020202020204" pitchFamily="34" charset="0"/>
               </a:rPr>
-              <a:t>La mejor directional accuracy (0.556)</a:t>
+              <a:t>La directional accuracy no sigue necesariamente a las métricas de NLP.</a:t>
             </a:r>
             <a:endParaRPr lang="en-US" sz="970" dirty="0">
               <a:latin typeface="Arial" panose="020B0604020202020204" pitchFamily="34" charset="0"/>
@@ -18076,14 +20163,20 @@
       </p:sp>
       <p:sp>
         <p:nvSpPr>
-          <p:cNvPr id="22" name="Text 16"/>
-          <p:cNvSpPr/>
-          <p:nvPr/>
-        </p:nvSpPr>
-        <p:spPr>
-          <a:xfrm>
-            <a:off x="640080" y="6473952"/>
-            <a:ext cx="7315200" cy="274320"/>
+          <p:cNvPr id="2" name="Text 7">
+            <a:extLst>
+              <a:ext uri="{FF2B5EF4-FFF2-40B4-BE49-F238E27FC236}">
+                <a16:creationId xmlns:a16="http://schemas.microsoft.com/office/drawing/2014/main" id="{ED5A9930-5BC3-B718-2BC2-FAEB4DFD8773}"/>
+              </a:ext>
+            </a:extLst>
+          </p:cNvPr>
+          <p:cNvSpPr/>
+          <p:nvPr/>
+        </p:nvSpPr>
+        <p:spPr>
+          <a:xfrm>
+            <a:off x="6947452" y="5943202"/>
+            <a:ext cx="4573988" cy="795528"/>
           </a:xfrm>
           <a:prstGeom prst="rect">
             <a:avLst/>
@@ -18095,21 +20188,67 @@
           <a:bodyPr wrap="square" lIns="0" tIns="0" rIns="0" bIns="0" rtlCol="0" anchor="ctr"/>
           <a:lstStyle/>
           <a:p>
-            <a:pPr marL="0" indent="0">
+            <a:pPr marL="0" indent="0" algn="r">
               <a:buNone/>
             </a:pPr>
             <a:r>
-              <a:rPr lang="en-US" sz="850" dirty="0">
-                <a:solidFill>
-                  <a:srgbClr val="667085"/>
-                </a:solidFill>
-                <a:latin typeface="Calibri" pitchFamily="34" charset="0"/>
+              <a:rPr lang="en-US" sz="1200" b="1" kern="0" spc="200" dirty="0">
+                <a:solidFill>
+                  <a:schemeClr val="bg2">
+                    <a:lumMod val="75000"/>
+                  </a:schemeClr>
+                </a:solidFill>
+                <a:latin typeface="Arial" panose="020B0604020202020204" pitchFamily="34" charset="0"/>
                 <a:ea typeface="Calibri" pitchFamily="34" charset="-122"/>
-                <a:cs typeface="Calibri" pitchFamily="34" charset="-120"/>
-              </a:rPr>
-              <a:t>Fine-tuning de GPT-2  ·  Narrativas financieras  ·  NLP</a:t>
-            </a:r>
-            <a:endParaRPr lang="en-US" sz="850" dirty="0"/>
+                <a:cs typeface="Arial" panose="020B0604020202020204" pitchFamily="34" charset="0"/>
+              </a:rPr>
+              <a:t>PROCESAMIENTO DE LENGUAJE NATURAL</a:t>
+            </a:r>
+          </a:p>
+          <a:p>
+            <a:pPr marL="0" indent="0" algn="r">
+              <a:buNone/>
+            </a:pPr>
+            <a:r>
+              <a:rPr lang="en-US" sz="1200" b="1" kern="0" spc="200" dirty="0">
+                <a:solidFill>
+                  <a:schemeClr val="bg2">
+                    <a:lumMod val="75000"/>
+                  </a:schemeClr>
+                </a:solidFill>
+                <a:latin typeface="Arial" panose="020B0604020202020204" pitchFamily="34" charset="0"/>
+                <a:ea typeface="Calibri" pitchFamily="34" charset="-122"/>
+                <a:cs typeface="Arial" panose="020B0604020202020204" pitchFamily="34" charset="0"/>
+              </a:rPr>
+              <a:t>Universidad de San Andres – MIA</a:t>
+            </a:r>
+          </a:p>
+          <a:p>
+            <a:pPr marL="0" indent="0" algn="r">
+              <a:buNone/>
+            </a:pPr>
+            <a:r>
+              <a:rPr lang="en-US" sz="1200" b="1" kern="0" spc="200" dirty="0">
+                <a:solidFill>
+                  <a:schemeClr val="bg2">
+                    <a:lumMod val="75000"/>
+                  </a:schemeClr>
+                </a:solidFill>
+                <a:latin typeface="Arial" panose="020B0604020202020204" pitchFamily="34" charset="0"/>
+                <a:ea typeface="Calibri" pitchFamily="34" charset="-122"/>
+                <a:cs typeface="Arial" panose="020B0604020202020204" pitchFamily="34" charset="0"/>
+              </a:rPr>
+              <a:t>Luciano Rielo</a:t>
+            </a:r>
+            <a:endParaRPr lang="en-US" sz="1200" dirty="0">
+              <a:solidFill>
+                <a:schemeClr val="bg2">
+                  <a:lumMod val="75000"/>
+                </a:schemeClr>
+              </a:solidFill>
+              <a:latin typeface="Arial" panose="020B0604020202020204" pitchFamily="34" charset="0"/>
+              <a:cs typeface="Arial" panose="020B0604020202020204" pitchFamily="34" charset="0"/>
+            </a:endParaRPr>
           </a:p>
         </p:txBody>
       </p:sp>
@@ -18123,15 +20262,7 @@
 
 <file path=ppt/slides/slide9.xml><?xml version="1.0" encoding="utf-8"?>
 <p:sld xmlns:a="http://schemas.openxmlformats.org/drawingml/2006/main" xmlns:r="http://schemas.openxmlformats.org/officeDocument/2006/relationships" xmlns:p="http://schemas.openxmlformats.org/presentationml/2006/main">
-  <p:cSld name="Slide 9">
-    <p:bg>
-      <p:bgPr>
-        <a:solidFill>
-          <a:srgbClr val="FFFFFF"/>
-        </a:solidFill>
-        <a:effectLst/>
-      </p:bgPr>
-    </p:bg>
+  <p:cSld>
     <p:spTree>
       <p:nvGrpSpPr>
         <p:cNvPr id="1" name=""/>
@@ -18171,7 +20302,7 @@
               <a:buNone/>
             </a:pPr>
             <a:r>
-              <a:rPr lang="en-US" sz="2800" b="1" dirty="0" err="1">
+              <a:rPr lang="en-US" sz="2800" b="1" dirty="0">
                 <a:solidFill>
                   <a:srgbClr val="23304A"/>
                 </a:solidFill>
@@ -18179,7 +20310,7 @@
                 <a:ea typeface="Georgia" pitchFamily="34" charset="-122"/>
                 <a:cs typeface="Arial" panose="020B0604020202020204" pitchFamily="34" charset="0"/>
               </a:rPr>
-              <a:t>Entrenamiento</a:t>
+              <a:t>Loss y perplexity</a:t>
             </a:r>
             <a:endParaRPr lang="en-US" sz="2800" dirty="0">
               <a:latin typeface="Arial" panose="020B0604020202020204" pitchFamily="34" charset="0"/>
@@ -18260,7 +20391,7 @@
                 <a:ea typeface="Calibri" pitchFamily="34" charset="-122"/>
                 <a:cs typeface="Arial" panose="020B0604020202020204" pitchFamily="34" charset="0"/>
               </a:rPr>
-              <a:t>Las curvas confirman fine-tuning real; la perplexity = exp(eval loss) mide el lenguaje, no la utilidad financiera.</a:t>
+              <a:t>La loss baja dentro de cada run; no es un ranking absoluto cuando cambian prompts y targets.</a:t>
             </a:r>
             <a:endParaRPr lang="en-US" sz="1200" dirty="0">
               <a:latin typeface="Arial" panose="020B0604020202020204" pitchFamily="34" charset="0"/>
@@ -18300,6 +20431,13 @@
             </a:outerShdw>
           </a:effectLst>
         </p:spPr>
+        <p:txBody>
+          <a:bodyPr/>
+          <a:lstStyle/>
+          <a:p>
+            <a:endParaRPr lang="es-AR"/>
+          </a:p>
+        </p:txBody>
       </p:sp>
       <p:pic>
         <p:nvPicPr>
@@ -18317,8 +20455,8 @@
         </p:blipFill>
         <p:spPr>
           <a:xfrm>
-            <a:off x="713232" y="1947672"/>
-            <a:ext cx="5248656" cy="2624328"/>
+            <a:off x="894311" y="1947672"/>
+            <a:ext cx="4886499" cy="2624328"/>
           </a:xfrm>
           <a:prstGeom prst="rect">
             <a:avLst/>
@@ -18398,6 +20536,13 @@
             </a:outerShdw>
           </a:effectLst>
         </p:spPr>
+        <p:txBody>
+          <a:bodyPr/>
+          <a:lstStyle/>
+          <a:p>
+            <a:endParaRPr lang="es-AR"/>
+          </a:p>
+        </p:txBody>
       </p:sp>
       <p:pic>
         <p:nvPicPr>
@@ -18415,8 +20560,8 @@
         </p:blipFill>
         <p:spPr>
           <a:xfrm>
-            <a:off x="6373368" y="1947672"/>
-            <a:ext cx="5248656" cy="2624328"/>
+            <a:off x="6554446" y="1947672"/>
+            <a:ext cx="4886499" cy="2624328"/>
           </a:xfrm>
           <a:prstGeom prst="rect">
             <a:avLst/>
@@ -18531,31 +20676,13 @@
             <a:prstDash val="solid"/>
           </a:ln>
         </p:spPr>
-      </p:sp>
-      <p:sp>
-        <p:nvSpPr>
-          <p:cNvPr id="14" name="Shape 10"/>
-          <p:cNvSpPr/>
-          <p:nvPr/>
-        </p:nvSpPr>
-        <p:spPr>
-          <a:xfrm>
-            <a:off x="640080" y="5212080"/>
-            <a:ext cx="1490472" cy="54864"/>
-          </a:xfrm>
-          <a:prstGeom prst="rect">
-            <a:avLst/>
-          </a:prstGeom>
-          <a:solidFill>
-            <a:srgbClr val="2A7F8C"/>
-          </a:solidFill>
-          <a:ln w="12700">
-            <a:solidFill>
-              <a:srgbClr val="333333"/>
-            </a:solidFill>
-            <a:prstDash val="solid"/>
-          </a:ln>
-        </p:spPr>
+        <p:txBody>
+          <a:bodyPr/>
+          <a:lstStyle/>
+          <a:p>
+            <a:endParaRPr lang="es-AR"/>
+          </a:p>
+        </p:txBody>
       </p:sp>
       <p:sp>
         <p:nvSpPr>
@@ -18665,31 +20792,13 @@
             <a:prstDash val="solid"/>
           </a:ln>
         </p:spPr>
-      </p:sp>
-      <p:sp>
-        <p:nvSpPr>
-          <p:cNvPr id="18" name="Shape 14"/>
-          <p:cNvSpPr/>
-          <p:nvPr/>
-        </p:nvSpPr>
-        <p:spPr>
-          <a:xfrm>
-            <a:off x="2240280" y="5212080"/>
-            <a:ext cx="1490472" cy="54864"/>
-          </a:xfrm>
-          <a:prstGeom prst="rect">
-            <a:avLst/>
-          </a:prstGeom>
-          <a:solidFill>
-            <a:srgbClr val="2A7F8C"/>
-          </a:solidFill>
-          <a:ln w="12700">
-            <a:solidFill>
-              <a:srgbClr val="333333"/>
-            </a:solidFill>
-            <a:prstDash val="solid"/>
-          </a:ln>
-        </p:spPr>
+        <p:txBody>
+          <a:bodyPr/>
+          <a:lstStyle/>
+          <a:p>
+            <a:endParaRPr lang="es-AR"/>
+          </a:p>
+        </p:txBody>
       </p:sp>
       <p:sp>
         <p:nvSpPr>
@@ -18799,31 +20908,13 @@
             <a:prstDash val="solid"/>
           </a:ln>
         </p:spPr>
-      </p:sp>
-      <p:sp>
-        <p:nvSpPr>
-          <p:cNvPr id="22" name="Shape 18"/>
-          <p:cNvSpPr/>
-          <p:nvPr/>
-        </p:nvSpPr>
-        <p:spPr>
-          <a:xfrm>
-            <a:off x="3840480" y="5212080"/>
-            <a:ext cx="1490472" cy="54864"/>
-          </a:xfrm>
-          <a:prstGeom prst="rect">
-            <a:avLst/>
-          </a:prstGeom>
-          <a:solidFill>
-            <a:srgbClr val="2A7F8C"/>
-          </a:solidFill>
-          <a:ln w="12700">
-            <a:solidFill>
-              <a:srgbClr val="333333"/>
-            </a:solidFill>
-            <a:prstDash val="solid"/>
-          </a:ln>
-        </p:spPr>
+        <p:txBody>
+          <a:bodyPr/>
+          <a:lstStyle/>
+          <a:p>
+            <a:endParaRPr lang="es-AR"/>
+          </a:p>
+        </p:txBody>
       </p:sp>
       <p:sp>
         <p:nvSpPr>
@@ -18933,31 +21024,13 @@
             <a:prstDash val="solid"/>
           </a:ln>
         </p:spPr>
-      </p:sp>
-      <p:sp>
-        <p:nvSpPr>
-          <p:cNvPr id="26" name="Shape 22"/>
-          <p:cNvSpPr/>
-          <p:nvPr/>
-        </p:nvSpPr>
-        <p:spPr>
-          <a:xfrm>
-            <a:off x="5440680" y="5212080"/>
-            <a:ext cx="1490472" cy="54864"/>
-          </a:xfrm>
-          <a:prstGeom prst="rect">
-            <a:avLst/>
-          </a:prstGeom>
-          <a:solidFill>
-            <a:srgbClr val="2A7F8C"/>
-          </a:solidFill>
-          <a:ln w="12700">
-            <a:solidFill>
-              <a:srgbClr val="333333"/>
-            </a:solidFill>
-            <a:prstDash val="solid"/>
-          </a:ln>
-        </p:spPr>
+        <p:txBody>
+          <a:bodyPr/>
+          <a:lstStyle/>
+          <a:p>
+            <a:endParaRPr lang="es-AR"/>
+          </a:p>
+        </p:txBody>
       </p:sp>
       <p:sp>
         <p:nvSpPr>
@@ -18992,7 +21065,7 @@
                 <a:ea typeface="Georgia" pitchFamily="34" charset="-122"/>
                 <a:cs typeface="Arial" panose="020B0604020202020204" pitchFamily="34" charset="0"/>
               </a:rPr>
-              <a:t>16.5</a:t>
+              <a:t>16.6</a:t>
             </a:r>
             <a:endParaRPr lang="en-US" sz="1900" dirty="0">
               <a:latin typeface="Arial" panose="020B0604020202020204" pitchFamily="34" charset="0"/>
@@ -19034,7 +21107,7 @@
                 <a:ea typeface="Calibri" pitchFamily="34" charset="-122"/>
                 <a:cs typeface="Arial" panose="020B0604020202020204" pitchFamily="34" charset="0"/>
               </a:rPr>
-              <a:t>NVDA dir. feat.</a:t>
+              <a:t>NVDA label sc.</a:t>
             </a:r>
             <a:endParaRPr lang="en-US" sz="850" dirty="0">
               <a:latin typeface="Arial" panose="020B0604020202020204" pitchFamily="34" charset="0"/>
@@ -19074,6 +21147,13 @@
             </a:outerShdw>
           </a:effectLst>
         </p:spPr>
+        <p:txBody>
+          <a:bodyPr/>
+          <a:lstStyle/>
+          <a:p>
+            <a:endParaRPr lang="es-AR"/>
+          </a:p>
+        </p:txBody>
       </p:sp>
       <p:sp>
         <p:nvSpPr>
@@ -19153,7 +21233,7 @@
                 <a:ea typeface="Calibri" pitchFamily="34" charset="-122"/>
                 <a:cs typeface="Arial" panose="020B0604020202020204" pitchFamily="34" charset="0"/>
               </a:rPr>
-              <a:t>El run con mejor perplexity no es el mejor en directional accuracy. Optimizar la pérdida de lenguaje no garantiza una señal financiera útil: modelar texto y producir una señal son objetivos distintos.</a:t>
+              <a:t>Menor perplexity no implica mejor resultado semántico o financiero. NVDA tagged structured tenía la mejor perplexity (≈9.73), pero no se eligió como variante estructurada: era peor en ROUGE-L y BERTScore que NVDA label scoring.</a:t>
             </a:r>
             <a:endParaRPr lang="en-US" sz="1000" dirty="0">
               <a:latin typeface="Arial" panose="020B0604020202020204" pitchFamily="34" charset="0"/>
@@ -19164,14 +21244,20 @@
       </p:sp>
       <p:sp>
         <p:nvSpPr>
-          <p:cNvPr id="33" name="Text 28"/>
-          <p:cNvSpPr/>
-          <p:nvPr/>
-        </p:nvSpPr>
-        <p:spPr>
-          <a:xfrm>
-            <a:off x="640080" y="6473952"/>
-            <a:ext cx="7315200" cy="274320"/>
+          <p:cNvPr id="2" name="Text 7">
+            <a:extLst>
+              <a:ext uri="{FF2B5EF4-FFF2-40B4-BE49-F238E27FC236}">
+                <a16:creationId xmlns:a16="http://schemas.microsoft.com/office/drawing/2014/main" id="{2FCF7774-C144-7DCC-E199-81B7AD5FC232}"/>
+              </a:ext>
+            </a:extLst>
+          </p:cNvPr>
+          <p:cNvSpPr/>
+          <p:nvPr/>
+        </p:nvSpPr>
+        <p:spPr>
+          <a:xfrm>
+            <a:off x="640080" y="6071616"/>
+            <a:ext cx="4573988" cy="795528"/>
           </a:xfrm>
           <a:prstGeom prst="rect">
             <a:avLst/>
@@ -19187,17 +21273,60 @@
               <a:buNone/>
             </a:pPr>
             <a:r>
-              <a:rPr lang="en-US" sz="850" dirty="0">
-                <a:solidFill>
-                  <a:srgbClr val="667085"/>
+              <a:rPr lang="en-US" sz="1050" b="1" kern="0" spc="200" dirty="0">
+                <a:solidFill>
+                  <a:schemeClr val="bg2">
+                    <a:lumMod val="75000"/>
+                  </a:schemeClr>
                 </a:solidFill>
                 <a:latin typeface="Arial" panose="020B0604020202020204" pitchFamily="34" charset="0"/>
                 <a:ea typeface="Calibri" pitchFamily="34" charset="-122"/>
                 <a:cs typeface="Arial" panose="020B0604020202020204" pitchFamily="34" charset="0"/>
               </a:rPr>
-              <a:t>Fine-tuning de GPT-2  ·  Narrativas financieras  ·  NLP</a:t>
-            </a:r>
-            <a:endParaRPr lang="en-US" sz="850" dirty="0">
+              <a:t>PROCESAMIENTO DE LENGUAJE NATURAL</a:t>
+            </a:r>
+          </a:p>
+          <a:p>
+            <a:pPr marL="0" indent="0">
+              <a:buNone/>
+            </a:pPr>
+            <a:r>
+              <a:rPr lang="en-US" sz="1050" b="1" kern="0" spc="200" dirty="0">
+                <a:solidFill>
+                  <a:schemeClr val="bg2">
+                    <a:lumMod val="75000"/>
+                  </a:schemeClr>
+                </a:solidFill>
+                <a:latin typeface="Arial" panose="020B0604020202020204" pitchFamily="34" charset="0"/>
+                <a:ea typeface="Calibri" pitchFamily="34" charset="-122"/>
+                <a:cs typeface="Arial" panose="020B0604020202020204" pitchFamily="34" charset="0"/>
+              </a:rPr>
+              <a:t>Universidad de San Andres – MIA</a:t>
+            </a:r>
+          </a:p>
+          <a:p>
+            <a:pPr marL="0" indent="0">
+              <a:buNone/>
+            </a:pPr>
+            <a:r>
+              <a:rPr lang="en-US" sz="1050" b="1" kern="0" spc="200" dirty="0">
+                <a:solidFill>
+                  <a:schemeClr val="bg2">
+                    <a:lumMod val="75000"/>
+                  </a:schemeClr>
+                </a:solidFill>
+                <a:latin typeface="Arial" panose="020B0604020202020204" pitchFamily="34" charset="0"/>
+                <a:ea typeface="Calibri" pitchFamily="34" charset="-122"/>
+                <a:cs typeface="Arial" panose="020B0604020202020204" pitchFamily="34" charset="0"/>
+              </a:rPr>
+              <a:t>Luciano Rielo</a:t>
+            </a:r>
+            <a:endParaRPr lang="en-US" sz="1050" dirty="0">
+              <a:solidFill>
+                <a:schemeClr val="bg2">
+                  <a:lumMod val="75000"/>
+                </a:schemeClr>
+              </a:solidFill>
               <a:latin typeface="Arial" panose="020B0604020202020204" pitchFamily="34" charset="0"/>
               <a:cs typeface="Arial" panose="020B0604020202020204" pitchFamily="34" charset="0"/>
             </a:endParaRPr>

--- a/presentacion_nlp_finanzas.pptx
+++ b/presentacion_nlp_finanzas.pptx
@@ -855,13 +855,26 @@
                 <a:ea typeface="+mn-ea"/>
                 <a:cs typeface="+mn-cs"/>
               </a:rPr>
-              <a:t>El test set es chico para sacar conclusiones financieras robustas. </a:t>
-            </a:r>
-          </a:p>
-          <a:p>
-            <a:pPr marL="171450" indent="-171450">
+              <a:t>El test set es chico para sacar conclusiones financieras robustas. Esto se debe principalmente a los datos que provee FNSPID</a:t>
+            </a:r>
+          </a:p>
+          <a:p>
+            <a:pPr marL="0" marR="0" lvl="0" indent="0" algn="l" defTabSz="914400" rtl="0" eaLnBrk="1" fontAlgn="auto" latinLnBrk="0" hangingPunct="1">
+              <a:lnSpc>
+                <a:spcPct val="100000"/>
+              </a:lnSpc>
+              <a:spcBef>
+                <a:spcPts val="0"/>
+              </a:spcBef>
+              <a:spcAft>
+                <a:spcPts val="0"/>
+              </a:spcAft>
+              <a:buClrTx/>
+              <a:buSzTx/>
               <a:buFontTx/>
-              <a:buChar char="-"/>
+              <a:buNone/>
+              <a:tabLst/>
+              <a:defRPr/>
             </a:pPr>
             <a:r>
               <a:rPr lang="es-ES" sz="1200" b="0" i="1" kern="1200" dirty="0">
@@ -873,16 +886,10 @@
                 <a:ea typeface="+mn-ea"/>
                 <a:cs typeface="+mn-cs"/>
               </a:rPr>
-              <a:t>Además, trabajamos con titulares agregados por día, no con artículos completos</a:t>
-            </a:r>
-          </a:p>
-          <a:p>
-            <a:pPr marL="171450" indent="-171450">
-              <a:buFontTx/>
-              <a:buChar char="-"/>
-            </a:pPr>
-            <a:r>
-              <a:rPr lang="es-ES" sz="1200" b="0" i="1" kern="1200" dirty="0">
+              <a:t>- GPT-2 </a:t>
+            </a:r>
+            <a:r>
+              <a:rPr lang="es-ES" sz="1200" b="0" i="1" kern="1200" dirty="0" err="1">
                 <a:solidFill>
                   <a:schemeClr val="tx1"/>
                 </a:solidFill>
@@ -891,10 +898,10 @@
                 <a:ea typeface="+mn-ea"/>
                 <a:cs typeface="+mn-cs"/>
               </a:rPr>
-              <a:t>GPT-2 </a:t>
-            </a:r>
-            <a:r>
-              <a:rPr lang="es-ES" sz="1200" b="0" i="1" kern="1200" dirty="0" err="1">
+              <a:t>small</a:t>
+            </a:r>
+            <a:r>
+              <a:rPr lang="es-ES" sz="1200" b="0" i="1" kern="1200" dirty="0">
                 <a:solidFill>
                   <a:schemeClr val="tx1"/>
                 </a:solidFill>
@@ -903,19 +910,7 @@
                 <a:ea typeface="+mn-ea"/>
                 <a:cs typeface="+mn-cs"/>
               </a:rPr>
-              <a:t>small</a:t>
-            </a:r>
-            <a:r>
-              <a:rPr lang="es-ES" sz="1200" b="0" i="1" kern="1200" dirty="0">
-                <a:solidFill>
-                  <a:schemeClr val="tx1"/>
-                </a:solidFill>
-                <a:effectLst/>
-                <a:latin typeface="+mn-lt"/>
-                <a:ea typeface="+mn-ea"/>
-                <a:cs typeface="+mn-cs"/>
-              </a:rPr>
-              <a:t> tiene capacidad limitada, por eso a veces genera texto genérico. </a:t>
+              <a:t> tiene capacidad limitada, por eso a veces genera texto genérico. Además, trabajamos con titulares agregados por día, no con artículos completos</a:t>
             </a:r>
           </a:p>
           <a:p>
@@ -4412,6 +4407,13 @@
             <a:prstDash val="solid"/>
           </a:ln>
         </p:spPr>
+        <p:txBody>
+          <a:bodyPr/>
+          <a:lstStyle/>
+          <a:p>
+            <a:endParaRPr lang="es-AR"/>
+          </a:p>
+        </p:txBody>
       </p:sp>
       <p:sp>
         <p:nvSpPr>
@@ -5156,7 +5158,7 @@
         </p:nvSpPr>
         <p:spPr>
           <a:xfrm>
-            <a:off x="8134471" y="4700016"/>
+            <a:off x="10321693" y="4539107"/>
             <a:ext cx="3127248" cy="502920"/>
           </a:xfrm>
           <a:prstGeom prst="rect">
@@ -5184,7 +5186,7 @@
                 <a:ea typeface="Calibri" pitchFamily="34" charset="-122"/>
                 <a:cs typeface="Arial" panose="020B0604020202020204" pitchFamily="34" charset="0"/>
               </a:rPr>
-              <a:t>Dir. acc. 0.530 con coverage 0.361 y p ≈ 0.579.</a:t>
+              <a:t>Dir. acc. 0.530</a:t>
             </a:r>
             <a:endParaRPr lang="en-US" sz="870" dirty="0">
               <a:latin typeface="Arial" panose="020B0604020202020204" pitchFamily="34" charset="0"/>
@@ -7107,7 +7109,7 @@
               <a:buChar char="–"/>
             </a:pPr>
             <a:r>
-              <a:rPr lang="en-US" sz="1100" dirty="0">
+              <a:rPr lang="en-US" sz="1100" dirty="0" err="1">
                 <a:solidFill>
                   <a:srgbClr val="C2CEDF"/>
                 </a:solidFill>
@@ -7115,7 +7117,62 @@
                 <a:ea typeface="Calibri" pitchFamily="34" charset="-122"/>
                 <a:cs typeface="Arial" panose="020B0604020202020204" pitchFamily="34" charset="0"/>
               </a:rPr>
-              <a:t>FinBERT es un evaluador automático imperfecto.</a:t>
+              <a:t>FinBERT</a:t>
+            </a:r>
+            <a:r>
+              <a:rPr lang="en-US" sz="1100" dirty="0">
+                <a:solidFill>
+                  <a:srgbClr val="C2CEDF"/>
+                </a:solidFill>
+                <a:latin typeface="Arial" panose="020B0604020202020204" pitchFamily="34" charset="0"/>
+                <a:ea typeface="Calibri" pitchFamily="34" charset="-122"/>
+                <a:cs typeface="Arial" panose="020B0604020202020204" pitchFamily="34" charset="0"/>
+              </a:rPr>
+              <a:t> es </a:t>
+            </a:r>
+            <a:r>
+              <a:rPr lang="en-US" sz="1100" dirty="0" err="1">
+                <a:solidFill>
+                  <a:srgbClr val="C2CEDF"/>
+                </a:solidFill>
+                <a:latin typeface="Arial" panose="020B0604020202020204" pitchFamily="34" charset="0"/>
+                <a:ea typeface="Calibri" pitchFamily="34" charset="-122"/>
+                <a:cs typeface="Arial" panose="020B0604020202020204" pitchFamily="34" charset="0"/>
+              </a:rPr>
+              <a:t>una</a:t>
+            </a:r>
+            <a:r>
+              <a:rPr lang="en-US" sz="1100" dirty="0">
+                <a:solidFill>
+                  <a:srgbClr val="C2CEDF"/>
+                </a:solidFill>
+                <a:latin typeface="Arial" panose="020B0604020202020204" pitchFamily="34" charset="0"/>
+                <a:ea typeface="Calibri" pitchFamily="34" charset="-122"/>
+                <a:cs typeface="Arial" panose="020B0604020202020204" pitchFamily="34" charset="0"/>
+              </a:rPr>
+              <a:t> IA para </a:t>
+            </a:r>
+            <a:r>
+              <a:rPr lang="en-US" sz="1100" dirty="0" err="1">
+                <a:solidFill>
+                  <a:srgbClr val="C2CEDF"/>
+                </a:solidFill>
+                <a:latin typeface="Arial" panose="020B0604020202020204" pitchFamily="34" charset="0"/>
+                <a:ea typeface="Calibri" pitchFamily="34" charset="-122"/>
+                <a:cs typeface="Arial" panose="020B0604020202020204" pitchFamily="34" charset="0"/>
+              </a:rPr>
+              <a:t>evaluar</a:t>
+            </a:r>
+            <a:r>
+              <a:rPr lang="en-US" sz="1100" dirty="0">
+                <a:solidFill>
+                  <a:srgbClr val="C2CEDF"/>
+                </a:solidFill>
+                <a:latin typeface="Arial" panose="020B0604020202020204" pitchFamily="34" charset="0"/>
+                <a:ea typeface="Calibri" pitchFamily="34" charset="-122"/>
+                <a:cs typeface="Arial" panose="020B0604020202020204" pitchFamily="34" charset="0"/>
+              </a:rPr>
+              <a:t> IA.</a:t>
             </a:r>
             <a:endParaRPr lang="en-US" sz="1100" dirty="0">
               <a:latin typeface="Arial" panose="020B0604020202020204" pitchFamily="34" charset="0"/>
@@ -7447,7 +7504,51 @@
                 <a:ea typeface="Calibri" pitchFamily="34" charset="-122"/>
                 <a:cs typeface="Arial" panose="020B0604020202020204" pitchFamily="34" charset="0"/>
               </a:rPr>
-              <a:t>El fine-tuning mejora ROUGE-L y sentiment match frente al modelo base.</a:t>
+              <a:t>El fine-tuning </a:t>
+            </a:r>
+            <a:r>
+              <a:rPr lang="en-US" sz="1080" dirty="0" err="1">
+                <a:solidFill>
+                  <a:srgbClr val="E6ECF5"/>
+                </a:solidFill>
+                <a:latin typeface="Arial" panose="020B0604020202020204" pitchFamily="34" charset="0"/>
+                <a:ea typeface="Calibri" pitchFamily="34" charset="-122"/>
+                <a:cs typeface="Arial" panose="020B0604020202020204" pitchFamily="34" charset="0"/>
+              </a:rPr>
+              <a:t>mejora</a:t>
+            </a:r>
+            <a:r>
+              <a:rPr lang="en-US" sz="1080" dirty="0">
+                <a:solidFill>
+                  <a:srgbClr val="E6ECF5"/>
+                </a:solidFill>
+                <a:latin typeface="Arial" panose="020B0604020202020204" pitchFamily="34" charset="0"/>
+                <a:ea typeface="Calibri" pitchFamily="34" charset="-122"/>
+                <a:cs typeface="Arial" panose="020B0604020202020204" pitchFamily="34" charset="0"/>
+              </a:rPr>
+              <a:t> ROUGE-L, </a:t>
+            </a:r>
+            <a:r>
+              <a:rPr lang="en-US" sz="1080" dirty="0" err="1">
+                <a:solidFill>
+                  <a:srgbClr val="E6ECF5"/>
+                </a:solidFill>
+                <a:latin typeface="Arial" panose="020B0604020202020204" pitchFamily="34" charset="0"/>
+                <a:ea typeface="Calibri" pitchFamily="34" charset="-122"/>
+                <a:cs typeface="Arial" panose="020B0604020202020204" pitchFamily="34" charset="0"/>
+              </a:rPr>
+              <a:t>BERTScore</a:t>
+            </a:r>
+            <a:r>
+              <a:rPr lang="en-US" sz="1080" dirty="0">
+                <a:solidFill>
+                  <a:srgbClr val="E6ECF5"/>
+                </a:solidFill>
+                <a:latin typeface="Arial" panose="020B0604020202020204" pitchFamily="34" charset="0"/>
+                <a:ea typeface="Calibri" pitchFamily="34" charset="-122"/>
+                <a:cs typeface="Arial" panose="020B0604020202020204" pitchFamily="34" charset="0"/>
+              </a:rPr>
+              <a:t> y sentiment match frente al modelo base.</a:t>
             </a:r>
             <a:endParaRPr lang="en-US" sz="1080" dirty="0">
               <a:latin typeface="Arial" panose="020B0604020202020204" pitchFamily="34" charset="0"/>
@@ -8708,6 +8809,13 @@
             <a:prstDash val="solid"/>
           </a:ln>
         </p:spPr>
+        <p:txBody>
+          <a:bodyPr/>
+          <a:lstStyle/>
+          <a:p>
+            <a:endParaRPr lang="es-AR"/>
+          </a:p>
+        </p:txBody>
       </p:sp>
       <p:sp>
         <p:nvSpPr>
@@ -10239,6 +10347,13 @@
             <a:prstDash val="solid"/>
           </a:ln>
         </p:spPr>
+        <p:txBody>
+          <a:bodyPr/>
+          <a:lstStyle/>
+          <a:p>
+            <a:endParaRPr lang="es-AR"/>
+          </a:p>
+        </p:txBody>
       </p:sp>
       <p:sp>
         <p:nvSpPr>
@@ -10268,6 +10383,13 @@
             <a:prstDash val="solid"/>
           </a:ln>
         </p:spPr>
+        <p:txBody>
+          <a:bodyPr/>
+          <a:lstStyle/>
+          <a:p>
+            <a:endParaRPr lang="es-AR"/>
+          </a:p>
+        </p:txBody>
       </p:sp>
       <p:sp>
         <p:nvSpPr>
@@ -10449,6 +10571,13 @@
             <a:prstDash val="solid"/>
           </a:ln>
         </p:spPr>
+        <p:txBody>
+          <a:bodyPr/>
+          <a:lstStyle/>
+          <a:p>
+            <a:endParaRPr lang="es-AR"/>
+          </a:p>
+        </p:txBody>
       </p:sp>
       <p:sp>
         <p:nvSpPr>
@@ -10630,6 +10759,13 @@
             <a:prstDash val="solid"/>
           </a:ln>
         </p:spPr>
+        <p:txBody>
+          <a:bodyPr/>
+          <a:lstStyle/>
+          <a:p>
+            <a:endParaRPr lang="es-AR"/>
+          </a:p>
+        </p:txBody>
       </p:sp>
       <p:sp>
         <p:nvSpPr>
@@ -10811,6 +10947,13 @@
             <a:prstDash val="solid"/>
           </a:ln>
         </p:spPr>
+        <p:txBody>
+          <a:bodyPr/>
+          <a:lstStyle/>
+          <a:p>
+            <a:endParaRPr lang="es-AR"/>
+          </a:p>
+        </p:txBody>
       </p:sp>
       <p:sp>
         <p:nvSpPr>
@@ -10992,6 +11135,13 @@
             <a:prstDash val="solid"/>
           </a:ln>
         </p:spPr>
+        <p:txBody>
+          <a:bodyPr/>
+          <a:lstStyle/>
+          <a:p>
+            <a:endParaRPr lang="es-AR"/>
+          </a:p>
+        </p:txBody>
       </p:sp>
       <p:sp>
         <p:nvSpPr>
@@ -11173,6 +11323,13 @@
             <a:prstDash val="solid"/>
           </a:ln>
         </p:spPr>
+        <p:txBody>
+          <a:bodyPr/>
+          <a:lstStyle/>
+          <a:p>
+            <a:endParaRPr lang="es-AR"/>
+          </a:p>
+        </p:txBody>
       </p:sp>
       <p:sp>
         <p:nvSpPr>
@@ -12061,6 +12218,13 @@
             <a:prstDash val="solid"/>
           </a:ln>
         </p:spPr>
+        <p:txBody>
+          <a:bodyPr/>
+          <a:lstStyle/>
+          <a:p>
+            <a:endParaRPr lang="es-AR"/>
+          </a:p>
+        </p:txBody>
       </p:sp>
       <p:sp>
         <p:nvSpPr>
@@ -12137,6 +12301,13 @@
             <a:prstDash val="solid"/>
           </a:ln>
         </p:spPr>
+        <p:txBody>
+          <a:bodyPr/>
+          <a:lstStyle/>
+          <a:p>
+            <a:endParaRPr lang="es-AR"/>
+          </a:p>
+        </p:txBody>
       </p:sp>
       <p:sp>
         <p:nvSpPr>
@@ -12213,6 +12384,13 @@
             <a:prstDash val="solid"/>
           </a:ln>
         </p:spPr>
+        <p:txBody>
+          <a:bodyPr/>
+          <a:lstStyle/>
+          <a:p>
+            <a:endParaRPr lang="es-AR"/>
+          </a:p>
+        </p:txBody>
       </p:sp>
       <p:sp>
         <p:nvSpPr>
@@ -12289,6 +12467,13 @@
             <a:prstDash val="solid"/>
           </a:ln>
         </p:spPr>
+        <p:txBody>
+          <a:bodyPr/>
+          <a:lstStyle/>
+          <a:p>
+            <a:endParaRPr lang="es-AR"/>
+          </a:p>
+        </p:txBody>
       </p:sp>
       <p:sp>
         <p:nvSpPr>
@@ -12364,6 +12549,13 @@
             <a:tailEnd type="triangle"/>
           </a:ln>
         </p:spPr>
+        <p:txBody>
+          <a:bodyPr/>
+          <a:lstStyle/>
+          <a:p>
+            <a:endParaRPr lang="es-AR"/>
+          </a:p>
+        </p:txBody>
       </p:sp>
       <p:sp>
         <p:nvSpPr>
